--- a/Classes/Phase 1/1.1 Kickoff - Slides.pptx
+++ b/Classes/Phase 1/1.1 Kickoff - Slides.pptx
@@ -7,6 +7,7 @@
   <p:sldIdLst>
     <p:sldId id="256" r:id="rId2"/>
     <p:sldId id="257" r:id="rId3"/>
+    <p:sldId id="282" r:id="rId33"/>
     <p:sldId id="258" r:id="rId4"/>
     <p:sldId id="259" r:id="rId5"/>
     <p:sldId id="260" r:id="rId6"/>
@@ -30,6 +31,8 @@
     <p:sldId id="278" r:id="rId24"/>
     <p:sldId id="279" r:id="rId25"/>
     <p:sldId id="280" r:id="rId26"/>
+    <p:sldId id="283" r:id="rId34"/>
+    <p:sldId id="284" r:id="rId35"/>
     <p:sldId id="281" r:id="rId27"/>
   </p:sldIdLst>
   <p:notesMasterIdLst>
@@ -3261,6 +3264,10 @@
             <a:prstDash val="solid"/>
           </a:ln>
         </p:spPr>
+        <p:txBody>
+          <a:bodyPr/>
+          <a:p/>
+        </p:txBody>
       </p:sp>
       <p:sp>
         <p:nvSpPr>
@@ -3479,6 +3486,10 @@
             <a:prstDash val="solid"/>
           </a:ln>
         </p:spPr>
+        <p:txBody>
+          <a:bodyPr/>
+          <a:p/>
+        </p:txBody>
       </p:sp>
       <p:sp>
         <p:nvSpPr>
@@ -3590,6 +3601,10 @@
             <a:prstDash val="solid"/>
           </a:ln>
         </p:spPr>
+        <p:txBody>
+          <a:bodyPr/>
+          <a:p/>
+        </p:txBody>
       </p:sp>
       <p:sp>
         <p:nvSpPr>
@@ -3698,6 +3713,10 @@
             <a:prstDash val="solid"/>
           </a:ln>
         </p:spPr>
+        <p:txBody>
+          <a:bodyPr/>
+          <a:p/>
+        </p:txBody>
       </p:sp>
       <p:sp>
         <p:nvSpPr>
@@ -3806,6 +3825,10 @@
             <a:prstDash val="solid"/>
           </a:ln>
         </p:spPr>
+        <p:txBody>
+          <a:bodyPr/>
+          <a:p/>
+        </p:txBody>
       </p:sp>
       <p:sp>
         <p:nvSpPr>
@@ -3910,6 +3933,10 @@
             <a:prstDash val="solid"/>
           </a:ln>
         </p:spPr>
+        <p:txBody>
+          <a:bodyPr/>
+          <a:p/>
+        </p:txBody>
       </p:sp>
       <p:sp>
         <p:nvSpPr>
@@ -3983,7 +4010,7 @@
                 <a:ea typeface="Helvetica Neue" pitchFamily="34" charset="-122"/>
                 <a:cs typeface="Helvetica Neue" pitchFamily="34" charset="-120"/>
               </a:rPr>
-              <a:t>WEEK 1 — KICKOFF   ·   10 / 26</a:t>
+              <a:t>WEEK 1 — KICKOFF   ·   11 / 29</a:t>
             </a:r>
             <a:endParaRPr lang="en-US" sz="750" dirty="0"/>
           </a:p>
@@ -4128,6 +4155,10 @@
             <a:prstDash val="solid"/>
           </a:ln>
         </p:spPr>
+        <p:txBody>
+          <a:bodyPr/>
+          <a:p/>
+        </p:txBody>
       </p:sp>
       <p:sp>
         <p:nvSpPr>
@@ -4148,6 +4179,10 @@
           </a:solidFill>
           <a:ln/>
         </p:spPr>
+        <p:txBody>
+          <a:bodyPr/>
+          <a:p/>
+        </p:txBody>
       </p:sp>
       <p:sp>
         <p:nvSpPr>
@@ -4334,6 +4369,10 @@
             <a:prstDash val="solid"/>
           </a:ln>
         </p:spPr>
+        <p:txBody>
+          <a:bodyPr/>
+          <a:p/>
+        </p:txBody>
       </p:sp>
       <p:sp>
         <p:nvSpPr>
@@ -4354,6 +4393,10 @@
           </a:solidFill>
           <a:ln/>
         </p:spPr>
+        <p:txBody>
+          <a:bodyPr/>
+          <a:p/>
+        </p:txBody>
       </p:sp>
       <p:sp>
         <p:nvSpPr>
@@ -4540,6 +4583,10 @@
             <a:prstDash val="solid"/>
           </a:ln>
         </p:spPr>
+        <p:txBody>
+          <a:bodyPr/>
+          <a:p/>
+        </p:txBody>
       </p:sp>
       <p:sp>
         <p:nvSpPr>
@@ -4560,6 +4607,10 @@
           </a:solidFill>
           <a:ln/>
         </p:spPr>
+        <p:txBody>
+          <a:bodyPr/>
+          <a:p/>
+        </p:txBody>
       </p:sp>
       <p:sp>
         <p:nvSpPr>
@@ -4746,6 +4797,10 @@
             <a:prstDash val="solid"/>
           </a:ln>
         </p:spPr>
+        <p:txBody>
+          <a:bodyPr/>
+          <a:p/>
+        </p:txBody>
       </p:sp>
       <p:sp>
         <p:nvSpPr>
@@ -4766,6 +4821,10 @@
           </a:solidFill>
           <a:ln/>
         </p:spPr>
+        <p:txBody>
+          <a:bodyPr/>
+          <a:p/>
+        </p:txBody>
       </p:sp>
       <p:sp>
         <p:nvSpPr>
@@ -4952,6 +5011,10 @@
             <a:prstDash val="solid"/>
           </a:ln>
         </p:spPr>
+        <p:txBody>
+          <a:bodyPr/>
+          <a:p/>
+        </p:txBody>
       </p:sp>
       <p:sp>
         <p:nvSpPr>
@@ -4972,6 +5035,10 @@
           </a:solidFill>
           <a:ln/>
         </p:spPr>
+        <p:txBody>
+          <a:bodyPr/>
+          <a:p/>
+        </p:txBody>
       </p:sp>
       <p:sp>
         <p:nvSpPr>
@@ -5158,6 +5225,10 @@
             <a:prstDash val="solid"/>
           </a:ln>
         </p:spPr>
+        <p:txBody>
+          <a:bodyPr/>
+          <a:p/>
+        </p:txBody>
       </p:sp>
       <p:sp>
         <p:nvSpPr>
@@ -5178,6 +5249,10 @@
           </a:solidFill>
           <a:ln/>
         </p:spPr>
+        <p:txBody>
+          <a:bodyPr/>
+          <a:p/>
+        </p:txBody>
       </p:sp>
       <p:sp>
         <p:nvSpPr>
@@ -5360,6 +5435,10 @@
             <a:prstDash val="solid"/>
           </a:ln>
         </p:spPr>
+        <p:txBody>
+          <a:bodyPr/>
+          <a:p/>
+        </p:txBody>
       </p:sp>
       <p:sp>
         <p:nvSpPr>
@@ -5433,7 +5512,7 @@
                 <a:ea typeface="Helvetica Neue" pitchFamily="34" charset="-122"/>
                 <a:cs typeface="Helvetica Neue" pitchFamily="34" charset="-120"/>
               </a:rPr>
-              <a:t>WEEK 1 — KICKOFF   ·   11 / 26</a:t>
+              <a:t>WEEK 1 — KICKOFF   ·   12 / 29</a:t>
             </a:r>
             <a:endParaRPr lang="en-US" sz="750" dirty="0"/>
           </a:p>
@@ -5578,6 +5657,10 @@
             <a:prstDash val="solid"/>
           </a:ln>
         </p:spPr>
+        <p:txBody>
+          <a:bodyPr/>
+          <a:p/>
+        </p:txBody>
       </p:sp>
       <p:sp>
         <p:nvSpPr>
@@ -5598,6 +5681,10 @@
           </a:solidFill>
           <a:ln/>
         </p:spPr>
+        <p:txBody>
+          <a:bodyPr/>
+          <a:p/>
+        </p:txBody>
       </p:sp>
       <p:sp>
         <p:nvSpPr>
@@ -5868,6 +5955,10 @@
             <a:prstDash val="solid"/>
           </a:ln>
         </p:spPr>
+        <p:txBody>
+          <a:bodyPr/>
+          <a:p/>
+        </p:txBody>
       </p:sp>
       <p:sp>
         <p:nvSpPr>
@@ -5888,6 +5979,10 @@
           </a:solidFill>
           <a:ln/>
         </p:spPr>
+        <p:txBody>
+          <a:bodyPr/>
+          <a:p/>
+        </p:txBody>
       </p:sp>
       <p:sp>
         <p:nvSpPr>
@@ -6158,6 +6253,10 @@
             <a:prstDash val="solid"/>
           </a:ln>
         </p:spPr>
+        <p:txBody>
+          <a:bodyPr/>
+          <a:p/>
+        </p:txBody>
       </p:sp>
       <p:sp>
         <p:nvSpPr>
@@ -6178,6 +6277,10 @@
           </a:solidFill>
           <a:ln/>
         </p:spPr>
+        <p:txBody>
+          <a:bodyPr/>
+          <a:p/>
+        </p:txBody>
       </p:sp>
       <p:sp>
         <p:nvSpPr>
@@ -6444,6 +6547,10 @@
             <a:prstDash val="solid"/>
           </a:ln>
         </p:spPr>
+        <p:txBody>
+          <a:bodyPr/>
+          <a:p/>
+        </p:txBody>
       </p:sp>
       <p:sp>
         <p:nvSpPr>
@@ -6517,7 +6624,7 @@
                 <a:ea typeface="Helvetica Neue" pitchFamily="34" charset="-122"/>
                 <a:cs typeface="Helvetica Neue" pitchFamily="34" charset="-120"/>
               </a:rPr>
-              <a:t>WEEK 1 — KICKOFF   ·   12 / 26</a:t>
+              <a:t>WEEK 1 — KICKOFF   ·   13 / 29</a:t>
             </a:r>
             <a:endParaRPr lang="en-US" sz="750" dirty="0"/>
           </a:p>
@@ -6662,6 +6769,10 @@
             <a:prstDash val="solid"/>
           </a:ln>
         </p:spPr>
+        <p:txBody>
+          <a:bodyPr/>
+          <a:p/>
+        </p:txBody>
       </p:sp>
       <p:sp>
         <p:nvSpPr>
@@ -6682,6 +6793,10 @@
           </a:solidFill>
           <a:ln/>
         </p:spPr>
+        <p:txBody>
+          <a:bodyPr/>
+          <a:p/>
+        </p:txBody>
       </p:sp>
       <p:sp>
         <p:nvSpPr>
@@ -6952,6 +7067,10 @@
             <a:prstDash val="solid"/>
           </a:ln>
         </p:spPr>
+        <p:txBody>
+          <a:bodyPr/>
+          <a:p/>
+        </p:txBody>
       </p:sp>
       <p:sp>
         <p:nvSpPr>
@@ -6972,6 +7091,10 @@
           </a:solidFill>
           <a:ln/>
         </p:spPr>
+        <p:txBody>
+          <a:bodyPr/>
+          <a:p/>
+        </p:txBody>
       </p:sp>
       <p:sp>
         <p:nvSpPr>
@@ -7242,6 +7365,10 @@
             <a:prstDash val="solid"/>
           </a:ln>
         </p:spPr>
+        <p:txBody>
+          <a:bodyPr/>
+          <a:p/>
+        </p:txBody>
       </p:sp>
       <p:sp>
         <p:nvSpPr>
@@ -7262,6 +7389,10 @@
           </a:solidFill>
           <a:ln/>
         </p:spPr>
+        <p:txBody>
+          <a:bodyPr/>
+          <a:p/>
+        </p:txBody>
       </p:sp>
       <p:sp>
         <p:nvSpPr>
@@ -7528,6 +7659,10 @@
             <a:prstDash val="solid"/>
           </a:ln>
         </p:spPr>
+        <p:txBody>
+          <a:bodyPr/>
+          <a:p/>
+        </p:txBody>
       </p:sp>
       <p:sp>
         <p:nvSpPr>
@@ -7601,7 +7736,7 @@
                 <a:ea typeface="Helvetica Neue" pitchFamily="34" charset="-122"/>
                 <a:cs typeface="Helvetica Neue" pitchFamily="34" charset="-120"/>
               </a:rPr>
-              <a:t>WEEK 1 — KICKOFF   ·   13 / 26</a:t>
+              <a:t>WEEK 1 — KICKOFF   ·   14 / 29</a:t>
             </a:r>
             <a:endParaRPr lang="en-US" sz="750" dirty="0"/>
           </a:p>
@@ -7739,6 +7874,10 @@
           </a:solidFill>
           <a:ln/>
         </p:spPr>
+        <p:txBody>
+          <a:bodyPr/>
+          <a:p/>
+        </p:txBody>
       </p:sp>
       <p:sp>
         <p:nvSpPr>
@@ -7882,6 +8021,10 @@
             <a:prstDash val="solid"/>
           </a:ln>
         </p:spPr>
+        <p:txBody>
+          <a:bodyPr/>
+          <a:p/>
+        </p:txBody>
       </p:sp>
       <p:sp>
         <p:nvSpPr>
@@ -7902,6 +8045,10 @@
           </a:solidFill>
           <a:ln/>
         </p:spPr>
+        <p:txBody>
+          <a:bodyPr/>
+          <a:p/>
+        </p:txBody>
       </p:sp>
       <p:sp>
         <p:nvSpPr>
@@ -8045,6 +8192,10 @@
             <a:prstDash val="solid"/>
           </a:ln>
         </p:spPr>
+        <p:txBody>
+          <a:bodyPr/>
+          <a:p/>
+        </p:txBody>
       </p:sp>
       <p:sp>
         <p:nvSpPr>
@@ -8065,6 +8216,10 @@
           </a:solidFill>
           <a:ln/>
         </p:spPr>
+        <p:txBody>
+          <a:bodyPr/>
+          <a:p/>
+        </p:txBody>
       </p:sp>
       <p:sp>
         <p:nvSpPr>
@@ -8208,6 +8363,10 @@
             <a:prstDash val="solid"/>
           </a:ln>
         </p:spPr>
+        <p:txBody>
+          <a:bodyPr/>
+          <a:p/>
+        </p:txBody>
       </p:sp>
       <p:sp>
         <p:nvSpPr>
@@ -8228,6 +8387,10 @@
           </a:solidFill>
           <a:ln/>
         </p:spPr>
+        <p:txBody>
+          <a:bodyPr/>
+          <a:p/>
+        </p:txBody>
       </p:sp>
       <p:sp>
         <p:nvSpPr>
@@ -8375,6 +8538,10 @@
             <a:prstDash val="solid"/>
           </a:ln>
         </p:spPr>
+        <p:txBody>
+          <a:bodyPr/>
+          <a:p/>
+        </p:txBody>
       </p:sp>
       <p:sp>
         <p:nvSpPr>
@@ -8457,6 +8624,10 @@
             <a:prstDash val="solid"/>
           </a:ln>
         </p:spPr>
+        <p:txBody>
+          <a:bodyPr/>
+          <a:p/>
+        </p:txBody>
       </p:sp>
       <p:sp>
         <p:nvSpPr>
@@ -8530,7 +8701,7 @@
                 <a:ea typeface="Helvetica Neue" pitchFamily="34" charset="-122"/>
                 <a:cs typeface="Helvetica Neue" pitchFamily="34" charset="-120"/>
               </a:rPr>
-              <a:t>WEEK 1 — KICKOFF   ·   14 / 26</a:t>
+              <a:t>WEEK 1 — KICKOFF   ·   15 / 29</a:t>
             </a:r>
             <a:endParaRPr lang="en-US" sz="750" dirty="0"/>
           </a:p>
@@ -8668,6 +8839,10 @@
             <a:prstDash val="solid"/>
           </a:ln>
         </p:spPr>
+        <p:txBody>
+          <a:bodyPr/>
+          <a:p/>
+        </p:txBody>
       </p:sp>
       <p:sp>
         <p:nvSpPr>
@@ -8730,6 +8905,10 @@
             <a:prstDash val="solid"/>
           </a:ln>
         </p:spPr>
+        <p:txBody>
+          <a:bodyPr/>
+          <a:p/>
+        </p:txBody>
       </p:sp>
       <p:sp>
         <p:nvSpPr>
@@ -8803,7 +8982,7 @@
                 <a:ea typeface="Helvetica Neue" pitchFamily="34" charset="-122"/>
                 <a:cs typeface="Helvetica Neue" pitchFamily="34" charset="-120"/>
               </a:rPr>
-              <a:t>WEEK 1 — KICKOFF   ·   15 / 26</a:t>
+              <a:t>WEEK 1 — KICKOFF   ·   16 / 29</a:t>
             </a:r>
             <a:endParaRPr lang="en-US" sz="750" dirty="0"/>
           </a:p>
@@ -8899,6 +9078,10 @@
           </a:solidFill>
           <a:ln/>
         </p:spPr>
+        <p:txBody>
+          <a:bodyPr/>
+          <a:p/>
+        </p:txBody>
       </p:sp>
       <p:sp>
         <p:nvSpPr>
@@ -9022,6 +9205,10 @@
           </a:solidFill>
           <a:ln/>
         </p:spPr>
+        <p:txBody>
+          <a:bodyPr/>
+          <a:p/>
+        </p:txBody>
       </p:sp>
       <p:sp>
         <p:nvSpPr>
@@ -9126,6 +9313,10 @@
             <a:prstDash val="solid"/>
           </a:ln>
         </p:spPr>
+        <p:txBody>
+          <a:bodyPr/>
+          <a:p/>
+        </p:txBody>
       </p:sp>
       <p:sp>
         <p:nvSpPr>
@@ -9199,7 +9390,7 @@
                 <a:ea typeface="Helvetica Neue" pitchFamily="34" charset="-122"/>
                 <a:cs typeface="Helvetica Neue" pitchFamily="34" charset="-120"/>
               </a:rPr>
-              <a:t>WEEK 1 — KICKOFF   ·   16 / 26</a:t>
+              <a:t>WEEK 1 — KICKOFF   ·   17 / 29</a:t>
             </a:r>
             <a:endParaRPr lang="en-US" sz="750" dirty="0"/>
           </a:p>
@@ -9344,6 +9535,10 @@
             <a:prstDash val="solid"/>
           </a:ln>
         </p:spPr>
+        <p:txBody>
+          <a:bodyPr/>
+          <a:p/>
+        </p:txBody>
       </p:sp>
       <p:sp>
         <p:nvSpPr>
@@ -9364,6 +9559,10 @@
           </a:solidFill>
           <a:ln/>
         </p:spPr>
+        <p:txBody>
+          <a:bodyPr/>
+          <a:p/>
+        </p:txBody>
       </p:sp>
       <p:sp>
         <p:nvSpPr>
@@ -9582,6 +9781,10 @@
           </a:solidFill>
           <a:ln/>
         </p:spPr>
+        <p:txBody>
+          <a:bodyPr/>
+          <a:p/>
+        </p:txBody>
       </p:sp>
       <p:sp>
         <p:nvSpPr>
@@ -9646,6 +9849,10 @@
             <a:prstDash val="solid"/>
           </a:ln>
         </p:spPr>
+        <p:txBody>
+          <a:bodyPr/>
+          <a:p/>
+        </p:txBody>
       </p:sp>
       <p:sp>
         <p:nvSpPr>
@@ -9825,6 +10032,10 @@
           </a:solidFill>
           <a:ln/>
         </p:spPr>
+        <p:txBody>
+          <a:bodyPr/>
+          <a:p/>
+        </p:txBody>
       </p:sp>
       <p:sp>
         <p:nvSpPr>
@@ -9889,6 +10100,10 @@
             <a:prstDash val="solid"/>
           </a:ln>
         </p:spPr>
+        <p:txBody>
+          <a:bodyPr/>
+          <a:p/>
+        </p:txBody>
       </p:sp>
       <p:sp>
         <p:nvSpPr>
@@ -10068,6 +10283,10 @@
           </a:solidFill>
           <a:ln/>
         </p:spPr>
+        <p:txBody>
+          <a:bodyPr/>
+          <a:p/>
+        </p:txBody>
       </p:sp>
       <p:sp>
         <p:nvSpPr>
@@ -10132,6 +10351,10 @@
             <a:prstDash val="solid"/>
           </a:ln>
         </p:spPr>
+        <p:txBody>
+          <a:bodyPr/>
+          <a:p/>
+        </p:txBody>
       </p:sp>
       <p:sp>
         <p:nvSpPr>
@@ -10311,6 +10534,10 @@
           </a:solidFill>
           <a:ln/>
         </p:spPr>
+        <p:txBody>
+          <a:bodyPr/>
+          <a:p/>
+        </p:txBody>
       </p:sp>
       <p:sp>
         <p:nvSpPr>
@@ -10375,6 +10602,10 @@
             <a:prstDash val="solid"/>
           </a:ln>
         </p:spPr>
+        <p:txBody>
+          <a:bodyPr/>
+          <a:p/>
+        </p:txBody>
       </p:sp>
       <p:sp>
         <p:nvSpPr>
@@ -10554,6 +10785,10 @@
           </a:solidFill>
           <a:ln/>
         </p:spPr>
+        <p:txBody>
+          <a:bodyPr/>
+          <a:p/>
+        </p:txBody>
       </p:sp>
       <p:sp>
         <p:nvSpPr>
@@ -10618,6 +10853,10 @@
             <a:prstDash val="solid"/>
           </a:ln>
         </p:spPr>
+        <p:txBody>
+          <a:bodyPr/>
+          <a:p/>
+        </p:txBody>
       </p:sp>
       <p:sp>
         <p:nvSpPr>
@@ -10800,6 +11039,10 @@
             <a:prstDash val="solid"/>
           </a:ln>
         </p:spPr>
+        <p:txBody>
+          <a:bodyPr/>
+          <a:p/>
+        </p:txBody>
       </p:sp>
       <p:sp>
         <p:nvSpPr>
@@ -10873,7 +11116,7 @@
                 <a:ea typeface="Helvetica Neue" pitchFamily="34" charset="-122"/>
                 <a:cs typeface="Helvetica Neue" pitchFamily="34" charset="-120"/>
               </a:rPr>
-              <a:t>WEEK 1 — KICKOFF   ·   17 / 26</a:t>
+              <a:t>WEEK 1 — KICKOFF   ·   18 / 29</a:t>
             </a:r>
             <a:endParaRPr lang="en-US" sz="750" dirty="0"/>
           </a:p>
@@ -12515,7 +12758,7 @@
                 <a:ea typeface="Helvetica Neue" pitchFamily="34" charset="-122"/>
                 <a:cs typeface="Helvetica Neue" pitchFamily="34" charset="-120"/>
               </a:rPr>
-              <a:t>WEEK 1 — KICKOFF   ·   18 / 26</a:t>
+              <a:t>WEEK 1 — KICKOFF   ·   19 / 29</a:t>
             </a:r>
             <a:endParaRPr lang="en-US" sz="750" dirty="0"/>
           </a:p>
@@ -12660,6 +12903,10 @@
             <a:prstDash val="solid"/>
           </a:ln>
         </p:spPr>
+        <p:txBody>
+          <a:bodyPr/>
+          <a:p/>
+        </p:txBody>
       </p:sp>
       <p:sp>
         <p:nvSpPr>
@@ -12768,6 +13015,10 @@
             <a:prstDash val="solid"/>
           </a:ln>
         </p:spPr>
+        <p:txBody>
+          <a:bodyPr/>
+          <a:p/>
+        </p:txBody>
       </p:sp>
       <p:sp>
         <p:nvSpPr>
@@ -12788,6 +13039,10 @@
           </a:solidFill>
           <a:ln/>
         </p:spPr>
+        <p:txBody>
+          <a:bodyPr/>
+          <a:p/>
+        </p:txBody>
       </p:sp>
       <p:sp>
         <p:nvSpPr>
@@ -12938,6 +13193,10 @@
             <a:prstDash val="solid"/>
           </a:ln>
         </p:spPr>
+        <p:txBody>
+          <a:bodyPr/>
+          <a:p/>
+        </p:txBody>
       </p:sp>
       <p:sp>
         <p:nvSpPr>
@@ -12958,6 +13217,10 @@
           </a:solidFill>
           <a:ln/>
         </p:spPr>
+        <p:txBody>
+          <a:bodyPr/>
+          <a:p/>
+        </p:txBody>
       </p:sp>
       <p:sp>
         <p:nvSpPr>
@@ -13108,6 +13371,10 @@
             <a:prstDash val="solid"/>
           </a:ln>
         </p:spPr>
+        <p:txBody>
+          <a:bodyPr/>
+          <a:p/>
+        </p:txBody>
       </p:sp>
       <p:sp>
         <p:nvSpPr>
@@ -13128,6 +13395,10 @@
           </a:solidFill>
           <a:ln/>
         </p:spPr>
+        <p:txBody>
+          <a:bodyPr/>
+          <a:p/>
+        </p:txBody>
       </p:sp>
       <p:sp>
         <p:nvSpPr>
@@ -13274,6 +13545,10 @@
             <a:prstDash val="solid"/>
           </a:ln>
         </p:spPr>
+        <p:txBody>
+          <a:bodyPr/>
+          <a:p/>
+        </p:txBody>
       </p:sp>
       <p:sp>
         <p:nvSpPr>
@@ -13347,7 +13622,7 @@
                 <a:ea typeface="Helvetica Neue" pitchFamily="34" charset="-122"/>
                 <a:cs typeface="Helvetica Neue" pitchFamily="34" charset="-120"/>
               </a:rPr>
-              <a:t>WEEK 1 — KICKOFF   ·   19 / 26</a:t>
+              <a:t>WEEK 1 — KICKOFF   ·   20 / 29</a:t>
             </a:r>
             <a:endParaRPr lang="en-US" sz="750" dirty="0"/>
           </a:p>
@@ -13605,6 +13880,10 @@
             <a:prstDash val="solid"/>
           </a:ln>
         </p:spPr>
+        <p:txBody>
+          <a:bodyPr/>
+          <a:p/>
+        </p:txBody>
       </p:sp>
       <p:sp>
         <p:nvSpPr>
@@ -13745,6 +14024,10 @@
             <a:prstDash val="solid"/>
           </a:ln>
         </p:spPr>
+        <p:txBody>
+          <a:bodyPr/>
+          <a:p/>
+        </p:txBody>
       </p:sp>
       <p:sp>
         <p:nvSpPr>
@@ -13885,6 +14168,10 @@
             <a:prstDash val="solid"/>
           </a:ln>
         </p:spPr>
+        <p:txBody>
+          <a:bodyPr/>
+          <a:p/>
+        </p:txBody>
       </p:sp>
       <p:sp>
         <p:nvSpPr>
@@ -14025,6 +14312,10 @@
             <a:prstDash val="solid"/>
           </a:ln>
         </p:spPr>
+        <p:txBody>
+          <a:bodyPr/>
+          <a:p/>
+        </p:txBody>
       </p:sp>
       <p:sp>
         <p:nvSpPr>
@@ -14165,6 +14456,10 @@
             <a:prstDash val="solid"/>
           </a:ln>
         </p:spPr>
+        <p:txBody>
+          <a:bodyPr/>
+          <a:p/>
+        </p:txBody>
       </p:sp>
       <p:sp>
         <p:nvSpPr>
@@ -14305,6 +14600,10 @@
             <a:prstDash val="solid"/>
           </a:ln>
         </p:spPr>
+        <p:txBody>
+          <a:bodyPr/>
+          <a:p/>
+        </p:txBody>
       </p:sp>
       <p:sp>
         <p:nvSpPr>
@@ -14445,6 +14744,10 @@
             <a:prstDash val="solid"/>
           </a:ln>
         </p:spPr>
+        <p:txBody>
+          <a:bodyPr/>
+          <a:p/>
+        </p:txBody>
       </p:sp>
       <p:sp>
         <p:nvSpPr>
@@ -14624,6 +14927,10 @@
             <a:prstDash val="solid"/>
           </a:ln>
         </p:spPr>
+        <p:txBody>
+          <a:bodyPr/>
+          <a:p/>
+        </p:txBody>
       </p:sp>
       <p:sp>
         <p:nvSpPr>
@@ -14697,7 +15004,7 @@
                 <a:ea typeface="Helvetica Neue" pitchFamily="34" charset="-122"/>
                 <a:cs typeface="Helvetica Neue" pitchFamily="34" charset="-120"/>
               </a:rPr>
-              <a:t>WEEK 1 — KICKOFF   ·   2 / 26</a:t>
+              <a:t>WEEK 1 — KICKOFF   ·   2 / 29</a:t>
             </a:r>
             <a:endParaRPr lang="en-US" sz="750" dirty="0"/>
           </a:p>
@@ -14793,6 +15100,10 @@
           </a:solidFill>
           <a:ln/>
         </p:spPr>
+        <p:txBody>
+          <a:bodyPr/>
+          <a:p/>
+        </p:txBody>
       </p:sp>
       <p:sp>
         <p:nvSpPr>
@@ -14916,6 +15227,10 @@
           </a:solidFill>
           <a:ln/>
         </p:spPr>
+        <p:txBody>
+          <a:bodyPr/>
+          <a:p/>
+        </p:txBody>
       </p:sp>
       <p:sp>
         <p:nvSpPr>
@@ -15020,6 +15335,10 @@
             <a:prstDash val="solid"/>
           </a:ln>
         </p:spPr>
+        <p:txBody>
+          <a:bodyPr/>
+          <a:p/>
+        </p:txBody>
       </p:sp>
       <p:sp>
         <p:nvSpPr>
@@ -15093,7 +15412,7 @@
                 <a:ea typeface="Helvetica Neue" pitchFamily="34" charset="-122"/>
                 <a:cs typeface="Helvetica Neue" pitchFamily="34" charset="-120"/>
               </a:rPr>
-              <a:t>WEEK 1 — KICKOFF   ·   20 / 26</a:t>
+              <a:t>WEEK 1 — KICKOFF   ·   21 / 29</a:t>
             </a:r>
             <a:endParaRPr lang="en-US" sz="750" dirty="0"/>
           </a:p>
@@ -15273,6 +15592,10 @@
           </a:solidFill>
           <a:ln/>
         </p:spPr>
+        <p:txBody>
+          <a:bodyPr/>
+          <a:p/>
+        </p:txBody>
       </p:sp>
       <p:sp>
         <p:nvSpPr>
@@ -15413,6 +15736,10 @@
           </a:solidFill>
           <a:ln/>
         </p:spPr>
+        <p:txBody>
+          <a:bodyPr/>
+          <a:p/>
+        </p:txBody>
       </p:sp>
       <p:sp>
         <p:nvSpPr>
@@ -15553,6 +15880,10 @@
           </a:solidFill>
           <a:ln/>
         </p:spPr>
+        <p:txBody>
+          <a:bodyPr/>
+          <a:p/>
+        </p:txBody>
       </p:sp>
       <p:sp>
         <p:nvSpPr>
@@ -15693,6 +16024,10 @@
           </a:solidFill>
           <a:ln/>
         </p:spPr>
+        <p:txBody>
+          <a:bodyPr/>
+          <a:p/>
+        </p:txBody>
       </p:sp>
       <p:sp>
         <p:nvSpPr>
@@ -15833,6 +16168,10 @@
           </a:solidFill>
           <a:ln/>
         </p:spPr>
+        <p:txBody>
+          <a:bodyPr/>
+          <a:p/>
+        </p:txBody>
       </p:sp>
       <p:sp>
         <p:nvSpPr>
@@ -15980,6 +16319,10 @@
             <a:prstDash val="solid"/>
           </a:ln>
         </p:spPr>
+        <p:txBody>
+          <a:bodyPr/>
+          <a:p/>
+        </p:txBody>
       </p:sp>
       <p:sp>
         <p:nvSpPr>
@@ -16152,6 +16495,10 @@
             <a:prstDash val="solid"/>
           </a:ln>
         </p:spPr>
+        <p:txBody>
+          <a:bodyPr/>
+          <a:p/>
+        </p:txBody>
       </p:sp>
       <p:sp>
         <p:nvSpPr>
@@ -16225,7 +16572,7 @@
                 <a:ea typeface="Helvetica Neue" pitchFamily="34" charset="-122"/>
                 <a:cs typeface="Helvetica Neue" pitchFamily="34" charset="-120"/>
               </a:rPr>
-              <a:t>WEEK 1 — KICKOFF   ·   21 / 26</a:t>
+              <a:t>WEEK 1 — KICKOFF   ·   22 / 29</a:t>
             </a:r>
             <a:endParaRPr lang="en-US" sz="750" dirty="0"/>
           </a:p>
@@ -16633,7 +16980,7 @@
                 <a:ea typeface="Helvetica Neue" pitchFamily="34" charset="-122"/>
                 <a:cs typeface="Helvetica Neue" pitchFamily="34" charset="-120"/>
               </a:rPr>
-              <a:t>WEEK 1 — KICKOFF   ·   22 / 26</a:t>
+              <a:t>WEEK 1 — KICKOFF   ·   23 / 29</a:t>
             </a:r>
             <a:endParaRPr lang="en-US" sz="750" dirty="0"/>
           </a:p>
@@ -17778,7 +18125,7 @@
                 <a:ea typeface="Helvetica Neue" pitchFamily="34" charset="-122"/>
                 <a:cs typeface="Helvetica Neue" pitchFamily="34" charset="-120"/>
               </a:rPr>
-              <a:t>WEEK 1 — KICKOFF   ·   23 / 26</a:t>
+              <a:t>WEEK 1 — KICKOFF   ·   24 / 29</a:t>
             </a:r>
             <a:endParaRPr lang="en-US" sz="750" dirty="0"/>
           </a:p>
@@ -17874,6 +18221,10 @@
           </a:solidFill>
           <a:ln/>
         </p:spPr>
+        <p:txBody>
+          <a:bodyPr/>
+          <a:p/>
+        </p:txBody>
       </p:sp>
       <p:sp>
         <p:nvSpPr>
@@ -17997,6 +18348,10 @@
           </a:solidFill>
           <a:ln/>
         </p:spPr>
+        <p:txBody>
+          <a:bodyPr/>
+          <a:p/>
+        </p:txBody>
       </p:sp>
       <p:sp>
         <p:nvSpPr>
@@ -18101,6 +18456,10 @@
             <a:prstDash val="solid"/>
           </a:ln>
         </p:spPr>
+        <p:txBody>
+          <a:bodyPr/>
+          <a:p/>
+        </p:txBody>
       </p:sp>
       <p:sp>
         <p:nvSpPr>
@@ -18174,7 +18533,7 @@
                 <a:ea typeface="Helvetica Neue" pitchFamily="34" charset="-122"/>
                 <a:cs typeface="Helvetica Neue" pitchFamily="34" charset="-120"/>
               </a:rPr>
-              <a:t>WEEK 1 — KICKOFF   ·   24 / 26</a:t>
+              <a:t>WEEK 1 — KICKOFF   ·   25 / 29</a:t>
             </a:r>
             <a:endParaRPr lang="en-US" sz="750" dirty="0"/>
           </a:p>
@@ -18351,6 +18710,10 @@
           </a:solidFill>
           <a:ln/>
         </p:spPr>
+        <p:txBody>
+          <a:bodyPr/>
+          <a:p/>
+        </p:txBody>
       </p:sp>
       <p:sp>
         <p:nvSpPr>
@@ -18452,6 +18815,10 @@
           </a:solidFill>
           <a:ln/>
         </p:spPr>
+        <p:txBody>
+          <a:bodyPr/>
+          <a:p/>
+        </p:txBody>
       </p:sp>
       <p:sp>
         <p:nvSpPr>
@@ -18553,6 +18920,10 @@
           </a:solidFill>
           <a:ln/>
         </p:spPr>
+        <p:txBody>
+          <a:bodyPr/>
+          <a:p/>
+        </p:txBody>
       </p:sp>
       <p:sp>
         <p:nvSpPr>
@@ -18742,6 +19113,10 @@
             <a:prstDash val="solid"/>
           </a:ln>
         </p:spPr>
+        <p:txBody>
+          <a:bodyPr/>
+          <a:p/>
+        </p:txBody>
       </p:sp>
       <p:sp>
         <p:nvSpPr>
@@ -18866,6 +19241,10 @@
             <a:prstDash val="solid"/>
           </a:ln>
         </p:spPr>
+        <p:txBody>
+          <a:bodyPr/>
+          <a:p/>
+        </p:txBody>
       </p:sp>
       <p:sp>
         <p:nvSpPr>
@@ -18931,6 +19310,10 @@
             <a:prstDash val="solid"/>
           </a:ln>
         </p:spPr>
+        <p:txBody>
+          <a:bodyPr/>
+          <a:p/>
+        </p:txBody>
       </p:sp>
       <p:sp>
         <p:nvSpPr>
@@ -19004,7 +19387,7 @@
                 <a:ea typeface="Helvetica Neue" pitchFamily="34" charset="-122"/>
                 <a:cs typeface="Helvetica Neue" pitchFamily="34" charset="-120"/>
               </a:rPr>
-              <a:t>WEEK 1 — KICKOFF   ·   25 / 26</a:t>
+              <a:t>WEEK 1 — KICKOFF   ·   26 / 29</a:t>
             </a:r>
             <a:endParaRPr lang="en-US" sz="750" dirty="0"/>
           </a:p>
@@ -19166,6 +19549,10 @@
             <a:prstDash val="solid"/>
           </a:ln>
         </p:spPr>
+        <p:txBody>
+          <a:bodyPr/>
+          <a:p/>
+        </p:txBody>
       </p:sp>
       <p:sp>
         <p:nvSpPr>
@@ -19265,6 +19652,2980 @@
               <a:t>SAY WATT ROBOTICS  ·  ROV TEAM      |      NEXT MEETING — WEEK 2, SOLDERING BOOTCAMP</a:t>
             </a:r>
             <a:endParaRPr lang="en-US" sz="900" dirty="0"/>
+          </a:p>
+        </p:txBody>
+      </p:sp>
+    </p:spTree>
+  </p:cSld>
+  <p:clrMapOvr>
+    <a:masterClrMapping/>
+  </p:clrMapOvr>
+</p:sld>
+</file>
+
+<file path=ppt/slides/slide27.xml><?xml version="1.0" encoding="utf-8"?>
+<p:sld xmlns:a="http://schemas.openxmlformats.org/drawingml/2006/main" xmlns:p="http://schemas.openxmlformats.org/presentationml/2006/main" xmlns:r="http://schemas.openxmlformats.org/officeDocument/2006/relationships">
+  <p:cSld>
+    <p:spTree>
+      <p:nvGrpSpPr>
+        <p:cNvPr id="1" name=""/>
+        <p:cNvGrpSpPr/>
+        <p:nvPr/>
+      </p:nvGrpSpPr>
+      <p:grpSpPr/>
+      <p:sp>
+        <p:nvSpPr>
+          <p:cNvPr id="2" name="TextBox 1"/>
+          <p:cNvSpPr txBox="1"/>
+          <p:nvPr/>
+        </p:nvSpPr>
+        <p:spPr>
+          <a:xfrm>
+            <a:off x="822960" y="530352"/>
+            <a:ext cx="10515600" cy="292608"/>
+          </a:xfrm>
+          <a:prstGeom prst="rect">
+            <a:avLst/>
+          </a:prstGeom>
+          <a:noFill/>
+        </p:spPr>
+        <p:txBody>
+          <a:bodyPr wrap="square" lIns="0" rIns="0" tIns="0" bIns="0" anchor="t">
+            <a:spAutoFit/>
+          </a:bodyPr>
+          <a:lstStyle/>
+          <a:p>
+            <a:pPr algn="l"/>
+            <a:r>
+              <a:rPr sz="1200" b="1" i="0" cap="all" spc="180">
+                <a:solidFill>
+                  <a:srgbClr val="0D7490"/>
+                </a:solidFill>
+                <a:latin typeface="Helvetica Neue"/>
+              </a:rPr>
+              <a:t>TODAY'S ROLES</a:t>
+            </a:r>
+          </a:p>
+        </p:txBody>
+      </p:sp>
+      <p:sp>
+        <p:nvSpPr>
+          <p:cNvPr id="3" name="TextBox 2"/>
+          <p:cNvSpPr txBox="1"/>
+          <p:nvPr/>
+        </p:nvSpPr>
+        <p:spPr>
+          <a:xfrm>
+            <a:off x="804672" y="822960"/>
+            <a:ext cx="10515600" cy="868680"/>
+          </a:xfrm>
+          <a:prstGeom prst="rect">
+            <a:avLst/>
+          </a:prstGeom>
+          <a:noFill/>
+        </p:spPr>
+        <p:txBody>
+          <a:bodyPr wrap="square" lIns="0" rIns="0" tIns="0" bIns="0" anchor="t">
+            <a:spAutoFit/>
+          </a:bodyPr>
+          <a:lstStyle/>
+          <a:p>
+            <a:pPr algn="l">
+              <a:lnSpc>
+                <a:spcPct val="105000"/>
+              </a:lnSpc>
+            </a:pPr>
+            <a:r>
+              <a:rPr sz="3000" b="1" i="0">
+                <a:solidFill>
+                  <a:srgbClr val="1D1D1F"/>
+                </a:solidFill>
+                <a:latin typeface="Helvetica Neue"/>
+              </a:rPr>
+              <a:t>Four jobs. Four students. Different every week.</a:t>
+            </a:r>
+          </a:p>
+        </p:txBody>
+      </p:sp>
+      <p:sp>
+        <p:nvSpPr>
+          <p:cNvPr id="4" name="TextBox 3"/>
+          <p:cNvSpPr txBox="1"/>
+          <p:nvPr/>
+        </p:nvSpPr>
+        <p:spPr>
+          <a:xfrm>
+            <a:off x="822960" y="1700784"/>
+            <a:ext cx="10515600" cy="457200"/>
+          </a:xfrm>
+          <a:prstGeom prst="rect">
+            <a:avLst/>
+          </a:prstGeom>
+          <a:noFill/>
+        </p:spPr>
+        <p:txBody>
+          <a:bodyPr wrap="square" lIns="0" rIns="0" tIns="0" bIns="0" anchor="t">
+            <a:spAutoFit/>
+          </a:bodyPr>
+          <a:lstStyle/>
+          <a:p>
+            <a:pPr algn="l"/>
+            <a:r>
+              <a:rPr sz="1400" b="0" i="1">
+                <a:solidFill>
+                  <a:srgbClr val="6E6E73"/>
+                </a:solidFill>
+                <a:latin typeface="Helvetica Neue"/>
+              </a:rPr>
+              <a:t>Every meeting we assign these four — by season's end, every student has done every job.</a:t>
+            </a:r>
+          </a:p>
+        </p:txBody>
+      </p:sp>
+      <p:sp>
+        <p:nvSpPr>
+          <p:cNvPr id="5" name="Rectangle 4"/>
+          <p:cNvSpPr/>
+          <p:nvPr/>
+        </p:nvSpPr>
+        <p:spPr>
+          <a:xfrm>
+            <a:off x="822960" y="2331720"/>
+            <a:ext cx="5074920" cy="1783080"/>
+          </a:xfrm>
+          <a:prstGeom prst="rect">
+            <a:avLst/>
+          </a:prstGeom>
+          <a:solidFill>
+            <a:srgbClr val="FBFBFD"/>
+          </a:solidFill>
+          <a:ln w="9525">
+            <a:solidFill>
+              <a:srgbClr val="E3E3E6"/>
+            </a:solidFill>
+          </a:ln>
+        </p:spPr>
+        <p:style>
+          <a:lnRef idx="1">
+            <a:schemeClr val="accent1"/>
+          </a:lnRef>
+          <a:fillRef idx="3">
+            <a:schemeClr val="accent1"/>
+          </a:fillRef>
+          <a:effectRef idx="2">
+            <a:schemeClr val="accent1"/>
+          </a:effectRef>
+          <a:fontRef idx="minor">
+            <a:schemeClr val="lt1"/>
+          </a:fontRef>
+        </p:style>
+        <p:txBody>
+          <a:bodyPr rtlCol="0" anchor="ctr"/>
+          <a:lstStyle/>
+          <a:p>
+            <a:pPr algn="ctr"/>
+          </a:p>
+        </p:txBody>
+      </p:sp>
+      <p:sp>
+        <p:nvSpPr>
+          <p:cNvPr id="6" name="TextBox 5"/>
+          <p:cNvSpPr txBox="1"/>
+          <p:nvPr/>
+        </p:nvSpPr>
+        <p:spPr>
+          <a:xfrm>
+            <a:off x="1143000" y="2606039"/>
+            <a:ext cx="4434840" cy="329184"/>
+          </a:xfrm>
+          <a:prstGeom prst="rect">
+            <a:avLst/>
+          </a:prstGeom>
+          <a:noFill/>
+        </p:spPr>
+        <p:txBody>
+          <a:bodyPr wrap="square" lIns="0" rIns="0" tIns="0" bIns="0" anchor="t">
+            <a:spAutoFit/>
+          </a:bodyPr>
+          <a:lstStyle/>
+          <a:p>
+            <a:pPr algn="l"/>
+            <a:r>
+              <a:rPr sz="1000" b="1" i="0" cap="all" spc="180">
+                <a:solidFill>
+                  <a:srgbClr val="0D7490"/>
+                </a:solidFill>
+                <a:latin typeface="Helvetica Neue"/>
+              </a:rPr>
+              <a:t>NOTETAKER / SCRIBE</a:t>
+            </a:r>
+          </a:p>
+        </p:txBody>
+      </p:sp>
+      <p:sp>
+        <p:nvSpPr>
+          <p:cNvPr id="7" name="TextBox 6"/>
+          <p:cNvSpPr txBox="1"/>
+          <p:nvPr/>
+        </p:nvSpPr>
+        <p:spPr>
+          <a:xfrm>
+            <a:off x="1143000" y="3008376"/>
+            <a:ext cx="4434840" cy="329184"/>
+          </a:xfrm>
+          <a:prstGeom prst="rect">
+            <a:avLst/>
+          </a:prstGeom>
+          <a:noFill/>
+        </p:spPr>
+        <p:txBody>
+          <a:bodyPr wrap="square" lIns="0" rIns="0" tIns="0" bIns="0" anchor="t">
+            <a:spAutoFit/>
+          </a:bodyPr>
+          <a:lstStyle/>
+          <a:p>
+            <a:pPr algn="l"/>
+            <a:r>
+              <a:rPr sz="1100" b="0" i="0" spc="40">
+                <a:solidFill>
+                  <a:srgbClr val="86868B"/>
+                </a:solidFill>
+                <a:latin typeface="Helvetica Neue"/>
+              </a:rPr>
+              <a:t>TODAY:  __________________________________</a:t>
+            </a:r>
+          </a:p>
+        </p:txBody>
+      </p:sp>
+      <p:sp>
+        <p:nvSpPr>
+          <p:cNvPr id="8" name="TextBox 7"/>
+          <p:cNvSpPr txBox="1"/>
+          <p:nvPr/>
+        </p:nvSpPr>
+        <p:spPr>
+          <a:xfrm>
+            <a:off x="1143000" y="3410711"/>
+            <a:ext cx="4434840" cy="594359"/>
+          </a:xfrm>
+          <a:prstGeom prst="rect">
+            <a:avLst/>
+          </a:prstGeom>
+          <a:noFill/>
+        </p:spPr>
+        <p:txBody>
+          <a:bodyPr wrap="square" lIns="0" rIns="0" tIns="0" bIns="0" anchor="t">
+            <a:spAutoFit/>
+          </a:bodyPr>
+          <a:lstStyle/>
+          <a:p>
+            <a:pPr algn="l"/>
+            <a:r>
+              <a:rPr sz="1150" b="0" i="0">
+                <a:solidFill>
+                  <a:srgbClr val="6E6E73"/>
+                </a:solidFill>
+                <a:latin typeface="Helvetica Neue"/>
+              </a:rPr>
+              <a:t>Captures every decision, action item, and blocker. Files notes with the CFO for the engineering notebook.</a:t>
+            </a:r>
+          </a:p>
+        </p:txBody>
+      </p:sp>
+      <p:sp>
+        <p:nvSpPr>
+          <p:cNvPr id="9" name="Rectangle 8"/>
+          <p:cNvSpPr/>
+          <p:nvPr/>
+        </p:nvSpPr>
+        <p:spPr>
+          <a:xfrm>
+            <a:off x="6126480" y="2331720"/>
+            <a:ext cx="5074920" cy="1783080"/>
+          </a:xfrm>
+          <a:prstGeom prst="rect">
+            <a:avLst/>
+          </a:prstGeom>
+          <a:solidFill>
+            <a:srgbClr val="FBFBFD"/>
+          </a:solidFill>
+          <a:ln w="9525">
+            <a:solidFill>
+              <a:srgbClr val="E3E3E6"/>
+            </a:solidFill>
+          </a:ln>
+        </p:spPr>
+        <p:style>
+          <a:lnRef idx="1">
+            <a:schemeClr val="accent1"/>
+          </a:lnRef>
+          <a:fillRef idx="3">
+            <a:schemeClr val="accent1"/>
+          </a:fillRef>
+          <a:effectRef idx="2">
+            <a:schemeClr val="accent1"/>
+          </a:effectRef>
+          <a:fontRef idx="minor">
+            <a:schemeClr val="lt1"/>
+          </a:fontRef>
+        </p:style>
+        <p:txBody>
+          <a:bodyPr rtlCol="0" anchor="ctr"/>
+          <a:lstStyle/>
+          <a:p>
+            <a:pPr algn="ctr"/>
+          </a:p>
+        </p:txBody>
+      </p:sp>
+      <p:sp>
+        <p:nvSpPr>
+          <p:cNvPr id="10" name="TextBox 9"/>
+          <p:cNvSpPr txBox="1"/>
+          <p:nvPr/>
+        </p:nvSpPr>
+        <p:spPr>
+          <a:xfrm>
+            <a:off x="6446520" y="2606039"/>
+            <a:ext cx="4434840" cy="329184"/>
+          </a:xfrm>
+          <a:prstGeom prst="rect">
+            <a:avLst/>
+          </a:prstGeom>
+          <a:noFill/>
+        </p:spPr>
+        <p:txBody>
+          <a:bodyPr wrap="square" lIns="0" rIns="0" tIns="0" bIns="0" anchor="t">
+            <a:spAutoFit/>
+          </a:bodyPr>
+          <a:lstStyle/>
+          <a:p>
+            <a:pPr algn="l"/>
+            <a:r>
+              <a:rPr sz="1000" b="1" i="0" cap="all" spc="180">
+                <a:solidFill>
+                  <a:srgbClr val="0D7490"/>
+                </a:solidFill>
+                <a:latin typeface="Helvetica Neue"/>
+              </a:rPr>
+              <a:t>SAFETY BRIEFER</a:t>
+            </a:r>
+          </a:p>
+        </p:txBody>
+      </p:sp>
+      <p:sp>
+        <p:nvSpPr>
+          <p:cNvPr id="11" name="TextBox 10"/>
+          <p:cNvSpPr txBox="1"/>
+          <p:nvPr/>
+        </p:nvSpPr>
+        <p:spPr>
+          <a:xfrm>
+            <a:off x="6446520" y="3008376"/>
+            <a:ext cx="4434840" cy="329184"/>
+          </a:xfrm>
+          <a:prstGeom prst="rect">
+            <a:avLst/>
+          </a:prstGeom>
+          <a:noFill/>
+        </p:spPr>
+        <p:txBody>
+          <a:bodyPr wrap="square" lIns="0" rIns="0" tIns="0" bIns="0" anchor="t">
+            <a:spAutoFit/>
+          </a:bodyPr>
+          <a:lstStyle/>
+          <a:p>
+            <a:pPr algn="l"/>
+            <a:r>
+              <a:rPr sz="1100" b="0" i="0" spc="40">
+                <a:solidFill>
+                  <a:srgbClr val="86868B"/>
+                </a:solidFill>
+                <a:latin typeface="Helvetica Neue"/>
+              </a:rPr>
+              <a:t>TODAY:  __________________________________</a:t>
+            </a:r>
+          </a:p>
+        </p:txBody>
+      </p:sp>
+      <p:sp>
+        <p:nvSpPr>
+          <p:cNvPr id="12" name="TextBox 11"/>
+          <p:cNvSpPr txBox="1"/>
+          <p:nvPr/>
+        </p:nvSpPr>
+        <p:spPr>
+          <a:xfrm>
+            <a:off x="6446520" y="3410711"/>
+            <a:ext cx="4434840" cy="594359"/>
+          </a:xfrm>
+          <a:prstGeom prst="rect">
+            <a:avLst/>
+          </a:prstGeom>
+          <a:noFill/>
+        </p:spPr>
+        <p:txBody>
+          <a:bodyPr wrap="square" lIns="0" rIns="0" tIns="0" bIns="0" anchor="t">
+            <a:spAutoFit/>
+          </a:bodyPr>
+          <a:lstStyle/>
+          <a:p>
+            <a:pPr algn="l"/>
+            <a:r>
+              <a:rPr sz="1150" b="0" i="0">
+                <a:solidFill>
+                  <a:srgbClr val="6E6E73"/>
+                </a:solidFill>
+                <a:latin typeface="Helvetica Neue"/>
+              </a:rPr>
+              <a:t>Delivers the standing four-question safety brief at the start of the meeting.</a:t>
+            </a:r>
+          </a:p>
+        </p:txBody>
+      </p:sp>
+      <p:sp>
+        <p:nvSpPr>
+          <p:cNvPr id="13" name="Rectangle 12"/>
+          <p:cNvSpPr/>
+          <p:nvPr/>
+        </p:nvSpPr>
+        <p:spPr>
+          <a:xfrm>
+            <a:off x="822960" y="4315968"/>
+            <a:ext cx="5074920" cy="1783080"/>
+          </a:xfrm>
+          <a:prstGeom prst="rect">
+            <a:avLst/>
+          </a:prstGeom>
+          <a:solidFill>
+            <a:srgbClr val="FBFBFD"/>
+          </a:solidFill>
+          <a:ln w="9525">
+            <a:solidFill>
+              <a:srgbClr val="E3E3E6"/>
+            </a:solidFill>
+          </a:ln>
+        </p:spPr>
+        <p:style>
+          <a:lnRef idx="1">
+            <a:schemeClr val="accent1"/>
+          </a:lnRef>
+          <a:fillRef idx="3">
+            <a:schemeClr val="accent1"/>
+          </a:fillRef>
+          <a:effectRef idx="2">
+            <a:schemeClr val="accent1"/>
+          </a:effectRef>
+          <a:fontRef idx="minor">
+            <a:schemeClr val="lt1"/>
+          </a:fontRef>
+        </p:style>
+        <p:txBody>
+          <a:bodyPr rtlCol="0" anchor="ctr"/>
+          <a:lstStyle/>
+          <a:p>
+            <a:pPr algn="ctr"/>
+          </a:p>
+        </p:txBody>
+      </p:sp>
+      <p:sp>
+        <p:nvSpPr>
+          <p:cNvPr id="14" name="TextBox 13"/>
+          <p:cNvSpPr txBox="1"/>
+          <p:nvPr/>
+        </p:nvSpPr>
+        <p:spPr>
+          <a:xfrm>
+            <a:off x="1143000" y="4590288"/>
+            <a:ext cx="4434840" cy="329184"/>
+          </a:xfrm>
+          <a:prstGeom prst="rect">
+            <a:avLst/>
+          </a:prstGeom>
+          <a:noFill/>
+        </p:spPr>
+        <p:txBody>
+          <a:bodyPr wrap="square" lIns="0" rIns="0" tIns="0" bIns="0" anchor="t">
+            <a:spAutoFit/>
+          </a:bodyPr>
+          <a:lstStyle/>
+          <a:p>
+            <a:pPr algn="l"/>
+            <a:r>
+              <a:rPr sz="1000" b="1" i="0" cap="all" spc="180">
+                <a:solidFill>
+                  <a:srgbClr val="0D7490"/>
+                </a:solidFill>
+                <a:latin typeface="Helvetica Neue"/>
+              </a:rPr>
+              <a:t>PHOTOGRAPHER</a:t>
+            </a:r>
+          </a:p>
+        </p:txBody>
+      </p:sp>
+      <p:sp>
+        <p:nvSpPr>
+          <p:cNvPr id="15" name="TextBox 14"/>
+          <p:cNvSpPr txBox="1"/>
+          <p:nvPr/>
+        </p:nvSpPr>
+        <p:spPr>
+          <a:xfrm>
+            <a:off x="1143000" y="4992624"/>
+            <a:ext cx="4434840" cy="329184"/>
+          </a:xfrm>
+          <a:prstGeom prst="rect">
+            <a:avLst/>
+          </a:prstGeom>
+          <a:noFill/>
+        </p:spPr>
+        <p:txBody>
+          <a:bodyPr wrap="square" lIns="0" rIns="0" tIns="0" bIns="0" anchor="t">
+            <a:spAutoFit/>
+          </a:bodyPr>
+          <a:lstStyle/>
+          <a:p>
+            <a:pPr algn="l"/>
+            <a:r>
+              <a:rPr sz="1100" b="0" i="0" spc="40">
+                <a:solidFill>
+                  <a:srgbClr val="86868B"/>
+                </a:solidFill>
+                <a:latin typeface="Helvetica Neue"/>
+              </a:rPr>
+              <a:t>TODAY:  __________________________________</a:t>
+            </a:r>
+          </a:p>
+        </p:txBody>
+      </p:sp>
+      <p:sp>
+        <p:nvSpPr>
+          <p:cNvPr id="16" name="TextBox 15"/>
+          <p:cNvSpPr txBox="1"/>
+          <p:nvPr/>
+        </p:nvSpPr>
+        <p:spPr>
+          <a:xfrm>
+            <a:off x="1143000" y="5394959"/>
+            <a:ext cx="4434840" cy="594359"/>
+          </a:xfrm>
+          <a:prstGeom prst="rect">
+            <a:avLst/>
+          </a:prstGeom>
+          <a:noFill/>
+        </p:spPr>
+        <p:txBody>
+          <a:bodyPr wrap="square" lIns="0" rIns="0" tIns="0" bIns="0" anchor="t">
+            <a:spAutoFit/>
+          </a:bodyPr>
+          <a:lstStyle/>
+          <a:p>
+            <a:pPr algn="l"/>
+            <a:r>
+              <a:rPr sz="1150" b="0" i="0">
+                <a:solidFill>
+                  <a:srgbClr val="6E6E73"/>
+                </a:solidFill>
+                <a:latin typeface="Helvetica Neue"/>
+              </a:rPr>
+              <a:t>Captures photos and short videos throughout — feeds the engineering notebook and the marketing display.</a:t>
+            </a:r>
+          </a:p>
+        </p:txBody>
+      </p:sp>
+      <p:sp>
+        <p:nvSpPr>
+          <p:cNvPr id="17" name="Rectangle 16"/>
+          <p:cNvSpPr/>
+          <p:nvPr/>
+        </p:nvSpPr>
+        <p:spPr>
+          <a:xfrm>
+            <a:off x="6126480" y="4315968"/>
+            <a:ext cx="5074920" cy="1783080"/>
+          </a:xfrm>
+          <a:prstGeom prst="rect">
+            <a:avLst/>
+          </a:prstGeom>
+          <a:solidFill>
+            <a:srgbClr val="FBFBFD"/>
+          </a:solidFill>
+          <a:ln w="9525">
+            <a:solidFill>
+              <a:srgbClr val="E3E3E6"/>
+            </a:solidFill>
+          </a:ln>
+        </p:spPr>
+        <p:style>
+          <a:lnRef idx="1">
+            <a:schemeClr val="accent1"/>
+          </a:lnRef>
+          <a:fillRef idx="3">
+            <a:schemeClr val="accent1"/>
+          </a:fillRef>
+          <a:effectRef idx="2">
+            <a:schemeClr val="accent1"/>
+          </a:effectRef>
+          <a:fontRef idx="minor">
+            <a:schemeClr val="lt1"/>
+          </a:fontRef>
+        </p:style>
+        <p:txBody>
+          <a:bodyPr rtlCol="0" anchor="ctr"/>
+          <a:lstStyle/>
+          <a:p>
+            <a:pPr algn="ctr"/>
+          </a:p>
+        </p:txBody>
+      </p:sp>
+      <p:sp>
+        <p:nvSpPr>
+          <p:cNvPr id="18" name="TextBox 17"/>
+          <p:cNvSpPr txBox="1"/>
+          <p:nvPr/>
+        </p:nvSpPr>
+        <p:spPr>
+          <a:xfrm>
+            <a:off x="6446520" y="4590288"/>
+            <a:ext cx="4434840" cy="329184"/>
+          </a:xfrm>
+          <a:prstGeom prst="rect">
+            <a:avLst/>
+          </a:prstGeom>
+          <a:noFill/>
+        </p:spPr>
+        <p:txBody>
+          <a:bodyPr wrap="square" lIns="0" rIns="0" tIns="0" bIns="0" anchor="t">
+            <a:spAutoFit/>
+          </a:bodyPr>
+          <a:lstStyle/>
+          <a:p>
+            <a:pPr algn="l"/>
+            <a:r>
+              <a:rPr sz="1000" b="1" i="0" cap="all" spc="180">
+                <a:solidFill>
+                  <a:srgbClr val="0D7490"/>
+                </a:solidFill>
+                <a:latin typeface="Helvetica Neue"/>
+              </a:rPr>
+              <a:t>TIMEKEEPER</a:t>
+            </a:r>
+          </a:p>
+        </p:txBody>
+      </p:sp>
+      <p:sp>
+        <p:nvSpPr>
+          <p:cNvPr id="19" name="TextBox 18"/>
+          <p:cNvSpPr txBox="1"/>
+          <p:nvPr/>
+        </p:nvSpPr>
+        <p:spPr>
+          <a:xfrm>
+            <a:off x="6446520" y="4992624"/>
+            <a:ext cx="4434840" cy="329184"/>
+          </a:xfrm>
+          <a:prstGeom prst="rect">
+            <a:avLst/>
+          </a:prstGeom>
+          <a:noFill/>
+        </p:spPr>
+        <p:txBody>
+          <a:bodyPr wrap="square" lIns="0" rIns="0" tIns="0" bIns="0" anchor="t">
+            <a:spAutoFit/>
+          </a:bodyPr>
+          <a:lstStyle/>
+          <a:p>
+            <a:pPr algn="l"/>
+            <a:r>
+              <a:rPr sz="1100" b="0" i="0" spc="40">
+                <a:solidFill>
+                  <a:srgbClr val="86868B"/>
+                </a:solidFill>
+                <a:latin typeface="Helvetica Neue"/>
+              </a:rPr>
+              <a:t>TODAY:  __________________________________</a:t>
+            </a:r>
+          </a:p>
+        </p:txBody>
+      </p:sp>
+      <p:sp>
+        <p:nvSpPr>
+          <p:cNvPr id="20" name="TextBox 19"/>
+          <p:cNvSpPr txBox="1"/>
+          <p:nvPr/>
+        </p:nvSpPr>
+        <p:spPr>
+          <a:xfrm>
+            <a:off x="6446520" y="5394959"/>
+            <a:ext cx="4434840" cy="594359"/>
+          </a:xfrm>
+          <a:prstGeom prst="rect">
+            <a:avLst/>
+          </a:prstGeom>
+          <a:noFill/>
+        </p:spPr>
+        <p:txBody>
+          <a:bodyPr wrap="square" lIns="0" rIns="0" tIns="0" bIns="0" anchor="t">
+            <a:spAutoFit/>
+          </a:bodyPr>
+          <a:lstStyle/>
+          <a:p>
+            <a:pPr algn="l"/>
+            <a:r>
+              <a:rPr sz="1150" b="0" i="0">
+                <a:solidFill>
+                  <a:srgbClr val="6E6E73"/>
+                </a:solidFill>
+                <a:latin typeface="Helvetica Neue"/>
+              </a:rPr>
+              <a:t>Holds the meeting to the agenda's clock. Calls the time at each block change.</a:t>
+            </a:r>
+          </a:p>
+        </p:txBody>
+      </p:sp>
+      <p:cxnSp>
+        <p:nvCxnSpPr>
+          <p:cNvPr id="21" name="Connector 20"/>
+          <p:cNvCxnSpPr/>
+          <p:nvPr/>
+        </p:nvCxnSpPr>
+        <p:spPr>
+          <a:xfrm>
+            <a:off x="822960" y="6437376"/>
+            <a:ext cx="10543032" cy="0"/>
+          </a:xfrm>
+          <a:prstGeom prst="line">
+            <a:avLst/>
+          </a:prstGeom>
+          <a:ln w="9525">
+            <a:solidFill>
+              <a:srgbClr val="E3E3E6"/>
+            </a:solidFill>
+          </a:ln>
+        </p:spPr>
+        <p:style>
+          <a:lnRef idx="2">
+            <a:schemeClr val="accent1"/>
+          </a:lnRef>
+          <a:fillRef idx="0">
+            <a:schemeClr val="accent1"/>
+          </a:fillRef>
+          <a:effectRef idx="1">
+            <a:schemeClr val="accent1"/>
+          </a:effectRef>
+          <a:fontRef idx="minor">
+            <a:schemeClr val="tx1"/>
+          </a:fontRef>
+        </p:style>
+      </p:cxnSp>
+      <p:sp>
+        <p:nvSpPr>
+          <p:cNvPr id="22" name="TextBox 21"/>
+          <p:cNvSpPr txBox="1"/>
+          <p:nvPr/>
+        </p:nvSpPr>
+        <p:spPr>
+          <a:xfrm>
+            <a:off x="822960" y="6473952"/>
+            <a:ext cx="5486400" cy="274320"/>
+          </a:xfrm>
+          <a:prstGeom prst="rect">
+            <a:avLst/>
+          </a:prstGeom>
+          <a:noFill/>
+        </p:spPr>
+        <p:txBody>
+          <a:bodyPr wrap="square" lIns="0" rIns="0" tIns="0" bIns="0" anchor="t">
+            <a:spAutoFit/>
+          </a:bodyPr>
+          <a:lstStyle/>
+          <a:p>
+            <a:pPr algn="l"/>
+            <a:r>
+              <a:rPr sz="750" b="1" i="0" cap="all" spc="180">
+                <a:solidFill>
+                  <a:srgbClr val="86868B"/>
+                </a:solidFill>
+                <a:latin typeface="Helvetica Neue"/>
+              </a:rPr>
+              <a:t>SAY WATT ROBOTICS  ·  ROV TEAM</a:t>
+            </a:r>
+          </a:p>
+        </p:txBody>
+      </p:sp>
+      <p:sp>
+        <p:nvSpPr>
+          <p:cNvPr id="23" name="TextBox 22"/>
+          <p:cNvSpPr txBox="1"/>
+          <p:nvPr/>
+        </p:nvSpPr>
+        <p:spPr>
+          <a:xfrm>
+            <a:off x="5879592" y="6473952"/>
+            <a:ext cx="5486400" cy="274320"/>
+          </a:xfrm>
+          <a:prstGeom prst="rect">
+            <a:avLst/>
+          </a:prstGeom>
+          <a:noFill/>
+        </p:spPr>
+        <p:txBody>
+          <a:bodyPr wrap="square" lIns="0" rIns="0" tIns="0" bIns="0" anchor="t">
+            <a:spAutoFit/>
+          </a:bodyPr>
+          <a:lstStyle/>
+          <a:p>
+            <a:pPr algn="r"/>
+            <a:r>
+              <a:rPr sz="750" b="1" i="0" cap="all" spc="180">
+                <a:solidFill>
+                  <a:srgbClr val="86868B"/>
+                </a:solidFill>
+                <a:latin typeface="Helvetica Neue"/>
+              </a:rPr>
+              <a:t>WEEK 1 — KICKOFF   ·   3 / 29</a:t>
+            </a:r>
+          </a:p>
+        </p:txBody>
+      </p:sp>
+    </p:spTree>
+  </p:cSld>
+  <p:clrMapOvr>
+    <a:masterClrMapping/>
+  </p:clrMapOvr>
+</p:sld>
+</file>
+
+<file path=ppt/slides/slide28.xml><?xml version="1.0" encoding="utf-8"?>
+<p:sld xmlns:a="http://schemas.openxmlformats.org/drawingml/2006/main" xmlns:p="http://schemas.openxmlformats.org/presentationml/2006/main" xmlns:r="http://schemas.openxmlformats.org/officeDocument/2006/relationships">
+  <p:cSld>
+    <p:spTree>
+      <p:nvGrpSpPr>
+        <p:cNvPr id="1" name=""/>
+        <p:cNvGrpSpPr/>
+        <p:nvPr/>
+      </p:nvGrpSpPr>
+      <p:grpSpPr/>
+      <p:sp>
+        <p:nvSpPr>
+          <p:cNvPr id="2" name="TextBox 1"/>
+          <p:cNvSpPr txBox="1"/>
+          <p:nvPr/>
+        </p:nvSpPr>
+        <p:spPr>
+          <a:xfrm>
+            <a:off x="822960" y="530352"/>
+            <a:ext cx="10515600" cy="292608"/>
+          </a:xfrm>
+          <a:prstGeom prst="rect">
+            <a:avLst/>
+          </a:prstGeom>
+          <a:noFill/>
+        </p:spPr>
+        <p:txBody>
+          <a:bodyPr wrap="square" lIns="0" rIns="0" tIns="0" bIns="0" anchor="t">
+            <a:spAutoFit/>
+          </a:bodyPr>
+          <a:lstStyle/>
+          <a:p>
+            <a:pPr algn="l"/>
+            <a:r>
+              <a:rPr sz="1200" b="1" i="0" cap="all" spc="180">
+                <a:solidFill>
+                  <a:srgbClr val="0D7490"/>
+                </a:solidFill>
+                <a:latin typeface="Helvetica Neue"/>
+              </a:rPr>
+              <a:t>ACTION ITEMS</a:t>
+            </a:r>
+          </a:p>
+        </p:txBody>
+      </p:sp>
+      <p:sp>
+        <p:nvSpPr>
+          <p:cNvPr id="3" name="TextBox 2"/>
+          <p:cNvSpPr txBox="1"/>
+          <p:nvPr/>
+        </p:nvSpPr>
+        <p:spPr>
+          <a:xfrm>
+            <a:off x="804672" y="822960"/>
+            <a:ext cx="10515600" cy="868680"/>
+          </a:xfrm>
+          <a:prstGeom prst="rect">
+            <a:avLst/>
+          </a:prstGeom>
+          <a:noFill/>
+        </p:spPr>
+        <p:txBody>
+          <a:bodyPr wrap="square" lIns="0" rIns="0" tIns="0" bIns="0" anchor="t">
+            <a:spAutoFit/>
+          </a:bodyPr>
+          <a:lstStyle/>
+          <a:p>
+            <a:pPr algn="l">
+              <a:lnSpc>
+                <a:spcPct val="105000"/>
+              </a:lnSpc>
+            </a:pPr>
+            <a:r>
+              <a:rPr sz="3000" b="1" i="0">
+                <a:solidFill>
+                  <a:srgbClr val="1D1D1F"/>
+                </a:solidFill>
+                <a:latin typeface="Helvetica Neue"/>
+              </a:rPr>
+              <a:t>What we decided. Who owns it. When it's due.</a:t>
+            </a:r>
+          </a:p>
+        </p:txBody>
+      </p:sp>
+      <p:sp>
+        <p:nvSpPr>
+          <p:cNvPr id="4" name="TextBox 3"/>
+          <p:cNvSpPr txBox="1"/>
+          <p:nvPr/>
+        </p:nvSpPr>
+        <p:spPr>
+          <a:xfrm>
+            <a:off x="822960" y="1700784"/>
+            <a:ext cx="10515600" cy="457200"/>
+          </a:xfrm>
+          <a:prstGeom prst="rect">
+            <a:avLst/>
+          </a:prstGeom>
+          <a:noFill/>
+        </p:spPr>
+        <p:txBody>
+          <a:bodyPr wrap="square" lIns="0" rIns="0" tIns="0" bIns="0" anchor="t">
+            <a:spAutoFit/>
+          </a:bodyPr>
+          <a:lstStyle/>
+          <a:p>
+            <a:pPr algn="l"/>
+            <a:r>
+              <a:rPr sz="1400" b="0" i="1">
+                <a:solidFill>
+                  <a:srgbClr val="6E6E73"/>
+                </a:solidFill>
+                <a:latin typeface="Helvetica Neue"/>
+              </a:rPr>
+              <a:t>The Notetaker fills these in during the meeting and reads them back before we leave.</a:t>
+            </a:r>
+          </a:p>
+        </p:txBody>
+      </p:sp>
+      <p:sp>
+        <p:nvSpPr>
+          <p:cNvPr id="5" name="Rectangle 4"/>
+          <p:cNvSpPr/>
+          <p:nvPr/>
+        </p:nvSpPr>
+        <p:spPr>
+          <a:xfrm>
+            <a:off x="822960" y="2423160"/>
+            <a:ext cx="10543032" cy="384048"/>
+          </a:xfrm>
+          <a:prstGeom prst="rect">
+            <a:avLst/>
+          </a:prstGeom>
+          <a:solidFill>
+            <a:srgbClr val="0D7490"/>
+          </a:solidFill>
+          <a:ln>
+            <a:noFill/>
+          </a:ln>
+        </p:spPr>
+        <p:style>
+          <a:lnRef idx="1">
+            <a:schemeClr val="accent1"/>
+          </a:lnRef>
+          <a:fillRef idx="3">
+            <a:schemeClr val="accent1"/>
+          </a:fillRef>
+          <a:effectRef idx="2">
+            <a:schemeClr val="accent1"/>
+          </a:effectRef>
+          <a:fontRef idx="minor">
+            <a:schemeClr val="lt1"/>
+          </a:fontRef>
+        </p:style>
+        <p:txBody>
+          <a:bodyPr rtlCol="0" anchor="ctr"/>
+          <a:lstStyle/>
+          <a:p>
+            <a:pPr algn="ctr"/>
+          </a:p>
+        </p:txBody>
+      </p:sp>
+      <p:sp>
+        <p:nvSpPr>
+          <p:cNvPr id="6" name="TextBox 5"/>
+          <p:cNvSpPr txBox="1"/>
+          <p:nvPr/>
+        </p:nvSpPr>
+        <p:spPr>
+          <a:xfrm>
+            <a:off x="1024128" y="2459736"/>
+            <a:ext cx="5486400" cy="310896"/>
+          </a:xfrm>
+          <a:prstGeom prst="rect">
+            <a:avLst/>
+          </a:prstGeom>
+          <a:noFill/>
+        </p:spPr>
+        <p:txBody>
+          <a:bodyPr wrap="square" lIns="0" rIns="0" tIns="0" bIns="0" anchor="t">
+            <a:spAutoFit/>
+          </a:bodyPr>
+          <a:lstStyle/>
+          <a:p>
+            <a:pPr algn="l"/>
+            <a:r>
+              <a:rPr sz="1000" b="1" i="0" cap="all" spc="180">
+                <a:solidFill>
+                  <a:srgbClr val="FFFFFF"/>
+                </a:solidFill>
+                <a:latin typeface="Helvetica Neue"/>
+              </a:rPr>
+              <a:t>ITEM</a:t>
+            </a:r>
+          </a:p>
+        </p:txBody>
+      </p:sp>
+      <p:sp>
+        <p:nvSpPr>
+          <p:cNvPr id="7" name="TextBox 6"/>
+          <p:cNvSpPr txBox="1"/>
+          <p:nvPr/>
+        </p:nvSpPr>
+        <p:spPr>
+          <a:xfrm>
+            <a:off x="6784848" y="2459736"/>
+            <a:ext cx="2011680" cy="310896"/>
+          </a:xfrm>
+          <a:prstGeom prst="rect">
+            <a:avLst/>
+          </a:prstGeom>
+          <a:noFill/>
+        </p:spPr>
+        <p:txBody>
+          <a:bodyPr wrap="square" lIns="0" rIns="0" tIns="0" bIns="0" anchor="t">
+            <a:spAutoFit/>
+          </a:bodyPr>
+          <a:lstStyle/>
+          <a:p>
+            <a:pPr algn="l"/>
+            <a:r>
+              <a:rPr sz="1000" b="1" i="0" cap="all" spc="180">
+                <a:solidFill>
+                  <a:srgbClr val="FFFFFF"/>
+                </a:solidFill>
+                <a:latin typeface="Helvetica Neue"/>
+              </a:rPr>
+              <a:t>OWNER</a:t>
+            </a:r>
+          </a:p>
+        </p:txBody>
+      </p:sp>
+      <p:sp>
+        <p:nvSpPr>
+          <p:cNvPr id="8" name="TextBox 7"/>
+          <p:cNvSpPr txBox="1"/>
+          <p:nvPr/>
+        </p:nvSpPr>
+        <p:spPr>
+          <a:xfrm>
+            <a:off x="9070848" y="2459736"/>
+            <a:ext cx="2221992" cy="310896"/>
+          </a:xfrm>
+          <a:prstGeom prst="rect">
+            <a:avLst/>
+          </a:prstGeom>
+          <a:noFill/>
+        </p:spPr>
+        <p:txBody>
+          <a:bodyPr wrap="square" lIns="0" rIns="0" tIns="0" bIns="0" anchor="t">
+            <a:spAutoFit/>
+          </a:bodyPr>
+          <a:lstStyle/>
+          <a:p>
+            <a:pPr algn="l"/>
+            <a:r>
+              <a:rPr sz="1000" b="1" i="0" cap="all" spc="180">
+                <a:solidFill>
+                  <a:srgbClr val="FFFFFF"/>
+                </a:solidFill>
+                <a:latin typeface="Helvetica Neue"/>
+              </a:rPr>
+              <a:t>DUE</a:t>
+            </a:r>
+          </a:p>
+        </p:txBody>
+      </p:sp>
+      <p:cxnSp>
+        <p:nvCxnSpPr>
+          <p:cNvPr id="9" name="Connector 8"/>
+          <p:cNvCxnSpPr/>
+          <p:nvPr/>
+        </p:nvCxnSpPr>
+        <p:spPr>
+          <a:xfrm>
+            <a:off x="822960" y="3374136"/>
+            <a:ext cx="10543032" cy="0"/>
+          </a:xfrm>
+          <a:prstGeom prst="line">
+            <a:avLst/>
+          </a:prstGeom>
+          <a:ln w="6350">
+            <a:solidFill>
+              <a:srgbClr val="E3E3E6"/>
+            </a:solidFill>
+          </a:ln>
+        </p:spPr>
+        <p:style>
+          <a:lnRef idx="2">
+            <a:schemeClr val="accent1"/>
+          </a:lnRef>
+          <a:fillRef idx="0">
+            <a:schemeClr val="accent1"/>
+          </a:fillRef>
+          <a:effectRef idx="1">
+            <a:schemeClr val="accent1"/>
+          </a:effectRef>
+          <a:fontRef idx="minor">
+            <a:schemeClr val="tx1"/>
+          </a:fontRef>
+        </p:style>
+      </p:cxnSp>
+      <p:cxnSp>
+        <p:nvCxnSpPr>
+          <p:cNvPr id="10" name="Connector 9"/>
+          <p:cNvCxnSpPr/>
+          <p:nvPr/>
+        </p:nvCxnSpPr>
+        <p:spPr>
+          <a:xfrm>
+            <a:off x="6583680" y="2807208"/>
+            <a:ext cx="0" cy="566928"/>
+          </a:xfrm>
+          <a:prstGeom prst="line">
+            <a:avLst/>
+          </a:prstGeom>
+          <a:ln w="6350">
+            <a:solidFill>
+              <a:srgbClr val="E3E3E6"/>
+            </a:solidFill>
+          </a:ln>
+        </p:spPr>
+        <p:style>
+          <a:lnRef idx="2">
+            <a:schemeClr val="accent1"/>
+          </a:lnRef>
+          <a:fillRef idx="0">
+            <a:schemeClr val="accent1"/>
+          </a:fillRef>
+          <a:effectRef idx="1">
+            <a:schemeClr val="accent1"/>
+          </a:effectRef>
+          <a:fontRef idx="minor">
+            <a:schemeClr val="tx1"/>
+          </a:fontRef>
+        </p:style>
+      </p:cxnSp>
+      <p:cxnSp>
+        <p:nvCxnSpPr>
+          <p:cNvPr id="11" name="Connector 10"/>
+          <p:cNvCxnSpPr/>
+          <p:nvPr/>
+        </p:nvCxnSpPr>
+        <p:spPr>
+          <a:xfrm>
+            <a:off x="8869680" y="2807208"/>
+            <a:ext cx="0" cy="566928"/>
+          </a:xfrm>
+          <a:prstGeom prst="line">
+            <a:avLst/>
+          </a:prstGeom>
+          <a:ln w="6350">
+            <a:solidFill>
+              <a:srgbClr val="E3E3E6"/>
+            </a:solidFill>
+          </a:ln>
+        </p:spPr>
+        <p:style>
+          <a:lnRef idx="2">
+            <a:schemeClr val="accent1"/>
+          </a:lnRef>
+          <a:fillRef idx="0">
+            <a:schemeClr val="accent1"/>
+          </a:fillRef>
+          <a:effectRef idx="1">
+            <a:schemeClr val="accent1"/>
+          </a:effectRef>
+          <a:fontRef idx="minor">
+            <a:schemeClr val="tx1"/>
+          </a:fontRef>
+        </p:style>
+      </p:cxnSp>
+      <p:cxnSp>
+        <p:nvCxnSpPr>
+          <p:cNvPr id="12" name="Connector 11"/>
+          <p:cNvCxnSpPr/>
+          <p:nvPr/>
+        </p:nvCxnSpPr>
+        <p:spPr>
+          <a:xfrm>
+            <a:off x="1024128" y="3209544"/>
+            <a:ext cx="5358384" cy="0"/>
+          </a:xfrm>
+          <a:prstGeom prst="line">
+            <a:avLst/>
+          </a:prstGeom>
+          <a:ln w="4445">
+            <a:solidFill>
+              <a:srgbClr val="E3E3E6"/>
+            </a:solidFill>
+          </a:ln>
+        </p:spPr>
+        <p:style>
+          <a:lnRef idx="2">
+            <a:schemeClr val="accent1"/>
+          </a:lnRef>
+          <a:fillRef idx="0">
+            <a:schemeClr val="accent1"/>
+          </a:fillRef>
+          <a:effectRef idx="1">
+            <a:schemeClr val="accent1"/>
+          </a:effectRef>
+          <a:fontRef idx="minor">
+            <a:schemeClr val="tx1"/>
+          </a:fontRef>
+        </p:style>
+      </p:cxnSp>
+      <p:cxnSp>
+        <p:nvCxnSpPr>
+          <p:cNvPr id="13" name="Connector 12"/>
+          <p:cNvCxnSpPr/>
+          <p:nvPr/>
+        </p:nvCxnSpPr>
+        <p:spPr>
+          <a:xfrm>
+            <a:off x="6784848" y="3209544"/>
+            <a:ext cx="1883664" cy="0"/>
+          </a:xfrm>
+          <a:prstGeom prst="line">
+            <a:avLst/>
+          </a:prstGeom>
+          <a:ln w="4445">
+            <a:solidFill>
+              <a:srgbClr val="E3E3E6"/>
+            </a:solidFill>
+          </a:ln>
+        </p:spPr>
+        <p:style>
+          <a:lnRef idx="2">
+            <a:schemeClr val="accent1"/>
+          </a:lnRef>
+          <a:fillRef idx="0">
+            <a:schemeClr val="accent1"/>
+          </a:fillRef>
+          <a:effectRef idx="1">
+            <a:schemeClr val="accent1"/>
+          </a:effectRef>
+          <a:fontRef idx="minor">
+            <a:schemeClr val="tx1"/>
+          </a:fontRef>
+        </p:style>
+      </p:cxnSp>
+      <p:cxnSp>
+        <p:nvCxnSpPr>
+          <p:cNvPr id="14" name="Connector 13"/>
+          <p:cNvCxnSpPr/>
+          <p:nvPr/>
+        </p:nvCxnSpPr>
+        <p:spPr>
+          <a:xfrm>
+            <a:off x="9070848" y="3209544"/>
+            <a:ext cx="2093976" cy="0"/>
+          </a:xfrm>
+          <a:prstGeom prst="line">
+            <a:avLst/>
+          </a:prstGeom>
+          <a:ln w="4445">
+            <a:solidFill>
+              <a:srgbClr val="E3E3E6"/>
+            </a:solidFill>
+          </a:ln>
+        </p:spPr>
+        <p:style>
+          <a:lnRef idx="2">
+            <a:schemeClr val="accent1"/>
+          </a:lnRef>
+          <a:fillRef idx="0">
+            <a:schemeClr val="accent1"/>
+          </a:fillRef>
+          <a:effectRef idx="1">
+            <a:schemeClr val="accent1"/>
+          </a:effectRef>
+          <a:fontRef idx="minor">
+            <a:schemeClr val="tx1"/>
+          </a:fontRef>
+        </p:style>
+      </p:cxnSp>
+      <p:cxnSp>
+        <p:nvCxnSpPr>
+          <p:cNvPr id="15" name="Connector 14"/>
+          <p:cNvCxnSpPr/>
+          <p:nvPr/>
+        </p:nvCxnSpPr>
+        <p:spPr>
+          <a:xfrm>
+            <a:off x="822960" y="3941063"/>
+            <a:ext cx="10543032" cy="0"/>
+          </a:xfrm>
+          <a:prstGeom prst="line">
+            <a:avLst/>
+          </a:prstGeom>
+          <a:ln w="6350">
+            <a:solidFill>
+              <a:srgbClr val="E3E3E6"/>
+            </a:solidFill>
+          </a:ln>
+        </p:spPr>
+        <p:style>
+          <a:lnRef idx="2">
+            <a:schemeClr val="accent1"/>
+          </a:lnRef>
+          <a:fillRef idx="0">
+            <a:schemeClr val="accent1"/>
+          </a:fillRef>
+          <a:effectRef idx="1">
+            <a:schemeClr val="accent1"/>
+          </a:effectRef>
+          <a:fontRef idx="minor">
+            <a:schemeClr val="tx1"/>
+          </a:fontRef>
+        </p:style>
+      </p:cxnSp>
+      <p:cxnSp>
+        <p:nvCxnSpPr>
+          <p:cNvPr id="16" name="Connector 15"/>
+          <p:cNvCxnSpPr/>
+          <p:nvPr/>
+        </p:nvCxnSpPr>
+        <p:spPr>
+          <a:xfrm>
+            <a:off x="6583680" y="3374136"/>
+            <a:ext cx="0" cy="566927"/>
+          </a:xfrm>
+          <a:prstGeom prst="line">
+            <a:avLst/>
+          </a:prstGeom>
+          <a:ln w="6350">
+            <a:solidFill>
+              <a:srgbClr val="E3E3E6"/>
+            </a:solidFill>
+          </a:ln>
+        </p:spPr>
+        <p:style>
+          <a:lnRef idx="2">
+            <a:schemeClr val="accent1"/>
+          </a:lnRef>
+          <a:fillRef idx="0">
+            <a:schemeClr val="accent1"/>
+          </a:fillRef>
+          <a:effectRef idx="1">
+            <a:schemeClr val="accent1"/>
+          </a:effectRef>
+          <a:fontRef idx="minor">
+            <a:schemeClr val="tx1"/>
+          </a:fontRef>
+        </p:style>
+      </p:cxnSp>
+      <p:cxnSp>
+        <p:nvCxnSpPr>
+          <p:cNvPr id="17" name="Connector 16"/>
+          <p:cNvCxnSpPr/>
+          <p:nvPr/>
+        </p:nvCxnSpPr>
+        <p:spPr>
+          <a:xfrm>
+            <a:off x="8869680" y="3374136"/>
+            <a:ext cx="0" cy="566927"/>
+          </a:xfrm>
+          <a:prstGeom prst="line">
+            <a:avLst/>
+          </a:prstGeom>
+          <a:ln w="6350">
+            <a:solidFill>
+              <a:srgbClr val="E3E3E6"/>
+            </a:solidFill>
+          </a:ln>
+        </p:spPr>
+        <p:style>
+          <a:lnRef idx="2">
+            <a:schemeClr val="accent1"/>
+          </a:lnRef>
+          <a:fillRef idx="0">
+            <a:schemeClr val="accent1"/>
+          </a:fillRef>
+          <a:effectRef idx="1">
+            <a:schemeClr val="accent1"/>
+          </a:effectRef>
+          <a:fontRef idx="minor">
+            <a:schemeClr val="tx1"/>
+          </a:fontRef>
+        </p:style>
+      </p:cxnSp>
+      <p:cxnSp>
+        <p:nvCxnSpPr>
+          <p:cNvPr id="18" name="Connector 17"/>
+          <p:cNvCxnSpPr/>
+          <p:nvPr/>
+        </p:nvCxnSpPr>
+        <p:spPr>
+          <a:xfrm>
+            <a:off x="1024128" y="3776472"/>
+            <a:ext cx="5358384" cy="0"/>
+          </a:xfrm>
+          <a:prstGeom prst="line">
+            <a:avLst/>
+          </a:prstGeom>
+          <a:ln w="4445">
+            <a:solidFill>
+              <a:srgbClr val="E3E3E6"/>
+            </a:solidFill>
+          </a:ln>
+        </p:spPr>
+        <p:style>
+          <a:lnRef idx="2">
+            <a:schemeClr val="accent1"/>
+          </a:lnRef>
+          <a:fillRef idx="0">
+            <a:schemeClr val="accent1"/>
+          </a:fillRef>
+          <a:effectRef idx="1">
+            <a:schemeClr val="accent1"/>
+          </a:effectRef>
+          <a:fontRef idx="minor">
+            <a:schemeClr val="tx1"/>
+          </a:fontRef>
+        </p:style>
+      </p:cxnSp>
+      <p:cxnSp>
+        <p:nvCxnSpPr>
+          <p:cNvPr id="19" name="Connector 18"/>
+          <p:cNvCxnSpPr/>
+          <p:nvPr/>
+        </p:nvCxnSpPr>
+        <p:spPr>
+          <a:xfrm>
+            <a:off x="6784848" y="3776472"/>
+            <a:ext cx="1883664" cy="0"/>
+          </a:xfrm>
+          <a:prstGeom prst="line">
+            <a:avLst/>
+          </a:prstGeom>
+          <a:ln w="4445">
+            <a:solidFill>
+              <a:srgbClr val="E3E3E6"/>
+            </a:solidFill>
+          </a:ln>
+        </p:spPr>
+        <p:style>
+          <a:lnRef idx="2">
+            <a:schemeClr val="accent1"/>
+          </a:lnRef>
+          <a:fillRef idx="0">
+            <a:schemeClr val="accent1"/>
+          </a:fillRef>
+          <a:effectRef idx="1">
+            <a:schemeClr val="accent1"/>
+          </a:effectRef>
+          <a:fontRef idx="minor">
+            <a:schemeClr val="tx1"/>
+          </a:fontRef>
+        </p:style>
+      </p:cxnSp>
+      <p:cxnSp>
+        <p:nvCxnSpPr>
+          <p:cNvPr id="20" name="Connector 19"/>
+          <p:cNvCxnSpPr/>
+          <p:nvPr/>
+        </p:nvCxnSpPr>
+        <p:spPr>
+          <a:xfrm>
+            <a:off x="9070848" y="3776472"/>
+            <a:ext cx="2093976" cy="0"/>
+          </a:xfrm>
+          <a:prstGeom prst="line">
+            <a:avLst/>
+          </a:prstGeom>
+          <a:ln w="4445">
+            <a:solidFill>
+              <a:srgbClr val="E3E3E6"/>
+            </a:solidFill>
+          </a:ln>
+        </p:spPr>
+        <p:style>
+          <a:lnRef idx="2">
+            <a:schemeClr val="accent1"/>
+          </a:lnRef>
+          <a:fillRef idx="0">
+            <a:schemeClr val="accent1"/>
+          </a:fillRef>
+          <a:effectRef idx="1">
+            <a:schemeClr val="accent1"/>
+          </a:effectRef>
+          <a:fontRef idx="minor">
+            <a:schemeClr val="tx1"/>
+          </a:fontRef>
+        </p:style>
+      </p:cxnSp>
+      <p:cxnSp>
+        <p:nvCxnSpPr>
+          <p:cNvPr id="21" name="Connector 20"/>
+          <p:cNvCxnSpPr/>
+          <p:nvPr/>
+        </p:nvCxnSpPr>
+        <p:spPr>
+          <a:xfrm>
+            <a:off x="822960" y="4507992"/>
+            <a:ext cx="10543032" cy="0"/>
+          </a:xfrm>
+          <a:prstGeom prst="line">
+            <a:avLst/>
+          </a:prstGeom>
+          <a:ln w="6350">
+            <a:solidFill>
+              <a:srgbClr val="E3E3E6"/>
+            </a:solidFill>
+          </a:ln>
+        </p:spPr>
+        <p:style>
+          <a:lnRef idx="2">
+            <a:schemeClr val="accent1"/>
+          </a:lnRef>
+          <a:fillRef idx="0">
+            <a:schemeClr val="accent1"/>
+          </a:fillRef>
+          <a:effectRef idx="1">
+            <a:schemeClr val="accent1"/>
+          </a:effectRef>
+          <a:fontRef idx="minor">
+            <a:schemeClr val="tx1"/>
+          </a:fontRef>
+        </p:style>
+      </p:cxnSp>
+      <p:cxnSp>
+        <p:nvCxnSpPr>
+          <p:cNvPr id="22" name="Connector 21"/>
+          <p:cNvCxnSpPr/>
+          <p:nvPr/>
+        </p:nvCxnSpPr>
+        <p:spPr>
+          <a:xfrm>
+            <a:off x="6583680" y="3941063"/>
+            <a:ext cx="0" cy="566929"/>
+          </a:xfrm>
+          <a:prstGeom prst="line">
+            <a:avLst/>
+          </a:prstGeom>
+          <a:ln w="6350">
+            <a:solidFill>
+              <a:srgbClr val="E3E3E6"/>
+            </a:solidFill>
+          </a:ln>
+        </p:spPr>
+        <p:style>
+          <a:lnRef idx="2">
+            <a:schemeClr val="accent1"/>
+          </a:lnRef>
+          <a:fillRef idx="0">
+            <a:schemeClr val="accent1"/>
+          </a:fillRef>
+          <a:effectRef idx="1">
+            <a:schemeClr val="accent1"/>
+          </a:effectRef>
+          <a:fontRef idx="minor">
+            <a:schemeClr val="tx1"/>
+          </a:fontRef>
+        </p:style>
+      </p:cxnSp>
+      <p:cxnSp>
+        <p:nvCxnSpPr>
+          <p:cNvPr id="23" name="Connector 22"/>
+          <p:cNvCxnSpPr/>
+          <p:nvPr/>
+        </p:nvCxnSpPr>
+        <p:spPr>
+          <a:xfrm>
+            <a:off x="8869680" y="3941063"/>
+            <a:ext cx="0" cy="566929"/>
+          </a:xfrm>
+          <a:prstGeom prst="line">
+            <a:avLst/>
+          </a:prstGeom>
+          <a:ln w="6350">
+            <a:solidFill>
+              <a:srgbClr val="E3E3E6"/>
+            </a:solidFill>
+          </a:ln>
+        </p:spPr>
+        <p:style>
+          <a:lnRef idx="2">
+            <a:schemeClr val="accent1"/>
+          </a:lnRef>
+          <a:fillRef idx="0">
+            <a:schemeClr val="accent1"/>
+          </a:fillRef>
+          <a:effectRef idx="1">
+            <a:schemeClr val="accent1"/>
+          </a:effectRef>
+          <a:fontRef idx="minor">
+            <a:schemeClr val="tx1"/>
+          </a:fontRef>
+        </p:style>
+      </p:cxnSp>
+      <p:cxnSp>
+        <p:nvCxnSpPr>
+          <p:cNvPr id="24" name="Connector 23"/>
+          <p:cNvCxnSpPr/>
+          <p:nvPr/>
+        </p:nvCxnSpPr>
+        <p:spPr>
+          <a:xfrm>
+            <a:off x="1024128" y="4343400"/>
+            <a:ext cx="5358384" cy="0"/>
+          </a:xfrm>
+          <a:prstGeom prst="line">
+            <a:avLst/>
+          </a:prstGeom>
+          <a:ln w="4445">
+            <a:solidFill>
+              <a:srgbClr val="E3E3E6"/>
+            </a:solidFill>
+          </a:ln>
+        </p:spPr>
+        <p:style>
+          <a:lnRef idx="2">
+            <a:schemeClr val="accent1"/>
+          </a:lnRef>
+          <a:fillRef idx="0">
+            <a:schemeClr val="accent1"/>
+          </a:fillRef>
+          <a:effectRef idx="1">
+            <a:schemeClr val="accent1"/>
+          </a:effectRef>
+          <a:fontRef idx="minor">
+            <a:schemeClr val="tx1"/>
+          </a:fontRef>
+        </p:style>
+      </p:cxnSp>
+      <p:cxnSp>
+        <p:nvCxnSpPr>
+          <p:cNvPr id="25" name="Connector 24"/>
+          <p:cNvCxnSpPr/>
+          <p:nvPr/>
+        </p:nvCxnSpPr>
+        <p:spPr>
+          <a:xfrm>
+            <a:off x="6784848" y="4343400"/>
+            <a:ext cx="1883664" cy="0"/>
+          </a:xfrm>
+          <a:prstGeom prst="line">
+            <a:avLst/>
+          </a:prstGeom>
+          <a:ln w="4445">
+            <a:solidFill>
+              <a:srgbClr val="E3E3E6"/>
+            </a:solidFill>
+          </a:ln>
+        </p:spPr>
+        <p:style>
+          <a:lnRef idx="2">
+            <a:schemeClr val="accent1"/>
+          </a:lnRef>
+          <a:fillRef idx="0">
+            <a:schemeClr val="accent1"/>
+          </a:fillRef>
+          <a:effectRef idx="1">
+            <a:schemeClr val="accent1"/>
+          </a:effectRef>
+          <a:fontRef idx="minor">
+            <a:schemeClr val="tx1"/>
+          </a:fontRef>
+        </p:style>
+      </p:cxnSp>
+      <p:cxnSp>
+        <p:nvCxnSpPr>
+          <p:cNvPr id="26" name="Connector 25"/>
+          <p:cNvCxnSpPr/>
+          <p:nvPr/>
+        </p:nvCxnSpPr>
+        <p:spPr>
+          <a:xfrm>
+            <a:off x="9070848" y="4343400"/>
+            <a:ext cx="2093976" cy="0"/>
+          </a:xfrm>
+          <a:prstGeom prst="line">
+            <a:avLst/>
+          </a:prstGeom>
+          <a:ln w="4445">
+            <a:solidFill>
+              <a:srgbClr val="E3E3E6"/>
+            </a:solidFill>
+          </a:ln>
+        </p:spPr>
+        <p:style>
+          <a:lnRef idx="2">
+            <a:schemeClr val="accent1"/>
+          </a:lnRef>
+          <a:fillRef idx="0">
+            <a:schemeClr val="accent1"/>
+          </a:fillRef>
+          <a:effectRef idx="1">
+            <a:schemeClr val="accent1"/>
+          </a:effectRef>
+          <a:fontRef idx="minor">
+            <a:schemeClr val="tx1"/>
+          </a:fontRef>
+        </p:style>
+      </p:cxnSp>
+      <p:cxnSp>
+        <p:nvCxnSpPr>
+          <p:cNvPr id="27" name="Connector 26"/>
+          <p:cNvCxnSpPr/>
+          <p:nvPr/>
+        </p:nvCxnSpPr>
+        <p:spPr>
+          <a:xfrm>
+            <a:off x="822960" y="5074920"/>
+            <a:ext cx="10543032" cy="0"/>
+          </a:xfrm>
+          <a:prstGeom prst="line">
+            <a:avLst/>
+          </a:prstGeom>
+          <a:ln w="6350">
+            <a:solidFill>
+              <a:srgbClr val="E3E3E6"/>
+            </a:solidFill>
+          </a:ln>
+        </p:spPr>
+        <p:style>
+          <a:lnRef idx="2">
+            <a:schemeClr val="accent1"/>
+          </a:lnRef>
+          <a:fillRef idx="0">
+            <a:schemeClr val="accent1"/>
+          </a:fillRef>
+          <a:effectRef idx="1">
+            <a:schemeClr val="accent1"/>
+          </a:effectRef>
+          <a:fontRef idx="minor">
+            <a:schemeClr val="tx1"/>
+          </a:fontRef>
+        </p:style>
+      </p:cxnSp>
+      <p:cxnSp>
+        <p:nvCxnSpPr>
+          <p:cNvPr id="28" name="Connector 27"/>
+          <p:cNvCxnSpPr/>
+          <p:nvPr/>
+        </p:nvCxnSpPr>
+        <p:spPr>
+          <a:xfrm>
+            <a:off x="6583680" y="4507992"/>
+            <a:ext cx="0" cy="566928"/>
+          </a:xfrm>
+          <a:prstGeom prst="line">
+            <a:avLst/>
+          </a:prstGeom>
+          <a:ln w="6350">
+            <a:solidFill>
+              <a:srgbClr val="E3E3E6"/>
+            </a:solidFill>
+          </a:ln>
+        </p:spPr>
+        <p:style>
+          <a:lnRef idx="2">
+            <a:schemeClr val="accent1"/>
+          </a:lnRef>
+          <a:fillRef idx="0">
+            <a:schemeClr val="accent1"/>
+          </a:fillRef>
+          <a:effectRef idx="1">
+            <a:schemeClr val="accent1"/>
+          </a:effectRef>
+          <a:fontRef idx="minor">
+            <a:schemeClr val="tx1"/>
+          </a:fontRef>
+        </p:style>
+      </p:cxnSp>
+      <p:cxnSp>
+        <p:nvCxnSpPr>
+          <p:cNvPr id="29" name="Connector 28"/>
+          <p:cNvCxnSpPr/>
+          <p:nvPr/>
+        </p:nvCxnSpPr>
+        <p:spPr>
+          <a:xfrm>
+            <a:off x="8869680" y="4507992"/>
+            <a:ext cx="0" cy="566928"/>
+          </a:xfrm>
+          <a:prstGeom prst="line">
+            <a:avLst/>
+          </a:prstGeom>
+          <a:ln w="6350">
+            <a:solidFill>
+              <a:srgbClr val="E3E3E6"/>
+            </a:solidFill>
+          </a:ln>
+        </p:spPr>
+        <p:style>
+          <a:lnRef idx="2">
+            <a:schemeClr val="accent1"/>
+          </a:lnRef>
+          <a:fillRef idx="0">
+            <a:schemeClr val="accent1"/>
+          </a:fillRef>
+          <a:effectRef idx="1">
+            <a:schemeClr val="accent1"/>
+          </a:effectRef>
+          <a:fontRef idx="minor">
+            <a:schemeClr val="tx1"/>
+          </a:fontRef>
+        </p:style>
+      </p:cxnSp>
+      <p:cxnSp>
+        <p:nvCxnSpPr>
+          <p:cNvPr id="30" name="Connector 29"/>
+          <p:cNvCxnSpPr/>
+          <p:nvPr/>
+        </p:nvCxnSpPr>
+        <p:spPr>
+          <a:xfrm>
+            <a:off x="1024128" y="4910328"/>
+            <a:ext cx="5358384" cy="0"/>
+          </a:xfrm>
+          <a:prstGeom prst="line">
+            <a:avLst/>
+          </a:prstGeom>
+          <a:ln w="4445">
+            <a:solidFill>
+              <a:srgbClr val="E3E3E6"/>
+            </a:solidFill>
+          </a:ln>
+        </p:spPr>
+        <p:style>
+          <a:lnRef idx="2">
+            <a:schemeClr val="accent1"/>
+          </a:lnRef>
+          <a:fillRef idx="0">
+            <a:schemeClr val="accent1"/>
+          </a:fillRef>
+          <a:effectRef idx="1">
+            <a:schemeClr val="accent1"/>
+          </a:effectRef>
+          <a:fontRef idx="minor">
+            <a:schemeClr val="tx1"/>
+          </a:fontRef>
+        </p:style>
+      </p:cxnSp>
+      <p:cxnSp>
+        <p:nvCxnSpPr>
+          <p:cNvPr id="31" name="Connector 30"/>
+          <p:cNvCxnSpPr/>
+          <p:nvPr/>
+        </p:nvCxnSpPr>
+        <p:spPr>
+          <a:xfrm>
+            <a:off x="6784848" y="4910328"/>
+            <a:ext cx="1883664" cy="0"/>
+          </a:xfrm>
+          <a:prstGeom prst="line">
+            <a:avLst/>
+          </a:prstGeom>
+          <a:ln w="4445">
+            <a:solidFill>
+              <a:srgbClr val="E3E3E6"/>
+            </a:solidFill>
+          </a:ln>
+        </p:spPr>
+        <p:style>
+          <a:lnRef idx="2">
+            <a:schemeClr val="accent1"/>
+          </a:lnRef>
+          <a:fillRef idx="0">
+            <a:schemeClr val="accent1"/>
+          </a:fillRef>
+          <a:effectRef idx="1">
+            <a:schemeClr val="accent1"/>
+          </a:effectRef>
+          <a:fontRef idx="minor">
+            <a:schemeClr val="tx1"/>
+          </a:fontRef>
+        </p:style>
+      </p:cxnSp>
+      <p:cxnSp>
+        <p:nvCxnSpPr>
+          <p:cNvPr id="32" name="Connector 31"/>
+          <p:cNvCxnSpPr/>
+          <p:nvPr/>
+        </p:nvCxnSpPr>
+        <p:spPr>
+          <a:xfrm>
+            <a:off x="9070848" y="4910328"/>
+            <a:ext cx="2093976" cy="0"/>
+          </a:xfrm>
+          <a:prstGeom prst="line">
+            <a:avLst/>
+          </a:prstGeom>
+          <a:ln w="4445">
+            <a:solidFill>
+              <a:srgbClr val="E3E3E6"/>
+            </a:solidFill>
+          </a:ln>
+        </p:spPr>
+        <p:style>
+          <a:lnRef idx="2">
+            <a:schemeClr val="accent1"/>
+          </a:lnRef>
+          <a:fillRef idx="0">
+            <a:schemeClr val="accent1"/>
+          </a:fillRef>
+          <a:effectRef idx="1">
+            <a:schemeClr val="accent1"/>
+          </a:effectRef>
+          <a:fontRef idx="minor">
+            <a:schemeClr val="tx1"/>
+          </a:fontRef>
+        </p:style>
+      </p:cxnSp>
+      <p:cxnSp>
+        <p:nvCxnSpPr>
+          <p:cNvPr id="33" name="Connector 32"/>
+          <p:cNvCxnSpPr/>
+          <p:nvPr/>
+        </p:nvCxnSpPr>
+        <p:spPr>
+          <a:xfrm>
+            <a:off x="822960" y="5641848"/>
+            <a:ext cx="10543032" cy="0"/>
+          </a:xfrm>
+          <a:prstGeom prst="line">
+            <a:avLst/>
+          </a:prstGeom>
+          <a:ln w="6350">
+            <a:solidFill>
+              <a:srgbClr val="E3E3E6"/>
+            </a:solidFill>
+          </a:ln>
+        </p:spPr>
+        <p:style>
+          <a:lnRef idx="2">
+            <a:schemeClr val="accent1"/>
+          </a:lnRef>
+          <a:fillRef idx="0">
+            <a:schemeClr val="accent1"/>
+          </a:fillRef>
+          <a:effectRef idx="1">
+            <a:schemeClr val="accent1"/>
+          </a:effectRef>
+          <a:fontRef idx="minor">
+            <a:schemeClr val="tx1"/>
+          </a:fontRef>
+        </p:style>
+      </p:cxnSp>
+      <p:cxnSp>
+        <p:nvCxnSpPr>
+          <p:cNvPr id="34" name="Connector 33"/>
+          <p:cNvCxnSpPr/>
+          <p:nvPr/>
+        </p:nvCxnSpPr>
+        <p:spPr>
+          <a:xfrm>
+            <a:off x="6583680" y="5074920"/>
+            <a:ext cx="0" cy="566928"/>
+          </a:xfrm>
+          <a:prstGeom prst="line">
+            <a:avLst/>
+          </a:prstGeom>
+          <a:ln w="6350">
+            <a:solidFill>
+              <a:srgbClr val="E3E3E6"/>
+            </a:solidFill>
+          </a:ln>
+        </p:spPr>
+        <p:style>
+          <a:lnRef idx="2">
+            <a:schemeClr val="accent1"/>
+          </a:lnRef>
+          <a:fillRef idx="0">
+            <a:schemeClr val="accent1"/>
+          </a:fillRef>
+          <a:effectRef idx="1">
+            <a:schemeClr val="accent1"/>
+          </a:effectRef>
+          <a:fontRef idx="minor">
+            <a:schemeClr val="tx1"/>
+          </a:fontRef>
+        </p:style>
+      </p:cxnSp>
+      <p:cxnSp>
+        <p:nvCxnSpPr>
+          <p:cNvPr id="35" name="Connector 34"/>
+          <p:cNvCxnSpPr/>
+          <p:nvPr/>
+        </p:nvCxnSpPr>
+        <p:spPr>
+          <a:xfrm>
+            <a:off x="8869680" y="5074920"/>
+            <a:ext cx="0" cy="566928"/>
+          </a:xfrm>
+          <a:prstGeom prst="line">
+            <a:avLst/>
+          </a:prstGeom>
+          <a:ln w="6350">
+            <a:solidFill>
+              <a:srgbClr val="E3E3E6"/>
+            </a:solidFill>
+          </a:ln>
+        </p:spPr>
+        <p:style>
+          <a:lnRef idx="2">
+            <a:schemeClr val="accent1"/>
+          </a:lnRef>
+          <a:fillRef idx="0">
+            <a:schemeClr val="accent1"/>
+          </a:fillRef>
+          <a:effectRef idx="1">
+            <a:schemeClr val="accent1"/>
+          </a:effectRef>
+          <a:fontRef idx="minor">
+            <a:schemeClr val="tx1"/>
+          </a:fontRef>
+        </p:style>
+      </p:cxnSp>
+      <p:cxnSp>
+        <p:nvCxnSpPr>
+          <p:cNvPr id="36" name="Connector 35"/>
+          <p:cNvCxnSpPr/>
+          <p:nvPr/>
+        </p:nvCxnSpPr>
+        <p:spPr>
+          <a:xfrm>
+            <a:off x="1024128" y="5477256"/>
+            <a:ext cx="5358384" cy="0"/>
+          </a:xfrm>
+          <a:prstGeom prst="line">
+            <a:avLst/>
+          </a:prstGeom>
+          <a:ln w="4445">
+            <a:solidFill>
+              <a:srgbClr val="E3E3E6"/>
+            </a:solidFill>
+          </a:ln>
+        </p:spPr>
+        <p:style>
+          <a:lnRef idx="2">
+            <a:schemeClr val="accent1"/>
+          </a:lnRef>
+          <a:fillRef idx="0">
+            <a:schemeClr val="accent1"/>
+          </a:fillRef>
+          <a:effectRef idx="1">
+            <a:schemeClr val="accent1"/>
+          </a:effectRef>
+          <a:fontRef idx="minor">
+            <a:schemeClr val="tx1"/>
+          </a:fontRef>
+        </p:style>
+      </p:cxnSp>
+      <p:cxnSp>
+        <p:nvCxnSpPr>
+          <p:cNvPr id="37" name="Connector 36"/>
+          <p:cNvCxnSpPr/>
+          <p:nvPr/>
+        </p:nvCxnSpPr>
+        <p:spPr>
+          <a:xfrm>
+            <a:off x="6784848" y="5477256"/>
+            <a:ext cx="1883664" cy="0"/>
+          </a:xfrm>
+          <a:prstGeom prst="line">
+            <a:avLst/>
+          </a:prstGeom>
+          <a:ln w="4445">
+            <a:solidFill>
+              <a:srgbClr val="E3E3E6"/>
+            </a:solidFill>
+          </a:ln>
+        </p:spPr>
+        <p:style>
+          <a:lnRef idx="2">
+            <a:schemeClr val="accent1"/>
+          </a:lnRef>
+          <a:fillRef idx="0">
+            <a:schemeClr val="accent1"/>
+          </a:fillRef>
+          <a:effectRef idx="1">
+            <a:schemeClr val="accent1"/>
+          </a:effectRef>
+          <a:fontRef idx="minor">
+            <a:schemeClr val="tx1"/>
+          </a:fontRef>
+        </p:style>
+      </p:cxnSp>
+      <p:cxnSp>
+        <p:nvCxnSpPr>
+          <p:cNvPr id="38" name="Connector 37"/>
+          <p:cNvCxnSpPr/>
+          <p:nvPr/>
+        </p:nvCxnSpPr>
+        <p:spPr>
+          <a:xfrm>
+            <a:off x="9070848" y="5477256"/>
+            <a:ext cx="2093976" cy="0"/>
+          </a:xfrm>
+          <a:prstGeom prst="line">
+            <a:avLst/>
+          </a:prstGeom>
+          <a:ln w="4445">
+            <a:solidFill>
+              <a:srgbClr val="E3E3E6"/>
+            </a:solidFill>
+          </a:ln>
+        </p:spPr>
+        <p:style>
+          <a:lnRef idx="2">
+            <a:schemeClr val="accent1"/>
+          </a:lnRef>
+          <a:fillRef idx="0">
+            <a:schemeClr val="accent1"/>
+          </a:fillRef>
+          <a:effectRef idx="1">
+            <a:schemeClr val="accent1"/>
+          </a:effectRef>
+          <a:fontRef idx="minor">
+            <a:schemeClr val="tx1"/>
+          </a:fontRef>
+        </p:style>
+      </p:cxnSp>
+      <p:cxnSp>
+        <p:nvCxnSpPr>
+          <p:cNvPr id="39" name="Connector 38"/>
+          <p:cNvCxnSpPr/>
+          <p:nvPr/>
+        </p:nvCxnSpPr>
+        <p:spPr>
+          <a:xfrm>
+            <a:off x="822960" y="6437376"/>
+            <a:ext cx="10543032" cy="0"/>
+          </a:xfrm>
+          <a:prstGeom prst="line">
+            <a:avLst/>
+          </a:prstGeom>
+          <a:ln w="9525">
+            <a:solidFill>
+              <a:srgbClr val="E3E3E6"/>
+            </a:solidFill>
+          </a:ln>
+        </p:spPr>
+        <p:style>
+          <a:lnRef idx="2">
+            <a:schemeClr val="accent1"/>
+          </a:lnRef>
+          <a:fillRef idx="0">
+            <a:schemeClr val="accent1"/>
+          </a:fillRef>
+          <a:effectRef idx="1">
+            <a:schemeClr val="accent1"/>
+          </a:effectRef>
+          <a:fontRef idx="minor">
+            <a:schemeClr val="tx1"/>
+          </a:fontRef>
+        </p:style>
+      </p:cxnSp>
+      <p:sp>
+        <p:nvSpPr>
+          <p:cNvPr id="40" name="TextBox 39"/>
+          <p:cNvSpPr txBox="1"/>
+          <p:nvPr/>
+        </p:nvSpPr>
+        <p:spPr>
+          <a:xfrm>
+            <a:off x="822960" y="6473952"/>
+            <a:ext cx="5486400" cy="274320"/>
+          </a:xfrm>
+          <a:prstGeom prst="rect">
+            <a:avLst/>
+          </a:prstGeom>
+          <a:noFill/>
+        </p:spPr>
+        <p:txBody>
+          <a:bodyPr wrap="square" lIns="0" rIns="0" tIns="0" bIns="0" anchor="t">
+            <a:spAutoFit/>
+          </a:bodyPr>
+          <a:lstStyle/>
+          <a:p>
+            <a:pPr algn="l"/>
+            <a:r>
+              <a:rPr sz="750" b="1" i="0" cap="all" spc="180">
+                <a:solidFill>
+                  <a:srgbClr val="86868B"/>
+                </a:solidFill>
+                <a:latin typeface="Helvetica Neue"/>
+              </a:rPr>
+              <a:t>SAY WATT ROBOTICS  ·  ROV TEAM</a:t>
+            </a:r>
+          </a:p>
+        </p:txBody>
+      </p:sp>
+      <p:sp>
+        <p:nvSpPr>
+          <p:cNvPr id="41" name="TextBox 40"/>
+          <p:cNvSpPr txBox="1"/>
+          <p:nvPr/>
+        </p:nvSpPr>
+        <p:spPr>
+          <a:xfrm>
+            <a:off x="5879592" y="6473952"/>
+            <a:ext cx="5486400" cy="274320"/>
+          </a:xfrm>
+          <a:prstGeom prst="rect">
+            <a:avLst/>
+          </a:prstGeom>
+          <a:noFill/>
+        </p:spPr>
+        <p:txBody>
+          <a:bodyPr wrap="square" lIns="0" rIns="0" tIns="0" bIns="0" anchor="t">
+            <a:spAutoFit/>
+          </a:bodyPr>
+          <a:lstStyle/>
+          <a:p>
+            <a:pPr algn="r"/>
+            <a:r>
+              <a:rPr sz="750" b="1" i="0" cap="all" spc="180">
+                <a:solidFill>
+                  <a:srgbClr val="86868B"/>
+                </a:solidFill>
+                <a:latin typeface="Helvetica Neue"/>
+              </a:rPr>
+              <a:t>WEEK 1 — KICKOFF   ·   27 / 29</a:t>
+            </a:r>
+          </a:p>
+        </p:txBody>
+      </p:sp>
+    </p:spTree>
+  </p:cSld>
+  <p:clrMapOvr>
+    <a:masterClrMapping/>
+  </p:clrMapOvr>
+</p:sld>
+</file>
+
+<file path=ppt/slides/slide29.xml><?xml version="1.0" encoding="utf-8"?>
+<p:sld xmlns:a="http://schemas.openxmlformats.org/drawingml/2006/main" xmlns:p="http://schemas.openxmlformats.org/presentationml/2006/main" xmlns:r="http://schemas.openxmlformats.org/officeDocument/2006/relationships">
+  <p:cSld>
+    <p:spTree>
+      <p:nvGrpSpPr>
+        <p:cNvPr id="1" name=""/>
+        <p:cNvGrpSpPr/>
+        <p:nvPr/>
+      </p:nvGrpSpPr>
+      <p:grpSpPr/>
+      <p:sp>
+        <p:nvSpPr>
+          <p:cNvPr id="2" name="TextBox 1"/>
+          <p:cNvSpPr txBox="1"/>
+          <p:nvPr/>
+        </p:nvSpPr>
+        <p:spPr>
+          <a:xfrm>
+            <a:off x="822960" y="530352"/>
+            <a:ext cx="10515600" cy="292608"/>
+          </a:xfrm>
+          <a:prstGeom prst="rect">
+            <a:avLst/>
+          </a:prstGeom>
+          <a:noFill/>
+        </p:spPr>
+        <p:txBody>
+          <a:bodyPr wrap="square" lIns="0" rIns="0" tIns="0" bIns="0" anchor="t">
+            <a:spAutoFit/>
+          </a:bodyPr>
+          <a:lstStyle/>
+          <a:p>
+            <a:pPr algn="l"/>
+            <a:r>
+              <a:rPr sz="1200" b="1" i="0" cap="all" spc="180">
+                <a:solidFill>
+                  <a:srgbClr val="0D7490"/>
+                </a:solidFill>
+                <a:latin typeface="Helvetica Neue"/>
+              </a:rPr>
+              <a:t>BEFORE WE LEAVE</a:t>
+            </a:r>
+          </a:p>
+        </p:txBody>
+      </p:sp>
+      <p:sp>
+        <p:nvSpPr>
+          <p:cNvPr id="3" name="TextBox 2"/>
+          <p:cNvSpPr txBox="1"/>
+          <p:nvPr/>
+        </p:nvSpPr>
+        <p:spPr>
+          <a:xfrm>
+            <a:off x="804672" y="822960"/>
+            <a:ext cx="10515600" cy="868680"/>
+          </a:xfrm>
+          <a:prstGeom prst="rect">
+            <a:avLst/>
+          </a:prstGeom>
+          <a:noFill/>
+        </p:spPr>
+        <p:txBody>
+          <a:bodyPr wrap="square" lIns="0" rIns="0" tIns="0" bIns="0" anchor="t">
+            <a:spAutoFit/>
+          </a:bodyPr>
+          <a:lstStyle/>
+          <a:p>
+            <a:pPr algn="l">
+              <a:lnSpc>
+                <a:spcPct val="105000"/>
+              </a:lnSpc>
+            </a:pPr>
+            <a:r>
+              <a:rPr sz="3000" b="1" i="0">
+                <a:solidFill>
+                  <a:srgbClr val="1D1D1F"/>
+                </a:solidFill>
+                <a:latin typeface="Helvetica Neue"/>
+              </a:rPr>
+              <a:t>Tools accounted for. Shop reset.</a:t>
+            </a:r>
+          </a:p>
+        </p:txBody>
+      </p:sp>
+      <p:sp>
+        <p:nvSpPr>
+          <p:cNvPr id="4" name="TextBox 3"/>
+          <p:cNvSpPr txBox="1"/>
+          <p:nvPr/>
+        </p:nvSpPr>
+        <p:spPr>
+          <a:xfrm>
+            <a:off x="822960" y="1700784"/>
+            <a:ext cx="10515600" cy="457200"/>
+          </a:xfrm>
+          <a:prstGeom prst="rect">
+            <a:avLst/>
+          </a:prstGeom>
+          <a:noFill/>
+        </p:spPr>
+        <p:txBody>
+          <a:bodyPr wrap="square" lIns="0" rIns="0" tIns="0" bIns="0" anchor="t">
+            <a:spAutoFit/>
+          </a:bodyPr>
+          <a:lstStyle/>
+          <a:p>
+            <a:pPr algn="l"/>
+            <a:r>
+              <a:rPr sz="1400" b="0" i="1">
+                <a:solidFill>
+                  <a:srgbClr val="6E6E73"/>
+                </a:solidFill>
+                <a:latin typeface="Helvetica Neue"/>
+              </a:rPr>
+              <a:t>We do this together, every meeting. No exceptions — the Tool Steward leads.</a:t>
+            </a:r>
+          </a:p>
+        </p:txBody>
+      </p:sp>
+      <p:sp>
+        <p:nvSpPr>
+          <p:cNvPr id="5" name="Rectangle 4"/>
+          <p:cNvSpPr/>
+          <p:nvPr/>
+        </p:nvSpPr>
+        <p:spPr>
+          <a:xfrm>
+            <a:off x="822960" y="2423160"/>
+            <a:ext cx="310896" cy="310896"/>
+          </a:xfrm>
+          <a:prstGeom prst="rect">
+            <a:avLst/>
+          </a:prstGeom>
+          <a:solidFill>
+            <a:srgbClr val="FFFFFF"/>
+          </a:solidFill>
+          <a:ln w="12700">
+            <a:solidFill>
+              <a:srgbClr val="86868B"/>
+            </a:solidFill>
+          </a:ln>
+        </p:spPr>
+        <p:style>
+          <a:lnRef idx="1">
+            <a:schemeClr val="accent1"/>
+          </a:lnRef>
+          <a:fillRef idx="3">
+            <a:schemeClr val="accent1"/>
+          </a:fillRef>
+          <a:effectRef idx="2">
+            <a:schemeClr val="accent1"/>
+          </a:effectRef>
+          <a:fontRef idx="minor">
+            <a:schemeClr val="lt1"/>
+          </a:fontRef>
+        </p:style>
+        <p:txBody>
+          <a:bodyPr rtlCol="0" anchor="ctr"/>
+          <a:lstStyle/>
+          <a:p>
+            <a:pPr algn="ctr"/>
+          </a:p>
+        </p:txBody>
+      </p:sp>
+      <p:sp>
+        <p:nvSpPr>
+          <p:cNvPr id="6" name="TextBox 5"/>
+          <p:cNvSpPr txBox="1"/>
+          <p:nvPr/>
+        </p:nvSpPr>
+        <p:spPr>
+          <a:xfrm>
+            <a:off x="1408176" y="2404872"/>
+            <a:ext cx="9957815" cy="402336"/>
+          </a:xfrm>
+          <a:prstGeom prst="rect">
+            <a:avLst/>
+          </a:prstGeom>
+          <a:noFill/>
+        </p:spPr>
+        <p:txBody>
+          <a:bodyPr wrap="square" lIns="0" rIns="0" tIns="0" bIns="0" anchor="ctr">
+            <a:spAutoFit/>
+          </a:bodyPr>
+          <a:lstStyle/>
+          <a:p>
+            <a:pPr algn="l"/>
+            <a:r>
+              <a:rPr sz="1400" b="0" i="0">
+                <a:solidFill>
+                  <a:srgbClr val="1D1D1F"/>
+                </a:solidFill>
+                <a:latin typeface="Helvetica Neue"/>
+              </a:rPr>
+              <a:t>Soldering irons unplugged, cool, and put away.</a:t>
+            </a:r>
+          </a:p>
+        </p:txBody>
+      </p:sp>
+      <p:sp>
+        <p:nvSpPr>
+          <p:cNvPr id="7" name="Rectangle 6"/>
+          <p:cNvSpPr/>
+          <p:nvPr/>
+        </p:nvSpPr>
+        <p:spPr>
+          <a:xfrm>
+            <a:off x="822960" y="2990088"/>
+            <a:ext cx="310896" cy="310896"/>
+          </a:xfrm>
+          <a:prstGeom prst="rect">
+            <a:avLst/>
+          </a:prstGeom>
+          <a:solidFill>
+            <a:srgbClr val="FFFFFF"/>
+          </a:solidFill>
+          <a:ln w="12700">
+            <a:solidFill>
+              <a:srgbClr val="86868B"/>
+            </a:solidFill>
+          </a:ln>
+        </p:spPr>
+        <p:style>
+          <a:lnRef idx="1">
+            <a:schemeClr val="accent1"/>
+          </a:lnRef>
+          <a:fillRef idx="3">
+            <a:schemeClr val="accent1"/>
+          </a:fillRef>
+          <a:effectRef idx="2">
+            <a:schemeClr val="accent1"/>
+          </a:effectRef>
+          <a:fontRef idx="minor">
+            <a:schemeClr val="lt1"/>
+          </a:fontRef>
+        </p:style>
+        <p:txBody>
+          <a:bodyPr rtlCol="0" anchor="ctr"/>
+          <a:lstStyle/>
+          <a:p>
+            <a:pPr algn="ctr"/>
+          </a:p>
+        </p:txBody>
+      </p:sp>
+      <p:sp>
+        <p:nvSpPr>
+          <p:cNvPr id="8" name="TextBox 7"/>
+          <p:cNvSpPr txBox="1"/>
+          <p:nvPr/>
+        </p:nvSpPr>
+        <p:spPr>
+          <a:xfrm>
+            <a:off x="1408176" y="2971800"/>
+            <a:ext cx="9957815" cy="402336"/>
+          </a:xfrm>
+          <a:prstGeom prst="rect">
+            <a:avLst/>
+          </a:prstGeom>
+          <a:noFill/>
+        </p:spPr>
+        <p:txBody>
+          <a:bodyPr wrap="square" lIns="0" rIns="0" tIns="0" bIns="0" anchor="ctr">
+            <a:spAutoFit/>
+          </a:bodyPr>
+          <a:lstStyle/>
+          <a:p>
+            <a:pPr algn="l"/>
+            <a:r>
+              <a:rPr sz="1400" b="0" i="0">
+                <a:solidFill>
+                  <a:srgbClr val="1D1D1F"/>
+                </a:solidFill>
+                <a:latin typeface="Helvetica Neue"/>
+              </a:rPr>
+              <a:t>All hand tools and test equipment back in their bins.</a:t>
+            </a:r>
+          </a:p>
+        </p:txBody>
+      </p:sp>
+      <p:sp>
+        <p:nvSpPr>
+          <p:cNvPr id="9" name="Rectangle 8"/>
+          <p:cNvSpPr/>
+          <p:nvPr/>
+        </p:nvSpPr>
+        <p:spPr>
+          <a:xfrm>
+            <a:off x="822960" y="3557015"/>
+            <a:ext cx="310896" cy="310896"/>
+          </a:xfrm>
+          <a:prstGeom prst="rect">
+            <a:avLst/>
+          </a:prstGeom>
+          <a:solidFill>
+            <a:srgbClr val="FFFFFF"/>
+          </a:solidFill>
+          <a:ln w="12700">
+            <a:solidFill>
+              <a:srgbClr val="86868B"/>
+            </a:solidFill>
+          </a:ln>
+        </p:spPr>
+        <p:style>
+          <a:lnRef idx="1">
+            <a:schemeClr val="accent1"/>
+          </a:lnRef>
+          <a:fillRef idx="3">
+            <a:schemeClr val="accent1"/>
+          </a:fillRef>
+          <a:effectRef idx="2">
+            <a:schemeClr val="accent1"/>
+          </a:effectRef>
+          <a:fontRef idx="minor">
+            <a:schemeClr val="lt1"/>
+          </a:fontRef>
+        </p:style>
+        <p:txBody>
+          <a:bodyPr rtlCol="0" anchor="ctr"/>
+          <a:lstStyle/>
+          <a:p>
+            <a:pPr algn="ctr"/>
+          </a:p>
+        </p:txBody>
+      </p:sp>
+      <p:sp>
+        <p:nvSpPr>
+          <p:cNvPr id="10" name="TextBox 9"/>
+          <p:cNvSpPr txBox="1"/>
+          <p:nvPr/>
+        </p:nvSpPr>
+        <p:spPr>
+          <a:xfrm>
+            <a:off x="1408176" y="3538727"/>
+            <a:ext cx="9957815" cy="402336"/>
+          </a:xfrm>
+          <a:prstGeom prst="rect">
+            <a:avLst/>
+          </a:prstGeom>
+          <a:noFill/>
+        </p:spPr>
+        <p:txBody>
+          <a:bodyPr wrap="square" lIns="0" rIns="0" tIns="0" bIns="0" anchor="ctr">
+            <a:spAutoFit/>
+          </a:bodyPr>
+          <a:lstStyle/>
+          <a:p>
+            <a:pPr algn="l"/>
+            <a:r>
+              <a:rPr sz="1400" b="0" i="0">
+                <a:solidFill>
+                  <a:srgbClr val="1D1D1F"/>
+                </a:solidFill>
+                <a:latin typeface="Helvetica Neue"/>
+              </a:rPr>
+              <a:t>Batteries off charge; charger stations powered down.</a:t>
+            </a:r>
+          </a:p>
+        </p:txBody>
+      </p:sp>
+      <p:sp>
+        <p:nvSpPr>
+          <p:cNvPr id="11" name="Rectangle 10"/>
+          <p:cNvSpPr/>
+          <p:nvPr/>
+        </p:nvSpPr>
+        <p:spPr>
+          <a:xfrm>
+            <a:off x="822960" y="4123944"/>
+            <a:ext cx="310896" cy="310896"/>
+          </a:xfrm>
+          <a:prstGeom prst="rect">
+            <a:avLst/>
+          </a:prstGeom>
+          <a:solidFill>
+            <a:srgbClr val="FFFFFF"/>
+          </a:solidFill>
+          <a:ln w="12700">
+            <a:solidFill>
+              <a:srgbClr val="86868B"/>
+            </a:solidFill>
+          </a:ln>
+        </p:spPr>
+        <p:style>
+          <a:lnRef idx="1">
+            <a:schemeClr val="accent1"/>
+          </a:lnRef>
+          <a:fillRef idx="3">
+            <a:schemeClr val="accent1"/>
+          </a:fillRef>
+          <a:effectRef idx="2">
+            <a:schemeClr val="accent1"/>
+          </a:effectRef>
+          <a:fontRef idx="minor">
+            <a:schemeClr val="lt1"/>
+          </a:fontRef>
+        </p:style>
+        <p:txBody>
+          <a:bodyPr rtlCol="0" anchor="ctr"/>
+          <a:lstStyle/>
+          <a:p>
+            <a:pPr algn="ctr"/>
+          </a:p>
+        </p:txBody>
+      </p:sp>
+      <p:sp>
+        <p:nvSpPr>
+          <p:cNvPr id="12" name="TextBox 11"/>
+          <p:cNvSpPr txBox="1"/>
+          <p:nvPr/>
+        </p:nvSpPr>
+        <p:spPr>
+          <a:xfrm>
+            <a:off x="1408176" y="4105656"/>
+            <a:ext cx="9957815" cy="402336"/>
+          </a:xfrm>
+          <a:prstGeom prst="rect">
+            <a:avLst/>
+          </a:prstGeom>
+          <a:noFill/>
+        </p:spPr>
+        <p:txBody>
+          <a:bodyPr wrap="square" lIns="0" rIns="0" tIns="0" bIns="0" anchor="ctr">
+            <a:spAutoFit/>
+          </a:bodyPr>
+          <a:lstStyle/>
+          <a:p>
+            <a:pPr algn="l"/>
+            <a:r>
+              <a:rPr sz="1400" b="0" i="0">
+                <a:solidFill>
+                  <a:srgbClr val="1D1D1F"/>
+                </a:solidFill>
+                <a:latin typeface="Helvetica Neue"/>
+              </a:rPr>
+              <a:t>Workshop swept; benches wiped; trash out.</a:t>
+            </a:r>
+          </a:p>
+        </p:txBody>
+      </p:sp>
+      <p:sp>
+        <p:nvSpPr>
+          <p:cNvPr id="13" name="Rectangle 12"/>
+          <p:cNvSpPr/>
+          <p:nvPr/>
+        </p:nvSpPr>
+        <p:spPr>
+          <a:xfrm>
+            <a:off x="822960" y="4690872"/>
+            <a:ext cx="310896" cy="310896"/>
+          </a:xfrm>
+          <a:prstGeom prst="rect">
+            <a:avLst/>
+          </a:prstGeom>
+          <a:solidFill>
+            <a:srgbClr val="FFFFFF"/>
+          </a:solidFill>
+          <a:ln w="12700">
+            <a:solidFill>
+              <a:srgbClr val="86868B"/>
+            </a:solidFill>
+          </a:ln>
+        </p:spPr>
+        <p:style>
+          <a:lnRef idx="1">
+            <a:schemeClr val="accent1"/>
+          </a:lnRef>
+          <a:fillRef idx="3">
+            <a:schemeClr val="accent1"/>
+          </a:fillRef>
+          <a:effectRef idx="2">
+            <a:schemeClr val="accent1"/>
+          </a:effectRef>
+          <a:fontRef idx="minor">
+            <a:schemeClr val="lt1"/>
+          </a:fontRef>
+        </p:style>
+        <p:txBody>
+          <a:bodyPr rtlCol="0" anchor="ctr"/>
+          <a:lstStyle/>
+          <a:p>
+            <a:pPr algn="ctr"/>
+          </a:p>
+        </p:txBody>
+      </p:sp>
+      <p:sp>
+        <p:nvSpPr>
+          <p:cNvPr id="14" name="TextBox 13"/>
+          <p:cNvSpPr txBox="1"/>
+          <p:nvPr/>
+        </p:nvSpPr>
+        <p:spPr>
+          <a:xfrm>
+            <a:off x="1408176" y="4672584"/>
+            <a:ext cx="9957815" cy="402336"/>
+          </a:xfrm>
+          <a:prstGeom prst="rect">
+            <a:avLst/>
+          </a:prstGeom>
+          <a:noFill/>
+        </p:spPr>
+        <p:txBody>
+          <a:bodyPr wrap="square" lIns="0" rIns="0" tIns="0" bIns="0" anchor="ctr">
+            <a:spAutoFit/>
+          </a:bodyPr>
+          <a:lstStyle/>
+          <a:p>
+            <a:pPr algn="l"/>
+            <a:r>
+              <a:rPr sz="1400" b="0" i="0">
+                <a:solidFill>
+                  <a:srgbClr val="1D1D1F"/>
+                </a:solidFill>
+                <a:latin typeface="Helvetica Neue"/>
+              </a:rPr>
+              <a:t>Today's photos uploaded to the team folder.</a:t>
+            </a:r>
+          </a:p>
+        </p:txBody>
+      </p:sp>
+      <p:sp>
+        <p:nvSpPr>
+          <p:cNvPr id="15" name="Rectangle 14"/>
+          <p:cNvSpPr/>
+          <p:nvPr/>
+        </p:nvSpPr>
+        <p:spPr>
+          <a:xfrm>
+            <a:off x="822960" y="5257800"/>
+            <a:ext cx="310896" cy="310896"/>
+          </a:xfrm>
+          <a:prstGeom prst="rect">
+            <a:avLst/>
+          </a:prstGeom>
+          <a:solidFill>
+            <a:srgbClr val="FFFFFF"/>
+          </a:solidFill>
+          <a:ln w="12700">
+            <a:solidFill>
+              <a:srgbClr val="86868B"/>
+            </a:solidFill>
+          </a:ln>
+        </p:spPr>
+        <p:style>
+          <a:lnRef idx="1">
+            <a:schemeClr val="accent1"/>
+          </a:lnRef>
+          <a:fillRef idx="3">
+            <a:schemeClr val="accent1"/>
+          </a:fillRef>
+          <a:effectRef idx="2">
+            <a:schemeClr val="accent1"/>
+          </a:effectRef>
+          <a:fontRef idx="minor">
+            <a:schemeClr val="lt1"/>
+          </a:fontRef>
+        </p:style>
+        <p:txBody>
+          <a:bodyPr rtlCol="0" anchor="ctr"/>
+          <a:lstStyle/>
+          <a:p>
+            <a:pPr algn="ctr"/>
+          </a:p>
+        </p:txBody>
+      </p:sp>
+      <p:sp>
+        <p:nvSpPr>
+          <p:cNvPr id="16" name="TextBox 15"/>
+          <p:cNvSpPr txBox="1"/>
+          <p:nvPr/>
+        </p:nvSpPr>
+        <p:spPr>
+          <a:xfrm>
+            <a:off x="1408176" y="5239512"/>
+            <a:ext cx="9957815" cy="402336"/>
+          </a:xfrm>
+          <a:prstGeom prst="rect">
+            <a:avLst/>
+          </a:prstGeom>
+          <a:noFill/>
+        </p:spPr>
+        <p:txBody>
+          <a:bodyPr wrap="square" lIns="0" rIns="0" tIns="0" bIns="0" anchor="ctr">
+            <a:spAutoFit/>
+          </a:bodyPr>
+          <a:lstStyle/>
+          <a:p>
+            <a:pPr algn="l"/>
+            <a:r>
+              <a:rPr sz="1400" b="0" i="0">
+                <a:solidFill>
+                  <a:srgbClr val="1D1D1F"/>
+                </a:solidFill>
+                <a:latin typeface="Helvetica Neue"/>
+              </a:rPr>
+              <a:t>Notetaker's meeting notes filed with the CFO for the engineering notebook.</a:t>
+            </a:r>
+          </a:p>
+        </p:txBody>
+      </p:sp>
+      <p:cxnSp>
+        <p:nvCxnSpPr>
+          <p:cNvPr id="17" name="Connector 16"/>
+          <p:cNvCxnSpPr/>
+          <p:nvPr/>
+        </p:nvCxnSpPr>
+        <p:spPr>
+          <a:xfrm>
+            <a:off x="822960" y="6437376"/>
+            <a:ext cx="10543032" cy="0"/>
+          </a:xfrm>
+          <a:prstGeom prst="line">
+            <a:avLst/>
+          </a:prstGeom>
+          <a:ln w="9525">
+            <a:solidFill>
+              <a:srgbClr val="E3E3E6"/>
+            </a:solidFill>
+          </a:ln>
+        </p:spPr>
+        <p:style>
+          <a:lnRef idx="2">
+            <a:schemeClr val="accent1"/>
+          </a:lnRef>
+          <a:fillRef idx="0">
+            <a:schemeClr val="accent1"/>
+          </a:fillRef>
+          <a:effectRef idx="1">
+            <a:schemeClr val="accent1"/>
+          </a:effectRef>
+          <a:fontRef idx="minor">
+            <a:schemeClr val="tx1"/>
+          </a:fontRef>
+        </p:style>
+      </p:cxnSp>
+      <p:sp>
+        <p:nvSpPr>
+          <p:cNvPr id="18" name="TextBox 17"/>
+          <p:cNvSpPr txBox="1"/>
+          <p:nvPr/>
+        </p:nvSpPr>
+        <p:spPr>
+          <a:xfrm>
+            <a:off x="822960" y="6473952"/>
+            <a:ext cx="5486400" cy="274320"/>
+          </a:xfrm>
+          <a:prstGeom prst="rect">
+            <a:avLst/>
+          </a:prstGeom>
+          <a:noFill/>
+        </p:spPr>
+        <p:txBody>
+          <a:bodyPr wrap="square" lIns="0" rIns="0" tIns="0" bIns="0" anchor="t">
+            <a:spAutoFit/>
+          </a:bodyPr>
+          <a:lstStyle/>
+          <a:p>
+            <a:pPr algn="l"/>
+            <a:r>
+              <a:rPr sz="750" b="1" i="0" cap="all" spc="180">
+                <a:solidFill>
+                  <a:srgbClr val="86868B"/>
+                </a:solidFill>
+                <a:latin typeface="Helvetica Neue"/>
+              </a:rPr>
+              <a:t>SAY WATT ROBOTICS  ·  ROV TEAM</a:t>
+            </a:r>
+          </a:p>
+        </p:txBody>
+      </p:sp>
+      <p:sp>
+        <p:nvSpPr>
+          <p:cNvPr id="19" name="TextBox 18"/>
+          <p:cNvSpPr txBox="1"/>
+          <p:nvPr/>
+        </p:nvSpPr>
+        <p:spPr>
+          <a:xfrm>
+            <a:off x="5879592" y="6473952"/>
+            <a:ext cx="5486400" cy="274320"/>
+          </a:xfrm>
+          <a:prstGeom prst="rect">
+            <a:avLst/>
+          </a:prstGeom>
+          <a:noFill/>
+        </p:spPr>
+        <p:txBody>
+          <a:bodyPr wrap="square" lIns="0" rIns="0" tIns="0" bIns="0" anchor="t">
+            <a:spAutoFit/>
+          </a:bodyPr>
+          <a:lstStyle/>
+          <a:p>
+            <a:pPr algn="r"/>
+            <a:r>
+              <a:rPr sz="750" b="1" i="0" cap="all" spc="180">
+                <a:solidFill>
+                  <a:srgbClr val="86868B"/>
+                </a:solidFill>
+                <a:latin typeface="Helvetica Neue"/>
+              </a:rPr>
+              <a:t>WEEK 1 — KICKOFF   ·   28 / 29</a:t>
+            </a:r>
           </a:p>
         </p:txBody>
       </p:sp>
@@ -19358,6 +22719,10 @@
           </a:solidFill>
           <a:ln/>
         </p:spPr>
+        <p:txBody>
+          <a:bodyPr/>
+          <a:p/>
+        </p:txBody>
       </p:sp>
       <p:sp>
         <p:nvSpPr>
@@ -19481,6 +22846,10 @@
           </a:solidFill>
           <a:ln/>
         </p:spPr>
+        <p:txBody>
+          <a:bodyPr/>
+          <a:p/>
+        </p:txBody>
       </p:sp>
       <p:sp>
         <p:nvSpPr>
@@ -19585,6 +22954,10 @@
             <a:prstDash val="solid"/>
           </a:ln>
         </p:spPr>
+        <p:txBody>
+          <a:bodyPr/>
+          <a:p/>
+        </p:txBody>
       </p:sp>
       <p:sp>
         <p:nvSpPr>
@@ -19658,7 +23031,7 @@
                 <a:ea typeface="Helvetica Neue" pitchFamily="34" charset="-122"/>
                 <a:cs typeface="Helvetica Neue" pitchFamily="34" charset="-120"/>
               </a:rPr>
-              <a:t>WEEK 1 — KICKOFF   ·   3 / 26</a:t>
+              <a:t>WEEK 1 — KICKOFF   ·   4 / 29</a:t>
             </a:r>
             <a:endParaRPr lang="en-US" sz="750" dirty="0"/>
           </a:p>
@@ -19906,6 +23279,10 @@
           </a:solidFill>
           <a:ln/>
         </p:spPr>
+        <p:txBody>
+          <a:bodyPr/>
+          <a:p/>
+        </p:txBody>
       </p:sp>
       <p:sp>
         <p:nvSpPr>
@@ -20004,6 +23381,10 @@
           </a:solidFill>
           <a:ln/>
         </p:spPr>
+        <p:txBody>
+          <a:bodyPr/>
+          <a:p/>
+        </p:txBody>
       </p:sp>
       <p:sp>
         <p:nvSpPr>
@@ -20102,6 +23483,10 @@
           </a:solidFill>
           <a:ln/>
         </p:spPr>
+        <p:txBody>
+          <a:bodyPr/>
+          <a:p/>
+        </p:txBody>
       </p:sp>
       <p:sp>
         <p:nvSpPr>
@@ -20200,6 +23585,10 @@
           </a:solidFill>
           <a:ln/>
         </p:spPr>
+        <p:txBody>
+          <a:bodyPr/>
+          <a:p/>
+        </p:txBody>
       </p:sp>
       <p:sp>
         <p:nvSpPr>
@@ -20305,6 +23694,10 @@
             <a:prstDash val="solid"/>
           </a:ln>
         </p:spPr>
+        <p:txBody>
+          <a:bodyPr/>
+          <a:p/>
+        </p:txBody>
       </p:sp>
       <p:sp>
         <p:nvSpPr>
@@ -20325,6 +23718,10 @@
           </a:solidFill>
           <a:ln/>
         </p:spPr>
+        <p:txBody>
+          <a:bodyPr/>
+          <a:p/>
+        </p:txBody>
       </p:sp>
       <p:sp>
         <p:nvSpPr>
@@ -20792,6 +24189,10 @@
             <a:prstDash val="solid"/>
           </a:ln>
         </p:spPr>
+        <p:txBody>
+          <a:bodyPr/>
+          <a:p/>
+        </p:txBody>
       </p:sp>
       <p:sp>
         <p:nvSpPr>
@@ -20865,7 +24266,7 @@
                 <a:ea typeface="Helvetica Neue" pitchFamily="34" charset="-122"/>
                 <a:cs typeface="Helvetica Neue" pitchFamily="34" charset="-120"/>
               </a:rPr>
-              <a:t>WEEK 1 — KICKOFF   ·   4 / 26</a:t>
+              <a:t>WEEK 1 — KICKOFF   ·   5 / 29</a:t>
             </a:r>
             <a:endParaRPr lang="en-US" sz="750" dirty="0"/>
           </a:p>
@@ -20961,6 +24362,10 @@
           </a:solidFill>
           <a:ln/>
         </p:spPr>
+        <p:txBody>
+          <a:bodyPr/>
+          <a:p/>
+        </p:txBody>
       </p:sp>
       <p:sp>
         <p:nvSpPr>
@@ -21084,6 +24489,10 @@
           </a:solidFill>
           <a:ln/>
         </p:spPr>
+        <p:txBody>
+          <a:bodyPr/>
+          <a:p/>
+        </p:txBody>
       </p:sp>
       <p:sp>
         <p:nvSpPr>
@@ -21188,6 +24597,10 @@
             <a:prstDash val="solid"/>
           </a:ln>
         </p:spPr>
+        <p:txBody>
+          <a:bodyPr/>
+          <a:p/>
+        </p:txBody>
       </p:sp>
       <p:sp>
         <p:nvSpPr>
@@ -21261,7 +24674,7 @@
                 <a:ea typeface="Helvetica Neue" pitchFamily="34" charset="-122"/>
                 <a:cs typeface="Helvetica Neue" pitchFamily="34" charset="-120"/>
               </a:rPr>
-              <a:t>WEEK 1 — KICKOFF   ·   5 / 26</a:t>
+              <a:t>WEEK 1 — KICKOFF   ·   6 / 29</a:t>
             </a:r>
             <a:endParaRPr lang="en-US" sz="750" dirty="0"/>
           </a:p>
@@ -21532,6 +24945,10 @@
             <a:prstDash val="solid"/>
           </a:ln>
         </p:spPr>
+        <p:txBody>
+          <a:bodyPr/>
+          <a:p/>
+        </p:txBody>
       </p:sp>
       <p:sp>
         <p:nvSpPr>
@@ -21636,6 +25053,10 @@
             <a:prstDash val="solid"/>
           </a:ln>
         </p:spPr>
+        <p:txBody>
+          <a:bodyPr/>
+          <a:p/>
+        </p:txBody>
       </p:sp>
       <p:sp>
         <p:nvSpPr>
@@ -21740,6 +25161,10 @@
             <a:prstDash val="solid"/>
           </a:ln>
         </p:spPr>
+        <p:txBody>
+          <a:bodyPr/>
+          <a:p/>
+        </p:txBody>
       </p:sp>
       <p:sp>
         <p:nvSpPr>
@@ -21813,7 +25238,7 @@
                 <a:ea typeface="Helvetica Neue" pitchFamily="34" charset="-122"/>
                 <a:cs typeface="Helvetica Neue" pitchFamily="34" charset="-120"/>
               </a:rPr>
-              <a:t>WEEK 1 — KICKOFF   ·   6 / 26</a:t>
+              <a:t>WEEK 1 — KICKOFF   ·   7 / 29</a:t>
             </a:r>
             <a:endParaRPr lang="en-US" sz="750" dirty="0"/>
           </a:p>
@@ -22000,6 +25425,10 @@
             <a:prstDash val="solid"/>
           </a:ln>
         </p:spPr>
+        <p:txBody>
+          <a:bodyPr/>
+          <a:p/>
+        </p:txBody>
       </p:sp>
       <p:sp>
         <p:nvSpPr>
@@ -22020,6 +25449,10 @@
           </a:solidFill>
           <a:ln/>
         </p:spPr>
+        <p:txBody>
+          <a:bodyPr/>
+          <a:p/>
+        </p:txBody>
       </p:sp>
       <p:sp>
         <p:nvSpPr>
@@ -22170,6 +25603,10 @@
             <a:prstDash val="solid"/>
           </a:ln>
         </p:spPr>
+        <p:txBody>
+          <a:bodyPr/>
+          <a:p/>
+        </p:txBody>
       </p:sp>
       <p:sp>
         <p:nvSpPr>
@@ -22190,6 +25627,10 @@
           </a:solidFill>
           <a:ln/>
         </p:spPr>
+        <p:txBody>
+          <a:bodyPr/>
+          <a:p/>
+        </p:txBody>
       </p:sp>
       <p:sp>
         <p:nvSpPr>
@@ -22340,6 +25781,10 @@
             <a:prstDash val="solid"/>
           </a:ln>
         </p:spPr>
+        <p:txBody>
+          <a:bodyPr/>
+          <a:p/>
+        </p:txBody>
       </p:sp>
       <p:sp>
         <p:nvSpPr>
@@ -22360,6 +25805,10 @@
           </a:solidFill>
           <a:ln/>
         </p:spPr>
+        <p:txBody>
+          <a:bodyPr/>
+          <a:p/>
+        </p:txBody>
       </p:sp>
       <p:sp>
         <p:nvSpPr>
@@ -22510,6 +25959,10 @@
             <a:prstDash val="solid"/>
           </a:ln>
         </p:spPr>
+        <p:txBody>
+          <a:bodyPr/>
+          <a:p/>
+        </p:txBody>
       </p:sp>
       <p:sp>
         <p:nvSpPr>
@@ -22530,6 +25983,10 @@
           </a:solidFill>
           <a:ln/>
         </p:spPr>
+        <p:txBody>
+          <a:bodyPr/>
+          <a:p/>
+        </p:txBody>
       </p:sp>
       <p:sp>
         <p:nvSpPr>
@@ -22680,6 +26137,10 @@
             <a:prstDash val="solid"/>
           </a:ln>
         </p:spPr>
+        <p:txBody>
+          <a:bodyPr/>
+          <a:p/>
+        </p:txBody>
       </p:sp>
       <p:sp>
         <p:nvSpPr>
@@ -22700,6 +26161,10 @@
           </a:solidFill>
           <a:ln/>
         </p:spPr>
+        <p:txBody>
+          <a:bodyPr/>
+          <a:p/>
+        </p:txBody>
       </p:sp>
       <p:sp>
         <p:nvSpPr>
@@ -22846,6 +26311,10 @@
             <a:prstDash val="solid"/>
           </a:ln>
         </p:spPr>
+        <p:txBody>
+          <a:bodyPr/>
+          <a:p/>
+        </p:txBody>
       </p:sp>
       <p:sp>
         <p:nvSpPr>
@@ -22919,7 +26388,7 @@
                 <a:ea typeface="Helvetica Neue" pitchFamily="34" charset="-122"/>
                 <a:cs typeface="Helvetica Neue" pitchFamily="34" charset="-120"/>
               </a:rPr>
-              <a:t>WEEK 1 — KICKOFF   ·   7 / 26</a:t>
+              <a:t>WEEK 1 — KICKOFF   ·   8 / 29</a:t>
             </a:r>
             <a:endParaRPr lang="en-US" sz="750" dirty="0"/>
           </a:p>
@@ -23064,6 +26533,10 @@
             <a:prstDash val="solid"/>
           </a:ln>
         </p:spPr>
+        <p:txBody>
+          <a:bodyPr/>
+          <a:p/>
+        </p:txBody>
       </p:sp>
       <p:sp>
         <p:nvSpPr>
@@ -23234,6 +26707,10 @@
             <a:prstDash val="solid"/>
           </a:ln>
         </p:spPr>
+        <p:txBody>
+          <a:bodyPr/>
+          <a:p/>
+        </p:txBody>
       </p:sp>
       <p:sp>
         <p:nvSpPr>
@@ -23404,6 +26881,10 @@
             <a:prstDash val="solid"/>
           </a:ln>
         </p:spPr>
+        <p:txBody>
+          <a:bodyPr/>
+          <a:p/>
+        </p:txBody>
       </p:sp>
       <p:sp>
         <p:nvSpPr>
@@ -23609,6 +27090,10 @@
             <a:prstDash val="solid"/>
           </a:ln>
         </p:spPr>
+        <p:txBody>
+          <a:bodyPr/>
+          <a:p/>
+        </p:txBody>
       </p:sp>
       <p:sp>
         <p:nvSpPr>
@@ -23682,7 +27167,7 @@
                 <a:ea typeface="Helvetica Neue" pitchFamily="34" charset="-122"/>
                 <a:cs typeface="Helvetica Neue" pitchFamily="34" charset="-120"/>
               </a:rPr>
-              <a:t>WEEK 1 — KICKOFF   ·   8 / 26</a:t>
+              <a:t>WEEK 1 — KICKOFF   ·   9 / 29</a:t>
             </a:r>
             <a:endParaRPr lang="en-US" sz="750" dirty="0"/>
           </a:p>
@@ -23778,6 +27263,10 @@
           </a:solidFill>
           <a:ln/>
         </p:spPr>
+        <p:txBody>
+          <a:bodyPr/>
+          <a:p/>
+        </p:txBody>
       </p:sp>
       <p:sp>
         <p:nvSpPr>
@@ -23901,6 +27390,10 @@
           </a:solidFill>
           <a:ln/>
         </p:spPr>
+        <p:txBody>
+          <a:bodyPr/>
+          <a:p/>
+        </p:txBody>
       </p:sp>
       <p:sp>
         <p:nvSpPr>
@@ -24005,6 +27498,10 @@
             <a:prstDash val="solid"/>
           </a:ln>
         </p:spPr>
+        <p:txBody>
+          <a:bodyPr/>
+          <a:p/>
+        </p:txBody>
       </p:sp>
       <p:sp>
         <p:nvSpPr>
@@ -24078,7 +27575,7 @@
                 <a:ea typeface="Helvetica Neue" pitchFamily="34" charset="-122"/>
                 <a:cs typeface="Helvetica Neue" pitchFamily="34" charset="-120"/>
               </a:rPr>
-              <a:t>WEEK 1 — KICKOFF   ·   9 / 26</a:t>
+              <a:t>WEEK 1 — KICKOFF   ·   10 / 29</a:t>
             </a:r>
             <a:endParaRPr lang="en-US" sz="750" dirty="0"/>
           </a:p>

--- a/Classes/Phase 1/1.1 Kickoff - Slides.pptx
+++ b/Classes/Phase 1/1.1 Kickoff - Slides.pptx
@@ -3357,6 +3357,414 @@
 
 <file path=ppt/slides/slide10.xml><?xml version="1.0" encoding="utf-8"?>
 <p:sld xmlns:a="http://schemas.openxmlformats.org/drawingml/2006/main" xmlns:r="http://schemas.openxmlformats.org/officeDocument/2006/relationships" xmlns:p="http://schemas.openxmlformats.org/presentationml/2006/main">
+  <p:cSld name="Slide 9">
+    <p:bg>
+      <p:bgPr>
+        <a:solidFill>
+          <a:srgbClr val="FBFBFD"/>
+        </a:solidFill>
+      </p:bgPr>
+    </p:bg>
+    <p:spTree>
+      <p:nvGrpSpPr>
+        <p:cNvPr id="1" name=""/>
+        <p:cNvGrpSpPr/>
+        <p:nvPr/>
+      </p:nvGrpSpPr>
+      <p:grpSpPr>
+        <a:xfrm>
+          <a:off x="0" y="0"/>
+          <a:ext cx="0" cy="0"/>
+          <a:chOff x="0" y="0"/>
+          <a:chExt cx="0" cy="0"/>
+        </a:xfrm>
+      </p:grpSpPr>
+      <p:sp>
+        <p:nvSpPr>
+          <p:cNvPr id="2" name="Text 0"/>
+          <p:cNvSpPr/>
+          <p:nvPr/>
+        </p:nvSpPr>
+        <p:spPr>
+          <a:xfrm>
+            <a:off x="4572000" y="182880"/>
+            <a:ext cx="7315200" cy="6492240"/>
+          </a:xfrm>
+          <a:prstGeom prst="rect">
+            <a:avLst/>
+          </a:prstGeom>
+          <a:noFill/>
+          <a:ln/>
+        </p:spPr>
+        <p:txBody>
+          <a:bodyPr wrap="square" lIns="0" tIns="0" rIns="0" bIns="0" rtlCol="0" anchor="ctr"/>
+          <a:lstStyle/>
+          <a:p>
+            <a:pPr algn="r" indent="0" marL="0">
+              <a:buNone/>
+            </a:pPr>
+            <a:r>
+              <a:rPr lang="en-US" sz="36000" b="1" dirty="0">
+                <a:solidFill>
+                  <a:srgbClr val="EEF0F1"/>
+                </a:solidFill>
+                <a:latin typeface="Helvetica Neue" pitchFamily="34" charset="0"/>
+                <a:ea typeface="Helvetica Neue" pitchFamily="34" charset="-122"/>
+                <a:cs typeface="Helvetica Neue" pitchFamily="34" charset="-120"/>
+              </a:rPr>
+              <a:t>03</a:t>
+            </a:r>
+            <a:endParaRPr lang="en-US" sz="36000" dirty="0"/>
+          </a:p>
+        </p:txBody>
+      </p:sp>
+      <p:sp>
+        <p:nvSpPr>
+          <p:cNvPr id="3" name="Shape 1"/>
+          <p:cNvSpPr/>
+          <p:nvPr/>
+        </p:nvSpPr>
+        <p:spPr>
+          <a:xfrm>
+            <a:off x="841248" y="2395728"/>
+            <a:ext cx="566928" cy="91440"/>
+          </a:xfrm>
+          <a:prstGeom prst="rect">
+            <a:avLst/>
+          </a:prstGeom>
+          <a:solidFill>
+            <a:srgbClr val="0D7490"/>
+          </a:solidFill>
+          <a:ln/>
+        </p:spPr>
+        <p:txBody>
+          <a:bodyPr/>
+          <a:p/>
+        </p:txBody>
+      </p:sp>
+      <p:sp>
+        <p:nvSpPr>
+          <p:cNvPr id="4" name="Text 2"/>
+          <p:cNvSpPr/>
+          <p:nvPr/>
+        </p:nvSpPr>
+        <p:spPr>
+          <a:xfrm>
+            <a:off x="822960" y="2615184"/>
+            <a:ext cx="6400800" cy="310896"/>
+          </a:xfrm>
+          <a:prstGeom prst="rect">
+            <a:avLst/>
+          </a:prstGeom>
+          <a:noFill/>
+          <a:ln/>
+        </p:spPr>
+        <p:txBody>
+          <a:bodyPr wrap="square" lIns="0" tIns="0" rIns="0" bIns="0" rtlCol="0" anchor="ctr"/>
+          <a:lstStyle/>
+          <a:p>
+            <a:pPr indent="0" marL="0">
+              <a:buNone/>
+            </a:pPr>
+            <a:r>
+              <a:rPr lang="en-US" sz="1300" b="1" spc="250" kern="0" dirty="0">
+                <a:solidFill>
+                  <a:srgbClr val="0D7490"/>
+                </a:solidFill>
+                <a:latin typeface="Helvetica Neue" pitchFamily="34" charset="0"/>
+                <a:ea typeface="Helvetica Neue" pitchFamily="34" charset="-122"/>
+                <a:cs typeface="Helvetica Neue" pitchFamily="34" charset="-120"/>
+              </a:rPr>
+              <a:t>SECTION 03</a:t>
+            </a:r>
+            <a:endParaRPr lang="en-US" sz="1300" dirty="0"/>
+          </a:p>
+        </p:txBody>
+      </p:sp>
+      <p:sp>
+        <p:nvSpPr>
+          <p:cNvPr id="5" name="Text 3"/>
+          <p:cNvSpPr/>
+          <p:nvPr/>
+        </p:nvSpPr>
+        <p:spPr>
+          <a:xfrm>
+            <a:off x="786384" y="2926080"/>
+            <a:ext cx="6949440" cy="1371600"/>
+          </a:xfrm>
+          <a:prstGeom prst="rect">
+            <a:avLst/>
+          </a:prstGeom>
+          <a:noFill/>
+          <a:ln/>
+        </p:spPr>
+        <p:txBody>
+          <a:bodyPr wrap="square" lIns="0" tIns="0" rIns="0" bIns="0" rtlCol="0" anchor="ctr"/>
+          <a:lstStyle/>
+          <a:p>
+            <a:pPr indent="0" marL="0">
+              <a:lnSpc>
+                <a:spcPts val="4300"/>
+              </a:lnSpc>
+              <a:buNone/>
+            </a:pPr>
+            <a:r>
+              <a:rPr lang="en-US" sz="4000" b="1" dirty="0">
+                <a:solidFill>
+                  <a:srgbClr val="1D1D1F"/>
+                </a:solidFill>
+                <a:latin typeface="Helvetica Neue" pitchFamily="34" charset="0"/>
+                <a:ea typeface="Helvetica Neue" pitchFamily="34" charset="-122"/>
+                <a:cs typeface="Helvetica Neue" pitchFamily="34" charset="-120"/>
+              </a:rPr>
+              <a:t>We Are</a:t>
+            </a:r>
+            <a:endParaRPr lang="en-US" sz="4000" dirty="0"/>
+          </a:p>
+          <a:p>
+            <a:pPr indent="0" marL="0">
+              <a:lnSpc>
+                <a:spcPts val="4300"/>
+              </a:lnSpc>
+              <a:buNone/>
+            </a:pPr>
+            <a:r>
+              <a:rPr lang="en-US" sz="4000" b="1" dirty="0">
+                <a:solidFill>
+                  <a:srgbClr val="1D1D1F"/>
+                </a:solidFill>
+                <a:latin typeface="Helvetica Neue" pitchFamily="34" charset="0"/>
+                <a:ea typeface="Helvetica Neue" pitchFamily="34" charset="-122"/>
+                <a:cs typeface="Helvetica Neue" pitchFamily="34" charset="-120"/>
+              </a:rPr>
+              <a:t>a Company</a:t>
+            </a:r>
+            <a:endParaRPr lang="en-US" sz="4000" dirty="0"/>
+          </a:p>
+        </p:txBody>
+      </p:sp>
+      <p:sp>
+        <p:nvSpPr>
+          <p:cNvPr id="6" name="Shape 4"/>
+          <p:cNvSpPr/>
+          <p:nvPr/>
+        </p:nvSpPr>
+        <p:spPr>
+          <a:xfrm>
+            <a:off x="841248" y="4370832"/>
+            <a:ext cx="2971800" cy="420624"/>
+          </a:xfrm>
+          <a:prstGeom prst="roundRect">
+            <a:avLst>
+              <a:gd name="adj" fmla="val 50000"/>
+            </a:avLst>
+          </a:prstGeom>
+          <a:solidFill>
+            <a:srgbClr val="0D7490"/>
+          </a:solidFill>
+          <a:ln/>
+        </p:spPr>
+        <p:txBody>
+          <a:bodyPr/>
+          <a:p/>
+        </p:txBody>
+      </p:sp>
+      <p:sp>
+        <p:nvSpPr>
+          <p:cNvPr id="7" name="Text 5"/>
+          <p:cNvSpPr/>
+          <p:nvPr/>
+        </p:nvSpPr>
+        <p:spPr>
+          <a:xfrm>
+            <a:off x="841248" y="4370832"/>
+            <a:ext cx="2971800" cy="420624"/>
+          </a:xfrm>
+          <a:prstGeom prst="rect">
+            <a:avLst/>
+          </a:prstGeom>
+          <a:noFill/>
+          <a:ln/>
+        </p:spPr>
+        <p:txBody>
+          <a:bodyPr wrap="square" lIns="0" tIns="0" rIns="0" bIns="0" rtlCol="0" anchor="ctr"/>
+          <a:lstStyle/>
+          <a:p>
+            <a:pPr algn="ctr" indent="0" marL="0">
+              <a:buNone/>
+            </a:pPr>
+            <a:r>
+              <a:rPr lang="en-US" sz="1050" b="1" spc="150" kern="0" dirty="0">
+                <a:solidFill>
+                  <a:srgbClr val="FFFFFF"/>
+                </a:solidFill>
+                <a:latin typeface="Helvetica Neue" pitchFamily="34" charset="0"/>
+                <a:ea typeface="Helvetica Neue" pitchFamily="34" charset="-122"/>
+                <a:cs typeface="Helvetica Neue" pitchFamily="34" charset="-120"/>
+              </a:rPr>
+              <a:t>0:45 – 1:30   ·   45 MIN</a:t>
+            </a:r>
+            <a:endParaRPr lang="en-US" sz="1050" dirty="0"/>
+          </a:p>
+        </p:txBody>
+      </p:sp>
+      <p:sp>
+        <p:nvSpPr>
+          <p:cNvPr id="8" name="Text 6"/>
+          <p:cNvSpPr/>
+          <p:nvPr/>
+        </p:nvSpPr>
+        <p:spPr>
+          <a:xfrm>
+            <a:off x="841248" y="5029200"/>
+            <a:ext cx="6126480" cy="1005840"/>
+          </a:xfrm>
+          <a:prstGeom prst="rect">
+            <a:avLst/>
+          </a:prstGeom>
+          <a:noFill/>
+          <a:ln/>
+        </p:spPr>
+        <p:txBody>
+          <a:bodyPr wrap="square" lIns="0" tIns="0" rIns="0" bIns="0" rtlCol="0" anchor="ctr"/>
+          <a:lstStyle/>
+          <a:p>
+            <a:pPr indent="0" marL="0">
+              <a:lnSpc>
+                <a:spcPts val="2200"/>
+              </a:lnSpc>
+              <a:buNone/>
+            </a:pPr>
+            <a:r>
+              <a:rPr lang="en-US" sz="1500" i="1" dirty="0">
+                <a:solidFill>
+                  <a:srgbClr val="6E6E73"/>
+                </a:solidFill>
+                <a:latin typeface="Helvetica Neue" pitchFamily="34" charset="0"/>
+                <a:ea typeface="Helvetica Neue" pitchFamily="34" charset="-122"/>
+                <a:cs typeface="Helvetica Neue" pitchFamily="34" charset="-120"/>
+              </a:rPr>
+              <a:t>This is the longest block of the day — and the one that decides how the team works.</a:t>
+            </a:r>
+            <a:endParaRPr lang="en-US" sz="1500" dirty="0"/>
+          </a:p>
+        </p:txBody>
+      </p:sp>
+      <p:sp>
+        <p:nvSpPr>
+          <p:cNvPr id="9" name="Shape 7"/>
+          <p:cNvSpPr/>
+          <p:nvPr/>
+        </p:nvSpPr>
+        <p:spPr>
+          <a:xfrm>
+            <a:off x="822960" y="6437376"/>
+            <a:ext cx="10545775" cy="0"/>
+          </a:xfrm>
+          <a:prstGeom prst="line">
+            <a:avLst/>
+          </a:prstGeom>
+          <a:noFill/>
+          <a:ln w="9525">
+            <a:solidFill>
+              <a:srgbClr val="E3E3E6"/>
+            </a:solidFill>
+            <a:prstDash val="solid"/>
+          </a:ln>
+        </p:spPr>
+        <p:txBody>
+          <a:bodyPr/>
+          <a:p/>
+        </p:txBody>
+      </p:sp>
+      <p:sp>
+        <p:nvSpPr>
+          <p:cNvPr id="10" name="Text 8"/>
+          <p:cNvSpPr/>
+          <p:nvPr/>
+        </p:nvSpPr>
+        <p:spPr>
+          <a:xfrm>
+            <a:off x="822960" y="6473952"/>
+            <a:ext cx="5486400" cy="274320"/>
+          </a:xfrm>
+          <a:prstGeom prst="rect">
+            <a:avLst/>
+          </a:prstGeom>
+          <a:noFill/>
+          <a:ln/>
+        </p:spPr>
+        <p:txBody>
+          <a:bodyPr wrap="square" lIns="0" tIns="0" rIns="0" bIns="0" rtlCol="0" anchor="ctr"/>
+          <a:lstStyle/>
+          <a:p>
+            <a:pPr indent="0" marL="0">
+              <a:buNone/>
+            </a:pPr>
+            <a:r>
+              <a:rPr lang="en-US" sz="750" spc="150" kern="0" dirty="0">
+                <a:solidFill>
+                  <a:srgbClr val="86868B"/>
+                </a:solidFill>
+                <a:latin typeface="Helvetica Neue" pitchFamily="34" charset="0"/>
+                <a:ea typeface="Helvetica Neue" pitchFamily="34" charset="-122"/>
+                <a:cs typeface="Helvetica Neue" pitchFamily="34" charset="-120"/>
+              </a:rPr>
+              <a:t>SAY WATT ROBOTICS  ·  ROV TEAM</a:t>
+            </a:r>
+            <a:endParaRPr lang="en-US" sz="750" dirty="0"/>
+          </a:p>
+        </p:txBody>
+      </p:sp>
+      <p:sp>
+        <p:nvSpPr>
+          <p:cNvPr id="11" name="Text 9"/>
+          <p:cNvSpPr/>
+          <p:nvPr/>
+        </p:nvSpPr>
+        <p:spPr>
+          <a:xfrm>
+            <a:off x="5882335" y="6473952"/>
+            <a:ext cx="5486400" cy="274320"/>
+          </a:xfrm>
+          <a:prstGeom prst="rect">
+            <a:avLst/>
+          </a:prstGeom>
+          <a:noFill/>
+          <a:ln/>
+        </p:spPr>
+        <p:txBody>
+          <a:bodyPr wrap="square" lIns="0" tIns="0" rIns="0" bIns="0" rtlCol="0" anchor="ctr"/>
+          <a:lstStyle/>
+          <a:p>
+            <a:pPr algn="r" indent="0" marL="0">
+              <a:buNone/>
+            </a:pPr>
+            <a:r>
+              <a:rPr lang="en-US" sz="750" spc="150" kern="0" dirty="0">
+                <a:solidFill>
+                  <a:srgbClr val="86868B"/>
+                </a:solidFill>
+                <a:latin typeface="Helvetica Neue" pitchFamily="34" charset="0"/>
+                <a:ea typeface="Helvetica Neue" pitchFamily="34" charset="-122"/>
+                <a:cs typeface="Helvetica Neue" pitchFamily="34" charset="-120"/>
+              </a:rPr>
+              <a:t>WEEK 1 — KICKOFF   ·   10 / 29</a:t>
+            </a:r>
+            <a:endParaRPr lang="en-US" sz="750" dirty="0"/>
+          </a:p>
+        </p:txBody>
+      </p:sp>
+    </p:spTree>
+  </p:cSld>
+  <p:clrMapOvr>
+    <a:masterClrMapping/>
+  </p:clrMapOvr>
+</p:sld>
+</file>
+
+<file path=ppt/slides/slide11.xml><?xml version="1.0" encoding="utf-8"?>
+<p:sld xmlns:a="http://schemas.openxmlformats.org/drawingml/2006/main" xmlns:r="http://schemas.openxmlformats.org/officeDocument/2006/relationships" xmlns:p="http://schemas.openxmlformats.org/presentationml/2006/main">
   <p:cSld name="Slide 10">
     <p:bg>
       <p:bgPr>
@@ -4024,7 +4432,7 @@
 </p:sld>
 </file>
 
-<file path=ppt/slides/slide11.xml><?xml version="1.0" encoding="utf-8"?>
+<file path=ppt/slides/slide12.xml><?xml version="1.0" encoding="utf-8"?>
 <p:sld xmlns:a="http://schemas.openxmlformats.org/drawingml/2006/main" xmlns:r="http://schemas.openxmlformats.org/officeDocument/2006/relationships" xmlns:p="http://schemas.openxmlformats.org/presentationml/2006/main">
   <p:cSld name="Slide 11">
     <p:bg>
@@ -5526,7 +5934,7 @@
 </p:sld>
 </file>
 
-<file path=ppt/slides/slide12.xml><?xml version="1.0" encoding="utf-8"?>
+<file path=ppt/slides/slide13.xml><?xml version="1.0" encoding="utf-8"?>
 <p:sld xmlns:a="http://schemas.openxmlformats.org/drawingml/2006/main" xmlns:r="http://schemas.openxmlformats.org/officeDocument/2006/relationships" xmlns:p="http://schemas.openxmlformats.org/presentationml/2006/main">
   <p:cSld name="Slide 12">
     <p:bg>
@@ -6638,7 +7046,7 @@
 </p:sld>
 </file>
 
-<file path=ppt/slides/slide13.xml><?xml version="1.0" encoding="utf-8"?>
+<file path=ppt/slides/slide14.xml><?xml version="1.0" encoding="utf-8"?>
 <p:sld xmlns:a="http://schemas.openxmlformats.org/drawingml/2006/main" xmlns:r="http://schemas.openxmlformats.org/officeDocument/2006/relationships" xmlns:p="http://schemas.openxmlformats.org/presentationml/2006/main">
   <p:cSld name="Slide 13">
     <p:bg>
@@ -7750,7 +8158,7 @@
 </p:sld>
 </file>
 
-<file path=ppt/slides/slide14.xml><?xml version="1.0" encoding="utf-8"?>
+<file path=ppt/slides/slide15.xml><?xml version="1.0" encoding="utf-8"?>
 <p:sld xmlns:a="http://schemas.openxmlformats.org/drawingml/2006/main" xmlns:r="http://schemas.openxmlformats.org/officeDocument/2006/relationships" xmlns:p="http://schemas.openxmlformats.org/presentationml/2006/main">
   <p:cSld name="Slide 14">
     <p:bg>
@@ -8715,7 +9123,7 @@
 </p:sld>
 </file>
 
-<file path=ppt/slides/slide15.xml><?xml version="1.0" encoding="utf-8"?>
+<file path=ppt/slides/slide16.xml><?xml version="1.0" encoding="utf-8"?>
 <p:sld xmlns:a="http://schemas.openxmlformats.org/drawingml/2006/main" xmlns:r="http://schemas.openxmlformats.org/officeDocument/2006/relationships" xmlns:p="http://schemas.openxmlformats.org/presentationml/2006/main">
   <p:cSld name="Slide 15">
     <p:bg>
@@ -8996,7 +9404,7 @@
 </p:sld>
 </file>
 
-<file path=ppt/slides/slide16.xml><?xml version="1.0" encoding="utf-8"?>
+<file path=ppt/slides/slide17.xml><?xml version="1.0" encoding="utf-8"?>
 <p:sld xmlns:a="http://schemas.openxmlformats.org/drawingml/2006/main" xmlns:r="http://schemas.openxmlformats.org/officeDocument/2006/relationships" xmlns:p="http://schemas.openxmlformats.org/presentationml/2006/main">
   <p:cSld name="Slide 16">
     <p:bg>
@@ -9404,7 +9812,7 @@
 </p:sld>
 </file>
 
-<file path=ppt/slides/slide17.xml><?xml version="1.0" encoding="utf-8"?>
+<file path=ppt/slides/slide18.xml><?xml version="1.0" encoding="utf-8"?>
 <p:sld xmlns:a="http://schemas.openxmlformats.org/drawingml/2006/main" xmlns:r="http://schemas.openxmlformats.org/officeDocument/2006/relationships" xmlns:p="http://schemas.openxmlformats.org/presentationml/2006/main">
   <p:cSld name="Slide 17">
     <p:bg>
@@ -11011,7 +11419,7 @@
                 <a:ea typeface="Helvetica Neue" pitchFamily="34" charset="-122"/>
                 <a:cs typeface="Helvetica Neue" pitchFamily="34" charset="-120"/>
               </a:rPr>
-              <a:t>Documents in, display printed, presentation rehearsed — travel to Dauphin Island.</a:t>
+              <a:t>Documents in, display printed, presentation rehearsed — travel to our 2027 regional.</a:t>
             </a:r>
             <a:endParaRPr lang="en-US" sz="1200" dirty="0"/>
           </a:p>
@@ -11130,7 +11538,7 @@
 </p:sld>
 </file>
 
-<file path=ppt/slides/slide18.xml><?xml version="1.0" encoding="utf-8"?>
+<file path=ppt/slides/slide19.xml><?xml version="1.0" encoding="utf-8"?>
 <p:sld xmlns:a="http://schemas.openxmlformats.org/drawingml/2006/main" xmlns:r="http://schemas.openxmlformats.org/officeDocument/2006/relationships" xmlns:p="http://schemas.openxmlformats.org/presentationml/2006/main">
   <p:cSld name="Slide 18">
     <p:bg>
@@ -12759,870 +13167,6 @@
                 <a:cs typeface="Helvetica Neue" pitchFamily="34" charset="-120"/>
               </a:rPr>
               <a:t>WEEK 1 — KICKOFF   ·   19 / 29</a:t>
-            </a:r>
-            <a:endParaRPr lang="en-US" sz="750" dirty="0"/>
-          </a:p>
-        </p:txBody>
-      </p:sp>
-    </p:spTree>
-  </p:cSld>
-  <p:clrMapOvr>
-    <a:masterClrMapping/>
-  </p:clrMapOvr>
-</p:sld>
-</file>
-
-<file path=ppt/slides/slide19.xml><?xml version="1.0" encoding="utf-8"?>
-<p:sld xmlns:a="http://schemas.openxmlformats.org/drawingml/2006/main" xmlns:r="http://schemas.openxmlformats.org/officeDocument/2006/relationships" xmlns:p="http://schemas.openxmlformats.org/presentationml/2006/main">
-  <p:cSld name="Slide 19">
-    <p:bg>
-      <p:bgPr>
-        <a:solidFill>
-          <a:srgbClr val="FFFFFF"/>
-        </a:solidFill>
-      </p:bgPr>
-    </p:bg>
-    <p:spTree>
-      <p:nvGrpSpPr>
-        <p:cNvPr id="1" name=""/>
-        <p:cNvGrpSpPr/>
-        <p:nvPr/>
-      </p:nvGrpSpPr>
-      <p:grpSpPr>
-        <a:xfrm>
-          <a:off x="0" y="0"/>
-          <a:ext cx="0" cy="0"/>
-          <a:chOff x="0" y="0"/>
-          <a:chExt cx="0" cy="0"/>
-        </a:xfrm>
-      </p:grpSpPr>
-      <p:sp>
-        <p:nvSpPr>
-          <p:cNvPr id="2" name="Text 0"/>
-          <p:cNvSpPr/>
-          <p:nvPr/>
-        </p:nvSpPr>
-        <p:spPr>
-          <a:xfrm>
-            <a:off x="822960" y="530352"/>
-            <a:ext cx="10515600" cy="292608"/>
-          </a:xfrm>
-          <a:prstGeom prst="rect">
-            <a:avLst/>
-          </a:prstGeom>
-          <a:noFill/>
-          <a:ln/>
-        </p:spPr>
-        <p:txBody>
-          <a:bodyPr wrap="square" lIns="0" tIns="0" rIns="0" bIns="0" rtlCol="0" anchor="ctr"/>
-          <a:lstStyle/>
-          <a:p>
-            <a:pPr indent="0" marL="0">
-              <a:buNone/>
-            </a:pPr>
-            <a:r>
-              <a:rPr lang="en-US" sz="1200" b="1" spc="250" kern="0" dirty="0">
-                <a:solidFill>
-                  <a:srgbClr val="0D7490"/>
-                </a:solidFill>
-                <a:latin typeface="Helvetica Neue" pitchFamily="34" charset="0"/>
-                <a:ea typeface="Helvetica Neue" pitchFamily="34" charset="-122"/>
-                <a:cs typeface="Helvetica Neue" pitchFamily="34" charset="-120"/>
-              </a:rPr>
-              <a:t>THE SEASON AHEAD</a:t>
-            </a:r>
-            <a:endParaRPr lang="en-US" sz="1200" dirty="0"/>
-          </a:p>
-        </p:txBody>
-      </p:sp>
-      <p:sp>
-        <p:nvSpPr>
-          <p:cNvPr id="3" name="Text 1"/>
-          <p:cNvSpPr/>
-          <p:nvPr/>
-        </p:nvSpPr>
-        <p:spPr>
-          <a:xfrm>
-            <a:off x="804672" y="822960"/>
-            <a:ext cx="10515600" cy="868680"/>
-          </a:xfrm>
-          <a:prstGeom prst="rect">
-            <a:avLst/>
-          </a:prstGeom>
-          <a:noFill/>
-          <a:ln/>
-        </p:spPr>
-        <p:txBody>
-          <a:bodyPr wrap="square" lIns="0" tIns="0" rIns="0" bIns="0" rtlCol="0" anchor="ctr"/>
-          <a:lstStyle/>
-          <a:p>
-            <a:pPr indent="0" marL="0">
-              <a:lnSpc>
-                <a:spcPts val="3120"/>
-              </a:lnSpc>
-              <a:buNone/>
-            </a:pPr>
-            <a:r>
-              <a:rPr lang="en-US" sz="3000" b="1" dirty="0">
-                <a:solidFill>
-                  <a:srgbClr val="1D1D1F"/>
-                </a:solidFill>
-                <a:latin typeface="Helvetica Neue" pitchFamily="34" charset="0"/>
-                <a:ea typeface="Helvetica Neue" pitchFamily="34" charset="-122"/>
-                <a:cs typeface="Helvetica Neue" pitchFamily="34" charset="-120"/>
-              </a:rPr>
-              <a:t>What Phase 1 must produce.</a:t>
-            </a:r>
-            <a:endParaRPr lang="en-US" sz="3000" dirty="0"/>
-          </a:p>
-        </p:txBody>
-      </p:sp>
-      <p:sp>
-        <p:nvSpPr>
-          <p:cNvPr id="4" name="Shape 2"/>
-          <p:cNvSpPr/>
-          <p:nvPr/>
-        </p:nvSpPr>
-        <p:spPr>
-          <a:xfrm>
-            <a:off x="822960" y="1783080"/>
-            <a:ext cx="10545775" cy="1371600"/>
-          </a:xfrm>
-          <a:prstGeom prst="roundRect">
-            <a:avLst>
-              <a:gd name="adj" fmla="val 7333"/>
-            </a:avLst>
-          </a:prstGeom>
-          <a:solidFill>
-            <a:srgbClr val="095D75"/>
-          </a:solidFill>
-          <a:ln w="12700">
-            <a:solidFill>
-              <a:srgbClr val="095D75"/>
-            </a:solidFill>
-            <a:prstDash val="solid"/>
-          </a:ln>
-        </p:spPr>
-        <p:txBody>
-          <a:bodyPr/>
-          <a:p/>
-        </p:txBody>
-      </p:sp>
-      <p:sp>
-        <p:nvSpPr>
-          <p:cNvPr id="5" name="Text 3"/>
-          <p:cNvSpPr/>
-          <p:nvPr/>
-        </p:nvSpPr>
-        <p:spPr>
-          <a:xfrm>
-            <a:off x="1234440" y="1783080"/>
-            <a:ext cx="9692640" cy="1371600"/>
-          </a:xfrm>
-          <a:prstGeom prst="rect">
-            <a:avLst/>
-          </a:prstGeom>
-          <a:noFill/>
-          <a:ln/>
-        </p:spPr>
-        <p:txBody>
-          <a:bodyPr wrap="square" lIns="0" tIns="0" rIns="0" bIns="0" rtlCol="0" anchor="ctr"/>
-          <a:lstStyle/>
-          <a:p>
-            <a:pPr indent="0" marL="0">
-              <a:lnSpc>
-                <a:spcPts val="2700"/>
-              </a:lnSpc>
-              <a:buNone/>
-            </a:pPr>
-            <a:r>
-              <a:rPr lang="en-US" sz="2100" b="1" i="1" dirty="0">
-                <a:solidFill>
-                  <a:srgbClr val="FFFFFF"/>
-                </a:solidFill>
-                <a:latin typeface="Helvetica Neue" pitchFamily="34" charset="0"/>
-                <a:ea typeface="Helvetica Neue" pitchFamily="34" charset="-122"/>
-                <a:cs typeface="Helvetica Neue" pitchFamily="34" charset="-120"/>
-              </a:rPr>
-              <a:t>“The goal of Phase 1 is not a competition ROV. It is a team that exists.”</a:t>
-            </a:r>
-            <a:endParaRPr lang="en-US" sz="2100" dirty="0"/>
-          </a:p>
-        </p:txBody>
-      </p:sp>
-      <p:sp>
-        <p:nvSpPr>
-          <p:cNvPr id="6" name="Text 4"/>
-          <p:cNvSpPr/>
-          <p:nvPr/>
-        </p:nvSpPr>
-        <p:spPr>
-          <a:xfrm>
-            <a:off x="822960" y="3419856"/>
-            <a:ext cx="10515600" cy="457200"/>
-          </a:xfrm>
-          <a:prstGeom prst="rect">
-            <a:avLst/>
-          </a:prstGeom>
-          <a:noFill/>
-          <a:ln/>
-        </p:spPr>
-        <p:txBody>
-          <a:bodyPr wrap="square" lIns="0" tIns="0" rIns="0" bIns="0" rtlCol="0" anchor="ctr"/>
-          <a:lstStyle/>
-          <a:p>
-            <a:pPr indent="0" marL="0">
-              <a:buNone/>
-            </a:pPr>
-            <a:r>
-              <a:rPr lang="en-US" sz="1400" dirty="0">
-                <a:solidFill>
-                  <a:srgbClr val="6E6E73"/>
-                </a:solidFill>
-                <a:latin typeface="Helvetica Neue" pitchFamily="34" charset="0"/>
-                <a:ea typeface="Helvetica Neue" pitchFamily="34" charset="-122"/>
-                <a:cs typeface="Helvetica Neue" pitchFamily="34" charset="-120"/>
-              </a:rPr>
-              <a:t>By the end of July, three things are true — and only these three need to be true:</a:t>
-            </a:r>
-            <a:endParaRPr lang="en-US" sz="1400" dirty="0"/>
-          </a:p>
-        </p:txBody>
-      </p:sp>
-      <p:sp>
-        <p:nvSpPr>
-          <p:cNvPr id="7" name="Shape 5"/>
-          <p:cNvSpPr/>
-          <p:nvPr/>
-        </p:nvSpPr>
-        <p:spPr>
-          <a:xfrm>
-            <a:off x="822960" y="3931920"/>
-            <a:ext cx="3310128" cy="2057400"/>
-          </a:xfrm>
-          <a:prstGeom prst="roundRect">
-            <a:avLst>
-              <a:gd name="adj" fmla="val 4889"/>
-            </a:avLst>
-          </a:prstGeom>
-          <a:solidFill>
-            <a:srgbClr val="FBFBFD"/>
-          </a:solidFill>
-          <a:ln w="12700">
-            <a:solidFill>
-              <a:srgbClr val="E3E3E6"/>
-            </a:solidFill>
-            <a:prstDash val="solid"/>
-          </a:ln>
-        </p:spPr>
-        <p:txBody>
-          <a:bodyPr/>
-          <a:p/>
-        </p:txBody>
-      </p:sp>
-      <p:sp>
-        <p:nvSpPr>
-          <p:cNvPr id="8" name="Shape 6"/>
-          <p:cNvSpPr/>
-          <p:nvPr/>
-        </p:nvSpPr>
-        <p:spPr>
-          <a:xfrm>
-            <a:off x="1097280" y="4206240"/>
-            <a:ext cx="420624" cy="420624"/>
-          </a:xfrm>
-          <a:prstGeom prst="ellipse">
-            <a:avLst/>
-          </a:prstGeom>
-          <a:solidFill>
-            <a:srgbClr val="EAF2F4"/>
-          </a:solidFill>
-          <a:ln/>
-        </p:spPr>
-        <p:txBody>
-          <a:bodyPr/>
-          <a:p/>
-        </p:txBody>
-      </p:sp>
-      <p:sp>
-        <p:nvSpPr>
-          <p:cNvPr id="9" name="Text 7"/>
-          <p:cNvSpPr/>
-          <p:nvPr/>
-        </p:nvSpPr>
-        <p:spPr>
-          <a:xfrm>
-            <a:off x="1097280" y="4206240"/>
-            <a:ext cx="420624" cy="420624"/>
-          </a:xfrm>
-          <a:prstGeom prst="rect">
-            <a:avLst/>
-          </a:prstGeom>
-          <a:noFill/>
-          <a:ln/>
-        </p:spPr>
-        <p:txBody>
-          <a:bodyPr wrap="square" lIns="0" tIns="0" rIns="0" bIns="0" rtlCol="0" anchor="ctr"/>
-          <a:lstStyle/>
-          <a:p>
-            <a:pPr algn="ctr" indent="0" marL="0">
-              <a:buNone/>
-            </a:pPr>
-            <a:r>
-              <a:rPr lang="en-US" sz="1288" b="1" dirty="0">
-                <a:solidFill>
-                  <a:srgbClr val="0D7490"/>
-                </a:solidFill>
-                <a:latin typeface="Helvetica Neue" pitchFamily="34" charset="0"/>
-                <a:ea typeface="Helvetica Neue" pitchFamily="34" charset="-122"/>
-                <a:cs typeface="Helvetica Neue" pitchFamily="34" charset="-120"/>
-              </a:rPr>
-              <a:t>1</a:t>
-            </a:r>
-            <a:endParaRPr lang="en-US" sz="1288" dirty="0"/>
-          </a:p>
-        </p:txBody>
-      </p:sp>
-      <p:sp>
-        <p:nvSpPr>
-          <p:cNvPr id="10" name="Text 8"/>
-          <p:cNvSpPr/>
-          <p:nvPr/>
-        </p:nvSpPr>
-        <p:spPr>
-          <a:xfrm>
-            <a:off x="1097280" y="4773168"/>
-            <a:ext cx="2761488" cy="603504"/>
-          </a:xfrm>
-          <a:prstGeom prst="rect">
-            <a:avLst/>
-          </a:prstGeom>
-          <a:noFill/>
-          <a:ln/>
-        </p:spPr>
-        <p:txBody>
-          <a:bodyPr wrap="square" lIns="0" tIns="0" rIns="0" bIns="0" rtlCol="0" anchor="ctr"/>
-          <a:lstStyle/>
-          <a:p>
-            <a:pPr indent="0" marL="0">
-              <a:lnSpc>
-                <a:spcPts val="1700"/>
-              </a:lnSpc>
-              <a:buNone/>
-            </a:pPr>
-            <a:r>
-              <a:rPr lang="en-US" sz="1450" b="1" dirty="0">
-                <a:solidFill>
-                  <a:srgbClr val="1D1D1F"/>
-                </a:solidFill>
-                <a:latin typeface="Helvetica Neue" pitchFamily="34" charset="0"/>
-                <a:ea typeface="Helvetica Neue" pitchFamily="34" charset="-122"/>
-                <a:cs typeface="Helvetica Neue" pitchFamily="34" charset="-120"/>
-              </a:rPr>
-              <a:t>A team that exists</a:t>
-            </a:r>
-            <a:endParaRPr lang="en-US" sz="1450" dirty="0"/>
-          </a:p>
-        </p:txBody>
-      </p:sp>
-      <p:sp>
-        <p:nvSpPr>
-          <p:cNvPr id="11" name="Text 9"/>
-          <p:cNvSpPr/>
-          <p:nvPr/>
-        </p:nvSpPr>
-        <p:spPr>
-          <a:xfrm>
-            <a:off x="1097280" y="5303520"/>
-            <a:ext cx="2779776" cy="594360"/>
-          </a:xfrm>
-          <a:prstGeom prst="rect">
-            <a:avLst/>
-          </a:prstGeom>
-          <a:noFill/>
-          <a:ln/>
-        </p:spPr>
-        <p:txBody>
-          <a:bodyPr wrap="square" lIns="0" tIns="0" rIns="0" bIns="0" rtlCol="0" anchor="ctr"/>
-          <a:lstStyle/>
-          <a:p>
-            <a:pPr indent="0" marL="0">
-              <a:lnSpc>
-                <a:spcPts val="1450"/>
-              </a:lnSpc>
-              <a:buNone/>
-            </a:pPr>
-            <a:r>
-              <a:rPr lang="en-US" sz="1100" dirty="0">
-                <a:solidFill>
-                  <a:srgbClr val="6E6E73"/>
-                </a:solidFill>
-                <a:latin typeface="Helvetica Neue" pitchFamily="34" charset="0"/>
-                <a:ea typeface="Helvetica Neue" pitchFamily="34" charset="-122"/>
-                <a:cs typeface="Helvetica Neue" pitchFamily="34" charset="-120"/>
-              </a:rPr>
-              <a:t>Six roles filled, a meeting rhythm that holds, and a safety habit that is automatic.</a:t>
-            </a:r>
-            <a:endParaRPr lang="en-US" sz="1100" dirty="0"/>
-          </a:p>
-        </p:txBody>
-      </p:sp>
-      <p:sp>
-        <p:nvSpPr>
-          <p:cNvPr id="12" name="Shape 10"/>
-          <p:cNvSpPr/>
-          <p:nvPr/>
-        </p:nvSpPr>
-        <p:spPr>
-          <a:xfrm>
-            <a:off x="4434840" y="3931920"/>
-            <a:ext cx="3310128" cy="2057400"/>
-          </a:xfrm>
-          <a:prstGeom prst="roundRect">
-            <a:avLst>
-              <a:gd name="adj" fmla="val 4889"/>
-            </a:avLst>
-          </a:prstGeom>
-          <a:solidFill>
-            <a:srgbClr val="FBFBFD"/>
-          </a:solidFill>
-          <a:ln w="12700">
-            <a:solidFill>
-              <a:srgbClr val="E3E3E6"/>
-            </a:solidFill>
-            <a:prstDash val="solid"/>
-          </a:ln>
-        </p:spPr>
-        <p:txBody>
-          <a:bodyPr/>
-          <a:p/>
-        </p:txBody>
-      </p:sp>
-      <p:sp>
-        <p:nvSpPr>
-          <p:cNvPr id="13" name="Shape 11"/>
-          <p:cNvSpPr/>
-          <p:nvPr/>
-        </p:nvSpPr>
-        <p:spPr>
-          <a:xfrm>
-            <a:off x="4709160" y="4206240"/>
-            <a:ext cx="420624" cy="420624"/>
-          </a:xfrm>
-          <a:prstGeom prst="ellipse">
-            <a:avLst/>
-          </a:prstGeom>
-          <a:solidFill>
-            <a:srgbClr val="EAF2F4"/>
-          </a:solidFill>
-          <a:ln/>
-        </p:spPr>
-        <p:txBody>
-          <a:bodyPr/>
-          <a:p/>
-        </p:txBody>
-      </p:sp>
-      <p:sp>
-        <p:nvSpPr>
-          <p:cNvPr id="14" name="Text 12"/>
-          <p:cNvSpPr/>
-          <p:nvPr/>
-        </p:nvSpPr>
-        <p:spPr>
-          <a:xfrm>
-            <a:off x="4709160" y="4206240"/>
-            <a:ext cx="420624" cy="420624"/>
-          </a:xfrm>
-          <a:prstGeom prst="rect">
-            <a:avLst/>
-          </a:prstGeom>
-          <a:noFill/>
-          <a:ln/>
-        </p:spPr>
-        <p:txBody>
-          <a:bodyPr wrap="square" lIns="0" tIns="0" rIns="0" bIns="0" rtlCol="0" anchor="ctr"/>
-          <a:lstStyle/>
-          <a:p>
-            <a:pPr algn="ctr" indent="0" marL="0">
-              <a:buNone/>
-            </a:pPr>
-            <a:r>
-              <a:rPr lang="en-US" sz="1288" b="1" dirty="0">
-                <a:solidFill>
-                  <a:srgbClr val="0D7490"/>
-                </a:solidFill>
-                <a:latin typeface="Helvetica Neue" pitchFamily="34" charset="0"/>
-                <a:ea typeface="Helvetica Neue" pitchFamily="34" charset="-122"/>
-                <a:cs typeface="Helvetica Neue" pitchFamily="34" charset="-120"/>
-              </a:rPr>
-              <a:t>2</a:t>
-            </a:r>
-            <a:endParaRPr lang="en-US" sz="1288" dirty="0"/>
-          </a:p>
-        </p:txBody>
-      </p:sp>
-      <p:sp>
-        <p:nvSpPr>
-          <p:cNvPr id="15" name="Text 13"/>
-          <p:cNvSpPr/>
-          <p:nvPr/>
-        </p:nvSpPr>
-        <p:spPr>
-          <a:xfrm>
-            <a:off x="4709160" y="4773168"/>
-            <a:ext cx="2761488" cy="603504"/>
-          </a:xfrm>
-          <a:prstGeom prst="rect">
-            <a:avLst/>
-          </a:prstGeom>
-          <a:noFill/>
-          <a:ln/>
-        </p:spPr>
-        <p:txBody>
-          <a:bodyPr wrap="square" lIns="0" tIns="0" rIns="0" bIns="0" rtlCol="0" anchor="ctr"/>
-          <a:lstStyle/>
-          <a:p>
-            <a:pPr indent="0" marL="0">
-              <a:lnSpc>
-                <a:spcPts val="1700"/>
-              </a:lnSpc>
-              <a:buNone/>
-            </a:pPr>
-            <a:r>
-              <a:rPr lang="en-US" sz="1450" b="1" dirty="0">
-                <a:solidFill>
-                  <a:srgbClr val="1D1D1F"/>
-                </a:solidFill>
-                <a:latin typeface="Helvetica Neue" pitchFamily="34" charset="0"/>
-                <a:ea typeface="Helvetica Neue" pitchFamily="34" charset="-122"/>
-                <a:cs typeface="Helvetica Neue" pitchFamily="34" charset="-120"/>
-              </a:rPr>
-              <a:t>A starter ROV in the water</a:t>
-            </a:r>
-            <a:endParaRPr lang="en-US" sz="1450" dirty="0"/>
-          </a:p>
-        </p:txBody>
-      </p:sp>
-      <p:sp>
-        <p:nvSpPr>
-          <p:cNvPr id="16" name="Text 14"/>
-          <p:cNvSpPr/>
-          <p:nvPr/>
-        </p:nvSpPr>
-        <p:spPr>
-          <a:xfrm>
-            <a:off x="4709160" y="5303520"/>
-            <a:ext cx="2779776" cy="594360"/>
-          </a:xfrm>
-          <a:prstGeom prst="rect">
-            <a:avLst/>
-          </a:prstGeom>
-          <a:noFill/>
-          <a:ln/>
-        </p:spPr>
-        <p:txBody>
-          <a:bodyPr wrap="square" lIns="0" tIns="0" rIns="0" bIns="0" rtlCol="0" anchor="ctr"/>
-          <a:lstStyle/>
-          <a:p>
-            <a:pPr indent="0" marL="0">
-              <a:lnSpc>
-                <a:spcPts val="1450"/>
-              </a:lnSpc>
-              <a:buNone/>
-            </a:pPr>
-            <a:r>
-              <a:rPr lang="en-US" sz="1100" dirty="0">
-                <a:solidFill>
-                  <a:srgbClr val="6E6E73"/>
-                </a:solidFill>
-                <a:latin typeface="Helvetica Neue" pitchFamily="34" charset="0"/>
-                <a:ea typeface="Helvetica Neue" pitchFamily="34" charset="-122"/>
-                <a:cs typeface="Helvetica Neue" pitchFamily="34" charset="-120"/>
-              </a:rPr>
-              <a:t>The SeaMATE Triggerfish built and swimming — every member has piloted it.</a:t>
-            </a:r>
-            <a:endParaRPr lang="en-US" sz="1100" dirty="0"/>
-          </a:p>
-        </p:txBody>
-      </p:sp>
-      <p:sp>
-        <p:nvSpPr>
-          <p:cNvPr id="17" name="Shape 15"/>
-          <p:cNvSpPr/>
-          <p:nvPr/>
-        </p:nvSpPr>
-        <p:spPr>
-          <a:xfrm>
-            <a:off x="8046720" y="3931920"/>
-            <a:ext cx="3310128" cy="2057400"/>
-          </a:xfrm>
-          <a:prstGeom prst="roundRect">
-            <a:avLst>
-              <a:gd name="adj" fmla="val 4889"/>
-            </a:avLst>
-          </a:prstGeom>
-          <a:solidFill>
-            <a:srgbClr val="FBFBFD"/>
-          </a:solidFill>
-          <a:ln w="12700">
-            <a:solidFill>
-              <a:srgbClr val="E3E3E6"/>
-            </a:solidFill>
-            <a:prstDash val="solid"/>
-          </a:ln>
-        </p:spPr>
-        <p:txBody>
-          <a:bodyPr/>
-          <a:p/>
-        </p:txBody>
-      </p:sp>
-      <p:sp>
-        <p:nvSpPr>
-          <p:cNvPr id="18" name="Shape 16"/>
-          <p:cNvSpPr/>
-          <p:nvPr/>
-        </p:nvSpPr>
-        <p:spPr>
-          <a:xfrm>
-            <a:off x="8321040" y="4206240"/>
-            <a:ext cx="420624" cy="420624"/>
-          </a:xfrm>
-          <a:prstGeom prst="ellipse">
-            <a:avLst/>
-          </a:prstGeom>
-          <a:solidFill>
-            <a:srgbClr val="EAF2F4"/>
-          </a:solidFill>
-          <a:ln/>
-        </p:spPr>
-        <p:txBody>
-          <a:bodyPr/>
-          <a:p/>
-        </p:txBody>
-      </p:sp>
-      <p:sp>
-        <p:nvSpPr>
-          <p:cNvPr id="19" name="Text 17"/>
-          <p:cNvSpPr/>
-          <p:nvPr/>
-        </p:nvSpPr>
-        <p:spPr>
-          <a:xfrm>
-            <a:off x="8321040" y="4206240"/>
-            <a:ext cx="420624" cy="420624"/>
-          </a:xfrm>
-          <a:prstGeom prst="rect">
-            <a:avLst/>
-          </a:prstGeom>
-          <a:noFill/>
-          <a:ln/>
-        </p:spPr>
-        <p:txBody>
-          <a:bodyPr wrap="square" lIns="0" tIns="0" rIns="0" bIns="0" rtlCol="0" anchor="ctr"/>
-          <a:lstStyle/>
-          <a:p>
-            <a:pPr algn="ctr" indent="0" marL="0">
-              <a:buNone/>
-            </a:pPr>
-            <a:r>
-              <a:rPr lang="en-US" sz="1288" b="1" dirty="0">
-                <a:solidFill>
-                  <a:srgbClr val="0D7490"/>
-                </a:solidFill>
-                <a:latin typeface="Helvetica Neue" pitchFamily="34" charset="0"/>
-                <a:ea typeface="Helvetica Neue" pitchFamily="34" charset="-122"/>
-                <a:cs typeface="Helvetica Neue" pitchFamily="34" charset="-120"/>
-              </a:rPr>
-              <a:t>3</a:t>
-            </a:r>
-            <a:endParaRPr lang="en-US" sz="1288" dirty="0"/>
-          </a:p>
-        </p:txBody>
-      </p:sp>
-      <p:sp>
-        <p:nvSpPr>
-          <p:cNvPr id="20" name="Text 18"/>
-          <p:cNvSpPr/>
-          <p:nvPr/>
-        </p:nvSpPr>
-        <p:spPr>
-          <a:xfrm>
-            <a:off x="8321040" y="4773168"/>
-            <a:ext cx="2761488" cy="603504"/>
-          </a:xfrm>
-          <a:prstGeom prst="rect">
-            <a:avLst/>
-          </a:prstGeom>
-          <a:noFill/>
-          <a:ln/>
-        </p:spPr>
-        <p:txBody>
-          <a:bodyPr wrap="square" lIns="0" tIns="0" rIns="0" bIns="0" rtlCol="0" anchor="ctr"/>
-          <a:lstStyle/>
-          <a:p>
-            <a:pPr indent="0" marL="0">
-              <a:lnSpc>
-                <a:spcPts val="1700"/>
-              </a:lnSpc>
-              <a:buNone/>
-            </a:pPr>
-            <a:r>
-              <a:rPr lang="en-US" sz="1450" b="1" dirty="0">
-                <a:solidFill>
-                  <a:srgbClr val="1D1D1F"/>
-                </a:solidFill>
-                <a:latin typeface="Helvetica Neue" pitchFamily="34" charset="0"/>
-                <a:ea typeface="Helvetica Neue" pitchFamily="34" charset="-122"/>
-                <a:cs typeface="Helvetica Neue" pitchFamily="34" charset="-120"/>
-              </a:rPr>
-              <a:t>Kids who have soldered</a:t>
-            </a:r>
-            <a:endParaRPr lang="en-US" sz="1450" dirty="0"/>
-          </a:p>
-        </p:txBody>
-      </p:sp>
-      <p:sp>
-        <p:nvSpPr>
-          <p:cNvPr id="21" name="Text 19"/>
-          <p:cNvSpPr/>
-          <p:nvPr/>
-        </p:nvSpPr>
-        <p:spPr>
-          <a:xfrm>
-            <a:off x="8321040" y="5303520"/>
-            <a:ext cx="2779776" cy="594360"/>
-          </a:xfrm>
-          <a:prstGeom prst="rect">
-            <a:avLst/>
-          </a:prstGeom>
-          <a:noFill/>
-          <a:ln/>
-        </p:spPr>
-        <p:txBody>
-          <a:bodyPr wrap="square" lIns="0" tIns="0" rIns="0" bIns="0" rtlCol="0" anchor="ctr"/>
-          <a:lstStyle/>
-          <a:p>
-            <a:pPr indent="0" marL="0">
-              <a:lnSpc>
-                <a:spcPts val="1450"/>
-              </a:lnSpc>
-              <a:buNone/>
-            </a:pPr>
-            <a:r>
-              <a:rPr lang="en-US" sz="1100" dirty="0">
-                <a:solidFill>
-                  <a:srgbClr val="6E6E73"/>
-                </a:solidFill>
-                <a:latin typeface="Helvetica Neue" pitchFamily="34" charset="0"/>
-                <a:ea typeface="Helvetica Neue" pitchFamily="34" charset="-122"/>
-                <a:cs typeface="Helvetica Neue" pitchFamily="34" charset="-120"/>
-              </a:rPr>
-              <a:t>Real hands-on skill: a clean joint, a sealed capsule, a multimeter read correctly.</a:t>
-            </a:r>
-            <a:endParaRPr lang="en-US" sz="1100" dirty="0"/>
-          </a:p>
-        </p:txBody>
-      </p:sp>
-      <p:sp>
-        <p:nvSpPr>
-          <p:cNvPr id="22" name="Shape 20"/>
-          <p:cNvSpPr/>
-          <p:nvPr/>
-        </p:nvSpPr>
-        <p:spPr>
-          <a:xfrm>
-            <a:off x="822960" y="6437376"/>
-            <a:ext cx="10545775" cy="0"/>
-          </a:xfrm>
-          <a:prstGeom prst="line">
-            <a:avLst/>
-          </a:prstGeom>
-          <a:noFill/>
-          <a:ln w="9525">
-            <a:solidFill>
-              <a:srgbClr val="E3E3E6"/>
-            </a:solidFill>
-            <a:prstDash val="solid"/>
-          </a:ln>
-        </p:spPr>
-        <p:txBody>
-          <a:bodyPr/>
-          <a:p/>
-        </p:txBody>
-      </p:sp>
-      <p:sp>
-        <p:nvSpPr>
-          <p:cNvPr id="23" name="Text 21"/>
-          <p:cNvSpPr/>
-          <p:nvPr/>
-        </p:nvSpPr>
-        <p:spPr>
-          <a:xfrm>
-            <a:off x="822960" y="6473952"/>
-            <a:ext cx="5486400" cy="274320"/>
-          </a:xfrm>
-          <a:prstGeom prst="rect">
-            <a:avLst/>
-          </a:prstGeom>
-          <a:noFill/>
-          <a:ln/>
-        </p:spPr>
-        <p:txBody>
-          <a:bodyPr wrap="square" lIns="0" tIns="0" rIns="0" bIns="0" rtlCol="0" anchor="ctr"/>
-          <a:lstStyle/>
-          <a:p>
-            <a:pPr indent="0" marL="0">
-              <a:buNone/>
-            </a:pPr>
-            <a:r>
-              <a:rPr lang="en-US" sz="750" spc="150" kern="0" dirty="0">
-                <a:solidFill>
-                  <a:srgbClr val="86868B"/>
-                </a:solidFill>
-                <a:latin typeface="Helvetica Neue" pitchFamily="34" charset="0"/>
-                <a:ea typeface="Helvetica Neue" pitchFamily="34" charset="-122"/>
-                <a:cs typeface="Helvetica Neue" pitchFamily="34" charset="-120"/>
-              </a:rPr>
-              <a:t>SAY WATT ROBOTICS  ·  ROV TEAM</a:t>
-            </a:r>
-            <a:endParaRPr lang="en-US" sz="750" dirty="0"/>
-          </a:p>
-        </p:txBody>
-      </p:sp>
-      <p:sp>
-        <p:nvSpPr>
-          <p:cNvPr id="24" name="Text 22"/>
-          <p:cNvSpPr/>
-          <p:nvPr/>
-        </p:nvSpPr>
-        <p:spPr>
-          <a:xfrm>
-            <a:off x="5882335" y="6473952"/>
-            <a:ext cx="5486400" cy="274320"/>
-          </a:xfrm>
-          <a:prstGeom prst="rect">
-            <a:avLst/>
-          </a:prstGeom>
-          <a:noFill/>
-          <a:ln/>
-        </p:spPr>
-        <p:txBody>
-          <a:bodyPr wrap="square" lIns="0" tIns="0" rIns="0" bIns="0" rtlCol="0" anchor="ctr"/>
-          <a:lstStyle/>
-          <a:p>
-            <a:pPr algn="r" indent="0" marL="0">
-              <a:buNone/>
-            </a:pPr>
-            <a:r>
-              <a:rPr lang="en-US" sz="750" spc="150" kern="0" dirty="0">
-                <a:solidFill>
-                  <a:srgbClr val="86868B"/>
-                </a:solidFill>
-                <a:latin typeface="Helvetica Neue" pitchFamily="34" charset="0"/>
-                <a:ea typeface="Helvetica Neue" pitchFamily="34" charset="-122"/>
-                <a:cs typeface="Helvetica Neue" pitchFamily="34" charset="-120"/>
-              </a:rPr>
-              <a:t>WEEK 1 — KICKOFF   ·   20 / 29</a:t>
             </a:r>
             <a:endParaRPr lang="en-US" sz="750" dirty="0"/>
           </a:p>
@@ -15020,6 +14564,870 @@
 
 <file path=ppt/slides/slide20.xml><?xml version="1.0" encoding="utf-8"?>
 <p:sld xmlns:a="http://schemas.openxmlformats.org/drawingml/2006/main" xmlns:r="http://schemas.openxmlformats.org/officeDocument/2006/relationships" xmlns:p="http://schemas.openxmlformats.org/presentationml/2006/main">
+  <p:cSld name="Slide 19">
+    <p:bg>
+      <p:bgPr>
+        <a:solidFill>
+          <a:srgbClr val="FFFFFF"/>
+        </a:solidFill>
+      </p:bgPr>
+    </p:bg>
+    <p:spTree>
+      <p:nvGrpSpPr>
+        <p:cNvPr id="1" name=""/>
+        <p:cNvGrpSpPr/>
+        <p:nvPr/>
+      </p:nvGrpSpPr>
+      <p:grpSpPr>
+        <a:xfrm>
+          <a:off x="0" y="0"/>
+          <a:ext cx="0" cy="0"/>
+          <a:chOff x="0" y="0"/>
+          <a:chExt cx="0" cy="0"/>
+        </a:xfrm>
+      </p:grpSpPr>
+      <p:sp>
+        <p:nvSpPr>
+          <p:cNvPr id="2" name="Text 0"/>
+          <p:cNvSpPr/>
+          <p:nvPr/>
+        </p:nvSpPr>
+        <p:spPr>
+          <a:xfrm>
+            <a:off x="822960" y="530352"/>
+            <a:ext cx="10515600" cy="292608"/>
+          </a:xfrm>
+          <a:prstGeom prst="rect">
+            <a:avLst/>
+          </a:prstGeom>
+          <a:noFill/>
+          <a:ln/>
+        </p:spPr>
+        <p:txBody>
+          <a:bodyPr wrap="square" lIns="0" tIns="0" rIns="0" bIns="0" rtlCol="0" anchor="ctr"/>
+          <a:lstStyle/>
+          <a:p>
+            <a:pPr indent="0" marL="0">
+              <a:buNone/>
+            </a:pPr>
+            <a:r>
+              <a:rPr lang="en-US" sz="1200" b="1" spc="250" kern="0" dirty="0">
+                <a:solidFill>
+                  <a:srgbClr val="0D7490"/>
+                </a:solidFill>
+                <a:latin typeface="Helvetica Neue" pitchFamily="34" charset="0"/>
+                <a:ea typeface="Helvetica Neue" pitchFamily="34" charset="-122"/>
+                <a:cs typeface="Helvetica Neue" pitchFamily="34" charset="-120"/>
+              </a:rPr>
+              <a:t>THE SEASON AHEAD</a:t>
+            </a:r>
+            <a:endParaRPr lang="en-US" sz="1200" dirty="0"/>
+          </a:p>
+        </p:txBody>
+      </p:sp>
+      <p:sp>
+        <p:nvSpPr>
+          <p:cNvPr id="3" name="Text 1"/>
+          <p:cNvSpPr/>
+          <p:nvPr/>
+        </p:nvSpPr>
+        <p:spPr>
+          <a:xfrm>
+            <a:off x="804672" y="822960"/>
+            <a:ext cx="10515600" cy="868680"/>
+          </a:xfrm>
+          <a:prstGeom prst="rect">
+            <a:avLst/>
+          </a:prstGeom>
+          <a:noFill/>
+          <a:ln/>
+        </p:spPr>
+        <p:txBody>
+          <a:bodyPr wrap="square" lIns="0" tIns="0" rIns="0" bIns="0" rtlCol="0" anchor="ctr"/>
+          <a:lstStyle/>
+          <a:p>
+            <a:pPr indent="0" marL="0">
+              <a:lnSpc>
+                <a:spcPts val="3120"/>
+              </a:lnSpc>
+              <a:buNone/>
+            </a:pPr>
+            <a:r>
+              <a:rPr lang="en-US" sz="3000" b="1" dirty="0">
+                <a:solidFill>
+                  <a:srgbClr val="1D1D1F"/>
+                </a:solidFill>
+                <a:latin typeface="Helvetica Neue" pitchFamily="34" charset="0"/>
+                <a:ea typeface="Helvetica Neue" pitchFamily="34" charset="-122"/>
+                <a:cs typeface="Helvetica Neue" pitchFamily="34" charset="-120"/>
+              </a:rPr>
+              <a:t>What Phase 1 must produce.</a:t>
+            </a:r>
+            <a:endParaRPr lang="en-US" sz="3000" dirty="0"/>
+          </a:p>
+        </p:txBody>
+      </p:sp>
+      <p:sp>
+        <p:nvSpPr>
+          <p:cNvPr id="4" name="Shape 2"/>
+          <p:cNvSpPr/>
+          <p:nvPr/>
+        </p:nvSpPr>
+        <p:spPr>
+          <a:xfrm>
+            <a:off x="822960" y="1783080"/>
+            <a:ext cx="10545775" cy="1371600"/>
+          </a:xfrm>
+          <a:prstGeom prst="roundRect">
+            <a:avLst>
+              <a:gd name="adj" fmla="val 7333"/>
+            </a:avLst>
+          </a:prstGeom>
+          <a:solidFill>
+            <a:srgbClr val="095D75"/>
+          </a:solidFill>
+          <a:ln w="12700">
+            <a:solidFill>
+              <a:srgbClr val="095D75"/>
+            </a:solidFill>
+            <a:prstDash val="solid"/>
+          </a:ln>
+        </p:spPr>
+        <p:txBody>
+          <a:bodyPr/>
+          <a:p/>
+        </p:txBody>
+      </p:sp>
+      <p:sp>
+        <p:nvSpPr>
+          <p:cNvPr id="5" name="Text 3"/>
+          <p:cNvSpPr/>
+          <p:nvPr/>
+        </p:nvSpPr>
+        <p:spPr>
+          <a:xfrm>
+            <a:off x="1234440" y="1783080"/>
+            <a:ext cx="9692640" cy="1371600"/>
+          </a:xfrm>
+          <a:prstGeom prst="rect">
+            <a:avLst/>
+          </a:prstGeom>
+          <a:noFill/>
+          <a:ln/>
+        </p:spPr>
+        <p:txBody>
+          <a:bodyPr wrap="square" lIns="0" tIns="0" rIns="0" bIns="0" rtlCol="0" anchor="ctr"/>
+          <a:lstStyle/>
+          <a:p>
+            <a:pPr indent="0" marL="0">
+              <a:lnSpc>
+                <a:spcPts val="2700"/>
+              </a:lnSpc>
+              <a:buNone/>
+            </a:pPr>
+            <a:r>
+              <a:rPr lang="en-US" sz="2100" b="1" i="1" dirty="0">
+                <a:solidFill>
+                  <a:srgbClr val="FFFFFF"/>
+                </a:solidFill>
+                <a:latin typeface="Helvetica Neue" pitchFamily="34" charset="0"/>
+                <a:ea typeface="Helvetica Neue" pitchFamily="34" charset="-122"/>
+                <a:cs typeface="Helvetica Neue" pitchFamily="34" charset="-120"/>
+              </a:rPr>
+              <a:t>“The goal of Phase 1 is not a competition ROV. It is a team that exists.”</a:t>
+            </a:r>
+            <a:endParaRPr lang="en-US" sz="2100" dirty="0"/>
+          </a:p>
+        </p:txBody>
+      </p:sp>
+      <p:sp>
+        <p:nvSpPr>
+          <p:cNvPr id="6" name="Text 4"/>
+          <p:cNvSpPr/>
+          <p:nvPr/>
+        </p:nvSpPr>
+        <p:spPr>
+          <a:xfrm>
+            <a:off x="822960" y="3419856"/>
+            <a:ext cx="10515600" cy="457200"/>
+          </a:xfrm>
+          <a:prstGeom prst="rect">
+            <a:avLst/>
+          </a:prstGeom>
+          <a:noFill/>
+          <a:ln/>
+        </p:spPr>
+        <p:txBody>
+          <a:bodyPr wrap="square" lIns="0" tIns="0" rIns="0" bIns="0" rtlCol="0" anchor="ctr"/>
+          <a:lstStyle/>
+          <a:p>
+            <a:pPr indent="0" marL="0">
+              <a:buNone/>
+            </a:pPr>
+            <a:r>
+              <a:rPr lang="en-US" sz="1400" dirty="0">
+                <a:solidFill>
+                  <a:srgbClr val="6E6E73"/>
+                </a:solidFill>
+                <a:latin typeface="Helvetica Neue" pitchFamily="34" charset="0"/>
+                <a:ea typeface="Helvetica Neue" pitchFamily="34" charset="-122"/>
+                <a:cs typeface="Helvetica Neue" pitchFamily="34" charset="-120"/>
+              </a:rPr>
+              <a:t>By the end of July, three things are true — and only these three need to be true:</a:t>
+            </a:r>
+            <a:endParaRPr lang="en-US" sz="1400" dirty="0"/>
+          </a:p>
+        </p:txBody>
+      </p:sp>
+      <p:sp>
+        <p:nvSpPr>
+          <p:cNvPr id="7" name="Shape 5"/>
+          <p:cNvSpPr/>
+          <p:nvPr/>
+        </p:nvSpPr>
+        <p:spPr>
+          <a:xfrm>
+            <a:off x="822960" y="3931920"/>
+            <a:ext cx="3310128" cy="2057400"/>
+          </a:xfrm>
+          <a:prstGeom prst="roundRect">
+            <a:avLst>
+              <a:gd name="adj" fmla="val 4889"/>
+            </a:avLst>
+          </a:prstGeom>
+          <a:solidFill>
+            <a:srgbClr val="FBFBFD"/>
+          </a:solidFill>
+          <a:ln w="12700">
+            <a:solidFill>
+              <a:srgbClr val="E3E3E6"/>
+            </a:solidFill>
+            <a:prstDash val="solid"/>
+          </a:ln>
+        </p:spPr>
+        <p:txBody>
+          <a:bodyPr/>
+          <a:p/>
+        </p:txBody>
+      </p:sp>
+      <p:sp>
+        <p:nvSpPr>
+          <p:cNvPr id="8" name="Shape 6"/>
+          <p:cNvSpPr/>
+          <p:nvPr/>
+        </p:nvSpPr>
+        <p:spPr>
+          <a:xfrm>
+            <a:off x="1097280" y="4206240"/>
+            <a:ext cx="420624" cy="420624"/>
+          </a:xfrm>
+          <a:prstGeom prst="ellipse">
+            <a:avLst/>
+          </a:prstGeom>
+          <a:solidFill>
+            <a:srgbClr val="EAF2F4"/>
+          </a:solidFill>
+          <a:ln/>
+        </p:spPr>
+        <p:txBody>
+          <a:bodyPr/>
+          <a:p/>
+        </p:txBody>
+      </p:sp>
+      <p:sp>
+        <p:nvSpPr>
+          <p:cNvPr id="9" name="Text 7"/>
+          <p:cNvSpPr/>
+          <p:nvPr/>
+        </p:nvSpPr>
+        <p:spPr>
+          <a:xfrm>
+            <a:off x="1097280" y="4206240"/>
+            <a:ext cx="420624" cy="420624"/>
+          </a:xfrm>
+          <a:prstGeom prst="rect">
+            <a:avLst/>
+          </a:prstGeom>
+          <a:noFill/>
+          <a:ln/>
+        </p:spPr>
+        <p:txBody>
+          <a:bodyPr wrap="square" lIns="0" tIns="0" rIns="0" bIns="0" rtlCol="0" anchor="ctr"/>
+          <a:lstStyle/>
+          <a:p>
+            <a:pPr algn="ctr" indent="0" marL="0">
+              <a:buNone/>
+            </a:pPr>
+            <a:r>
+              <a:rPr lang="en-US" sz="1288" b="1" dirty="0">
+                <a:solidFill>
+                  <a:srgbClr val="0D7490"/>
+                </a:solidFill>
+                <a:latin typeface="Helvetica Neue" pitchFamily="34" charset="0"/>
+                <a:ea typeface="Helvetica Neue" pitchFamily="34" charset="-122"/>
+                <a:cs typeface="Helvetica Neue" pitchFamily="34" charset="-120"/>
+              </a:rPr>
+              <a:t>1</a:t>
+            </a:r>
+            <a:endParaRPr lang="en-US" sz="1288" dirty="0"/>
+          </a:p>
+        </p:txBody>
+      </p:sp>
+      <p:sp>
+        <p:nvSpPr>
+          <p:cNvPr id="10" name="Text 8"/>
+          <p:cNvSpPr/>
+          <p:nvPr/>
+        </p:nvSpPr>
+        <p:spPr>
+          <a:xfrm>
+            <a:off x="1097280" y="4773168"/>
+            <a:ext cx="2761488" cy="603504"/>
+          </a:xfrm>
+          <a:prstGeom prst="rect">
+            <a:avLst/>
+          </a:prstGeom>
+          <a:noFill/>
+          <a:ln/>
+        </p:spPr>
+        <p:txBody>
+          <a:bodyPr wrap="square" lIns="0" tIns="0" rIns="0" bIns="0" rtlCol="0" anchor="ctr"/>
+          <a:lstStyle/>
+          <a:p>
+            <a:pPr indent="0" marL="0">
+              <a:lnSpc>
+                <a:spcPts val="1700"/>
+              </a:lnSpc>
+              <a:buNone/>
+            </a:pPr>
+            <a:r>
+              <a:rPr lang="en-US" sz="1450" b="1" dirty="0">
+                <a:solidFill>
+                  <a:srgbClr val="1D1D1F"/>
+                </a:solidFill>
+                <a:latin typeface="Helvetica Neue" pitchFamily="34" charset="0"/>
+                <a:ea typeface="Helvetica Neue" pitchFamily="34" charset="-122"/>
+                <a:cs typeface="Helvetica Neue" pitchFamily="34" charset="-120"/>
+              </a:rPr>
+              <a:t>A team that exists</a:t>
+            </a:r>
+            <a:endParaRPr lang="en-US" sz="1450" dirty="0"/>
+          </a:p>
+        </p:txBody>
+      </p:sp>
+      <p:sp>
+        <p:nvSpPr>
+          <p:cNvPr id="11" name="Text 9"/>
+          <p:cNvSpPr/>
+          <p:nvPr/>
+        </p:nvSpPr>
+        <p:spPr>
+          <a:xfrm>
+            <a:off x="1097280" y="5303520"/>
+            <a:ext cx="2779776" cy="594360"/>
+          </a:xfrm>
+          <a:prstGeom prst="rect">
+            <a:avLst/>
+          </a:prstGeom>
+          <a:noFill/>
+          <a:ln/>
+        </p:spPr>
+        <p:txBody>
+          <a:bodyPr wrap="square" lIns="0" tIns="0" rIns="0" bIns="0" rtlCol="0" anchor="ctr"/>
+          <a:lstStyle/>
+          <a:p>
+            <a:pPr indent="0" marL="0">
+              <a:lnSpc>
+                <a:spcPts val="1450"/>
+              </a:lnSpc>
+              <a:buNone/>
+            </a:pPr>
+            <a:r>
+              <a:rPr lang="en-US" sz="1100" dirty="0">
+                <a:solidFill>
+                  <a:srgbClr val="6E6E73"/>
+                </a:solidFill>
+                <a:latin typeface="Helvetica Neue" pitchFamily="34" charset="0"/>
+                <a:ea typeface="Helvetica Neue" pitchFamily="34" charset="-122"/>
+                <a:cs typeface="Helvetica Neue" pitchFamily="34" charset="-120"/>
+              </a:rPr>
+              <a:t>Six roles filled, a meeting rhythm that holds, and a safety habit that is automatic.</a:t>
+            </a:r>
+            <a:endParaRPr lang="en-US" sz="1100" dirty="0"/>
+          </a:p>
+        </p:txBody>
+      </p:sp>
+      <p:sp>
+        <p:nvSpPr>
+          <p:cNvPr id="12" name="Shape 10"/>
+          <p:cNvSpPr/>
+          <p:nvPr/>
+        </p:nvSpPr>
+        <p:spPr>
+          <a:xfrm>
+            <a:off x="4434840" y="3931920"/>
+            <a:ext cx="3310128" cy="2057400"/>
+          </a:xfrm>
+          <a:prstGeom prst="roundRect">
+            <a:avLst>
+              <a:gd name="adj" fmla="val 4889"/>
+            </a:avLst>
+          </a:prstGeom>
+          <a:solidFill>
+            <a:srgbClr val="FBFBFD"/>
+          </a:solidFill>
+          <a:ln w="12700">
+            <a:solidFill>
+              <a:srgbClr val="E3E3E6"/>
+            </a:solidFill>
+            <a:prstDash val="solid"/>
+          </a:ln>
+        </p:spPr>
+        <p:txBody>
+          <a:bodyPr/>
+          <a:p/>
+        </p:txBody>
+      </p:sp>
+      <p:sp>
+        <p:nvSpPr>
+          <p:cNvPr id="13" name="Shape 11"/>
+          <p:cNvSpPr/>
+          <p:nvPr/>
+        </p:nvSpPr>
+        <p:spPr>
+          <a:xfrm>
+            <a:off x="4709160" y="4206240"/>
+            <a:ext cx="420624" cy="420624"/>
+          </a:xfrm>
+          <a:prstGeom prst="ellipse">
+            <a:avLst/>
+          </a:prstGeom>
+          <a:solidFill>
+            <a:srgbClr val="EAF2F4"/>
+          </a:solidFill>
+          <a:ln/>
+        </p:spPr>
+        <p:txBody>
+          <a:bodyPr/>
+          <a:p/>
+        </p:txBody>
+      </p:sp>
+      <p:sp>
+        <p:nvSpPr>
+          <p:cNvPr id="14" name="Text 12"/>
+          <p:cNvSpPr/>
+          <p:nvPr/>
+        </p:nvSpPr>
+        <p:spPr>
+          <a:xfrm>
+            <a:off x="4709160" y="4206240"/>
+            <a:ext cx="420624" cy="420624"/>
+          </a:xfrm>
+          <a:prstGeom prst="rect">
+            <a:avLst/>
+          </a:prstGeom>
+          <a:noFill/>
+          <a:ln/>
+        </p:spPr>
+        <p:txBody>
+          <a:bodyPr wrap="square" lIns="0" tIns="0" rIns="0" bIns="0" rtlCol="0" anchor="ctr"/>
+          <a:lstStyle/>
+          <a:p>
+            <a:pPr algn="ctr" indent="0" marL="0">
+              <a:buNone/>
+            </a:pPr>
+            <a:r>
+              <a:rPr lang="en-US" sz="1288" b="1" dirty="0">
+                <a:solidFill>
+                  <a:srgbClr val="0D7490"/>
+                </a:solidFill>
+                <a:latin typeface="Helvetica Neue" pitchFamily="34" charset="0"/>
+                <a:ea typeface="Helvetica Neue" pitchFamily="34" charset="-122"/>
+                <a:cs typeface="Helvetica Neue" pitchFamily="34" charset="-120"/>
+              </a:rPr>
+              <a:t>2</a:t>
+            </a:r>
+            <a:endParaRPr lang="en-US" sz="1288" dirty="0"/>
+          </a:p>
+        </p:txBody>
+      </p:sp>
+      <p:sp>
+        <p:nvSpPr>
+          <p:cNvPr id="15" name="Text 13"/>
+          <p:cNvSpPr/>
+          <p:nvPr/>
+        </p:nvSpPr>
+        <p:spPr>
+          <a:xfrm>
+            <a:off x="4709160" y="4773168"/>
+            <a:ext cx="2761488" cy="603504"/>
+          </a:xfrm>
+          <a:prstGeom prst="rect">
+            <a:avLst/>
+          </a:prstGeom>
+          <a:noFill/>
+          <a:ln/>
+        </p:spPr>
+        <p:txBody>
+          <a:bodyPr wrap="square" lIns="0" tIns="0" rIns="0" bIns="0" rtlCol="0" anchor="ctr"/>
+          <a:lstStyle/>
+          <a:p>
+            <a:pPr indent="0" marL="0">
+              <a:lnSpc>
+                <a:spcPts val="1700"/>
+              </a:lnSpc>
+              <a:buNone/>
+            </a:pPr>
+            <a:r>
+              <a:rPr lang="en-US" sz="1450" b="1" dirty="0">
+                <a:solidFill>
+                  <a:srgbClr val="1D1D1F"/>
+                </a:solidFill>
+                <a:latin typeface="Helvetica Neue" pitchFamily="34" charset="0"/>
+                <a:ea typeface="Helvetica Neue" pitchFamily="34" charset="-122"/>
+                <a:cs typeface="Helvetica Neue" pitchFamily="34" charset="-120"/>
+              </a:rPr>
+              <a:t>A starter ROV in the water</a:t>
+            </a:r>
+            <a:endParaRPr lang="en-US" sz="1450" dirty="0"/>
+          </a:p>
+        </p:txBody>
+      </p:sp>
+      <p:sp>
+        <p:nvSpPr>
+          <p:cNvPr id="16" name="Text 14"/>
+          <p:cNvSpPr/>
+          <p:nvPr/>
+        </p:nvSpPr>
+        <p:spPr>
+          <a:xfrm>
+            <a:off x="4709160" y="5303520"/>
+            <a:ext cx="2779776" cy="594360"/>
+          </a:xfrm>
+          <a:prstGeom prst="rect">
+            <a:avLst/>
+          </a:prstGeom>
+          <a:noFill/>
+          <a:ln/>
+        </p:spPr>
+        <p:txBody>
+          <a:bodyPr wrap="square" lIns="0" tIns="0" rIns="0" bIns="0" rtlCol="0" anchor="ctr"/>
+          <a:lstStyle/>
+          <a:p>
+            <a:pPr indent="0" marL="0">
+              <a:lnSpc>
+                <a:spcPts val="1450"/>
+              </a:lnSpc>
+              <a:buNone/>
+            </a:pPr>
+            <a:r>
+              <a:rPr lang="en-US" sz="1100" dirty="0">
+                <a:solidFill>
+                  <a:srgbClr val="6E6E73"/>
+                </a:solidFill>
+                <a:latin typeface="Helvetica Neue" pitchFamily="34" charset="0"/>
+                <a:ea typeface="Helvetica Neue" pitchFamily="34" charset="-122"/>
+                <a:cs typeface="Helvetica Neue" pitchFamily="34" charset="-120"/>
+              </a:rPr>
+              <a:t>The SeaMATE Triggerfish built and swimming — every member has piloted it.</a:t>
+            </a:r>
+            <a:endParaRPr lang="en-US" sz="1100" dirty="0"/>
+          </a:p>
+        </p:txBody>
+      </p:sp>
+      <p:sp>
+        <p:nvSpPr>
+          <p:cNvPr id="17" name="Shape 15"/>
+          <p:cNvSpPr/>
+          <p:nvPr/>
+        </p:nvSpPr>
+        <p:spPr>
+          <a:xfrm>
+            <a:off x="8046720" y="3931920"/>
+            <a:ext cx="3310128" cy="2057400"/>
+          </a:xfrm>
+          <a:prstGeom prst="roundRect">
+            <a:avLst>
+              <a:gd name="adj" fmla="val 4889"/>
+            </a:avLst>
+          </a:prstGeom>
+          <a:solidFill>
+            <a:srgbClr val="FBFBFD"/>
+          </a:solidFill>
+          <a:ln w="12700">
+            <a:solidFill>
+              <a:srgbClr val="E3E3E6"/>
+            </a:solidFill>
+            <a:prstDash val="solid"/>
+          </a:ln>
+        </p:spPr>
+        <p:txBody>
+          <a:bodyPr/>
+          <a:p/>
+        </p:txBody>
+      </p:sp>
+      <p:sp>
+        <p:nvSpPr>
+          <p:cNvPr id="18" name="Shape 16"/>
+          <p:cNvSpPr/>
+          <p:nvPr/>
+        </p:nvSpPr>
+        <p:spPr>
+          <a:xfrm>
+            <a:off x="8321040" y="4206240"/>
+            <a:ext cx="420624" cy="420624"/>
+          </a:xfrm>
+          <a:prstGeom prst="ellipse">
+            <a:avLst/>
+          </a:prstGeom>
+          <a:solidFill>
+            <a:srgbClr val="EAF2F4"/>
+          </a:solidFill>
+          <a:ln/>
+        </p:spPr>
+        <p:txBody>
+          <a:bodyPr/>
+          <a:p/>
+        </p:txBody>
+      </p:sp>
+      <p:sp>
+        <p:nvSpPr>
+          <p:cNvPr id="19" name="Text 17"/>
+          <p:cNvSpPr/>
+          <p:nvPr/>
+        </p:nvSpPr>
+        <p:spPr>
+          <a:xfrm>
+            <a:off x="8321040" y="4206240"/>
+            <a:ext cx="420624" cy="420624"/>
+          </a:xfrm>
+          <a:prstGeom prst="rect">
+            <a:avLst/>
+          </a:prstGeom>
+          <a:noFill/>
+          <a:ln/>
+        </p:spPr>
+        <p:txBody>
+          <a:bodyPr wrap="square" lIns="0" tIns="0" rIns="0" bIns="0" rtlCol="0" anchor="ctr"/>
+          <a:lstStyle/>
+          <a:p>
+            <a:pPr algn="ctr" indent="0" marL="0">
+              <a:buNone/>
+            </a:pPr>
+            <a:r>
+              <a:rPr lang="en-US" sz="1288" b="1" dirty="0">
+                <a:solidFill>
+                  <a:srgbClr val="0D7490"/>
+                </a:solidFill>
+                <a:latin typeface="Helvetica Neue" pitchFamily="34" charset="0"/>
+                <a:ea typeface="Helvetica Neue" pitchFamily="34" charset="-122"/>
+                <a:cs typeface="Helvetica Neue" pitchFamily="34" charset="-120"/>
+              </a:rPr>
+              <a:t>3</a:t>
+            </a:r>
+            <a:endParaRPr lang="en-US" sz="1288" dirty="0"/>
+          </a:p>
+        </p:txBody>
+      </p:sp>
+      <p:sp>
+        <p:nvSpPr>
+          <p:cNvPr id="20" name="Text 18"/>
+          <p:cNvSpPr/>
+          <p:nvPr/>
+        </p:nvSpPr>
+        <p:spPr>
+          <a:xfrm>
+            <a:off x="8321040" y="4773168"/>
+            <a:ext cx="2761488" cy="603504"/>
+          </a:xfrm>
+          <a:prstGeom prst="rect">
+            <a:avLst/>
+          </a:prstGeom>
+          <a:noFill/>
+          <a:ln/>
+        </p:spPr>
+        <p:txBody>
+          <a:bodyPr wrap="square" lIns="0" tIns="0" rIns="0" bIns="0" rtlCol="0" anchor="ctr"/>
+          <a:lstStyle/>
+          <a:p>
+            <a:pPr indent="0" marL="0">
+              <a:lnSpc>
+                <a:spcPts val="1700"/>
+              </a:lnSpc>
+              <a:buNone/>
+            </a:pPr>
+            <a:r>
+              <a:rPr lang="en-US" sz="1450" b="1" dirty="0">
+                <a:solidFill>
+                  <a:srgbClr val="1D1D1F"/>
+                </a:solidFill>
+                <a:latin typeface="Helvetica Neue" pitchFamily="34" charset="0"/>
+                <a:ea typeface="Helvetica Neue" pitchFamily="34" charset="-122"/>
+                <a:cs typeface="Helvetica Neue" pitchFamily="34" charset="-120"/>
+              </a:rPr>
+              <a:t>Kids who have soldered</a:t>
+            </a:r>
+            <a:endParaRPr lang="en-US" sz="1450" dirty="0"/>
+          </a:p>
+        </p:txBody>
+      </p:sp>
+      <p:sp>
+        <p:nvSpPr>
+          <p:cNvPr id="21" name="Text 19"/>
+          <p:cNvSpPr/>
+          <p:nvPr/>
+        </p:nvSpPr>
+        <p:spPr>
+          <a:xfrm>
+            <a:off x="8321040" y="5303520"/>
+            <a:ext cx="2779776" cy="594360"/>
+          </a:xfrm>
+          <a:prstGeom prst="rect">
+            <a:avLst/>
+          </a:prstGeom>
+          <a:noFill/>
+          <a:ln/>
+        </p:spPr>
+        <p:txBody>
+          <a:bodyPr wrap="square" lIns="0" tIns="0" rIns="0" bIns="0" rtlCol="0" anchor="ctr"/>
+          <a:lstStyle/>
+          <a:p>
+            <a:pPr indent="0" marL="0">
+              <a:lnSpc>
+                <a:spcPts val="1450"/>
+              </a:lnSpc>
+              <a:buNone/>
+            </a:pPr>
+            <a:r>
+              <a:rPr lang="en-US" sz="1100" dirty="0">
+                <a:solidFill>
+                  <a:srgbClr val="6E6E73"/>
+                </a:solidFill>
+                <a:latin typeface="Helvetica Neue" pitchFamily="34" charset="0"/>
+                <a:ea typeface="Helvetica Neue" pitchFamily="34" charset="-122"/>
+                <a:cs typeface="Helvetica Neue" pitchFamily="34" charset="-120"/>
+              </a:rPr>
+              <a:t>Real hands-on skill: a clean joint, a sealed capsule, a multimeter read correctly.</a:t>
+            </a:r>
+            <a:endParaRPr lang="en-US" sz="1100" dirty="0"/>
+          </a:p>
+        </p:txBody>
+      </p:sp>
+      <p:sp>
+        <p:nvSpPr>
+          <p:cNvPr id="22" name="Shape 20"/>
+          <p:cNvSpPr/>
+          <p:nvPr/>
+        </p:nvSpPr>
+        <p:spPr>
+          <a:xfrm>
+            <a:off x="822960" y="6437376"/>
+            <a:ext cx="10545775" cy="0"/>
+          </a:xfrm>
+          <a:prstGeom prst="line">
+            <a:avLst/>
+          </a:prstGeom>
+          <a:noFill/>
+          <a:ln w="9525">
+            <a:solidFill>
+              <a:srgbClr val="E3E3E6"/>
+            </a:solidFill>
+            <a:prstDash val="solid"/>
+          </a:ln>
+        </p:spPr>
+        <p:txBody>
+          <a:bodyPr/>
+          <a:p/>
+        </p:txBody>
+      </p:sp>
+      <p:sp>
+        <p:nvSpPr>
+          <p:cNvPr id="23" name="Text 21"/>
+          <p:cNvSpPr/>
+          <p:nvPr/>
+        </p:nvSpPr>
+        <p:spPr>
+          <a:xfrm>
+            <a:off x="822960" y="6473952"/>
+            <a:ext cx="5486400" cy="274320"/>
+          </a:xfrm>
+          <a:prstGeom prst="rect">
+            <a:avLst/>
+          </a:prstGeom>
+          <a:noFill/>
+          <a:ln/>
+        </p:spPr>
+        <p:txBody>
+          <a:bodyPr wrap="square" lIns="0" tIns="0" rIns="0" bIns="0" rtlCol="0" anchor="ctr"/>
+          <a:lstStyle/>
+          <a:p>
+            <a:pPr indent="0" marL="0">
+              <a:buNone/>
+            </a:pPr>
+            <a:r>
+              <a:rPr lang="en-US" sz="750" spc="150" kern="0" dirty="0">
+                <a:solidFill>
+                  <a:srgbClr val="86868B"/>
+                </a:solidFill>
+                <a:latin typeface="Helvetica Neue" pitchFamily="34" charset="0"/>
+                <a:ea typeface="Helvetica Neue" pitchFamily="34" charset="-122"/>
+                <a:cs typeface="Helvetica Neue" pitchFamily="34" charset="-120"/>
+              </a:rPr>
+              <a:t>SAY WATT ROBOTICS  ·  ROV TEAM</a:t>
+            </a:r>
+            <a:endParaRPr lang="en-US" sz="750" dirty="0"/>
+          </a:p>
+        </p:txBody>
+      </p:sp>
+      <p:sp>
+        <p:nvSpPr>
+          <p:cNvPr id="24" name="Text 22"/>
+          <p:cNvSpPr/>
+          <p:nvPr/>
+        </p:nvSpPr>
+        <p:spPr>
+          <a:xfrm>
+            <a:off x="5882335" y="6473952"/>
+            <a:ext cx="5486400" cy="274320"/>
+          </a:xfrm>
+          <a:prstGeom prst="rect">
+            <a:avLst/>
+          </a:prstGeom>
+          <a:noFill/>
+          <a:ln/>
+        </p:spPr>
+        <p:txBody>
+          <a:bodyPr wrap="square" lIns="0" tIns="0" rIns="0" bIns="0" rtlCol="0" anchor="ctr"/>
+          <a:lstStyle/>
+          <a:p>
+            <a:pPr algn="r" indent="0" marL="0">
+              <a:buNone/>
+            </a:pPr>
+            <a:r>
+              <a:rPr lang="en-US" sz="750" spc="150" kern="0" dirty="0">
+                <a:solidFill>
+                  <a:srgbClr val="86868B"/>
+                </a:solidFill>
+                <a:latin typeface="Helvetica Neue" pitchFamily="34" charset="0"/>
+                <a:ea typeface="Helvetica Neue" pitchFamily="34" charset="-122"/>
+                <a:cs typeface="Helvetica Neue" pitchFamily="34" charset="-120"/>
+              </a:rPr>
+              <a:t>WEEK 1 — KICKOFF   ·   20 / 29</a:t>
+            </a:r>
+            <a:endParaRPr lang="en-US" sz="750" dirty="0"/>
+          </a:p>
+        </p:txBody>
+      </p:sp>
+    </p:spTree>
+  </p:cSld>
+  <p:clrMapOvr>
+    <a:masterClrMapping/>
+  </p:clrMapOvr>
+</p:sld>
+</file>
+
+<file path=ppt/slides/slide21.xml><?xml version="1.0" encoding="utf-8"?>
+<p:sld xmlns:a="http://schemas.openxmlformats.org/drawingml/2006/main" xmlns:r="http://schemas.openxmlformats.org/officeDocument/2006/relationships" xmlns:p="http://schemas.openxmlformats.org/presentationml/2006/main">
   <p:cSld name="Slide 20">
     <p:bg>
       <p:bgPr>
@@ -15426,7 +15834,7 @@
 </p:sld>
 </file>
 
-<file path=ppt/slides/slide21.xml><?xml version="1.0" encoding="utf-8"?>
+<file path=ppt/slides/slide22.xml><?xml version="1.0" encoding="utf-8"?>
 <p:sld xmlns:a="http://schemas.openxmlformats.org/drawingml/2006/main" xmlns:r="http://schemas.openxmlformats.org/officeDocument/2006/relationships" xmlns:p="http://schemas.openxmlformats.org/presentationml/2006/main">
   <p:cSld name="Slide 21">
     <p:bg>
@@ -16586,7 +16994,7 @@
 </p:sld>
 </file>
 
-<file path=ppt/slides/slide22.xml><?xml version="1.0" encoding="utf-8"?>
+<file path=ppt/slides/slide23.xml><?xml version="1.0" encoding="utf-8"?>
 <p:sld xmlns:a="http://schemas.openxmlformats.org/drawingml/2006/main" xmlns:r="http://schemas.openxmlformats.org/officeDocument/2006/relationships" xmlns:p="http://schemas.openxmlformats.org/presentationml/2006/main">
   <p:cSld name="Slide 22">
     <p:bg>
@@ -16994,7 +17402,7 @@
 </p:sld>
 </file>
 
-<file path=ppt/slides/slide23.xml><?xml version="1.0" encoding="utf-8"?>
+<file path=ppt/slides/slide24.xml><?xml version="1.0" encoding="utf-8"?>
 <p:sld xmlns:a="http://schemas.openxmlformats.org/drawingml/2006/main" xmlns:r="http://schemas.openxmlformats.org/officeDocument/2006/relationships" xmlns:p="http://schemas.openxmlformats.org/presentationml/2006/main">
   <p:cSld name="Slide 23">
     <p:bg>
@@ -18139,7 +18547,7 @@
 </p:sld>
 </file>
 
-<file path=ppt/slides/slide24.xml><?xml version="1.0" encoding="utf-8"?>
+<file path=ppt/slides/slide25.xml><?xml version="1.0" encoding="utf-8"?>
 <p:sld xmlns:a="http://schemas.openxmlformats.org/drawingml/2006/main" xmlns:r="http://schemas.openxmlformats.org/officeDocument/2006/relationships" xmlns:p="http://schemas.openxmlformats.org/presentationml/2006/main">
   <p:cSld name="Slide 24">
     <p:bg>
@@ -18547,7 +18955,7 @@
 </p:sld>
 </file>
 
-<file path=ppt/slides/slide25.xml><?xml version="1.0" encoding="utf-8"?>
+<file path=ppt/slides/slide26.xml><?xml version="1.0" encoding="utf-8"?>
 <p:sld xmlns:a="http://schemas.openxmlformats.org/drawingml/2006/main" xmlns:r="http://schemas.openxmlformats.org/officeDocument/2006/relationships" xmlns:p="http://schemas.openxmlformats.org/presentationml/2006/main">
   <p:cSld name="Slide 25">
     <p:bg>
@@ -19401,7 +19809,2149 @@
 </p:sld>
 </file>
 
-<file path=ppt/slides/slide26.xml><?xml version="1.0" encoding="utf-8"?>
+<file path=ppt/slides/slide27.xml><?xml version="1.0" encoding="utf-8"?>
+<p:sld xmlns:a="http://schemas.openxmlformats.org/drawingml/2006/main" xmlns:p="http://schemas.openxmlformats.org/presentationml/2006/main" xmlns:r="http://schemas.openxmlformats.org/officeDocument/2006/relationships">
+  <p:cSld>
+    <p:spTree>
+      <p:nvGrpSpPr>
+        <p:cNvPr id="1" name=""/>
+        <p:cNvGrpSpPr/>
+        <p:nvPr/>
+      </p:nvGrpSpPr>
+      <p:grpSpPr/>
+      <p:sp>
+        <p:nvSpPr>
+          <p:cNvPr id="2" name="TextBox 1"/>
+          <p:cNvSpPr txBox="1"/>
+          <p:nvPr/>
+        </p:nvSpPr>
+        <p:spPr>
+          <a:xfrm>
+            <a:off x="822960" y="530352"/>
+            <a:ext cx="10515600" cy="292608"/>
+          </a:xfrm>
+          <a:prstGeom prst="rect">
+            <a:avLst/>
+          </a:prstGeom>
+          <a:noFill/>
+        </p:spPr>
+        <p:txBody>
+          <a:bodyPr wrap="square" lIns="0" rIns="0" tIns="0" bIns="0" anchor="t">
+            <a:spAutoFit/>
+          </a:bodyPr>
+          <a:lstStyle/>
+          <a:p>
+            <a:pPr algn="l"/>
+            <a:r>
+              <a:rPr sz="1200" b="1" i="0" cap="all" spc="180">
+                <a:solidFill>
+                  <a:srgbClr val="0D7490"/>
+                </a:solidFill>
+                <a:latin typeface="Helvetica Neue"/>
+              </a:rPr>
+              <a:t>ACTION ITEMS</a:t>
+            </a:r>
+          </a:p>
+        </p:txBody>
+      </p:sp>
+      <p:sp>
+        <p:nvSpPr>
+          <p:cNvPr id="3" name="TextBox 2"/>
+          <p:cNvSpPr txBox="1"/>
+          <p:nvPr/>
+        </p:nvSpPr>
+        <p:spPr>
+          <a:xfrm>
+            <a:off x="804672" y="822960"/>
+            <a:ext cx="10515600" cy="868680"/>
+          </a:xfrm>
+          <a:prstGeom prst="rect">
+            <a:avLst/>
+          </a:prstGeom>
+          <a:noFill/>
+        </p:spPr>
+        <p:txBody>
+          <a:bodyPr wrap="square" lIns="0" rIns="0" tIns="0" bIns="0" anchor="t">
+            <a:spAutoFit/>
+          </a:bodyPr>
+          <a:lstStyle/>
+          <a:p>
+            <a:pPr algn="l">
+              <a:lnSpc>
+                <a:spcPct val="105000"/>
+              </a:lnSpc>
+            </a:pPr>
+            <a:r>
+              <a:rPr sz="3000" b="1" i="0">
+                <a:solidFill>
+                  <a:srgbClr val="1D1D1F"/>
+                </a:solidFill>
+                <a:latin typeface="Helvetica Neue"/>
+              </a:rPr>
+              <a:t>What we decided. Who owns it. When it's due.</a:t>
+            </a:r>
+          </a:p>
+        </p:txBody>
+      </p:sp>
+      <p:sp>
+        <p:nvSpPr>
+          <p:cNvPr id="4" name="TextBox 3"/>
+          <p:cNvSpPr txBox="1"/>
+          <p:nvPr/>
+        </p:nvSpPr>
+        <p:spPr>
+          <a:xfrm>
+            <a:off x="822960" y="1700784"/>
+            <a:ext cx="10515600" cy="457200"/>
+          </a:xfrm>
+          <a:prstGeom prst="rect">
+            <a:avLst/>
+          </a:prstGeom>
+          <a:noFill/>
+        </p:spPr>
+        <p:txBody>
+          <a:bodyPr wrap="square" lIns="0" rIns="0" tIns="0" bIns="0" anchor="t">
+            <a:spAutoFit/>
+          </a:bodyPr>
+          <a:lstStyle/>
+          <a:p>
+            <a:pPr algn="l"/>
+            <a:r>
+              <a:rPr sz="1400" b="0" i="1">
+                <a:solidFill>
+                  <a:srgbClr val="6E6E73"/>
+                </a:solidFill>
+                <a:latin typeface="Helvetica Neue"/>
+              </a:rPr>
+              <a:t>The Notetaker fills these in during the meeting and reads them back before we leave.</a:t>
+            </a:r>
+          </a:p>
+        </p:txBody>
+      </p:sp>
+      <p:sp>
+        <p:nvSpPr>
+          <p:cNvPr id="5" name="Rectangle 4"/>
+          <p:cNvSpPr/>
+          <p:nvPr/>
+        </p:nvSpPr>
+        <p:spPr>
+          <a:xfrm>
+            <a:off x="822960" y="2423160"/>
+            <a:ext cx="10543032" cy="384048"/>
+          </a:xfrm>
+          <a:prstGeom prst="rect">
+            <a:avLst/>
+          </a:prstGeom>
+          <a:solidFill>
+            <a:srgbClr val="0D7490"/>
+          </a:solidFill>
+          <a:ln>
+            <a:noFill/>
+          </a:ln>
+        </p:spPr>
+        <p:style>
+          <a:lnRef idx="1">
+            <a:schemeClr val="accent1"/>
+          </a:lnRef>
+          <a:fillRef idx="3">
+            <a:schemeClr val="accent1"/>
+          </a:fillRef>
+          <a:effectRef idx="2">
+            <a:schemeClr val="accent1"/>
+          </a:effectRef>
+          <a:fontRef idx="minor">
+            <a:schemeClr val="lt1"/>
+          </a:fontRef>
+        </p:style>
+        <p:txBody>
+          <a:bodyPr rtlCol="0" anchor="ctr"/>
+          <a:lstStyle/>
+          <a:p>
+            <a:pPr algn="ctr"/>
+          </a:p>
+        </p:txBody>
+      </p:sp>
+      <p:sp>
+        <p:nvSpPr>
+          <p:cNvPr id="6" name="TextBox 5"/>
+          <p:cNvSpPr txBox="1"/>
+          <p:nvPr/>
+        </p:nvSpPr>
+        <p:spPr>
+          <a:xfrm>
+            <a:off x="1024128" y="2459736"/>
+            <a:ext cx="5486400" cy="310896"/>
+          </a:xfrm>
+          <a:prstGeom prst="rect">
+            <a:avLst/>
+          </a:prstGeom>
+          <a:noFill/>
+        </p:spPr>
+        <p:txBody>
+          <a:bodyPr wrap="square" lIns="0" rIns="0" tIns="0" bIns="0" anchor="t">
+            <a:spAutoFit/>
+          </a:bodyPr>
+          <a:lstStyle/>
+          <a:p>
+            <a:pPr algn="l"/>
+            <a:r>
+              <a:rPr sz="1000" b="1" i="0" cap="all" spc="180">
+                <a:solidFill>
+                  <a:srgbClr val="FFFFFF"/>
+                </a:solidFill>
+                <a:latin typeface="Helvetica Neue"/>
+              </a:rPr>
+              <a:t>ITEM</a:t>
+            </a:r>
+          </a:p>
+        </p:txBody>
+      </p:sp>
+      <p:sp>
+        <p:nvSpPr>
+          <p:cNvPr id="7" name="TextBox 6"/>
+          <p:cNvSpPr txBox="1"/>
+          <p:nvPr/>
+        </p:nvSpPr>
+        <p:spPr>
+          <a:xfrm>
+            <a:off x="6784848" y="2459736"/>
+            <a:ext cx="2011680" cy="310896"/>
+          </a:xfrm>
+          <a:prstGeom prst="rect">
+            <a:avLst/>
+          </a:prstGeom>
+          <a:noFill/>
+        </p:spPr>
+        <p:txBody>
+          <a:bodyPr wrap="square" lIns="0" rIns="0" tIns="0" bIns="0" anchor="t">
+            <a:spAutoFit/>
+          </a:bodyPr>
+          <a:lstStyle/>
+          <a:p>
+            <a:pPr algn="l"/>
+            <a:r>
+              <a:rPr sz="1000" b="1" i="0" cap="all" spc="180">
+                <a:solidFill>
+                  <a:srgbClr val="FFFFFF"/>
+                </a:solidFill>
+                <a:latin typeface="Helvetica Neue"/>
+              </a:rPr>
+              <a:t>OWNER</a:t>
+            </a:r>
+          </a:p>
+        </p:txBody>
+      </p:sp>
+      <p:sp>
+        <p:nvSpPr>
+          <p:cNvPr id="8" name="TextBox 7"/>
+          <p:cNvSpPr txBox="1"/>
+          <p:nvPr/>
+        </p:nvSpPr>
+        <p:spPr>
+          <a:xfrm>
+            <a:off x="9070848" y="2459736"/>
+            <a:ext cx="2221992" cy="310896"/>
+          </a:xfrm>
+          <a:prstGeom prst="rect">
+            <a:avLst/>
+          </a:prstGeom>
+          <a:noFill/>
+        </p:spPr>
+        <p:txBody>
+          <a:bodyPr wrap="square" lIns="0" rIns="0" tIns="0" bIns="0" anchor="t">
+            <a:spAutoFit/>
+          </a:bodyPr>
+          <a:lstStyle/>
+          <a:p>
+            <a:pPr algn="l"/>
+            <a:r>
+              <a:rPr sz="1000" b="1" i="0" cap="all" spc="180">
+                <a:solidFill>
+                  <a:srgbClr val="FFFFFF"/>
+                </a:solidFill>
+                <a:latin typeface="Helvetica Neue"/>
+              </a:rPr>
+              <a:t>DUE</a:t>
+            </a:r>
+          </a:p>
+        </p:txBody>
+      </p:sp>
+      <p:cxnSp>
+        <p:nvCxnSpPr>
+          <p:cNvPr id="9" name="Connector 8"/>
+          <p:cNvCxnSpPr/>
+          <p:nvPr/>
+        </p:nvCxnSpPr>
+        <p:spPr>
+          <a:xfrm>
+            <a:off x="822960" y="3374136"/>
+            <a:ext cx="10543032" cy="0"/>
+          </a:xfrm>
+          <a:prstGeom prst="line">
+            <a:avLst/>
+          </a:prstGeom>
+          <a:ln w="6350">
+            <a:solidFill>
+              <a:srgbClr val="E3E3E6"/>
+            </a:solidFill>
+          </a:ln>
+        </p:spPr>
+        <p:style>
+          <a:lnRef idx="2">
+            <a:schemeClr val="accent1"/>
+          </a:lnRef>
+          <a:fillRef idx="0">
+            <a:schemeClr val="accent1"/>
+          </a:fillRef>
+          <a:effectRef idx="1">
+            <a:schemeClr val="accent1"/>
+          </a:effectRef>
+          <a:fontRef idx="minor">
+            <a:schemeClr val="tx1"/>
+          </a:fontRef>
+        </p:style>
+      </p:cxnSp>
+      <p:cxnSp>
+        <p:nvCxnSpPr>
+          <p:cNvPr id="10" name="Connector 9"/>
+          <p:cNvCxnSpPr/>
+          <p:nvPr/>
+        </p:nvCxnSpPr>
+        <p:spPr>
+          <a:xfrm>
+            <a:off x="6583680" y="2807208"/>
+            <a:ext cx="0" cy="566928"/>
+          </a:xfrm>
+          <a:prstGeom prst="line">
+            <a:avLst/>
+          </a:prstGeom>
+          <a:ln w="6350">
+            <a:solidFill>
+              <a:srgbClr val="E3E3E6"/>
+            </a:solidFill>
+          </a:ln>
+        </p:spPr>
+        <p:style>
+          <a:lnRef idx="2">
+            <a:schemeClr val="accent1"/>
+          </a:lnRef>
+          <a:fillRef idx="0">
+            <a:schemeClr val="accent1"/>
+          </a:fillRef>
+          <a:effectRef idx="1">
+            <a:schemeClr val="accent1"/>
+          </a:effectRef>
+          <a:fontRef idx="minor">
+            <a:schemeClr val="tx1"/>
+          </a:fontRef>
+        </p:style>
+      </p:cxnSp>
+      <p:cxnSp>
+        <p:nvCxnSpPr>
+          <p:cNvPr id="11" name="Connector 10"/>
+          <p:cNvCxnSpPr/>
+          <p:nvPr/>
+        </p:nvCxnSpPr>
+        <p:spPr>
+          <a:xfrm>
+            <a:off x="8869680" y="2807208"/>
+            <a:ext cx="0" cy="566928"/>
+          </a:xfrm>
+          <a:prstGeom prst="line">
+            <a:avLst/>
+          </a:prstGeom>
+          <a:ln w="6350">
+            <a:solidFill>
+              <a:srgbClr val="E3E3E6"/>
+            </a:solidFill>
+          </a:ln>
+        </p:spPr>
+        <p:style>
+          <a:lnRef idx="2">
+            <a:schemeClr val="accent1"/>
+          </a:lnRef>
+          <a:fillRef idx="0">
+            <a:schemeClr val="accent1"/>
+          </a:fillRef>
+          <a:effectRef idx="1">
+            <a:schemeClr val="accent1"/>
+          </a:effectRef>
+          <a:fontRef idx="minor">
+            <a:schemeClr val="tx1"/>
+          </a:fontRef>
+        </p:style>
+      </p:cxnSp>
+      <p:cxnSp>
+        <p:nvCxnSpPr>
+          <p:cNvPr id="12" name="Connector 11"/>
+          <p:cNvCxnSpPr/>
+          <p:nvPr/>
+        </p:nvCxnSpPr>
+        <p:spPr>
+          <a:xfrm>
+            <a:off x="1024128" y="3209544"/>
+            <a:ext cx="5358384" cy="0"/>
+          </a:xfrm>
+          <a:prstGeom prst="line">
+            <a:avLst/>
+          </a:prstGeom>
+          <a:ln w="4445">
+            <a:solidFill>
+              <a:srgbClr val="E3E3E6"/>
+            </a:solidFill>
+          </a:ln>
+        </p:spPr>
+        <p:style>
+          <a:lnRef idx="2">
+            <a:schemeClr val="accent1"/>
+          </a:lnRef>
+          <a:fillRef idx="0">
+            <a:schemeClr val="accent1"/>
+          </a:fillRef>
+          <a:effectRef idx="1">
+            <a:schemeClr val="accent1"/>
+          </a:effectRef>
+          <a:fontRef idx="minor">
+            <a:schemeClr val="tx1"/>
+          </a:fontRef>
+        </p:style>
+      </p:cxnSp>
+      <p:cxnSp>
+        <p:nvCxnSpPr>
+          <p:cNvPr id="13" name="Connector 12"/>
+          <p:cNvCxnSpPr/>
+          <p:nvPr/>
+        </p:nvCxnSpPr>
+        <p:spPr>
+          <a:xfrm>
+            <a:off x="6784848" y="3209544"/>
+            <a:ext cx="1883664" cy="0"/>
+          </a:xfrm>
+          <a:prstGeom prst="line">
+            <a:avLst/>
+          </a:prstGeom>
+          <a:ln w="4445">
+            <a:solidFill>
+              <a:srgbClr val="E3E3E6"/>
+            </a:solidFill>
+          </a:ln>
+        </p:spPr>
+        <p:style>
+          <a:lnRef idx="2">
+            <a:schemeClr val="accent1"/>
+          </a:lnRef>
+          <a:fillRef idx="0">
+            <a:schemeClr val="accent1"/>
+          </a:fillRef>
+          <a:effectRef idx="1">
+            <a:schemeClr val="accent1"/>
+          </a:effectRef>
+          <a:fontRef idx="minor">
+            <a:schemeClr val="tx1"/>
+          </a:fontRef>
+        </p:style>
+      </p:cxnSp>
+      <p:cxnSp>
+        <p:nvCxnSpPr>
+          <p:cNvPr id="14" name="Connector 13"/>
+          <p:cNvCxnSpPr/>
+          <p:nvPr/>
+        </p:nvCxnSpPr>
+        <p:spPr>
+          <a:xfrm>
+            <a:off x="9070848" y="3209544"/>
+            <a:ext cx="2093976" cy="0"/>
+          </a:xfrm>
+          <a:prstGeom prst="line">
+            <a:avLst/>
+          </a:prstGeom>
+          <a:ln w="4445">
+            <a:solidFill>
+              <a:srgbClr val="E3E3E6"/>
+            </a:solidFill>
+          </a:ln>
+        </p:spPr>
+        <p:style>
+          <a:lnRef idx="2">
+            <a:schemeClr val="accent1"/>
+          </a:lnRef>
+          <a:fillRef idx="0">
+            <a:schemeClr val="accent1"/>
+          </a:fillRef>
+          <a:effectRef idx="1">
+            <a:schemeClr val="accent1"/>
+          </a:effectRef>
+          <a:fontRef idx="minor">
+            <a:schemeClr val="tx1"/>
+          </a:fontRef>
+        </p:style>
+      </p:cxnSp>
+      <p:cxnSp>
+        <p:nvCxnSpPr>
+          <p:cNvPr id="15" name="Connector 14"/>
+          <p:cNvCxnSpPr/>
+          <p:nvPr/>
+        </p:nvCxnSpPr>
+        <p:spPr>
+          <a:xfrm>
+            <a:off x="822960" y="3941063"/>
+            <a:ext cx="10543032" cy="0"/>
+          </a:xfrm>
+          <a:prstGeom prst="line">
+            <a:avLst/>
+          </a:prstGeom>
+          <a:ln w="6350">
+            <a:solidFill>
+              <a:srgbClr val="E3E3E6"/>
+            </a:solidFill>
+          </a:ln>
+        </p:spPr>
+        <p:style>
+          <a:lnRef idx="2">
+            <a:schemeClr val="accent1"/>
+          </a:lnRef>
+          <a:fillRef idx="0">
+            <a:schemeClr val="accent1"/>
+          </a:fillRef>
+          <a:effectRef idx="1">
+            <a:schemeClr val="accent1"/>
+          </a:effectRef>
+          <a:fontRef idx="minor">
+            <a:schemeClr val="tx1"/>
+          </a:fontRef>
+        </p:style>
+      </p:cxnSp>
+      <p:cxnSp>
+        <p:nvCxnSpPr>
+          <p:cNvPr id="16" name="Connector 15"/>
+          <p:cNvCxnSpPr/>
+          <p:nvPr/>
+        </p:nvCxnSpPr>
+        <p:spPr>
+          <a:xfrm>
+            <a:off x="6583680" y="3374136"/>
+            <a:ext cx="0" cy="566927"/>
+          </a:xfrm>
+          <a:prstGeom prst="line">
+            <a:avLst/>
+          </a:prstGeom>
+          <a:ln w="6350">
+            <a:solidFill>
+              <a:srgbClr val="E3E3E6"/>
+            </a:solidFill>
+          </a:ln>
+        </p:spPr>
+        <p:style>
+          <a:lnRef idx="2">
+            <a:schemeClr val="accent1"/>
+          </a:lnRef>
+          <a:fillRef idx="0">
+            <a:schemeClr val="accent1"/>
+          </a:fillRef>
+          <a:effectRef idx="1">
+            <a:schemeClr val="accent1"/>
+          </a:effectRef>
+          <a:fontRef idx="minor">
+            <a:schemeClr val="tx1"/>
+          </a:fontRef>
+        </p:style>
+      </p:cxnSp>
+      <p:cxnSp>
+        <p:nvCxnSpPr>
+          <p:cNvPr id="17" name="Connector 16"/>
+          <p:cNvCxnSpPr/>
+          <p:nvPr/>
+        </p:nvCxnSpPr>
+        <p:spPr>
+          <a:xfrm>
+            <a:off x="8869680" y="3374136"/>
+            <a:ext cx="0" cy="566927"/>
+          </a:xfrm>
+          <a:prstGeom prst="line">
+            <a:avLst/>
+          </a:prstGeom>
+          <a:ln w="6350">
+            <a:solidFill>
+              <a:srgbClr val="E3E3E6"/>
+            </a:solidFill>
+          </a:ln>
+        </p:spPr>
+        <p:style>
+          <a:lnRef idx="2">
+            <a:schemeClr val="accent1"/>
+          </a:lnRef>
+          <a:fillRef idx="0">
+            <a:schemeClr val="accent1"/>
+          </a:fillRef>
+          <a:effectRef idx="1">
+            <a:schemeClr val="accent1"/>
+          </a:effectRef>
+          <a:fontRef idx="minor">
+            <a:schemeClr val="tx1"/>
+          </a:fontRef>
+        </p:style>
+      </p:cxnSp>
+      <p:cxnSp>
+        <p:nvCxnSpPr>
+          <p:cNvPr id="18" name="Connector 17"/>
+          <p:cNvCxnSpPr/>
+          <p:nvPr/>
+        </p:nvCxnSpPr>
+        <p:spPr>
+          <a:xfrm>
+            <a:off x="1024128" y="3776472"/>
+            <a:ext cx="5358384" cy="0"/>
+          </a:xfrm>
+          <a:prstGeom prst="line">
+            <a:avLst/>
+          </a:prstGeom>
+          <a:ln w="4445">
+            <a:solidFill>
+              <a:srgbClr val="E3E3E6"/>
+            </a:solidFill>
+          </a:ln>
+        </p:spPr>
+        <p:style>
+          <a:lnRef idx="2">
+            <a:schemeClr val="accent1"/>
+          </a:lnRef>
+          <a:fillRef idx="0">
+            <a:schemeClr val="accent1"/>
+          </a:fillRef>
+          <a:effectRef idx="1">
+            <a:schemeClr val="accent1"/>
+          </a:effectRef>
+          <a:fontRef idx="minor">
+            <a:schemeClr val="tx1"/>
+          </a:fontRef>
+        </p:style>
+      </p:cxnSp>
+      <p:cxnSp>
+        <p:nvCxnSpPr>
+          <p:cNvPr id="19" name="Connector 18"/>
+          <p:cNvCxnSpPr/>
+          <p:nvPr/>
+        </p:nvCxnSpPr>
+        <p:spPr>
+          <a:xfrm>
+            <a:off x="6784848" y="3776472"/>
+            <a:ext cx="1883664" cy="0"/>
+          </a:xfrm>
+          <a:prstGeom prst="line">
+            <a:avLst/>
+          </a:prstGeom>
+          <a:ln w="4445">
+            <a:solidFill>
+              <a:srgbClr val="E3E3E6"/>
+            </a:solidFill>
+          </a:ln>
+        </p:spPr>
+        <p:style>
+          <a:lnRef idx="2">
+            <a:schemeClr val="accent1"/>
+          </a:lnRef>
+          <a:fillRef idx="0">
+            <a:schemeClr val="accent1"/>
+          </a:fillRef>
+          <a:effectRef idx="1">
+            <a:schemeClr val="accent1"/>
+          </a:effectRef>
+          <a:fontRef idx="minor">
+            <a:schemeClr val="tx1"/>
+          </a:fontRef>
+        </p:style>
+      </p:cxnSp>
+      <p:cxnSp>
+        <p:nvCxnSpPr>
+          <p:cNvPr id="20" name="Connector 19"/>
+          <p:cNvCxnSpPr/>
+          <p:nvPr/>
+        </p:nvCxnSpPr>
+        <p:spPr>
+          <a:xfrm>
+            <a:off x="9070848" y="3776472"/>
+            <a:ext cx="2093976" cy="0"/>
+          </a:xfrm>
+          <a:prstGeom prst="line">
+            <a:avLst/>
+          </a:prstGeom>
+          <a:ln w="4445">
+            <a:solidFill>
+              <a:srgbClr val="E3E3E6"/>
+            </a:solidFill>
+          </a:ln>
+        </p:spPr>
+        <p:style>
+          <a:lnRef idx="2">
+            <a:schemeClr val="accent1"/>
+          </a:lnRef>
+          <a:fillRef idx="0">
+            <a:schemeClr val="accent1"/>
+          </a:fillRef>
+          <a:effectRef idx="1">
+            <a:schemeClr val="accent1"/>
+          </a:effectRef>
+          <a:fontRef idx="minor">
+            <a:schemeClr val="tx1"/>
+          </a:fontRef>
+        </p:style>
+      </p:cxnSp>
+      <p:cxnSp>
+        <p:nvCxnSpPr>
+          <p:cNvPr id="21" name="Connector 20"/>
+          <p:cNvCxnSpPr/>
+          <p:nvPr/>
+        </p:nvCxnSpPr>
+        <p:spPr>
+          <a:xfrm>
+            <a:off x="822960" y="4507992"/>
+            <a:ext cx="10543032" cy="0"/>
+          </a:xfrm>
+          <a:prstGeom prst="line">
+            <a:avLst/>
+          </a:prstGeom>
+          <a:ln w="6350">
+            <a:solidFill>
+              <a:srgbClr val="E3E3E6"/>
+            </a:solidFill>
+          </a:ln>
+        </p:spPr>
+        <p:style>
+          <a:lnRef idx="2">
+            <a:schemeClr val="accent1"/>
+          </a:lnRef>
+          <a:fillRef idx="0">
+            <a:schemeClr val="accent1"/>
+          </a:fillRef>
+          <a:effectRef idx="1">
+            <a:schemeClr val="accent1"/>
+          </a:effectRef>
+          <a:fontRef idx="minor">
+            <a:schemeClr val="tx1"/>
+          </a:fontRef>
+        </p:style>
+      </p:cxnSp>
+      <p:cxnSp>
+        <p:nvCxnSpPr>
+          <p:cNvPr id="22" name="Connector 21"/>
+          <p:cNvCxnSpPr/>
+          <p:nvPr/>
+        </p:nvCxnSpPr>
+        <p:spPr>
+          <a:xfrm>
+            <a:off x="6583680" y="3941063"/>
+            <a:ext cx="0" cy="566929"/>
+          </a:xfrm>
+          <a:prstGeom prst="line">
+            <a:avLst/>
+          </a:prstGeom>
+          <a:ln w="6350">
+            <a:solidFill>
+              <a:srgbClr val="E3E3E6"/>
+            </a:solidFill>
+          </a:ln>
+        </p:spPr>
+        <p:style>
+          <a:lnRef idx="2">
+            <a:schemeClr val="accent1"/>
+          </a:lnRef>
+          <a:fillRef idx="0">
+            <a:schemeClr val="accent1"/>
+          </a:fillRef>
+          <a:effectRef idx="1">
+            <a:schemeClr val="accent1"/>
+          </a:effectRef>
+          <a:fontRef idx="minor">
+            <a:schemeClr val="tx1"/>
+          </a:fontRef>
+        </p:style>
+      </p:cxnSp>
+      <p:cxnSp>
+        <p:nvCxnSpPr>
+          <p:cNvPr id="23" name="Connector 22"/>
+          <p:cNvCxnSpPr/>
+          <p:nvPr/>
+        </p:nvCxnSpPr>
+        <p:spPr>
+          <a:xfrm>
+            <a:off x="8869680" y="3941063"/>
+            <a:ext cx="0" cy="566929"/>
+          </a:xfrm>
+          <a:prstGeom prst="line">
+            <a:avLst/>
+          </a:prstGeom>
+          <a:ln w="6350">
+            <a:solidFill>
+              <a:srgbClr val="E3E3E6"/>
+            </a:solidFill>
+          </a:ln>
+        </p:spPr>
+        <p:style>
+          <a:lnRef idx="2">
+            <a:schemeClr val="accent1"/>
+          </a:lnRef>
+          <a:fillRef idx="0">
+            <a:schemeClr val="accent1"/>
+          </a:fillRef>
+          <a:effectRef idx="1">
+            <a:schemeClr val="accent1"/>
+          </a:effectRef>
+          <a:fontRef idx="minor">
+            <a:schemeClr val="tx1"/>
+          </a:fontRef>
+        </p:style>
+      </p:cxnSp>
+      <p:cxnSp>
+        <p:nvCxnSpPr>
+          <p:cNvPr id="24" name="Connector 23"/>
+          <p:cNvCxnSpPr/>
+          <p:nvPr/>
+        </p:nvCxnSpPr>
+        <p:spPr>
+          <a:xfrm>
+            <a:off x="1024128" y="4343400"/>
+            <a:ext cx="5358384" cy="0"/>
+          </a:xfrm>
+          <a:prstGeom prst="line">
+            <a:avLst/>
+          </a:prstGeom>
+          <a:ln w="4445">
+            <a:solidFill>
+              <a:srgbClr val="E3E3E6"/>
+            </a:solidFill>
+          </a:ln>
+        </p:spPr>
+        <p:style>
+          <a:lnRef idx="2">
+            <a:schemeClr val="accent1"/>
+          </a:lnRef>
+          <a:fillRef idx="0">
+            <a:schemeClr val="accent1"/>
+          </a:fillRef>
+          <a:effectRef idx="1">
+            <a:schemeClr val="accent1"/>
+          </a:effectRef>
+          <a:fontRef idx="minor">
+            <a:schemeClr val="tx1"/>
+          </a:fontRef>
+        </p:style>
+      </p:cxnSp>
+      <p:cxnSp>
+        <p:nvCxnSpPr>
+          <p:cNvPr id="25" name="Connector 24"/>
+          <p:cNvCxnSpPr/>
+          <p:nvPr/>
+        </p:nvCxnSpPr>
+        <p:spPr>
+          <a:xfrm>
+            <a:off x="6784848" y="4343400"/>
+            <a:ext cx="1883664" cy="0"/>
+          </a:xfrm>
+          <a:prstGeom prst="line">
+            <a:avLst/>
+          </a:prstGeom>
+          <a:ln w="4445">
+            <a:solidFill>
+              <a:srgbClr val="E3E3E6"/>
+            </a:solidFill>
+          </a:ln>
+        </p:spPr>
+        <p:style>
+          <a:lnRef idx="2">
+            <a:schemeClr val="accent1"/>
+          </a:lnRef>
+          <a:fillRef idx="0">
+            <a:schemeClr val="accent1"/>
+          </a:fillRef>
+          <a:effectRef idx="1">
+            <a:schemeClr val="accent1"/>
+          </a:effectRef>
+          <a:fontRef idx="minor">
+            <a:schemeClr val="tx1"/>
+          </a:fontRef>
+        </p:style>
+      </p:cxnSp>
+      <p:cxnSp>
+        <p:nvCxnSpPr>
+          <p:cNvPr id="26" name="Connector 25"/>
+          <p:cNvCxnSpPr/>
+          <p:nvPr/>
+        </p:nvCxnSpPr>
+        <p:spPr>
+          <a:xfrm>
+            <a:off x="9070848" y="4343400"/>
+            <a:ext cx="2093976" cy="0"/>
+          </a:xfrm>
+          <a:prstGeom prst="line">
+            <a:avLst/>
+          </a:prstGeom>
+          <a:ln w="4445">
+            <a:solidFill>
+              <a:srgbClr val="E3E3E6"/>
+            </a:solidFill>
+          </a:ln>
+        </p:spPr>
+        <p:style>
+          <a:lnRef idx="2">
+            <a:schemeClr val="accent1"/>
+          </a:lnRef>
+          <a:fillRef idx="0">
+            <a:schemeClr val="accent1"/>
+          </a:fillRef>
+          <a:effectRef idx="1">
+            <a:schemeClr val="accent1"/>
+          </a:effectRef>
+          <a:fontRef idx="minor">
+            <a:schemeClr val="tx1"/>
+          </a:fontRef>
+        </p:style>
+      </p:cxnSp>
+      <p:cxnSp>
+        <p:nvCxnSpPr>
+          <p:cNvPr id="27" name="Connector 26"/>
+          <p:cNvCxnSpPr/>
+          <p:nvPr/>
+        </p:nvCxnSpPr>
+        <p:spPr>
+          <a:xfrm>
+            <a:off x="822960" y="5074920"/>
+            <a:ext cx="10543032" cy="0"/>
+          </a:xfrm>
+          <a:prstGeom prst="line">
+            <a:avLst/>
+          </a:prstGeom>
+          <a:ln w="6350">
+            <a:solidFill>
+              <a:srgbClr val="E3E3E6"/>
+            </a:solidFill>
+          </a:ln>
+        </p:spPr>
+        <p:style>
+          <a:lnRef idx="2">
+            <a:schemeClr val="accent1"/>
+          </a:lnRef>
+          <a:fillRef idx="0">
+            <a:schemeClr val="accent1"/>
+          </a:fillRef>
+          <a:effectRef idx="1">
+            <a:schemeClr val="accent1"/>
+          </a:effectRef>
+          <a:fontRef idx="minor">
+            <a:schemeClr val="tx1"/>
+          </a:fontRef>
+        </p:style>
+      </p:cxnSp>
+      <p:cxnSp>
+        <p:nvCxnSpPr>
+          <p:cNvPr id="28" name="Connector 27"/>
+          <p:cNvCxnSpPr/>
+          <p:nvPr/>
+        </p:nvCxnSpPr>
+        <p:spPr>
+          <a:xfrm>
+            <a:off x="6583680" y="4507992"/>
+            <a:ext cx="0" cy="566928"/>
+          </a:xfrm>
+          <a:prstGeom prst="line">
+            <a:avLst/>
+          </a:prstGeom>
+          <a:ln w="6350">
+            <a:solidFill>
+              <a:srgbClr val="E3E3E6"/>
+            </a:solidFill>
+          </a:ln>
+        </p:spPr>
+        <p:style>
+          <a:lnRef idx="2">
+            <a:schemeClr val="accent1"/>
+          </a:lnRef>
+          <a:fillRef idx="0">
+            <a:schemeClr val="accent1"/>
+          </a:fillRef>
+          <a:effectRef idx="1">
+            <a:schemeClr val="accent1"/>
+          </a:effectRef>
+          <a:fontRef idx="minor">
+            <a:schemeClr val="tx1"/>
+          </a:fontRef>
+        </p:style>
+      </p:cxnSp>
+      <p:cxnSp>
+        <p:nvCxnSpPr>
+          <p:cNvPr id="29" name="Connector 28"/>
+          <p:cNvCxnSpPr/>
+          <p:nvPr/>
+        </p:nvCxnSpPr>
+        <p:spPr>
+          <a:xfrm>
+            <a:off x="8869680" y="4507992"/>
+            <a:ext cx="0" cy="566928"/>
+          </a:xfrm>
+          <a:prstGeom prst="line">
+            <a:avLst/>
+          </a:prstGeom>
+          <a:ln w="6350">
+            <a:solidFill>
+              <a:srgbClr val="E3E3E6"/>
+            </a:solidFill>
+          </a:ln>
+        </p:spPr>
+        <p:style>
+          <a:lnRef idx="2">
+            <a:schemeClr val="accent1"/>
+          </a:lnRef>
+          <a:fillRef idx="0">
+            <a:schemeClr val="accent1"/>
+          </a:fillRef>
+          <a:effectRef idx="1">
+            <a:schemeClr val="accent1"/>
+          </a:effectRef>
+          <a:fontRef idx="minor">
+            <a:schemeClr val="tx1"/>
+          </a:fontRef>
+        </p:style>
+      </p:cxnSp>
+      <p:cxnSp>
+        <p:nvCxnSpPr>
+          <p:cNvPr id="30" name="Connector 29"/>
+          <p:cNvCxnSpPr/>
+          <p:nvPr/>
+        </p:nvCxnSpPr>
+        <p:spPr>
+          <a:xfrm>
+            <a:off x="1024128" y="4910328"/>
+            <a:ext cx="5358384" cy="0"/>
+          </a:xfrm>
+          <a:prstGeom prst="line">
+            <a:avLst/>
+          </a:prstGeom>
+          <a:ln w="4445">
+            <a:solidFill>
+              <a:srgbClr val="E3E3E6"/>
+            </a:solidFill>
+          </a:ln>
+        </p:spPr>
+        <p:style>
+          <a:lnRef idx="2">
+            <a:schemeClr val="accent1"/>
+          </a:lnRef>
+          <a:fillRef idx="0">
+            <a:schemeClr val="accent1"/>
+          </a:fillRef>
+          <a:effectRef idx="1">
+            <a:schemeClr val="accent1"/>
+          </a:effectRef>
+          <a:fontRef idx="minor">
+            <a:schemeClr val="tx1"/>
+          </a:fontRef>
+        </p:style>
+      </p:cxnSp>
+      <p:cxnSp>
+        <p:nvCxnSpPr>
+          <p:cNvPr id="31" name="Connector 30"/>
+          <p:cNvCxnSpPr/>
+          <p:nvPr/>
+        </p:nvCxnSpPr>
+        <p:spPr>
+          <a:xfrm>
+            <a:off x="6784848" y="4910328"/>
+            <a:ext cx="1883664" cy="0"/>
+          </a:xfrm>
+          <a:prstGeom prst="line">
+            <a:avLst/>
+          </a:prstGeom>
+          <a:ln w="4445">
+            <a:solidFill>
+              <a:srgbClr val="E3E3E6"/>
+            </a:solidFill>
+          </a:ln>
+        </p:spPr>
+        <p:style>
+          <a:lnRef idx="2">
+            <a:schemeClr val="accent1"/>
+          </a:lnRef>
+          <a:fillRef idx="0">
+            <a:schemeClr val="accent1"/>
+          </a:fillRef>
+          <a:effectRef idx="1">
+            <a:schemeClr val="accent1"/>
+          </a:effectRef>
+          <a:fontRef idx="minor">
+            <a:schemeClr val="tx1"/>
+          </a:fontRef>
+        </p:style>
+      </p:cxnSp>
+      <p:cxnSp>
+        <p:nvCxnSpPr>
+          <p:cNvPr id="32" name="Connector 31"/>
+          <p:cNvCxnSpPr/>
+          <p:nvPr/>
+        </p:nvCxnSpPr>
+        <p:spPr>
+          <a:xfrm>
+            <a:off x="9070848" y="4910328"/>
+            <a:ext cx="2093976" cy="0"/>
+          </a:xfrm>
+          <a:prstGeom prst="line">
+            <a:avLst/>
+          </a:prstGeom>
+          <a:ln w="4445">
+            <a:solidFill>
+              <a:srgbClr val="E3E3E6"/>
+            </a:solidFill>
+          </a:ln>
+        </p:spPr>
+        <p:style>
+          <a:lnRef idx="2">
+            <a:schemeClr val="accent1"/>
+          </a:lnRef>
+          <a:fillRef idx="0">
+            <a:schemeClr val="accent1"/>
+          </a:fillRef>
+          <a:effectRef idx="1">
+            <a:schemeClr val="accent1"/>
+          </a:effectRef>
+          <a:fontRef idx="minor">
+            <a:schemeClr val="tx1"/>
+          </a:fontRef>
+        </p:style>
+      </p:cxnSp>
+      <p:cxnSp>
+        <p:nvCxnSpPr>
+          <p:cNvPr id="33" name="Connector 32"/>
+          <p:cNvCxnSpPr/>
+          <p:nvPr/>
+        </p:nvCxnSpPr>
+        <p:spPr>
+          <a:xfrm>
+            <a:off x="822960" y="5641848"/>
+            <a:ext cx="10543032" cy="0"/>
+          </a:xfrm>
+          <a:prstGeom prst="line">
+            <a:avLst/>
+          </a:prstGeom>
+          <a:ln w="6350">
+            <a:solidFill>
+              <a:srgbClr val="E3E3E6"/>
+            </a:solidFill>
+          </a:ln>
+        </p:spPr>
+        <p:style>
+          <a:lnRef idx="2">
+            <a:schemeClr val="accent1"/>
+          </a:lnRef>
+          <a:fillRef idx="0">
+            <a:schemeClr val="accent1"/>
+          </a:fillRef>
+          <a:effectRef idx="1">
+            <a:schemeClr val="accent1"/>
+          </a:effectRef>
+          <a:fontRef idx="minor">
+            <a:schemeClr val="tx1"/>
+          </a:fontRef>
+        </p:style>
+      </p:cxnSp>
+      <p:cxnSp>
+        <p:nvCxnSpPr>
+          <p:cNvPr id="34" name="Connector 33"/>
+          <p:cNvCxnSpPr/>
+          <p:nvPr/>
+        </p:nvCxnSpPr>
+        <p:spPr>
+          <a:xfrm>
+            <a:off x="6583680" y="5074920"/>
+            <a:ext cx="0" cy="566928"/>
+          </a:xfrm>
+          <a:prstGeom prst="line">
+            <a:avLst/>
+          </a:prstGeom>
+          <a:ln w="6350">
+            <a:solidFill>
+              <a:srgbClr val="E3E3E6"/>
+            </a:solidFill>
+          </a:ln>
+        </p:spPr>
+        <p:style>
+          <a:lnRef idx="2">
+            <a:schemeClr val="accent1"/>
+          </a:lnRef>
+          <a:fillRef idx="0">
+            <a:schemeClr val="accent1"/>
+          </a:fillRef>
+          <a:effectRef idx="1">
+            <a:schemeClr val="accent1"/>
+          </a:effectRef>
+          <a:fontRef idx="minor">
+            <a:schemeClr val="tx1"/>
+          </a:fontRef>
+        </p:style>
+      </p:cxnSp>
+      <p:cxnSp>
+        <p:nvCxnSpPr>
+          <p:cNvPr id="35" name="Connector 34"/>
+          <p:cNvCxnSpPr/>
+          <p:nvPr/>
+        </p:nvCxnSpPr>
+        <p:spPr>
+          <a:xfrm>
+            <a:off x="8869680" y="5074920"/>
+            <a:ext cx="0" cy="566928"/>
+          </a:xfrm>
+          <a:prstGeom prst="line">
+            <a:avLst/>
+          </a:prstGeom>
+          <a:ln w="6350">
+            <a:solidFill>
+              <a:srgbClr val="E3E3E6"/>
+            </a:solidFill>
+          </a:ln>
+        </p:spPr>
+        <p:style>
+          <a:lnRef idx="2">
+            <a:schemeClr val="accent1"/>
+          </a:lnRef>
+          <a:fillRef idx="0">
+            <a:schemeClr val="accent1"/>
+          </a:fillRef>
+          <a:effectRef idx="1">
+            <a:schemeClr val="accent1"/>
+          </a:effectRef>
+          <a:fontRef idx="minor">
+            <a:schemeClr val="tx1"/>
+          </a:fontRef>
+        </p:style>
+      </p:cxnSp>
+      <p:cxnSp>
+        <p:nvCxnSpPr>
+          <p:cNvPr id="36" name="Connector 35"/>
+          <p:cNvCxnSpPr/>
+          <p:nvPr/>
+        </p:nvCxnSpPr>
+        <p:spPr>
+          <a:xfrm>
+            <a:off x="1024128" y="5477256"/>
+            <a:ext cx="5358384" cy="0"/>
+          </a:xfrm>
+          <a:prstGeom prst="line">
+            <a:avLst/>
+          </a:prstGeom>
+          <a:ln w="4445">
+            <a:solidFill>
+              <a:srgbClr val="E3E3E6"/>
+            </a:solidFill>
+          </a:ln>
+        </p:spPr>
+        <p:style>
+          <a:lnRef idx="2">
+            <a:schemeClr val="accent1"/>
+          </a:lnRef>
+          <a:fillRef idx="0">
+            <a:schemeClr val="accent1"/>
+          </a:fillRef>
+          <a:effectRef idx="1">
+            <a:schemeClr val="accent1"/>
+          </a:effectRef>
+          <a:fontRef idx="minor">
+            <a:schemeClr val="tx1"/>
+          </a:fontRef>
+        </p:style>
+      </p:cxnSp>
+      <p:cxnSp>
+        <p:nvCxnSpPr>
+          <p:cNvPr id="37" name="Connector 36"/>
+          <p:cNvCxnSpPr/>
+          <p:nvPr/>
+        </p:nvCxnSpPr>
+        <p:spPr>
+          <a:xfrm>
+            <a:off x="6784848" y="5477256"/>
+            <a:ext cx="1883664" cy="0"/>
+          </a:xfrm>
+          <a:prstGeom prst="line">
+            <a:avLst/>
+          </a:prstGeom>
+          <a:ln w="4445">
+            <a:solidFill>
+              <a:srgbClr val="E3E3E6"/>
+            </a:solidFill>
+          </a:ln>
+        </p:spPr>
+        <p:style>
+          <a:lnRef idx="2">
+            <a:schemeClr val="accent1"/>
+          </a:lnRef>
+          <a:fillRef idx="0">
+            <a:schemeClr val="accent1"/>
+          </a:fillRef>
+          <a:effectRef idx="1">
+            <a:schemeClr val="accent1"/>
+          </a:effectRef>
+          <a:fontRef idx="minor">
+            <a:schemeClr val="tx1"/>
+          </a:fontRef>
+        </p:style>
+      </p:cxnSp>
+      <p:cxnSp>
+        <p:nvCxnSpPr>
+          <p:cNvPr id="38" name="Connector 37"/>
+          <p:cNvCxnSpPr/>
+          <p:nvPr/>
+        </p:nvCxnSpPr>
+        <p:spPr>
+          <a:xfrm>
+            <a:off x="9070848" y="5477256"/>
+            <a:ext cx="2093976" cy="0"/>
+          </a:xfrm>
+          <a:prstGeom prst="line">
+            <a:avLst/>
+          </a:prstGeom>
+          <a:ln w="4445">
+            <a:solidFill>
+              <a:srgbClr val="E3E3E6"/>
+            </a:solidFill>
+          </a:ln>
+        </p:spPr>
+        <p:style>
+          <a:lnRef idx="2">
+            <a:schemeClr val="accent1"/>
+          </a:lnRef>
+          <a:fillRef idx="0">
+            <a:schemeClr val="accent1"/>
+          </a:fillRef>
+          <a:effectRef idx="1">
+            <a:schemeClr val="accent1"/>
+          </a:effectRef>
+          <a:fontRef idx="minor">
+            <a:schemeClr val="tx1"/>
+          </a:fontRef>
+        </p:style>
+      </p:cxnSp>
+      <p:cxnSp>
+        <p:nvCxnSpPr>
+          <p:cNvPr id="39" name="Connector 38"/>
+          <p:cNvCxnSpPr/>
+          <p:nvPr/>
+        </p:nvCxnSpPr>
+        <p:spPr>
+          <a:xfrm>
+            <a:off x="822960" y="6437376"/>
+            <a:ext cx="10543032" cy="0"/>
+          </a:xfrm>
+          <a:prstGeom prst="line">
+            <a:avLst/>
+          </a:prstGeom>
+          <a:ln w="9525">
+            <a:solidFill>
+              <a:srgbClr val="E3E3E6"/>
+            </a:solidFill>
+          </a:ln>
+        </p:spPr>
+        <p:style>
+          <a:lnRef idx="2">
+            <a:schemeClr val="accent1"/>
+          </a:lnRef>
+          <a:fillRef idx="0">
+            <a:schemeClr val="accent1"/>
+          </a:fillRef>
+          <a:effectRef idx="1">
+            <a:schemeClr val="accent1"/>
+          </a:effectRef>
+          <a:fontRef idx="minor">
+            <a:schemeClr val="tx1"/>
+          </a:fontRef>
+        </p:style>
+      </p:cxnSp>
+      <p:sp>
+        <p:nvSpPr>
+          <p:cNvPr id="40" name="TextBox 39"/>
+          <p:cNvSpPr txBox="1"/>
+          <p:nvPr/>
+        </p:nvSpPr>
+        <p:spPr>
+          <a:xfrm>
+            <a:off x="822960" y="6473952"/>
+            <a:ext cx="5486400" cy="274320"/>
+          </a:xfrm>
+          <a:prstGeom prst="rect">
+            <a:avLst/>
+          </a:prstGeom>
+          <a:noFill/>
+        </p:spPr>
+        <p:txBody>
+          <a:bodyPr wrap="square" lIns="0" rIns="0" tIns="0" bIns="0" anchor="t">
+            <a:spAutoFit/>
+          </a:bodyPr>
+          <a:lstStyle/>
+          <a:p>
+            <a:pPr algn="l"/>
+            <a:r>
+              <a:rPr sz="750" b="1" i="0" cap="all" spc="180">
+                <a:solidFill>
+                  <a:srgbClr val="86868B"/>
+                </a:solidFill>
+                <a:latin typeface="Helvetica Neue"/>
+              </a:rPr>
+              <a:t>SAY WATT ROBOTICS  ·  ROV TEAM</a:t>
+            </a:r>
+          </a:p>
+        </p:txBody>
+      </p:sp>
+      <p:sp>
+        <p:nvSpPr>
+          <p:cNvPr id="41" name="TextBox 40"/>
+          <p:cNvSpPr txBox="1"/>
+          <p:nvPr/>
+        </p:nvSpPr>
+        <p:spPr>
+          <a:xfrm>
+            <a:off x="5879592" y="6473952"/>
+            <a:ext cx="5486400" cy="274320"/>
+          </a:xfrm>
+          <a:prstGeom prst="rect">
+            <a:avLst/>
+          </a:prstGeom>
+          <a:noFill/>
+        </p:spPr>
+        <p:txBody>
+          <a:bodyPr wrap="square" lIns="0" rIns="0" tIns="0" bIns="0" anchor="t">
+            <a:spAutoFit/>
+          </a:bodyPr>
+          <a:lstStyle/>
+          <a:p>
+            <a:pPr algn="r"/>
+            <a:r>
+              <a:rPr sz="750" b="1" i="0" cap="all" spc="180">
+                <a:solidFill>
+                  <a:srgbClr val="86868B"/>
+                </a:solidFill>
+                <a:latin typeface="Helvetica Neue"/>
+              </a:rPr>
+              <a:t>WEEK 1 — KICKOFF   ·   27 / 29</a:t>
+            </a:r>
+          </a:p>
+        </p:txBody>
+      </p:sp>
+    </p:spTree>
+  </p:cSld>
+  <p:clrMapOvr>
+    <a:masterClrMapping/>
+  </p:clrMapOvr>
+</p:sld>
+</file>
+
+<file path=ppt/slides/slide28.xml><?xml version="1.0" encoding="utf-8"?>
+<p:sld xmlns:a="http://schemas.openxmlformats.org/drawingml/2006/main" xmlns:p="http://schemas.openxmlformats.org/presentationml/2006/main" xmlns:r="http://schemas.openxmlformats.org/officeDocument/2006/relationships">
+  <p:cSld>
+    <p:spTree>
+      <p:nvGrpSpPr>
+        <p:cNvPr id="1" name=""/>
+        <p:cNvGrpSpPr/>
+        <p:nvPr/>
+      </p:nvGrpSpPr>
+      <p:grpSpPr/>
+      <p:sp>
+        <p:nvSpPr>
+          <p:cNvPr id="2" name="TextBox 1"/>
+          <p:cNvSpPr txBox="1"/>
+          <p:nvPr/>
+        </p:nvSpPr>
+        <p:spPr>
+          <a:xfrm>
+            <a:off x="822960" y="530352"/>
+            <a:ext cx="10515600" cy="292608"/>
+          </a:xfrm>
+          <a:prstGeom prst="rect">
+            <a:avLst/>
+          </a:prstGeom>
+          <a:noFill/>
+        </p:spPr>
+        <p:txBody>
+          <a:bodyPr wrap="square" lIns="0" rIns="0" tIns="0" bIns="0" anchor="t">
+            <a:spAutoFit/>
+          </a:bodyPr>
+          <a:lstStyle/>
+          <a:p>
+            <a:pPr algn="l"/>
+            <a:r>
+              <a:rPr sz="1200" b="1" i="0" cap="all" spc="180">
+                <a:solidFill>
+                  <a:srgbClr val="0D7490"/>
+                </a:solidFill>
+                <a:latin typeface="Helvetica Neue"/>
+              </a:rPr>
+              <a:t>BEFORE WE LEAVE</a:t>
+            </a:r>
+          </a:p>
+        </p:txBody>
+      </p:sp>
+      <p:sp>
+        <p:nvSpPr>
+          <p:cNvPr id="3" name="TextBox 2"/>
+          <p:cNvSpPr txBox="1"/>
+          <p:nvPr/>
+        </p:nvSpPr>
+        <p:spPr>
+          <a:xfrm>
+            <a:off x="804672" y="822960"/>
+            <a:ext cx="10515600" cy="868680"/>
+          </a:xfrm>
+          <a:prstGeom prst="rect">
+            <a:avLst/>
+          </a:prstGeom>
+          <a:noFill/>
+        </p:spPr>
+        <p:txBody>
+          <a:bodyPr wrap="square" lIns="0" rIns="0" tIns="0" bIns="0" anchor="t">
+            <a:spAutoFit/>
+          </a:bodyPr>
+          <a:lstStyle/>
+          <a:p>
+            <a:pPr algn="l">
+              <a:lnSpc>
+                <a:spcPct val="105000"/>
+              </a:lnSpc>
+            </a:pPr>
+            <a:r>
+              <a:rPr sz="3000" b="1" i="0">
+                <a:solidFill>
+                  <a:srgbClr val="1D1D1F"/>
+                </a:solidFill>
+                <a:latin typeface="Helvetica Neue"/>
+              </a:rPr>
+              <a:t>Tools accounted for. Shop reset.</a:t>
+            </a:r>
+          </a:p>
+        </p:txBody>
+      </p:sp>
+      <p:sp>
+        <p:nvSpPr>
+          <p:cNvPr id="4" name="TextBox 3"/>
+          <p:cNvSpPr txBox="1"/>
+          <p:nvPr/>
+        </p:nvSpPr>
+        <p:spPr>
+          <a:xfrm>
+            <a:off x="822960" y="1700784"/>
+            <a:ext cx="10515600" cy="457200"/>
+          </a:xfrm>
+          <a:prstGeom prst="rect">
+            <a:avLst/>
+          </a:prstGeom>
+          <a:noFill/>
+        </p:spPr>
+        <p:txBody>
+          <a:bodyPr wrap="square" lIns="0" rIns="0" tIns="0" bIns="0" anchor="t">
+            <a:spAutoFit/>
+          </a:bodyPr>
+          <a:lstStyle/>
+          <a:p>
+            <a:pPr algn="l"/>
+            <a:r>
+              <a:rPr sz="1400" b="0" i="1">
+                <a:solidFill>
+                  <a:srgbClr val="6E6E73"/>
+                </a:solidFill>
+                <a:latin typeface="Helvetica Neue"/>
+              </a:rPr>
+              <a:t>We do this together, every meeting. No exceptions — the Tool Steward leads.</a:t>
+            </a:r>
+          </a:p>
+        </p:txBody>
+      </p:sp>
+      <p:sp>
+        <p:nvSpPr>
+          <p:cNvPr id="5" name="Rectangle 4"/>
+          <p:cNvSpPr/>
+          <p:nvPr/>
+        </p:nvSpPr>
+        <p:spPr>
+          <a:xfrm>
+            <a:off x="822960" y="2423160"/>
+            <a:ext cx="310896" cy="310896"/>
+          </a:xfrm>
+          <a:prstGeom prst="rect">
+            <a:avLst/>
+          </a:prstGeom>
+          <a:solidFill>
+            <a:srgbClr val="FFFFFF"/>
+          </a:solidFill>
+          <a:ln w="12700">
+            <a:solidFill>
+              <a:srgbClr val="86868B"/>
+            </a:solidFill>
+          </a:ln>
+        </p:spPr>
+        <p:style>
+          <a:lnRef idx="1">
+            <a:schemeClr val="accent1"/>
+          </a:lnRef>
+          <a:fillRef idx="3">
+            <a:schemeClr val="accent1"/>
+          </a:fillRef>
+          <a:effectRef idx="2">
+            <a:schemeClr val="accent1"/>
+          </a:effectRef>
+          <a:fontRef idx="minor">
+            <a:schemeClr val="lt1"/>
+          </a:fontRef>
+        </p:style>
+        <p:txBody>
+          <a:bodyPr rtlCol="0" anchor="ctr"/>
+          <a:lstStyle/>
+          <a:p>
+            <a:pPr algn="ctr"/>
+          </a:p>
+        </p:txBody>
+      </p:sp>
+      <p:sp>
+        <p:nvSpPr>
+          <p:cNvPr id="6" name="TextBox 5"/>
+          <p:cNvSpPr txBox="1"/>
+          <p:nvPr/>
+        </p:nvSpPr>
+        <p:spPr>
+          <a:xfrm>
+            <a:off x="1408176" y="2404872"/>
+            <a:ext cx="9957815" cy="402336"/>
+          </a:xfrm>
+          <a:prstGeom prst="rect">
+            <a:avLst/>
+          </a:prstGeom>
+          <a:noFill/>
+        </p:spPr>
+        <p:txBody>
+          <a:bodyPr wrap="square" lIns="0" rIns="0" tIns="0" bIns="0" anchor="ctr">
+            <a:spAutoFit/>
+          </a:bodyPr>
+          <a:lstStyle/>
+          <a:p>
+            <a:pPr algn="l"/>
+            <a:r>
+              <a:rPr sz="1400" b="0" i="0">
+                <a:solidFill>
+                  <a:srgbClr val="1D1D1F"/>
+                </a:solidFill>
+                <a:latin typeface="Helvetica Neue"/>
+              </a:rPr>
+              <a:t>Soldering irons unplugged, cool, and put away.</a:t>
+            </a:r>
+          </a:p>
+        </p:txBody>
+      </p:sp>
+      <p:sp>
+        <p:nvSpPr>
+          <p:cNvPr id="7" name="Rectangle 6"/>
+          <p:cNvSpPr/>
+          <p:nvPr/>
+        </p:nvSpPr>
+        <p:spPr>
+          <a:xfrm>
+            <a:off x="822960" y="2990088"/>
+            <a:ext cx="310896" cy="310896"/>
+          </a:xfrm>
+          <a:prstGeom prst="rect">
+            <a:avLst/>
+          </a:prstGeom>
+          <a:solidFill>
+            <a:srgbClr val="FFFFFF"/>
+          </a:solidFill>
+          <a:ln w="12700">
+            <a:solidFill>
+              <a:srgbClr val="86868B"/>
+            </a:solidFill>
+          </a:ln>
+        </p:spPr>
+        <p:style>
+          <a:lnRef idx="1">
+            <a:schemeClr val="accent1"/>
+          </a:lnRef>
+          <a:fillRef idx="3">
+            <a:schemeClr val="accent1"/>
+          </a:fillRef>
+          <a:effectRef idx="2">
+            <a:schemeClr val="accent1"/>
+          </a:effectRef>
+          <a:fontRef idx="minor">
+            <a:schemeClr val="lt1"/>
+          </a:fontRef>
+        </p:style>
+        <p:txBody>
+          <a:bodyPr rtlCol="0" anchor="ctr"/>
+          <a:lstStyle/>
+          <a:p>
+            <a:pPr algn="ctr"/>
+          </a:p>
+        </p:txBody>
+      </p:sp>
+      <p:sp>
+        <p:nvSpPr>
+          <p:cNvPr id="8" name="TextBox 7"/>
+          <p:cNvSpPr txBox="1"/>
+          <p:nvPr/>
+        </p:nvSpPr>
+        <p:spPr>
+          <a:xfrm>
+            <a:off x="1408176" y="2971800"/>
+            <a:ext cx="9957815" cy="402336"/>
+          </a:xfrm>
+          <a:prstGeom prst="rect">
+            <a:avLst/>
+          </a:prstGeom>
+          <a:noFill/>
+        </p:spPr>
+        <p:txBody>
+          <a:bodyPr wrap="square" lIns="0" rIns="0" tIns="0" bIns="0" anchor="ctr">
+            <a:spAutoFit/>
+          </a:bodyPr>
+          <a:lstStyle/>
+          <a:p>
+            <a:pPr algn="l"/>
+            <a:r>
+              <a:rPr sz="1400" b="0" i="0">
+                <a:solidFill>
+                  <a:srgbClr val="1D1D1F"/>
+                </a:solidFill>
+                <a:latin typeface="Helvetica Neue"/>
+              </a:rPr>
+              <a:t>All hand tools and test equipment back in their bins.</a:t>
+            </a:r>
+          </a:p>
+        </p:txBody>
+      </p:sp>
+      <p:sp>
+        <p:nvSpPr>
+          <p:cNvPr id="9" name="Rectangle 8"/>
+          <p:cNvSpPr/>
+          <p:nvPr/>
+        </p:nvSpPr>
+        <p:spPr>
+          <a:xfrm>
+            <a:off x="822960" y="3557015"/>
+            <a:ext cx="310896" cy="310896"/>
+          </a:xfrm>
+          <a:prstGeom prst="rect">
+            <a:avLst/>
+          </a:prstGeom>
+          <a:solidFill>
+            <a:srgbClr val="FFFFFF"/>
+          </a:solidFill>
+          <a:ln w="12700">
+            <a:solidFill>
+              <a:srgbClr val="86868B"/>
+            </a:solidFill>
+          </a:ln>
+        </p:spPr>
+        <p:style>
+          <a:lnRef idx="1">
+            <a:schemeClr val="accent1"/>
+          </a:lnRef>
+          <a:fillRef idx="3">
+            <a:schemeClr val="accent1"/>
+          </a:fillRef>
+          <a:effectRef idx="2">
+            <a:schemeClr val="accent1"/>
+          </a:effectRef>
+          <a:fontRef idx="minor">
+            <a:schemeClr val="lt1"/>
+          </a:fontRef>
+        </p:style>
+        <p:txBody>
+          <a:bodyPr rtlCol="0" anchor="ctr"/>
+          <a:lstStyle/>
+          <a:p>
+            <a:pPr algn="ctr"/>
+          </a:p>
+        </p:txBody>
+      </p:sp>
+      <p:sp>
+        <p:nvSpPr>
+          <p:cNvPr id="10" name="TextBox 9"/>
+          <p:cNvSpPr txBox="1"/>
+          <p:nvPr/>
+        </p:nvSpPr>
+        <p:spPr>
+          <a:xfrm>
+            <a:off x="1408176" y="3538727"/>
+            <a:ext cx="9957815" cy="402336"/>
+          </a:xfrm>
+          <a:prstGeom prst="rect">
+            <a:avLst/>
+          </a:prstGeom>
+          <a:noFill/>
+        </p:spPr>
+        <p:txBody>
+          <a:bodyPr wrap="square" lIns="0" rIns="0" tIns="0" bIns="0" anchor="ctr">
+            <a:spAutoFit/>
+          </a:bodyPr>
+          <a:lstStyle/>
+          <a:p>
+            <a:pPr algn="l"/>
+            <a:r>
+              <a:rPr sz="1400" b="0" i="0">
+                <a:solidFill>
+                  <a:srgbClr val="1D1D1F"/>
+                </a:solidFill>
+                <a:latin typeface="Helvetica Neue"/>
+              </a:rPr>
+              <a:t>Batteries off charge; charger stations powered down.</a:t>
+            </a:r>
+          </a:p>
+        </p:txBody>
+      </p:sp>
+      <p:sp>
+        <p:nvSpPr>
+          <p:cNvPr id="11" name="Rectangle 10"/>
+          <p:cNvSpPr/>
+          <p:nvPr/>
+        </p:nvSpPr>
+        <p:spPr>
+          <a:xfrm>
+            <a:off x="822960" y="4123944"/>
+            <a:ext cx="310896" cy="310896"/>
+          </a:xfrm>
+          <a:prstGeom prst="rect">
+            <a:avLst/>
+          </a:prstGeom>
+          <a:solidFill>
+            <a:srgbClr val="FFFFFF"/>
+          </a:solidFill>
+          <a:ln w="12700">
+            <a:solidFill>
+              <a:srgbClr val="86868B"/>
+            </a:solidFill>
+          </a:ln>
+        </p:spPr>
+        <p:style>
+          <a:lnRef idx="1">
+            <a:schemeClr val="accent1"/>
+          </a:lnRef>
+          <a:fillRef idx="3">
+            <a:schemeClr val="accent1"/>
+          </a:fillRef>
+          <a:effectRef idx="2">
+            <a:schemeClr val="accent1"/>
+          </a:effectRef>
+          <a:fontRef idx="minor">
+            <a:schemeClr val="lt1"/>
+          </a:fontRef>
+        </p:style>
+        <p:txBody>
+          <a:bodyPr rtlCol="0" anchor="ctr"/>
+          <a:lstStyle/>
+          <a:p>
+            <a:pPr algn="ctr"/>
+          </a:p>
+        </p:txBody>
+      </p:sp>
+      <p:sp>
+        <p:nvSpPr>
+          <p:cNvPr id="12" name="TextBox 11"/>
+          <p:cNvSpPr txBox="1"/>
+          <p:nvPr/>
+        </p:nvSpPr>
+        <p:spPr>
+          <a:xfrm>
+            <a:off x="1408176" y="4105656"/>
+            <a:ext cx="9957815" cy="402336"/>
+          </a:xfrm>
+          <a:prstGeom prst="rect">
+            <a:avLst/>
+          </a:prstGeom>
+          <a:noFill/>
+        </p:spPr>
+        <p:txBody>
+          <a:bodyPr wrap="square" lIns="0" rIns="0" tIns="0" bIns="0" anchor="ctr">
+            <a:spAutoFit/>
+          </a:bodyPr>
+          <a:lstStyle/>
+          <a:p>
+            <a:pPr algn="l"/>
+            <a:r>
+              <a:rPr sz="1400" b="0" i="0">
+                <a:solidFill>
+                  <a:srgbClr val="1D1D1F"/>
+                </a:solidFill>
+                <a:latin typeface="Helvetica Neue"/>
+              </a:rPr>
+              <a:t>Workshop swept; benches wiped; trash out.</a:t>
+            </a:r>
+          </a:p>
+        </p:txBody>
+      </p:sp>
+      <p:sp>
+        <p:nvSpPr>
+          <p:cNvPr id="13" name="Rectangle 12"/>
+          <p:cNvSpPr/>
+          <p:nvPr/>
+        </p:nvSpPr>
+        <p:spPr>
+          <a:xfrm>
+            <a:off x="822960" y="4690872"/>
+            <a:ext cx="310896" cy="310896"/>
+          </a:xfrm>
+          <a:prstGeom prst="rect">
+            <a:avLst/>
+          </a:prstGeom>
+          <a:solidFill>
+            <a:srgbClr val="FFFFFF"/>
+          </a:solidFill>
+          <a:ln w="12700">
+            <a:solidFill>
+              <a:srgbClr val="86868B"/>
+            </a:solidFill>
+          </a:ln>
+        </p:spPr>
+        <p:style>
+          <a:lnRef idx="1">
+            <a:schemeClr val="accent1"/>
+          </a:lnRef>
+          <a:fillRef idx="3">
+            <a:schemeClr val="accent1"/>
+          </a:fillRef>
+          <a:effectRef idx="2">
+            <a:schemeClr val="accent1"/>
+          </a:effectRef>
+          <a:fontRef idx="minor">
+            <a:schemeClr val="lt1"/>
+          </a:fontRef>
+        </p:style>
+        <p:txBody>
+          <a:bodyPr rtlCol="0" anchor="ctr"/>
+          <a:lstStyle/>
+          <a:p>
+            <a:pPr algn="ctr"/>
+          </a:p>
+        </p:txBody>
+      </p:sp>
+      <p:sp>
+        <p:nvSpPr>
+          <p:cNvPr id="14" name="TextBox 13"/>
+          <p:cNvSpPr txBox="1"/>
+          <p:nvPr/>
+        </p:nvSpPr>
+        <p:spPr>
+          <a:xfrm>
+            <a:off x="1408176" y="4672584"/>
+            <a:ext cx="9957815" cy="402336"/>
+          </a:xfrm>
+          <a:prstGeom prst="rect">
+            <a:avLst/>
+          </a:prstGeom>
+          <a:noFill/>
+        </p:spPr>
+        <p:txBody>
+          <a:bodyPr wrap="square" lIns="0" rIns="0" tIns="0" bIns="0" anchor="ctr">
+            <a:spAutoFit/>
+          </a:bodyPr>
+          <a:lstStyle/>
+          <a:p>
+            <a:pPr algn="l"/>
+            <a:r>
+              <a:rPr sz="1400" b="0" i="0">
+                <a:solidFill>
+                  <a:srgbClr val="1D1D1F"/>
+                </a:solidFill>
+                <a:latin typeface="Helvetica Neue"/>
+              </a:rPr>
+              <a:t>Today's photos uploaded to the team folder.</a:t>
+            </a:r>
+          </a:p>
+        </p:txBody>
+      </p:sp>
+      <p:sp>
+        <p:nvSpPr>
+          <p:cNvPr id="15" name="Rectangle 14"/>
+          <p:cNvSpPr/>
+          <p:nvPr/>
+        </p:nvSpPr>
+        <p:spPr>
+          <a:xfrm>
+            <a:off x="822960" y="5257800"/>
+            <a:ext cx="310896" cy="310896"/>
+          </a:xfrm>
+          <a:prstGeom prst="rect">
+            <a:avLst/>
+          </a:prstGeom>
+          <a:solidFill>
+            <a:srgbClr val="FFFFFF"/>
+          </a:solidFill>
+          <a:ln w="12700">
+            <a:solidFill>
+              <a:srgbClr val="86868B"/>
+            </a:solidFill>
+          </a:ln>
+        </p:spPr>
+        <p:style>
+          <a:lnRef idx="1">
+            <a:schemeClr val="accent1"/>
+          </a:lnRef>
+          <a:fillRef idx="3">
+            <a:schemeClr val="accent1"/>
+          </a:fillRef>
+          <a:effectRef idx="2">
+            <a:schemeClr val="accent1"/>
+          </a:effectRef>
+          <a:fontRef idx="minor">
+            <a:schemeClr val="lt1"/>
+          </a:fontRef>
+        </p:style>
+        <p:txBody>
+          <a:bodyPr rtlCol="0" anchor="ctr"/>
+          <a:lstStyle/>
+          <a:p>
+            <a:pPr algn="ctr"/>
+          </a:p>
+        </p:txBody>
+      </p:sp>
+      <p:sp>
+        <p:nvSpPr>
+          <p:cNvPr id="16" name="TextBox 15"/>
+          <p:cNvSpPr txBox="1"/>
+          <p:nvPr/>
+        </p:nvSpPr>
+        <p:spPr>
+          <a:xfrm>
+            <a:off x="1408176" y="5239512"/>
+            <a:ext cx="9957815" cy="402336"/>
+          </a:xfrm>
+          <a:prstGeom prst="rect">
+            <a:avLst/>
+          </a:prstGeom>
+          <a:noFill/>
+        </p:spPr>
+        <p:txBody>
+          <a:bodyPr wrap="square" lIns="0" rIns="0" tIns="0" bIns="0" anchor="ctr">
+            <a:spAutoFit/>
+          </a:bodyPr>
+          <a:lstStyle/>
+          <a:p>
+            <a:pPr algn="l"/>
+            <a:r>
+              <a:rPr sz="1400" b="0" i="0">
+                <a:solidFill>
+                  <a:srgbClr val="1D1D1F"/>
+                </a:solidFill>
+                <a:latin typeface="Helvetica Neue"/>
+              </a:rPr>
+              <a:t>Notetaker's meeting notes filed with the CFO for the engineering notebook.</a:t>
+            </a:r>
+          </a:p>
+        </p:txBody>
+      </p:sp>
+      <p:cxnSp>
+        <p:nvCxnSpPr>
+          <p:cNvPr id="17" name="Connector 16"/>
+          <p:cNvCxnSpPr/>
+          <p:nvPr/>
+        </p:nvCxnSpPr>
+        <p:spPr>
+          <a:xfrm>
+            <a:off x="822960" y="6437376"/>
+            <a:ext cx="10543032" cy="0"/>
+          </a:xfrm>
+          <a:prstGeom prst="line">
+            <a:avLst/>
+          </a:prstGeom>
+          <a:ln w="9525">
+            <a:solidFill>
+              <a:srgbClr val="E3E3E6"/>
+            </a:solidFill>
+          </a:ln>
+        </p:spPr>
+        <p:style>
+          <a:lnRef idx="2">
+            <a:schemeClr val="accent1"/>
+          </a:lnRef>
+          <a:fillRef idx="0">
+            <a:schemeClr val="accent1"/>
+          </a:fillRef>
+          <a:effectRef idx="1">
+            <a:schemeClr val="accent1"/>
+          </a:effectRef>
+          <a:fontRef idx="minor">
+            <a:schemeClr val="tx1"/>
+          </a:fontRef>
+        </p:style>
+      </p:cxnSp>
+      <p:sp>
+        <p:nvSpPr>
+          <p:cNvPr id="18" name="TextBox 17"/>
+          <p:cNvSpPr txBox="1"/>
+          <p:nvPr/>
+        </p:nvSpPr>
+        <p:spPr>
+          <a:xfrm>
+            <a:off x="822960" y="6473952"/>
+            <a:ext cx="5486400" cy="274320"/>
+          </a:xfrm>
+          <a:prstGeom prst="rect">
+            <a:avLst/>
+          </a:prstGeom>
+          <a:noFill/>
+        </p:spPr>
+        <p:txBody>
+          <a:bodyPr wrap="square" lIns="0" rIns="0" tIns="0" bIns="0" anchor="t">
+            <a:spAutoFit/>
+          </a:bodyPr>
+          <a:lstStyle/>
+          <a:p>
+            <a:pPr algn="l"/>
+            <a:r>
+              <a:rPr sz="750" b="1" i="0" cap="all" spc="180">
+                <a:solidFill>
+                  <a:srgbClr val="86868B"/>
+                </a:solidFill>
+                <a:latin typeface="Helvetica Neue"/>
+              </a:rPr>
+              <a:t>SAY WATT ROBOTICS  ·  ROV TEAM</a:t>
+            </a:r>
+          </a:p>
+        </p:txBody>
+      </p:sp>
+      <p:sp>
+        <p:nvSpPr>
+          <p:cNvPr id="19" name="TextBox 18"/>
+          <p:cNvSpPr txBox="1"/>
+          <p:nvPr/>
+        </p:nvSpPr>
+        <p:spPr>
+          <a:xfrm>
+            <a:off x="5879592" y="6473952"/>
+            <a:ext cx="5486400" cy="274320"/>
+          </a:xfrm>
+          <a:prstGeom prst="rect">
+            <a:avLst/>
+          </a:prstGeom>
+          <a:noFill/>
+        </p:spPr>
+        <p:txBody>
+          <a:bodyPr wrap="square" lIns="0" rIns="0" tIns="0" bIns="0" anchor="t">
+            <a:spAutoFit/>
+          </a:bodyPr>
+          <a:lstStyle/>
+          <a:p>
+            <a:pPr algn="r"/>
+            <a:r>
+              <a:rPr sz="750" b="1" i="0" cap="all" spc="180">
+                <a:solidFill>
+                  <a:srgbClr val="86868B"/>
+                </a:solidFill>
+                <a:latin typeface="Helvetica Neue"/>
+              </a:rPr>
+              <a:t>WEEK 1 — KICKOFF   ·   28 / 29</a:t>
+            </a:r>
+          </a:p>
+        </p:txBody>
+      </p:sp>
+    </p:spTree>
+  </p:cSld>
+  <p:clrMapOvr>
+    <a:masterClrMapping/>
+  </p:clrMapOvr>
+</p:sld>
+</file>
+
+<file path=ppt/slides/slide29.xml><?xml version="1.0" encoding="utf-8"?>
 <p:sld xmlns:a="http://schemas.openxmlformats.org/drawingml/2006/main" xmlns:r="http://schemas.openxmlformats.org/officeDocument/2006/relationships" xmlns:p="http://schemas.openxmlformats.org/presentationml/2006/main">
   <p:cSld name="Slide 26">
     <p:bg>
@@ -19663,7 +22213,7 @@
 </p:sld>
 </file>
 
-<file path=ppt/slides/slide27.xml><?xml version="1.0" encoding="utf-8"?>
+<file path=ppt/slides/slide3.xml><?xml version="1.0" encoding="utf-8"?>
 <p:sld xmlns:a="http://schemas.openxmlformats.org/drawingml/2006/main" xmlns:p="http://schemas.openxmlformats.org/presentationml/2006/main" xmlns:r="http://schemas.openxmlformats.org/officeDocument/2006/relationships">
   <p:cSld>
     <p:spTree>
@@ -20495,2149 +23045,7 @@
 </p:sld>
 </file>
 
-<file path=ppt/slides/slide28.xml><?xml version="1.0" encoding="utf-8"?>
-<p:sld xmlns:a="http://schemas.openxmlformats.org/drawingml/2006/main" xmlns:p="http://schemas.openxmlformats.org/presentationml/2006/main" xmlns:r="http://schemas.openxmlformats.org/officeDocument/2006/relationships">
-  <p:cSld>
-    <p:spTree>
-      <p:nvGrpSpPr>
-        <p:cNvPr id="1" name=""/>
-        <p:cNvGrpSpPr/>
-        <p:nvPr/>
-      </p:nvGrpSpPr>
-      <p:grpSpPr/>
-      <p:sp>
-        <p:nvSpPr>
-          <p:cNvPr id="2" name="TextBox 1"/>
-          <p:cNvSpPr txBox="1"/>
-          <p:nvPr/>
-        </p:nvSpPr>
-        <p:spPr>
-          <a:xfrm>
-            <a:off x="822960" y="530352"/>
-            <a:ext cx="10515600" cy="292608"/>
-          </a:xfrm>
-          <a:prstGeom prst="rect">
-            <a:avLst/>
-          </a:prstGeom>
-          <a:noFill/>
-        </p:spPr>
-        <p:txBody>
-          <a:bodyPr wrap="square" lIns="0" rIns="0" tIns="0" bIns="0" anchor="t">
-            <a:spAutoFit/>
-          </a:bodyPr>
-          <a:lstStyle/>
-          <a:p>
-            <a:pPr algn="l"/>
-            <a:r>
-              <a:rPr sz="1200" b="1" i="0" cap="all" spc="180">
-                <a:solidFill>
-                  <a:srgbClr val="0D7490"/>
-                </a:solidFill>
-                <a:latin typeface="Helvetica Neue"/>
-              </a:rPr>
-              <a:t>ACTION ITEMS</a:t>
-            </a:r>
-          </a:p>
-        </p:txBody>
-      </p:sp>
-      <p:sp>
-        <p:nvSpPr>
-          <p:cNvPr id="3" name="TextBox 2"/>
-          <p:cNvSpPr txBox="1"/>
-          <p:nvPr/>
-        </p:nvSpPr>
-        <p:spPr>
-          <a:xfrm>
-            <a:off x="804672" y="822960"/>
-            <a:ext cx="10515600" cy="868680"/>
-          </a:xfrm>
-          <a:prstGeom prst="rect">
-            <a:avLst/>
-          </a:prstGeom>
-          <a:noFill/>
-        </p:spPr>
-        <p:txBody>
-          <a:bodyPr wrap="square" lIns="0" rIns="0" tIns="0" bIns="0" anchor="t">
-            <a:spAutoFit/>
-          </a:bodyPr>
-          <a:lstStyle/>
-          <a:p>
-            <a:pPr algn="l">
-              <a:lnSpc>
-                <a:spcPct val="105000"/>
-              </a:lnSpc>
-            </a:pPr>
-            <a:r>
-              <a:rPr sz="3000" b="1" i="0">
-                <a:solidFill>
-                  <a:srgbClr val="1D1D1F"/>
-                </a:solidFill>
-                <a:latin typeface="Helvetica Neue"/>
-              </a:rPr>
-              <a:t>What we decided. Who owns it. When it's due.</a:t>
-            </a:r>
-          </a:p>
-        </p:txBody>
-      </p:sp>
-      <p:sp>
-        <p:nvSpPr>
-          <p:cNvPr id="4" name="TextBox 3"/>
-          <p:cNvSpPr txBox="1"/>
-          <p:nvPr/>
-        </p:nvSpPr>
-        <p:spPr>
-          <a:xfrm>
-            <a:off x="822960" y="1700784"/>
-            <a:ext cx="10515600" cy="457200"/>
-          </a:xfrm>
-          <a:prstGeom prst="rect">
-            <a:avLst/>
-          </a:prstGeom>
-          <a:noFill/>
-        </p:spPr>
-        <p:txBody>
-          <a:bodyPr wrap="square" lIns="0" rIns="0" tIns="0" bIns="0" anchor="t">
-            <a:spAutoFit/>
-          </a:bodyPr>
-          <a:lstStyle/>
-          <a:p>
-            <a:pPr algn="l"/>
-            <a:r>
-              <a:rPr sz="1400" b="0" i="1">
-                <a:solidFill>
-                  <a:srgbClr val="6E6E73"/>
-                </a:solidFill>
-                <a:latin typeface="Helvetica Neue"/>
-              </a:rPr>
-              <a:t>The Notetaker fills these in during the meeting and reads them back before we leave.</a:t>
-            </a:r>
-          </a:p>
-        </p:txBody>
-      </p:sp>
-      <p:sp>
-        <p:nvSpPr>
-          <p:cNvPr id="5" name="Rectangle 4"/>
-          <p:cNvSpPr/>
-          <p:nvPr/>
-        </p:nvSpPr>
-        <p:spPr>
-          <a:xfrm>
-            <a:off x="822960" y="2423160"/>
-            <a:ext cx="10543032" cy="384048"/>
-          </a:xfrm>
-          <a:prstGeom prst="rect">
-            <a:avLst/>
-          </a:prstGeom>
-          <a:solidFill>
-            <a:srgbClr val="0D7490"/>
-          </a:solidFill>
-          <a:ln>
-            <a:noFill/>
-          </a:ln>
-        </p:spPr>
-        <p:style>
-          <a:lnRef idx="1">
-            <a:schemeClr val="accent1"/>
-          </a:lnRef>
-          <a:fillRef idx="3">
-            <a:schemeClr val="accent1"/>
-          </a:fillRef>
-          <a:effectRef idx="2">
-            <a:schemeClr val="accent1"/>
-          </a:effectRef>
-          <a:fontRef idx="minor">
-            <a:schemeClr val="lt1"/>
-          </a:fontRef>
-        </p:style>
-        <p:txBody>
-          <a:bodyPr rtlCol="0" anchor="ctr"/>
-          <a:lstStyle/>
-          <a:p>
-            <a:pPr algn="ctr"/>
-          </a:p>
-        </p:txBody>
-      </p:sp>
-      <p:sp>
-        <p:nvSpPr>
-          <p:cNvPr id="6" name="TextBox 5"/>
-          <p:cNvSpPr txBox="1"/>
-          <p:nvPr/>
-        </p:nvSpPr>
-        <p:spPr>
-          <a:xfrm>
-            <a:off x="1024128" y="2459736"/>
-            <a:ext cx="5486400" cy="310896"/>
-          </a:xfrm>
-          <a:prstGeom prst="rect">
-            <a:avLst/>
-          </a:prstGeom>
-          <a:noFill/>
-        </p:spPr>
-        <p:txBody>
-          <a:bodyPr wrap="square" lIns="0" rIns="0" tIns="0" bIns="0" anchor="t">
-            <a:spAutoFit/>
-          </a:bodyPr>
-          <a:lstStyle/>
-          <a:p>
-            <a:pPr algn="l"/>
-            <a:r>
-              <a:rPr sz="1000" b="1" i="0" cap="all" spc="180">
-                <a:solidFill>
-                  <a:srgbClr val="FFFFFF"/>
-                </a:solidFill>
-                <a:latin typeface="Helvetica Neue"/>
-              </a:rPr>
-              <a:t>ITEM</a:t>
-            </a:r>
-          </a:p>
-        </p:txBody>
-      </p:sp>
-      <p:sp>
-        <p:nvSpPr>
-          <p:cNvPr id="7" name="TextBox 6"/>
-          <p:cNvSpPr txBox="1"/>
-          <p:nvPr/>
-        </p:nvSpPr>
-        <p:spPr>
-          <a:xfrm>
-            <a:off x="6784848" y="2459736"/>
-            <a:ext cx="2011680" cy="310896"/>
-          </a:xfrm>
-          <a:prstGeom prst="rect">
-            <a:avLst/>
-          </a:prstGeom>
-          <a:noFill/>
-        </p:spPr>
-        <p:txBody>
-          <a:bodyPr wrap="square" lIns="0" rIns="0" tIns="0" bIns="0" anchor="t">
-            <a:spAutoFit/>
-          </a:bodyPr>
-          <a:lstStyle/>
-          <a:p>
-            <a:pPr algn="l"/>
-            <a:r>
-              <a:rPr sz="1000" b="1" i="0" cap="all" spc="180">
-                <a:solidFill>
-                  <a:srgbClr val="FFFFFF"/>
-                </a:solidFill>
-                <a:latin typeface="Helvetica Neue"/>
-              </a:rPr>
-              <a:t>OWNER</a:t>
-            </a:r>
-          </a:p>
-        </p:txBody>
-      </p:sp>
-      <p:sp>
-        <p:nvSpPr>
-          <p:cNvPr id="8" name="TextBox 7"/>
-          <p:cNvSpPr txBox="1"/>
-          <p:nvPr/>
-        </p:nvSpPr>
-        <p:spPr>
-          <a:xfrm>
-            <a:off x="9070848" y="2459736"/>
-            <a:ext cx="2221992" cy="310896"/>
-          </a:xfrm>
-          <a:prstGeom prst="rect">
-            <a:avLst/>
-          </a:prstGeom>
-          <a:noFill/>
-        </p:spPr>
-        <p:txBody>
-          <a:bodyPr wrap="square" lIns="0" rIns="0" tIns="0" bIns="0" anchor="t">
-            <a:spAutoFit/>
-          </a:bodyPr>
-          <a:lstStyle/>
-          <a:p>
-            <a:pPr algn="l"/>
-            <a:r>
-              <a:rPr sz="1000" b="1" i="0" cap="all" spc="180">
-                <a:solidFill>
-                  <a:srgbClr val="FFFFFF"/>
-                </a:solidFill>
-                <a:latin typeface="Helvetica Neue"/>
-              </a:rPr>
-              <a:t>DUE</a:t>
-            </a:r>
-          </a:p>
-        </p:txBody>
-      </p:sp>
-      <p:cxnSp>
-        <p:nvCxnSpPr>
-          <p:cNvPr id="9" name="Connector 8"/>
-          <p:cNvCxnSpPr/>
-          <p:nvPr/>
-        </p:nvCxnSpPr>
-        <p:spPr>
-          <a:xfrm>
-            <a:off x="822960" y="3374136"/>
-            <a:ext cx="10543032" cy="0"/>
-          </a:xfrm>
-          <a:prstGeom prst="line">
-            <a:avLst/>
-          </a:prstGeom>
-          <a:ln w="6350">
-            <a:solidFill>
-              <a:srgbClr val="E3E3E6"/>
-            </a:solidFill>
-          </a:ln>
-        </p:spPr>
-        <p:style>
-          <a:lnRef idx="2">
-            <a:schemeClr val="accent1"/>
-          </a:lnRef>
-          <a:fillRef idx="0">
-            <a:schemeClr val="accent1"/>
-          </a:fillRef>
-          <a:effectRef idx="1">
-            <a:schemeClr val="accent1"/>
-          </a:effectRef>
-          <a:fontRef idx="minor">
-            <a:schemeClr val="tx1"/>
-          </a:fontRef>
-        </p:style>
-      </p:cxnSp>
-      <p:cxnSp>
-        <p:nvCxnSpPr>
-          <p:cNvPr id="10" name="Connector 9"/>
-          <p:cNvCxnSpPr/>
-          <p:nvPr/>
-        </p:nvCxnSpPr>
-        <p:spPr>
-          <a:xfrm>
-            <a:off x="6583680" y="2807208"/>
-            <a:ext cx="0" cy="566928"/>
-          </a:xfrm>
-          <a:prstGeom prst="line">
-            <a:avLst/>
-          </a:prstGeom>
-          <a:ln w="6350">
-            <a:solidFill>
-              <a:srgbClr val="E3E3E6"/>
-            </a:solidFill>
-          </a:ln>
-        </p:spPr>
-        <p:style>
-          <a:lnRef idx="2">
-            <a:schemeClr val="accent1"/>
-          </a:lnRef>
-          <a:fillRef idx="0">
-            <a:schemeClr val="accent1"/>
-          </a:fillRef>
-          <a:effectRef idx="1">
-            <a:schemeClr val="accent1"/>
-          </a:effectRef>
-          <a:fontRef idx="minor">
-            <a:schemeClr val="tx1"/>
-          </a:fontRef>
-        </p:style>
-      </p:cxnSp>
-      <p:cxnSp>
-        <p:nvCxnSpPr>
-          <p:cNvPr id="11" name="Connector 10"/>
-          <p:cNvCxnSpPr/>
-          <p:nvPr/>
-        </p:nvCxnSpPr>
-        <p:spPr>
-          <a:xfrm>
-            <a:off x="8869680" y="2807208"/>
-            <a:ext cx="0" cy="566928"/>
-          </a:xfrm>
-          <a:prstGeom prst="line">
-            <a:avLst/>
-          </a:prstGeom>
-          <a:ln w="6350">
-            <a:solidFill>
-              <a:srgbClr val="E3E3E6"/>
-            </a:solidFill>
-          </a:ln>
-        </p:spPr>
-        <p:style>
-          <a:lnRef idx="2">
-            <a:schemeClr val="accent1"/>
-          </a:lnRef>
-          <a:fillRef idx="0">
-            <a:schemeClr val="accent1"/>
-          </a:fillRef>
-          <a:effectRef idx="1">
-            <a:schemeClr val="accent1"/>
-          </a:effectRef>
-          <a:fontRef idx="minor">
-            <a:schemeClr val="tx1"/>
-          </a:fontRef>
-        </p:style>
-      </p:cxnSp>
-      <p:cxnSp>
-        <p:nvCxnSpPr>
-          <p:cNvPr id="12" name="Connector 11"/>
-          <p:cNvCxnSpPr/>
-          <p:nvPr/>
-        </p:nvCxnSpPr>
-        <p:spPr>
-          <a:xfrm>
-            <a:off x="1024128" y="3209544"/>
-            <a:ext cx="5358384" cy="0"/>
-          </a:xfrm>
-          <a:prstGeom prst="line">
-            <a:avLst/>
-          </a:prstGeom>
-          <a:ln w="4445">
-            <a:solidFill>
-              <a:srgbClr val="E3E3E6"/>
-            </a:solidFill>
-          </a:ln>
-        </p:spPr>
-        <p:style>
-          <a:lnRef idx="2">
-            <a:schemeClr val="accent1"/>
-          </a:lnRef>
-          <a:fillRef idx="0">
-            <a:schemeClr val="accent1"/>
-          </a:fillRef>
-          <a:effectRef idx="1">
-            <a:schemeClr val="accent1"/>
-          </a:effectRef>
-          <a:fontRef idx="minor">
-            <a:schemeClr val="tx1"/>
-          </a:fontRef>
-        </p:style>
-      </p:cxnSp>
-      <p:cxnSp>
-        <p:nvCxnSpPr>
-          <p:cNvPr id="13" name="Connector 12"/>
-          <p:cNvCxnSpPr/>
-          <p:nvPr/>
-        </p:nvCxnSpPr>
-        <p:spPr>
-          <a:xfrm>
-            <a:off x="6784848" y="3209544"/>
-            <a:ext cx="1883664" cy="0"/>
-          </a:xfrm>
-          <a:prstGeom prst="line">
-            <a:avLst/>
-          </a:prstGeom>
-          <a:ln w="4445">
-            <a:solidFill>
-              <a:srgbClr val="E3E3E6"/>
-            </a:solidFill>
-          </a:ln>
-        </p:spPr>
-        <p:style>
-          <a:lnRef idx="2">
-            <a:schemeClr val="accent1"/>
-          </a:lnRef>
-          <a:fillRef idx="0">
-            <a:schemeClr val="accent1"/>
-          </a:fillRef>
-          <a:effectRef idx="1">
-            <a:schemeClr val="accent1"/>
-          </a:effectRef>
-          <a:fontRef idx="minor">
-            <a:schemeClr val="tx1"/>
-          </a:fontRef>
-        </p:style>
-      </p:cxnSp>
-      <p:cxnSp>
-        <p:nvCxnSpPr>
-          <p:cNvPr id="14" name="Connector 13"/>
-          <p:cNvCxnSpPr/>
-          <p:nvPr/>
-        </p:nvCxnSpPr>
-        <p:spPr>
-          <a:xfrm>
-            <a:off x="9070848" y="3209544"/>
-            <a:ext cx="2093976" cy="0"/>
-          </a:xfrm>
-          <a:prstGeom prst="line">
-            <a:avLst/>
-          </a:prstGeom>
-          <a:ln w="4445">
-            <a:solidFill>
-              <a:srgbClr val="E3E3E6"/>
-            </a:solidFill>
-          </a:ln>
-        </p:spPr>
-        <p:style>
-          <a:lnRef idx="2">
-            <a:schemeClr val="accent1"/>
-          </a:lnRef>
-          <a:fillRef idx="0">
-            <a:schemeClr val="accent1"/>
-          </a:fillRef>
-          <a:effectRef idx="1">
-            <a:schemeClr val="accent1"/>
-          </a:effectRef>
-          <a:fontRef idx="minor">
-            <a:schemeClr val="tx1"/>
-          </a:fontRef>
-        </p:style>
-      </p:cxnSp>
-      <p:cxnSp>
-        <p:nvCxnSpPr>
-          <p:cNvPr id="15" name="Connector 14"/>
-          <p:cNvCxnSpPr/>
-          <p:nvPr/>
-        </p:nvCxnSpPr>
-        <p:spPr>
-          <a:xfrm>
-            <a:off x="822960" y="3941063"/>
-            <a:ext cx="10543032" cy="0"/>
-          </a:xfrm>
-          <a:prstGeom prst="line">
-            <a:avLst/>
-          </a:prstGeom>
-          <a:ln w="6350">
-            <a:solidFill>
-              <a:srgbClr val="E3E3E6"/>
-            </a:solidFill>
-          </a:ln>
-        </p:spPr>
-        <p:style>
-          <a:lnRef idx="2">
-            <a:schemeClr val="accent1"/>
-          </a:lnRef>
-          <a:fillRef idx="0">
-            <a:schemeClr val="accent1"/>
-          </a:fillRef>
-          <a:effectRef idx="1">
-            <a:schemeClr val="accent1"/>
-          </a:effectRef>
-          <a:fontRef idx="minor">
-            <a:schemeClr val="tx1"/>
-          </a:fontRef>
-        </p:style>
-      </p:cxnSp>
-      <p:cxnSp>
-        <p:nvCxnSpPr>
-          <p:cNvPr id="16" name="Connector 15"/>
-          <p:cNvCxnSpPr/>
-          <p:nvPr/>
-        </p:nvCxnSpPr>
-        <p:spPr>
-          <a:xfrm>
-            <a:off x="6583680" y="3374136"/>
-            <a:ext cx="0" cy="566927"/>
-          </a:xfrm>
-          <a:prstGeom prst="line">
-            <a:avLst/>
-          </a:prstGeom>
-          <a:ln w="6350">
-            <a:solidFill>
-              <a:srgbClr val="E3E3E6"/>
-            </a:solidFill>
-          </a:ln>
-        </p:spPr>
-        <p:style>
-          <a:lnRef idx="2">
-            <a:schemeClr val="accent1"/>
-          </a:lnRef>
-          <a:fillRef idx="0">
-            <a:schemeClr val="accent1"/>
-          </a:fillRef>
-          <a:effectRef idx="1">
-            <a:schemeClr val="accent1"/>
-          </a:effectRef>
-          <a:fontRef idx="minor">
-            <a:schemeClr val="tx1"/>
-          </a:fontRef>
-        </p:style>
-      </p:cxnSp>
-      <p:cxnSp>
-        <p:nvCxnSpPr>
-          <p:cNvPr id="17" name="Connector 16"/>
-          <p:cNvCxnSpPr/>
-          <p:nvPr/>
-        </p:nvCxnSpPr>
-        <p:spPr>
-          <a:xfrm>
-            <a:off x="8869680" y="3374136"/>
-            <a:ext cx="0" cy="566927"/>
-          </a:xfrm>
-          <a:prstGeom prst="line">
-            <a:avLst/>
-          </a:prstGeom>
-          <a:ln w="6350">
-            <a:solidFill>
-              <a:srgbClr val="E3E3E6"/>
-            </a:solidFill>
-          </a:ln>
-        </p:spPr>
-        <p:style>
-          <a:lnRef idx="2">
-            <a:schemeClr val="accent1"/>
-          </a:lnRef>
-          <a:fillRef idx="0">
-            <a:schemeClr val="accent1"/>
-          </a:fillRef>
-          <a:effectRef idx="1">
-            <a:schemeClr val="accent1"/>
-          </a:effectRef>
-          <a:fontRef idx="minor">
-            <a:schemeClr val="tx1"/>
-          </a:fontRef>
-        </p:style>
-      </p:cxnSp>
-      <p:cxnSp>
-        <p:nvCxnSpPr>
-          <p:cNvPr id="18" name="Connector 17"/>
-          <p:cNvCxnSpPr/>
-          <p:nvPr/>
-        </p:nvCxnSpPr>
-        <p:spPr>
-          <a:xfrm>
-            <a:off x="1024128" y="3776472"/>
-            <a:ext cx="5358384" cy="0"/>
-          </a:xfrm>
-          <a:prstGeom prst="line">
-            <a:avLst/>
-          </a:prstGeom>
-          <a:ln w="4445">
-            <a:solidFill>
-              <a:srgbClr val="E3E3E6"/>
-            </a:solidFill>
-          </a:ln>
-        </p:spPr>
-        <p:style>
-          <a:lnRef idx="2">
-            <a:schemeClr val="accent1"/>
-          </a:lnRef>
-          <a:fillRef idx="0">
-            <a:schemeClr val="accent1"/>
-          </a:fillRef>
-          <a:effectRef idx="1">
-            <a:schemeClr val="accent1"/>
-          </a:effectRef>
-          <a:fontRef idx="minor">
-            <a:schemeClr val="tx1"/>
-          </a:fontRef>
-        </p:style>
-      </p:cxnSp>
-      <p:cxnSp>
-        <p:nvCxnSpPr>
-          <p:cNvPr id="19" name="Connector 18"/>
-          <p:cNvCxnSpPr/>
-          <p:nvPr/>
-        </p:nvCxnSpPr>
-        <p:spPr>
-          <a:xfrm>
-            <a:off x="6784848" y="3776472"/>
-            <a:ext cx="1883664" cy="0"/>
-          </a:xfrm>
-          <a:prstGeom prst="line">
-            <a:avLst/>
-          </a:prstGeom>
-          <a:ln w="4445">
-            <a:solidFill>
-              <a:srgbClr val="E3E3E6"/>
-            </a:solidFill>
-          </a:ln>
-        </p:spPr>
-        <p:style>
-          <a:lnRef idx="2">
-            <a:schemeClr val="accent1"/>
-          </a:lnRef>
-          <a:fillRef idx="0">
-            <a:schemeClr val="accent1"/>
-          </a:fillRef>
-          <a:effectRef idx="1">
-            <a:schemeClr val="accent1"/>
-          </a:effectRef>
-          <a:fontRef idx="minor">
-            <a:schemeClr val="tx1"/>
-          </a:fontRef>
-        </p:style>
-      </p:cxnSp>
-      <p:cxnSp>
-        <p:nvCxnSpPr>
-          <p:cNvPr id="20" name="Connector 19"/>
-          <p:cNvCxnSpPr/>
-          <p:nvPr/>
-        </p:nvCxnSpPr>
-        <p:spPr>
-          <a:xfrm>
-            <a:off x="9070848" y="3776472"/>
-            <a:ext cx="2093976" cy="0"/>
-          </a:xfrm>
-          <a:prstGeom prst="line">
-            <a:avLst/>
-          </a:prstGeom>
-          <a:ln w="4445">
-            <a:solidFill>
-              <a:srgbClr val="E3E3E6"/>
-            </a:solidFill>
-          </a:ln>
-        </p:spPr>
-        <p:style>
-          <a:lnRef idx="2">
-            <a:schemeClr val="accent1"/>
-          </a:lnRef>
-          <a:fillRef idx="0">
-            <a:schemeClr val="accent1"/>
-          </a:fillRef>
-          <a:effectRef idx="1">
-            <a:schemeClr val="accent1"/>
-          </a:effectRef>
-          <a:fontRef idx="minor">
-            <a:schemeClr val="tx1"/>
-          </a:fontRef>
-        </p:style>
-      </p:cxnSp>
-      <p:cxnSp>
-        <p:nvCxnSpPr>
-          <p:cNvPr id="21" name="Connector 20"/>
-          <p:cNvCxnSpPr/>
-          <p:nvPr/>
-        </p:nvCxnSpPr>
-        <p:spPr>
-          <a:xfrm>
-            <a:off x="822960" y="4507992"/>
-            <a:ext cx="10543032" cy="0"/>
-          </a:xfrm>
-          <a:prstGeom prst="line">
-            <a:avLst/>
-          </a:prstGeom>
-          <a:ln w="6350">
-            <a:solidFill>
-              <a:srgbClr val="E3E3E6"/>
-            </a:solidFill>
-          </a:ln>
-        </p:spPr>
-        <p:style>
-          <a:lnRef idx="2">
-            <a:schemeClr val="accent1"/>
-          </a:lnRef>
-          <a:fillRef idx="0">
-            <a:schemeClr val="accent1"/>
-          </a:fillRef>
-          <a:effectRef idx="1">
-            <a:schemeClr val="accent1"/>
-          </a:effectRef>
-          <a:fontRef idx="minor">
-            <a:schemeClr val="tx1"/>
-          </a:fontRef>
-        </p:style>
-      </p:cxnSp>
-      <p:cxnSp>
-        <p:nvCxnSpPr>
-          <p:cNvPr id="22" name="Connector 21"/>
-          <p:cNvCxnSpPr/>
-          <p:nvPr/>
-        </p:nvCxnSpPr>
-        <p:spPr>
-          <a:xfrm>
-            <a:off x="6583680" y="3941063"/>
-            <a:ext cx="0" cy="566929"/>
-          </a:xfrm>
-          <a:prstGeom prst="line">
-            <a:avLst/>
-          </a:prstGeom>
-          <a:ln w="6350">
-            <a:solidFill>
-              <a:srgbClr val="E3E3E6"/>
-            </a:solidFill>
-          </a:ln>
-        </p:spPr>
-        <p:style>
-          <a:lnRef idx="2">
-            <a:schemeClr val="accent1"/>
-          </a:lnRef>
-          <a:fillRef idx="0">
-            <a:schemeClr val="accent1"/>
-          </a:fillRef>
-          <a:effectRef idx="1">
-            <a:schemeClr val="accent1"/>
-          </a:effectRef>
-          <a:fontRef idx="minor">
-            <a:schemeClr val="tx1"/>
-          </a:fontRef>
-        </p:style>
-      </p:cxnSp>
-      <p:cxnSp>
-        <p:nvCxnSpPr>
-          <p:cNvPr id="23" name="Connector 22"/>
-          <p:cNvCxnSpPr/>
-          <p:nvPr/>
-        </p:nvCxnSpPr>
-        <p:spPr>
-          <a:xfrm>
-            <a:off x="8869680" y="3941063"/>
-            <a:ext cx="0" cy="566929"/>
-          </a:xfrm>
-          <a:prstGeom prst="line">
-            <a:avLst/>
-          </a:prstGeom>
-          <a:ln w="6350">
-            <a:solidFill>
-              <a:srgbClr val="E3E3E6"/>
-            </a:solidFill>
-          </a:ln>
-        </p:spPr>
-        <p:style>
-          <a:lnRef idx="2">
-            <a:schemeClr val="accent1"/>
-          </a:lnRef>
-          <a:fillRef idx="0">
-            <a:schemeClr val="accent1"/>
-          </a:fillRef>
-          <a:effectRef idx="1">
-            <a:schemeClr val="accent1"/>
-          </a:effectRef>
-          <a:fontRef idx="minor">
-            <a:schemeClr val="tx1"/>
-          </a:fontRef>
-        </p:style>
-      </p:cxnSp>
-      <p:cxnSp>
-        <p:nvCxnSpPr>
-          <p:cNvPr id="24" name="Connector 23"/>
-          <p:cNvCxnSpPr/>
-          <p:nvPr/>
-        </p:nvCxnSpPr>
-        <p:spPr>
-          <a:xfrm>
-            <a:off x="1024128" y="4343400"/>
-            <a:ext cx="5358384" cy="0"/>
-          </a:xfrm>
-          <a:prstGeom prst="line">
-            <a:avLst/>
-          </a:prstGeom>
-          <a:ln w="4445">
-            <a:solidFill>
-              <a:srgbClr val="E3E3E6"/>
-            </a:solidFill>
-          </a:ln>
-        </p:spPr>
-        <p:style>
-          <a:lnRef idx="2">
-            <a:schemeClr val="accent1"/>
-          </a:lnRef>
-          <a:fillRef idx="0">
-            <a:schemeClr val="accent1"/>
-          </a:fillRef>
-          <a:effectRef idx="1">
-            <a:schemeClr val="accent1"/>
-          </a:effectRef>
-          <a:fontRef idx="minor">
-            <a:schemeClr val="tx1"/>
-          </a:fontRef>
-        </p:style>
-      </p:cxnSp>
-      <p:cxnSp>
-        <p:nvCxnSpPr>
-          <p:cNvPr id="25" name="Connector 24"/>
-          <p:cNvCxnSpPr/>
-          <p:nvPr/>
-        </p:nvCxnSpPr>
-        <p:spPr>
-          <a:xfrm>
-            <a:off x="6784848" y="4343400"/>
-            <a:ext cx="1883664" cy="0"/>
-          </a:xfrm>
-          <a:prstGeom prst="line">
-            <a:avLst/>
-          </a:prstGeom>
-          <a:ln w="4445">
-            <a:solidFill>
-              <a:srgbClr val="E3E3E6"/>
-            </a:solidFill>
-          </a:ln>
-        </p:spPr>
-        <p:style>
-          <a:lnRef idx="2">
-            <a:schemeClr val="accent1"/>
-          </a:lnRef>
-          <a:fillRef idx="0">
-            <a:schemeClr val="accent1"/>
-          </a:fillRef>
-          <a:effectRef idx="1">
-            <a:schemeClr val="accent1"/>
-          </a:effectRef>
-          <a:fontRef idx="minor">
-            <a:schemeClr val="tx1"/>
-          </a:fontRef>
-        </p:style>
-      </p:cxnSp>
-      <p:cxnSp>
-        <p:nvCxnSpPr>
-          <p:cNvPr id="26" name="Connector 25"/>
-          <p:cNvCxnSpPr/>
-          <p:nvPr/>
-        </p:nvCxnSpPr>
-        <p:spPr>
-          <a:xfrm>
-            <a:off x="9070848" y="4343400"/>
-            <a:ext cx="2093976" cy="0"/>
-          </a:xfrm>
-          <a:prstGeom prst="line">
-            <a:avLst/>
-          </a:prstGeom>
-          <a:ln w="4445">
-            <a:solidFill>
-              <a:srgbClr val="E3E3E6"/>
-            </a:solidFill>
-          </a:ln>
-        </p:spPr>
-        <p:style>
-          <a:lnRef idx="2">
-            <a:schemeClr val="accent1"/>
-          </a:lnRef>
-          <a:fillRef idx="0">
-            <a:schemeClr val="accent1"/>
-          </a:fillRef>
-          <a:effectRef idx="1">
-            <a:schemeClr val="accent1"/>
-          </a:effectRef>
-          <a:fontRef idx="minor">
-            <a:schemeClr val="tx1"/>
-          </a:fontRef>
-        </p:style>
-      </p:cxnSp>
-      <p:cxnSp>
-        <p:nvCxnSpPr>
-          <p:cNvPr id="27" name="Connector 26"/>
-          <p:cNvCxnSpPr/>
-          <p:nvPr/>
-        </p:nvCxnSpPr>
-        <p:spPr>
-          <a:xfrm>
-            <a:off x="822960" y="5074920"/>
-            <a:ext cx="10543032" cy="0"/>
-          </a:xfrm>
-          <a:prstGeom prst="line">
-            <a:avLst/>
-          </a:prstGeom>
-          <a:ln w="6350">
-            <a:solidFill>
-              <a:srgbClr val="E3E3E6"/>
-            </a:solidFill>
-          </a:ln>
-        </p:spPr>
-        <p:style>
-          <a:lnRef idx="2">
-            <a:schemeClr val="accent1"/>
-          </a:lnRef>
-          <a:fillRef idx="0">
-            <a:schemeClr val="accent1"/>
-          </a:fillRef>
-          <a:effectRef idx="1">
-            <a:schemeClr val="accent1"/>
-          </a:effectRef>
-          <a:fontRef idx="minor">
-            <a:schemeClr val="tx1"/>
-          </a:fontRef>
-        </p:style>
-      </p:cxnSp>
-      <p:cxnSp>
-        <p:nvCxnSpPr>
-          <p:cNvPr id="28" name="Connector 27"/>
-          <p:cNvCxnSpPr/>
-          <p:nvPr/>
-        </p:nvCxnSpPr>
-        <p:spPr>
-          <a:xfrm>
-            <a:off x="6583680" y="4507992"/>
-            <a:ext cx="0" cy="566928"/>
-          </a:xfrm>
-          <a:prstGeom prst="line">
-            <a:avLst/>
-          </a:prstGeom>
-          <a:ln w="6350">
-            <a:solidFill>
-              <a:srgbClr val="E3E3E6"/>
-            </a:solidFill>
-          </a:ln>
-        </p:spPr>
-        <p:style>
-          <a:lnRef idx="2">
-            <a:schemeClr val="accent1"/>
-          </a:lnRef>
-          <a:fillRef idx="0">
-            <a:schemeClr val="accent1"/>
-          </a:fillRef>
-          <a:effectRef idx="1">
-            <a:schemeClr val="accent1"/>
-          </a:effectRef>
-          <a:fontRef idx="minor">
-            <a:schemeClr val="tx1"/>
-          </a:fontRef>
-        </p:style>
-      </p:cxnSp>
-      <p:cxnSp>
-        <p:nvCxnSpPr>
-          <p:cNvPr id="29" name="Connector 28"/>
-          <p:cNvCxnSpPr/>
-          <p:nvPr/>
-        </p:nvCxnSpPr>
-        <p:spPr>
-          <a:xfrm>
-            <a:off x="8869680" y="4507992"/>
-            <a:ext cx="0" cy="566928"/>
-          </a:xfrm>
-          <a:prstGeom prst="line">
-            <a:avLst/>
-          </a:prstGeom>
-          <a:ln w="6350">
-            <a:solidFill>
-              <a:srgbClr val="E3E3E6"/>
-            </a:solidFill>
-          </a:ln>
-        </p:spPr>
-        <p:style>
-          <a:lnRef idx="2">
-            <a:schemeClr val="accent1"/>
-          </a:lnRef>
-          <a:fillRef idx="0">
-            <a:schemeClr val="accent1"/>
-          </a:fillRef>
-          <a:effectRef idx="1">
-            <a:schemeClr val="accent1"/>
-          </a:effectRef>
-          <a:fontRef idx="minor">
-            <a:schemeClr val="tx1"/>
-          </a:fontRef>
-        </p:style>
-      </p:cxnSp>
-      <p:cxnSp>
-        <p:nvCxnSpPr>
-          <p:cNvPr id="30" name="Connector 29"/>
-          <p:cNvCxnSpPr/>
-          <p:nvPr/>
-        </p:nvCxnSpPr>
-        <p:spPr>
-          <a:xfrm>
-            <a:off x="1024128" y="4910328"/>
-            <a:ext cx="5358384" cy="0"/>
-          </a:xfrm>
-          <a:prstGeom prst="line">
-            <a:avLst/>
-          </a:prstGeom>
-          <a:ln w="4445">
-            <a:solidFill>
-              <a:srgbClr val="E3E3E6"/>
-            </a:solidFill>
-          </a:ln>
-        </p:spPr>
-        <p:style>
-          <a:lnRef idx="2">
-            <a:schemeClr val="accent1"/>
-          </a:lnRef>
-          <a:fillRef idx="0">
-            <a:schemeClr val="accent1"/>
-          </a:fillRef>
-          <a:effectRef idx="1">
-            <a:schemeClr val="accent1"/>
-          </a:effectRef>
-          <a:fontRef idx="minor">
-            <a:schemeClr val="tx1"/>
-          </a:fontRef>
-        </p:style>
-      </p:cxnSp>
-      <p:cxnSp>
-        <p:nvCxnSpPr>
-          <p:cNvPr id="31" name="Connector 30"/>
-          <p:cNvCxnSpPr/>
-          <p:nvPr/>
-        </p:nvCxnSpPr>
-        <p:spPr>
-          <a:xfrm>
-            <a:off x="6784848" y="4910328"/>
-            <a:ext cx="1883664" cy="0"/>
-          </a:xfrm>
-          <a:prstGeom prst="line">
-            <a:avLst/>
-          </a:prstGeom>
-          <a:ln w="4445">
-            <a:solidFill>
-              <a:srgbClr val="E3E3E6"/>
-            </a:solidFill>
-          </a:ln>
-        </p:spPr>
-        <p:style>
-          <a:lnRef idx="2">
-            <a:schemeClr val="accent1"/>
-          </a:lnRef>
-          <a:fillRef idx="0">
-            <a:schemeClr val="accent1"/>
-          </a:fillRef>
-          <a:effectRef idx="1">
-            <a:schemeClr val="accent1"/>
-          </a:effectRef>
-          <a:fontRef idx="minor">
-            <a:schemeClr val="tx1"/>
-          </a:fontRef>
-        </p:style>
-      </p:cxnSp>
-      <p:cxnSp>
-        <p:nvCxnSpPr>
-          <p:cNvPr id="32" name="Connector 31"/>
-          <p:cNvCxnSpPr/>
-          <p:nvPr/>
-        </p:nvCxnSpPr>
-        <p:spPr>
-          <a:xfrm>
-            <a:off x="9070848" y="4910328"/>
-            <a:ext cx="2093976" cy="0"/>
-          </a:xfrm>
-          <a:prstGeom prst="line">
-            <a:avLst/>
-          </a:prstGeom>
-          <a:ln w="4445">
-            <a:solidFill>
-              <a:srgbClr val="E3E3E6"/>
-            </a:solidFill>
-          </a:ln>
-        </p:spPr>
-        <p:style>
-          <a:lnRef idx="2">
-            <a:schemeClr val="accent1"/>
-          </a:lnRef>
-          <a:fillRef idx="0">
-            <a:schemeClr val="accent1"/>
-          </a:fillRef>
-          <a:effectRef idx="1">
-            <a:schemeClr val="accent1"/>
-          </a:effectRef>
-          <a:fontRef idx="minor">
-            <a:schemeClr val="tx1"/>
-          </a:fontRef>
-        </p:style>
-      </p:cxnSp>
-      <p:cxnSp>
-        <p:nvCxnSpPr>
-          <p:cNvPr id="33" name="Connector 32"/>
-          <p:cNvCxnSpPr/>
-          <p:nvPr/>
-        </p:nvCxnSpPr>
-        <p:spPr>
-          <a:xfrm>
-            <a:off x="822960" y="5641848"/>
-            <a:ext cx="10543032" cy="0"/>
-          </a:xfrm>
-          <a:prstGeom prst="line">
-            <a:avLst/>
-          </a:prstGeom>
-          <a:ln w="6350">
-            <a:solidFill>
-              <a:srgbClr val="E3E3E6"/>
-            </a:solidFill>
-          </a:ln>
-        </p:spPr>
-        <p:style>
-          <a:lnRef idx="2">
-            <a:schemeClr val="accent1"/>
-          </a:lnRef>
-          <a:fillRef idx="0">
-            <a:schemeClr val="accent1"/>
-          </a:fillRef>
-          <a:effectRef idx="1">
-            <a:schemeClr val="accent1"/>
-          </a:effectRef>
-          <a:fontRef idx="minor">
-            <a:schemeClr val="tx1"/>
-          </a:fontRef>
-        </p:style>
-      </p:cxnSp>
-      <p:cxnSp>
-        <p:nvCxnSpPr>
-          <p:cNvPr id="34" name="Connector 33"/>
-          <p:cNvCxnSpPr/>
-          <p:nvPr/>
-        </p:nvCxnSpPr>
-        <p:spPr>
-          <a:xfrm>
-            <a:off x="6583680" y="5074920"/>
-            <a:ext cx="0" cy="566928"/>
-          </a:xfrm>
-          <a:prstGeom prst="line">
-            <a:avLst/>
-          </a:prstGeom>
-          <a:ln w="6350">
-            <a:solidFill>
-              <a:srgbClr val="E3E3E6"/>
-            </a:solidFill>
-          </a:ln>
-        </p:spPr>
-        <p:style>
-          <a:lnRef idx="2">
-            <a:schemeClr val="accent1"/>
-          </a:lnRef>
-          <a:fillRef idx="0">
-            <a:schemeClr val="accent1"/>
-          </a:fillRef>
-          <a:effectRef idx="1">
-            <a:schemeClr val="accent1"/>
-          </a:effectRef>
-          <a:fontRef idx="minor">
-            <a:schemeClr val="tx1"/>
-          </a:fontRef>
-        </p:style>
-      </p:cxnSp>
-      <p:cxnSp>
-        <p:nvCxnSpPr>
-          <p:cNvPr id="35" name="Connector 34"/>
-          <p:cNvCxnSpPr/>
-          <p:nvPr/>
-        </p:nvCxnSpPr>
-        <p:spPr>
-          <a:xfrm>
-            <a:off x="8869680" y="5074920"/>
-            <a:ext cx="0" cy="566928"/>
-          </a:xfrm>
-          <a:prstGeom prst="line">
-            <a:avLst/>
-          </a:prstGeom>
-          <a:ln w="6350">
-            <a:solidFill>
-              <a:srgbClr val="E3E3E6"/>
-            </a:solidFill>
-          </a:ln>
-        </p:spPr>
-        <p:style>
-          <a:lnRef idx="2">
-            <a:schemeClr val="accent1"/>
-          </a:lnRef>
-          <a:fillRef idx="0">
-            <a:schemeClr val="accent1"/>
-          </a:fillRef>
-          <a:effectRef idx="1">
-            <a:schemeClr val="accent1"/>
-          </a:effectRef>
-          <a:fontRef idx="minor">
-            <a:schemeClr val="tx1"/>
-          </a:fontRef>
-        </p:style>
-      </p:cxnSp>
-      <p:cxnSp>
-        <p:nvCxnSpPr>
-          <p:cNvPr id="36" name="Connector 35"/>
-          <p:cNvCxnSpPr/>
-          <p:nvPr/>
-        </p:nvCxnSpPr>
-        <p:spPr>
-          <a:xfrm>
-            <a:off x="1024128" y="5477256"/>
-            <a:ext cx="5358384" cy="0"/>
-          </a:xfrm>
-          <a:prstGeom prst="line">
-            <a:avLst/>
-          </a:prstGeom>
-          <a:ln w="4445">
-            <a:solidFill>
-              <a:srgbClr val="E3E3E6"/>
-            </a:solidFill>
-          </a:ln>
-        </p:spPr>
-        <p:style>
-          <a:lnRef idx="2">
-            <a:schemeClr val="accent1"/>
-          </a:lnRef>
-          <a:fillRef idx="0">
-            <a:schemeClr val="accent1"/>
-          </a:fillRef>
-          <a:effectRef idx="1">
-            <a:schemeClr val="accent1"/>
-          </a:effectRef>
-          <a:fontRef idx="minor">
-            <a:schemeClr val="tx1"/>
-          </a:fontRef>
-        </p:style>
-      </p:cxnSp>
-      <p:cxnSp>
-        <p:nvCxnSpPr>
-          <p:cNvPr id="37" name="Connector 36"/>
-          <p:cNvCxnSpPr/>
-          <p:nvPr/>
-        </p:nvCxnSpPr>
-        <p:spPr>
-          <a:xfrm>
-            <a:off x="6784848" y="5477256"/>
-            <a:ext cx="1883664" cy="0"/>
-          </a:xfrm>
-          <a:prstGeom prst="line">
-            <a:avLst/>
-          </a:prstGeom>
-          <a:ln w="4445">
-            <a:solidFill>
-              <a:srgbClr val="E3E3E6"/>
-            </a:solidFill>
-          </a:ln>
-        </p:spPr>
-        <p:style>
-          <a:lnRef idx="2">
-            <a:schemeClr val="accent1"/>
-          </a:lnRef>
-          <a:fillRef idx="0">
-            <a:schemeClr val="accent1"/>
-          </a:fillRef>
-          <a:effectRef idx="1">
-            <a:schemeClr val="accent1"/>
-          </a:effectRef>
-          <a:fontRef idx="minor">
-            <a:schemeClr val="tx1"/>
-          </a:fontRef>
-        </p:style>
-      </p:cxnSp>
-      <p:cxnSp>
-        <p:nvCxnSpPr>
-          <p:cNvPr id="38" name="Connector 37"/>
-          <p:cNvCxnSpPr/>
-          <p:nvPr/>
-        </p:nvCxnSpPr>
-        <p:spPr>
-          <a:xfrm>
-            <a:off x="9070848" y="5477256"/>
-            <a:ext cx="2093976" cy="0"/>
-          </a:xfrm>
-          <a:prstGeom prst="line">
-            <a:avLst/>
-          </a:prstGeom>
-          <a:ln w="4445">
-            <a:solidFill>
-              <a:srgbClr val="E3E3E6"/>
-            </a:solidFill>
-          </a:ln>
-        </p:spPr>
-        <p:style>
-          <a:lnRef idx="2">
-            <a:schemeClr val="accent1"/>
-          </a:lnRef>
-          <a:fillRef idx="0">
-            <a:schemeClr val="accent1"/>
-          </a:fillRef>
-          <a:effectRef idx="1">
-            <a:schemeClr val="accent1"/>
-          </a:effectRef>
-          <a:fontRef idx="minor">
-            <a:schemeClr val="tx1"/>
-          </a:fontRef>
-        </p:style>
-      </p:cxnSp>
-      <p:cxnSp>
-        <p:nvCxnSpPr>
-          <p:cNvPr id="39" name="Connector 38"/>
-          <p:cNvCxnSpPr/>
-          <p:nvPr/>
-        </p:nvCxnSpPr>
-        <p:spPr>
-          <a:xfrm>
-            <a:off x="822960" y="6437376"/>
-            <a:ext cx="10543032" cy="0"/>
-          </a:xfrm>
-          <a:prstGeom prst="line">
-            <a:avLst/>
-          </a:prstGeom>
-          <a:ln w="9525">
-            <a:solidFill>
-              <a:srgbClr val="E3E3E6"/>
-            </a:solidFill>
-          </a:ln>
-        </p:spPr>
-        <p:style>
-          <a:lnRef idx="2">
-            <a:schemeClr val="accent1"/>
-          </a:lnRef>
-          <a:fillRef idx="0">
-            <a:schemeClr val="accent1"/>
-          </a:fillRef>
-          <a:effectRef idx="1">
-            <a:schemeClr val="accent1"/>
-          </a:effectRef>
-          <a:fontRef idx="minor">
-            <a:schemeClr val="tx1"/>
-          </a:fontRef>
-        </p:style>
-      </p:cxnSp>
-      <p:sp>
-        <p:nvSpPr>
-          <p:cNvPr id="40" name="TextBox 39"/>
-          <p:cNvSpPr txBox="1"/>
-          <p:nvPr/>
-        </p:nvSpPr>
-        <p:spPr>
-          <a:xfrm>
-            <a:off x="822960" y="6473952"/>
-            <a:ext cx="5486400" cy="274320"/>
-          </a:xfrm>
-          <a:prstGeom prst="rect">
-            <a:avLst/>
-          </a:prstGeom>
-          <a:noFill/>
-        </p:spPr>
-        <p:txBody>
-          <a:bodyPr wrap="square" lIns="0" rIns="0" tIns="0" bIns="0" anchor="t">
-            <a:spAutoFit/>
-          </a:bodyPr>
-          <a:lstStyle/>
-          <a:p>
-            <a:pPr algn="l"/>
-            <a:r>
-              <a:rPr sz="750" b="1" i="0" cap="all" spc="180">
-                <a:solidFill>
-                  <a:srgbClr val="86868B"/>
-                </a:solidFill>
-                <a:latin typeface="Helvetica Neue"/>
-              </a:rPr>
-              <a:t>SAY WATT ROBOTICS  ·  ROV TEAM</a:t>
-            </a:r>
-          </a:p>
-        </p:txBody>
-      </p:sp>
-      <p:sp>
-        <p:nvSpPr>
-          <p:cNvPr id="41" name="TextBox 40"/>
-          <p:cNvSpPr txBox="1"/>
-          <p:nvPr/>
-        </p:nvSpPr>
-        <p:spPr>
-          <a:xfrm>
-            <a:off x="5879592" y="6473952"/>
-            <a:ext cx="5486400" cy="274320"/>
-          </a:xfrm>
-          <a:prstGeom prst="rect">
-            <a:avLst/>
-          </a:prstGeom>
-          <a:noFill/>
-        </p:spPr>
-        <p:txBody>
-          <a:bodyPr wrap="square" lIns="0" rIns="0" tIns="0" bIns="0" anchor="t">
-            <a:spAutoFit/>
-          </a:bodyPr>
-          <a:lstStyle/>
-          <a:p>
-            <a:pPr algn="r"/>
-            <a:r>
-              <a:rPr sz="750" b="1" i="0" cap="all" spc="180">
-                <a:solidFill>
-                  <a:srgbClr val="86868B"/>
-                </a:solidFill>
-                <a:latin typeface="Helvetica Neue"/>
-              </a:rPr>
-              <a:t>WEEK 1 — KICKOFF   ·   27 / 29</a:t>
-            </a:r>
-          </a:p>
-        </p:txBody>
-      </p:sp>
-    </p:spTree>
-  </p:cSld>
-  <p:clrMapOvr>
-    <a:masterClrMapping/>
-  </p:clrMapOvr>
-</p:sld>
-</file>
-
-<file path=ppt/slides/slide29.xml><?xml version="1.0" encoding="utf-8"?>
-<p:sld xmlns:a="http://schemas.openxmlformats.org/drawingml/2006/main" xmlns:p="http://schemas.openxmlformats.org/presentationml/2006/main" xmlns:r="http://schemas.openxmlformats.org/officeDocument/2006/relationships">
-  <p:cSld>
-    <p:spTree>
-      <p:nvGrpSpPr>
-        <p:cNvPr id="1" name=""/>
-        <p:cNvGrpSpPr/>
-        <p:nvPr/>
-      </p:nvGrpSpPr>
-      <p:grpSpPr/>
-      <p:sp>
-        <p:nvSpPr>
-          <p:cNvPr id="2" name="TextBox 1"/>
-          <p:cNvSpPr txBox="1"/>
-          <p:nvPr/>
-        </p:nvSpPr>
-        <p:spPr>
-          <a:xfrm>
-            <a:off x="822960" y="530352"/>
-            <a:ext cx="10515600" cy="292608"/>
-          </a:xfrm>
-          <a:prstGeom prst="rect">
-            <a:avLst/>
-          </a:prstGeom>
-          <a:noFill/>
-        </p:spPr>
-        <p:txBody>
-          <a:bodyPr wrap="square" lIns="0" rIns="0" tIns="0" bIns="0" anchor="t">
-            <a:spAutoFit/>
-          </a:bodyPr>
-          <a:lstStyle/>
-          <a:p>
-            <a:pPr algn="l"/>
-            <a:r>
-              <a:rPr sz="1200" b="1" i="0" cap="all" spc="180">
-                <a:solidFill>
-                  <a:srgbClr val="0D7490"/>
-                </a:solidFill>
-                <a:latin typeface="Helvetica Neue"/>
-              </a:rPr>
-              <a:t>BEFORE WE LEAVE</a:t>
-            </a:r>
-          </a:p>
-        </p:txBody>
-      </p:sp>
-      <p:sp>
-        <p:nvSpPr>
-          <p:cNvPr id="3" name="TextBox 2"/>
-          <p:cNvSpPr txBox="1"/>
-          <p:nvPr/>
-        </p:nvSpPr>
-        <p:spPr>
-          <a:xfrm>
-            <a:off x="804672" y="822960"/>
-            <a:ext cx="10515600" cy="868680"/>
-          </a:xfrm>
-          <a:prstGeom prst="rect">
-            <a:avLst/>
-          </a:prstGeom>
-          <a:noFill/>
-        </p:spPr>
-        <p:txBody>
-          <a:bodyPr wrap="square" lIns="0" rIns="0" tIns="0" bIns="0" anchor="t">
-            <a:spAutoFit/>
-          </a:bodyPr>
-          <a:lstStyle/>
-          <a:p>
-            <a:pPr algn="l">
-              <a:lnSpc>
-                <a:spcPct val="105000"/>
-              </a:lnSpc>
-            </a:pPr>
-            <a:r>
-              <a:rPr sz="3000" b="1" i="0">
-                <a:solidFill>
-                  <a:srgbClr val="1D1D1F"/>
-                </a:solidFill>
-                <a:latin typeface="Helvetica Neue"/>
-              </a:rPr>
-              <a:t>Tools accounted for. Shop reset.</a:t>
-            </a:r>
-          </a:p>
-        </p:txBody>
-      </p:sp>
-      <p:sp>
-        <p:nvSpPr>
-          <p:cNvPr id="4" name="TextBox 3"/>
-          <p:cNvSpPr txBox="1"/>
-          <p:nvPr/>
-        </p:nvSpPr>
-        <p:spPr>
-          <a:xfrm>
-            <a:off x="822960" y="1700784"/>
-            <a:ext cx="10515600" cy="457200"/>
-          </a:xfrm>
-          <a:prstGeom prst="rect">
-            <a:avLst/>
-          </a:prstGeom>
-          <a:noFill/>
-        </p:spPr>
-        <p:txBody>
-          <a:bodyPr wrap="square" lIns="0" rIns="0" tIns="0" bIns="0" anchor="t">
-            <a:spAutoFit/>
-          </a:bodyPr>
-          <a:lstStyle/>
-          <a:p>
-            <a:pPr algn="l"/>
-            <a:r>
-              <a:rPr sz="1400" b="0" i="1">
-                <a:solidFill>
-                  <a:srgbClr val="6E6E73"/>
-                </a:solidFill>
-                <a:latin typeface="Helvetica Neue"/>
-              </a:rPr>
-              <a:t>We do this together, every meeting. No exceptions — the Tool Steward leads.</a:t>
-            </a:r>
-          </a:p>
-        </p:txBody>
-      </p:sp>
-      <p:sp>
-        <p:nvSpPr>
-          <p:cNvPr id="5" name="Rectangle 4"/>
-          <p:cNvSpPr/>
-          <p:nvPr/>
-        </p:nvSpPr>
-        <p:spPr>
-          <a:xfrm>
-            <a:off x="822960" y="2423160"/>
-            <a:ext cx="310896" cy="310896"/>
-          </a:xfrm>
-          <a:prstGeom prst="rect">
-            <a:avLst/>
-          </a:prstGeom>
-          <a:solidFill>
-            <a:srgbClr val="FFFFFF"/>
-          </a:solidFill>
-          <a:ln w="12700">
-            <a:solidFill>
-              <a:srgbClr val="86868B"/>
-            </a:solidFill>
-          </a:ln>
-        </p:spPr>
-        <p:style>
-          <a:lnRef idx="1">
-            <a:schemeClr val="accent1"/>
-          </a:lnRef>
-          <a:fillRef idx="3">
-            <a:schemeClr val="accent1"/>
-          </a:fillRef>
-          <a:effectRef idx="2">
-            <a:schemeClr val="accent1"/>
-          </a:effectRef>
-          <a:fontRef idx="minor">
-            <a:schemeClr val="lt1"/>
-          </a:fontRef>
-        </p:style>
-        <p:txBody>
-          <a:bodyPr rtlCol="0" anchor="ctr"/>
-          <a:lstStyle/>
-          <a:p>
-            <a:pPr algn="ctr"/>
-          </a:p>
-        </p:txBody>
-      </p:sp>
-      <p:sp>
-        <p:nvSpPr>
-          <p:cNvPr id="6" name="TextBox 5"/>
-          <p:cNvSpPr txBox="1"/>
-          <p:nvPr/>
-        </p:nvSpPr>
-        <p:spPr>
-          <a:xfrm>
-            <a:off x="1408176" y="2404872"/>
-            <a:ext cx="9957815" cy="402336"/>
-          </a:xfrm>
-          <a:prstGeom prst="rect">
-            <a:avLst/>
-          </a:prstGeom>
-          <a:noFill/>
-        </p:spPr>
-        <p:txBody>
-          <a:bodyPr wrap="square" lIns="0" rIns="0" tIns="0" bIns="0" anchor="ctr">
-            <a:spAutoFit/>
-          </a:bodyPr>
-          <a:lstStyle/>
-          <a:p>
-            <a:pPr algn="l"/>
-            <a:r>
-              <a:rPr sz="1400" b="0" i="0">
-                <a:solidFill>
-                  <a:srgbClr val="1D1D1F"/>
-                </a:solidFill>
-                <a:latin typeface="Helvetica Neue"/>
-              </a:rPr>
-              <a:t>Soldering irons unplugged, cool, and put away.</a:t>
-            </a:r>
-          </a:p>
-        </p:txBody>
-      </p:sp>
-      <p:sp>
-        <p:nvSpPr>
-          <p:cNvPr id="7" name="Rectangle 6"/>
-          <p:cNvSpPr/>
-          <p:nvPr/>
-        </p:nvSpPr>
-        <p:spPr>
-          <a:xfrm>
-            <a:off x="822960" y="2990088"/>
-            <a:ext cx="310896" cy="310896"/>
-          </a:xfrm>
-          <a:prstGeom prst="rect">
-            <a:avLst/>
-          </a:prstGeom>
-          <a:solidFill>
-            <a:srgbClr val="FFFFFF"/>
-          </a:solidFill>
-          <a:ln w="12700">
-            <a:solidFill>
-              <a:srgbClr val="86868B"/>
-            </a:solidFill>
-          </a:ln>
-        </p:spPr>
-        <p:style>
-          <a:lnRef idx="1">
-            <a:schemeClr val="accent1"/>
-          </a:lnRef>
-          <a:fillRef idx="3">
-            <a:schemeClr val="accent1"/>
-          </a:fillRef>
-          <a:effectRef idx="2">
-            <a:schemeClr val="accent1"/>
-          </a:effectRef>
-          <a:fontRef idx="minor">
-            <a:schemeClr val="lt1"/>
-          </a:fontRef>
-        </p:style>
-        <p:txBody>
-          <a:bodyPr rtlCol="0" anchor="ctr"/>
-          <a:lstStyle/>
-          <a:p>
-            <a:pPr algn="ctr"/>
-          </a:p>
-        </p:txBody>
-      </p:sp>
-      <p:sp>
-        <p:nvSpPr>
-          <p:cNvPr id="8" name="TextBox 7"/>
-          <p:cNvSpPr txBox="1"/>
-          <p:nvPr/>
-        </p:nvSpPr>
-        <p:spPr>
-          <a:xfrm>
-            <a:off x="1408176" y="2971800"/>
-            <a:ext cx="9957815" cy="402336"/>
-          </a:xfrm>
-          <a:prstGeom prst="rect">
-            <a:avLst/>
-          </a:prstGeom>
-          <a:noFill/>
-        </p:spPr>
-        <p:txBody>
-          <a:bodyPr wrap="square" lIns="0" rIns="0" tIns="0" bIns="0" anchor="ctr">
-            <a:spAutoFit/>
-          </a:bodyPr>
-          <a:lstStyle/>
-          <a:p>
-            <a:pPr algn="l"/>
-            <a:r>
-              <a:rPr sz="1400" b="0" i="0">
-                <a:solidFill>
-                  <a:srgbClr val="1D1D1F"/>
-                </a:solidFill>
-                <a:latin typeface="Helvetica Neue"/>
-              </a:rPr>
-              <a:t>All hand tools and test equipment back in their bins.</a:t>
-            </a:r>
-          </a:p>
-        </p:txBody>
-      </p:sp>
-      <p:sp>
-        <p:nvSpPr>
-          <p:cNvPr id="9" name="Rectangle 8"/>
-          <p:cNvSpPr/>
-          <p:nvPr/>
-        </p:nvSpPr>
-        <p:spPr>
-          <a:xfrm>
-            <a:off x="822960" y="3557015"/>
-            <a:ext cx="310896" cy="310896"/>
-          </a:xfrm>
-          <a:prstGeom prst="rect">
-            <a:avLst/>
-          </a:prstGeom>
-          <a:solidFill>
-            <a:srgbClr val="FFFFFF"/>
-          </a:solidFill>
-          <a:ln w="12700">
-            <a:solidFill>
-              <a:srgbClr val="86868B"/>
-            </a:solidFill>
-          </a:ln>
-        </p:spPr>
-        <p:style>
-          <a:lnRef idx="1">
-            <a:schemeClr val="accent1"/>
-          </a:lnRef>
-          <a:fillRef idx="3">
-            <a:schemeClr val="accent1"/>
-          </a:fillRef>
-          <a:effectRef idx="2">
-            <a:schemeClr val="accent1"/>
-          </a:effectRef>
-          <a:fontRef idx="minor">
-            <a:schemeClr val="lt1"/>
-          </a:fontRef>
-        </p:style>
-        <p:txBody>
-          <a:bodyPr rtlCol="0" anchor="ctr"/>
-          <a:lstStyle/>
-          <a:p>
-            <a:pPr algn="ctr"/>
-          </a:p>
-        </p:txBody>
-      </p:sp>
-      <p:sp>
-        <p:nvSpPr>
-          <p:cNvPr id="10" name="TextBox 9"/>
-          <p:cNvSpPr txBox="1"/>
-          <p:nvPr/>
-        </p:nvSpPr>
-        <p:spPr>
-          <a:xfrm>
-            <a:off x="1408176" y="3538727"/>
-            <a:ext cx="9957815" cy="402336"/>
-          </a:xfrm>
-          <a:prstGeom prst="rect">
-            <a:avLst/>
-          </a:prstGeom>
-          <a:noFill/>
-        </p:spPr>
-        <p:txBody>
-          <a:bodyPr wrap="square" lIns="0" rIns="0" tIns="0" bIns="0" anchor="ctr">
-            <a:spAutoFit/>
-          </a:bodyPr>
-          <a:lstStyle/>
-          <a:p>
-            <a:pPr algn="l"/>
-            <a:r>
-              <a:rPr sz="1400" b="0" i="0">
-                <a:solidFill>
-                  <a:srgbClr val="1D1D1F"/>
-                </a:solidFill>
-                <a:latin typeface="Helvetica Neue"/>
-              </a:rPr>
-              <a:t>Batteries off charge; charger stations powered down.</a:t>
-            </a:r>
-          </a:p>
-        </p:txBody>
-      </p:sp>
-      <p:sp>
-        <p:nvSpPr>
-          <p:cNvPr id="11" name="Rectangle 10"/>
-          <p:cNvSpPr/>
-          <p:nvPr/>
-        </p:nvSpPr>
-        <p:spPr>
-          <a:xfrm>
-            <a:off x="822960" y="4123944"/>
-            <a:ext cx="310896" cy="310896"/>
-          </a:xfrm>
-          <a:prstGeom prst="rect">
-            <a:avLst/>
-          </a:prstGeom>
-          <a:solidFill>
-            <a:srgbClr val="FFFFFF"/>
-          </a:solidFill>
-          <a:ln w="12700">
-            <a:solidFill>
-              <a:srgbClr val="86868B"/>
-            </a:solidFill>
-          </a:ln>
-        </p:spPr>
-        <p:style>
-          <a:lnRef idx="1">
-            <a:schemeClr val="accent1"/>
-          </a:lnRef>
-          <a:fillRef idx="3">
-            <a:schemeClr val="accent1"/>
-          </a:fillRef>
-          <a:effectRef idx="2">
-            <a:schemeClr val="accent1"/>
-          </a:effectRef>
-          <a:fontRef idx="minor">
-            <a:schemeClr val="lt1"/>
-          </a:fontRef>
-        </p:style>
-        <p:txBody>
-          <a:bodyPr rtlCol="0" anchor="ctr"/>
-          <a:lstStyle/>
-          <a:p>
-            <a:pPr algn="ctr"/>
-          </a:p>
-        </p:txBody>
-      </p:sp>
-      <p:sp>
-        <p:nvSpPr>
-          <p:cNvPr id="12" name="TextBox 11"/>
-          <p:cNvSpPr txBox="1"/>
-          <p:nvPr/>
-        </p:nvSpPr>
-        <p:spPr>
-          <a:xfrm>
-            <a:off x="1408176" y="4105656"/>
-            <a:ext cx="9957815" cy="402336"/>
-          </a:xfrm>
-          <a:prstGeom prst="rect">
-            <a:avLst/>
-          </a:prstGeom>
-          <a:noFill/>
-        </p:spPr>
-        <p:txBody>
-          <a:bodyPr wrap="square" lIns="0" rIns="0" tIns="0" bIns="0" anchor="ctr">
-            <a:spAutoFit/>
-          </a:bodyPr>
-          <a:lstStyle/>
-          <a:p>
-            <a:pPr algn="l"/>
-            <a:r>
-              <a:rPr sz="1400" b="0" i="0">
-                <a:solidFill>
-                  <a:srgbClr val="1D1D1F"/>
-                </a:solidFill>
-                <a:latin typeface="Helvetica Neue"/>
-              </a:rPr>
-              <a:t>Workshop swept; benches wiped; trash out.</a:t>
-            </a:r>
-          </a:p>
-        </p:txBody>
-      </p:sp>
-      <p:sp>
-        <p:nvSpPr>
-          <p:cNvPr id="13" name="Rectangle 12"/>
-          <p:cNvSpPr/>
-          <p:nvPr/>
-        </p:nvSpPr>
-        <p:spPr>
-          <a:xfrm>
-            <a:off x="822960" y="4690872"/>
-            <a:ext cx="310896" cy="310896"/>
-          </a:xfrm>
-          <a:prstGeom prst="rect">
-            <a:avLst/>
-          </a:prstGeom>
-          <a:solidFill>
-            <a:srgbClr val="FFFFFF"/>
-          </a:solidFill>
-          <a:ln w="12700">
-            <a:solidFill>
-              <a:srgbClr val="86868B"/>
-            </a:solidFill>
-          </a:ln>
-        </p:spPr>
-        <p:style>
-          <a:lnRef idx="1">
-            <a:schemeClr val="accent1"/>
-          </a:lnRef>
-          <a:fillRef idx="3">
-            <a:schemeClr val="accent1"/>
-          </a:fillRef>
-          <a:effectRef idx="2">
-            <a:schemeClr val="accent1"/>
-          </a:effectRef>
-          <a:fontRef idx="minor">
-            <a:schemeClr val="lt1"/>
-          </a:fontRef>
-        </p:style>
-        <p:txBody>
-          <a:bodyPr rtlCol="0" anchor="ctr"/>
-          <a:lstStyle/>
-          <a:p>
-            <a:pPr algn="ctr"/>
-          </a:p>
-        </p:txBody>
-      </p:sp>
-      <p:sp>
-        <p:nvSpPr>
-          <p:cNvPr id="14" name="TextBox 13"/>
-          <p:cNvSpPr txBox="1"/>
-          <p:nvPr/>
-        </p:nvSpPr>
-        <p:spPr>
-          <a:xfrm>
-            <a:off x="1408176" y="4672584"/>
-            <a:ext cx="9957815" cy="402336"/>
-          </a:xfrm>
-          <a:prstGeom prst="rect">
-            <a:avLst/>
-          </a:prstGeom>
-          <a:noFill/>
-        </p:spPr>
-        <p:txBody>
-          <a:bodyPr wrap="square" lIns="0" rIns="0" tIns="0" bIns="0" anchor="ctr">
-            <a:spAutoFit/>
-          </a:bodyPr>
-          <a:lstStyle/>
-          <a:p>
-            <a:pPr algn="l"/>
-            <a:r>
-              <a:rPr sz="1400" b="0" i="0">
-                <a:solidFill>
-                  <a:srgbClr val="1D1D1F"/>
-                </a:solidFill>
-                <a:latin typeface="Helvetica Neue"/>
-              </a:rPr>
-              <a:t>Today's photos uploaded to the team folder.</a:t>
-            </a:r>
-          </a:p>
-        </p:txBody>
-      </p:sp>
-      <p:sp>
-        <p:nvSpPr>
-          <p:cNvPr id="15" name="Rectangle 14"/>
-          <p:cNvSpPr/>
-          <p:nvPr/>
-        </p:nvSpPr>
-        <p:spPr>
-          <a:xfrm>
-            <a:off x="822960" y="5257800"/>
-            <a:ext cx="310896" cy="310896"/>
-          </a:xfrm>
-          <a:prstGeom prst="rect">
-            <a:avLst/>
-          </a:prstGeom>
-          <a:solidFill>
-            <a:srgbClr val="FFFFFF"/>
-          </a:solidFill>
-          <a:ln w="12700">
-            <a:solidFill>
-              <a:srgbClr val="86868B"/>
-            </a:solidFill>
-          </a:ln>
-        </p:spPr>
-        <p:style>
-          <a:lnRef idx="1">
-            <a:schemeClr val="accent1"/>
-          </a:lnRef>
-          <a:fillRef idx="3">
-            <a:schemeClr val="accent1"/>
-          </a:fillRef>
-          <a:effectRef idx="2">
-            <a:schemeClr val="accent1"/>
-          </a:effectRef>
-          <a:fontRef idx="minor">
-            <a:schemeClr val="lt1"/>
-          </a:fontRef>
-        </p:style>
-        <p:txBody>
-          <a:bodyPr rtlCol="0" anchor="ctr"/>
-          <a:lstStyle/>
-          <a:p>
-            <a:pPr algn="ctr"/>
-          </a:p>
-        </p:txBody>
-      </p:sp>
-      <p:sp>
-        <p:nvSpPr>
-          <p:cNvPr id="16" name="TextBox 15"/>
-          <p:cNvSpPr txBox="1"/>
-          <p:nvPr/>
-        </p:nvSpPr>
-        <p:spPr>
-          <a:xfrm>
-            <a:off x="1408176" y="5239512"/>
-            <a:ext cx="9957815" cy="402336"/>
-          </a:xfrm>
-          <a:prstGeom prst="rect">
-            <a:avLst/>
-          </a:prstGeom>
-          <a:noFill/>
-        </p:spPr>
-        <p:txBody>
-          <a:bodyPr wrap="square" lIns="0" rIns="0" tIns="0" bIns="0" anchor="ctr">
-            <a:spAutoFit/>
-          </a:bodyPr>
-          <a:lstStyle/>
-          <a:p>
-            <a:pPr algn="l"/>
-            <a:r>
-              <a:rPr sz="1400" b="0" i="0">
-                <a:solidFill>
-                  <a:srgbClr val="1D1D1F"/>
-                </a:solidFill>
-                <a:latin typeface="Helvetica Neue"/>
-              </a:rPr>
-              <a:t>Notetaker's meeting notes filed with the CFO for the engineering notebook.</a:t>
-            </a:r>
-          </a:p>
-        </p:txBody>
-      </p:sp>
-      <p:cxnSp>
-        <p:nvCxnSpPr>
-          <p:cNvPr id="17" name="Connector 16"/>
-          <p:cNvCxnSpPr/>
-          <p:nvPr/>
-        </p:nvCxnSpPr>
-        <p:spPr>
-          <a:xfrm>
-            <a:off x="822960" y="6437376"/>
-            <a:ext cx="10543032" cy="0"/>
-          </a:xfrm>
-          <a:prstGeom prst="line">
-            <a:avLst/>
-          </a:prstGeom>
-          <a:ln w="9525">
-            <a:solidFill>
-              <a:srgbClr val="E3E3E6"/>
-            </a:solidFill>
-          </a:ln>
-        </p:spPr>
-        <p:style>
-          <a:lnRef idx="2">
-            <a:schemeClr val="accent1"/>
-          </a:lnRef>
-          <a:fillRef idx="0">
-            <a:schemeClr val="accent1"/>
-          </a:fillRef>
-          <a:effectRef idx="1">
-            <a:schemeClr val="accent1"/>
-          </a:effectRef>
-          <a:fontRef idx="minor">
-            <a:schemeClr val="tx1"/>
-          </a:fontRef>
-        </p:style>
-      </p:cxnSp>
-      <p:sp>
-        <p:nvSpPr>
-          <p:cNvPr id="18" name="TextBox 17"/>
-          <p:cNvSpPr txBox="1"/>
-          <p:nvPr/>
-        </p:nvSpPr>
-        <p:spPr>
-          <a:xfrm>
-            <a:off x="822960" y="6473952"/>
-            <a:ext cx="5486400" cy="274320"/>
-          </a:xfrm>
-          <a:prstGeom prst="rect">
-            <a:avLst/>
-          </a:prstGeom>
-          <a:noFill/>
-        </p:spPr>
-        <p:txBody>
-          <a:bodyPr wrap="square" lIns="0" rIns="0" tIns="0" bIns="0" anchor="t">
-            <a:spAutoFit/>
-          </a:bodyPr>
-          <a:lstStyle/>
-          <a:p>
-            <a:pPr algn="l"/>
-            <a:r>
-              <a:rPr sz="750" b="1" i="0" cap="all" spc="180">
-                <a:solidFill>
-                  <a:srgbClr val="86868B"/>
-                </a:solidFill>
-                <a:latin typeface="Helvetica Neue"/>
-              </a:rPr>
-              <a:t>SAY WATT ROBOTICS  ·  ROV TEAM</a:t>
-            </a:r>
-          </a:p>
-        </p:txBody>
-      </p:sp>
-      <p:sp>
-        <p:nvSpPr>
-          <p:cNvPr id="19" name="TextBox 18"/>
-          <p:cNvSpPr txBox="1"/>
-          <p:nvPr/>
-        </p:nvSpPr>
-        <p:spPr>
-          <a:xfrm>
-            <a:off x="5879592" y="6473952"/>
-            <a:ext cx="5486400" cy="274320"/>
-          </a:xfrm>
-          <a:prstGeom prst="rect">
-            <a:avLst/>
-          </a:prstGeom>
-          <a:noFill/>
-        </p:spPr>
-        <p:txBody>
-          <a:bodyPr wrap="square" lIns="0" rIns="0" tIns="0" bIns="0" anchor="t">
-            <a:spAutoFit/>
-          </a:bodyPr>
-          <a:lstStyle/>
-          <a:p>
-            <a:pPr algn="r"/>
-            <a:r>
-              <a:rPr sz="750" b="1" i="0" cap="all" spc="180">
-                <a:solidFill>
-                  <a:srgbClr val="86868B"/>
-                </a:solidFill>
-                <a:latin typeface="Helvetica Neue"/>
-              </a:rPr>
-              <a:t>WEEK 1 — KICKOFF   ·   28 / 29</a:t>
-            </a:r>
-          </a:p>
-        </p:txBody>
-      </p:sp>
-    </p:spTree>
-  </p:cSld>
-  <p:clrMapOvr>
-    <a:masterClrMapping/>
-  </p:clrMapOvr>
-</p:sld>
-</file>
-
-<file path=ppt/slides/slide3.xml><?xml version="1.0" encoding="utf-8"?>
+<file path=ppt/slides/slide4.xml><?xml version="1.0" encoding="utf-8"?>
 <p:sld xmlns:a="http://schemas.openxmlformats.org/drawingml/2006/main" xmlns:r="http://schemas.openxmlformats.org/officeDocument/2006/relationships" xmlns:p="http://schemas.openxmlformats.org/presentationml/2006/main">
   <p:cSld name="Slide 3">
     <p:bg>
@@ -23045,7 +23453,7 @@
 </p:sld>
 </file>
 
-<file path=ppt/slides/slide4.xml><?xml version="1.0" encoding="utf-8"?>
+<file path=ppt/slides/slide5.xml><?xml version="1.0" encoding="utf-8"?>
 <p:sld xmlns:a="http://schemas.openxmlformats.org/drawingml/2006/main" xmlns:r="http://schemas.openxmlformats.org/officeDocument/2006/relationships" xmlns:p="http://schemas.openxmlformats.org/presentationml/2006/main">
   <p:cSld name="Slide 4">
     <p:bg>
@@ -24280,7 +24688,7 @@
 </p:sld>
 </file>
 
-<file path=ppt/slides/slide5.xml><?xml version="1.0" encoding="utf-8"?>
+<file path=ppt/slides/slide6.xml><?xml version="1.0" encoding="utf-8"?>
 <p:sld xmlns:a="http://schemas.openxmlformats.org/drawingml/2006/main" xmlns:r="http://schemas.openxmlformats.org/officeDocument/2006/relationships" xmlns:p="http://schemas.openxmlformats.org/presentationml/2006/main">
   <p:cSld name="Slide 5">
     <p:bg>
@@ -24688,7 +25096,7 @@
 </p:sld>
 </file>
 
-<file path=ppt/slides/slide6.xml><?xml version="1.0" encoding="utf-8"?>
+<file path=ppt/slides/slide7.xml><?xml version="1.0" encoding="utf-8"?>
 <p:sld xmlns:a="http://schemas.openxmlformats.org/drawingml/2006/main" xmlns:r="http://schemas.openxmlformats.org/officeDocument/2006/relationships" xmlns:p="http://schemas.openxmlformats.org/presentationml/2006/main">
   <p:cSld name="Slide 6">
     <p:bg>
@@ -25252,7 +25660,7 @@
 </p:sld>
 </file>
 
-<file path=ppt/slides/slide7.xml><?xml version="1.0" encoding="utf-8"?>
+<file path=ppt/slides/slide8.xml><?xml version="1.0" encoding="utf-8"?>
 <p:sld xmlns:a="http://schemas.openxmlformats.org/drawingml/2006/main" xmlns:r="http://schemas.openxmlformats.org/officeDocument/2006/relationships" xmlns:p="http://schemas.openxmlformats.org/presentationml/2006/main">
   <p:cSld name="Slide 7">
     <p:bg>
@@ -26402,7 +26810,7 @@
 </p:sld>
 </file>
 
-<file path=ppt/slides/slide8.xml><?xml version="1.0" encoding="utf-8"?>
+<file path=ppt/slides/slide9.xml><?xml version="1.0" encoding="utf-8"?>
 <p:sld xmlns:a="http://schemas.openxmlformats.org/drawingml/2006/main" xmlns:r="http://schemas.openxmlformats.org/officeDocument/2006/relationships" xmlns:p="http://schemas.openxmlformats.org/presentationml/2006/main">
   <p:cSld name="Slide 8">
     <p:bg>
@@ -26613,7 +27021,7 @@
                 <a:ea typeface="Helvetica Neue" pitchFamily="34" charset="-122"/>
                 <a:cs typeface="Helvetica Neue" pitchFamily="34" charset="-120"/>
               </a:rPr>
-              <a:t>Dauphin Island</a:t>
+              <a:t>2027 MATE ROV</a:t>
             </a:r>
             <a:endParaRPr lang="en-US" sz="2700" dirty="0"/>
           </a:p>
@@ -26633,7 +27041,7 @@
                 <a:ea typeface="Helvetica Neue" pitchFamily="34" charset="-122"/>
                 <a:cs typeface="Helvetica Neue" pitchFamily="34" charset="-120"/>
               </a:rPr>
-              <a:t>Sea Lab</a:t>
+              <a:t>Regional (TBD)</a:t>
             </a:r>
             <a:endParaRPr lang="en-US" sz="2700" dirty="0"/>
           </a:p>
@@ -26675,7 +27083,7 @@
                 <a:ea typeface="Helvetica Neue" pitchFamily="34" charset="-122"/>
                 <a:cs typeface="Helvetica Neue" pitchFamily="34" charset="-120"/>
               </a:rPr>
-              <a:t>On the Alabama Gulf coast — about a six-hour drive south. The Northern Gulf Coast Regional.</a:t>
+              <a:t>Regional assignment is set at registration — likely a long drive. We'll lock in travel plans once it's confirmed.</a:t>
             </a:r>
             <a:endParaRPr lang="en-US" sz="1200" dirty="0"/>
           </a:p>
@@ -27168,414 +27576,6 @@
                 <a:cs typeface="Helvetica Neue" pitchFamily="34" charset="-120"/>
               </a:rPr>
               <a:t>WEEK 1 — KICKOFF   ·   9 / 29</a:t>
-            </a:r>
-            <a:endParaRPr lang="en-US" sz="750" dirty="0"/>
-          </a:p>
-        </p:txBody>
-      </p:sp>
-    </p:spTree>
-  </p:cSld>
-  <p:clrMapOvr>
-    <a:masterClrMapping/>
-  </p:clrMapOvr>
-</p:sld>
-</file>
-
-<file path=ppt/slides/slide9.xml><?xml version="1.0" encoding="utf-8"?>
-<p:sld xmlns:a="http://schemas.openxmlformats.org/drawingml/2006/main" xmlns:r="http://schemas.openxmlformats.org/officeDocument/2006/relationships" xmlns:p="http://schemas.openxmlformats.org/presentationml/2006/main">
-  <p:cSld name="Slide 9">
-    <p:bg>
-      <p:bgPr>
-        <a:solidFill>
-          <a:srgbClr val="FBFBFD"/>
-        </a:solidFill>
-      </p:bgPr>
-    </p:bg>
-    <p:spTree>
-      <p:nvGrpSpPr>
-        <p:cNvPr id="1" name=""/>
-        <p:cNvGrpSpPr/>
-        <p:nvPr/>
-      </p:nvGrpSpPr>
-      <p:grpSpPr>
-        <a:xfrm>
-          <a:off x="0" y="0"/>
-          <a:ext cx="0" cy="0"/>
-          <a:chOff x="0" y="0"/>
-          <a:chExt cx="0" cy="0"/>
-        </a:xfrm>
-      </p:grpSpPr>
-      <p:sp>
-        <p:nvSpPr>
-          <p:cNvPr id="2" name="Text 0"/>
-          <p:cNvSpPr/>
-          <p:nvPr/>
-        </p:nvSpPr>
-        <p:spPr>
-          <a:xfrm>
-            <a:off x="4572000" y="182880"/>
-            <a:ext cx="7315200" cy="6492240"/>
-          </a:xfrm>
-          <a:prstGeom prst="rect">
-            <a:avLst/>
-          </a:prstGeom>
-          <a:noFill/>
-          <a:ln/>
-        </p:spPr>
-        <p:txBody>
-          <a:bodyPr wrap="square" lIns="0" tIns="0" rIns="0" bIns="0" rtlCol="0" anchor="ctr"/>
-          <a:lstStyle/>
-          <a:p>
-            <a:pPr algn="r" indent="0" marL="0">
-              <a:buNone/>
-            </a:pPr>
-            <a:r>
-              <a:rPr lang="en-US" sz="36000" b="1" dirty="0">
-                <a:solidFill>
-                  <a:srgbClr val="EEF0F1"/>
-                </a:solidFill>
-                <a:latin typeface="Helvetica Neue" pitchFamily="34" charset="0"/>
-                <a:ea typeface="Helvetica Neue" pitchFamily="34" charset="-122"/>
-                <a:cs typeface="Helvetica Neue" pitchFamily="34" charset="-120"/>
-              </a:rPr>
-              <a:t>03</a:t>
-            </a:r>
-            <a:endParaRPr lang="en-US" sz="36000" dirty="0"/>
-          </a:p>
-        </p:txBody>
-      </p:sp>
-      <p:sp>
-        <p:nvSpPr>
-          <p:cNvPr id="3" name="Shape 1"/>
-          <p:cNvSpPr/>
-          <p:nvPr/>
-        </p:nvSpPr>
-        <p:spPr>
-          <a:xfrm>
-            <a:off x="841248" y="2395728"/>
-            <a:ext cx="566928" cy="91440"/>
-          </a:xfrm>
-          <a:prstGeom prst="rect">
-            <a:avLst/>
-          </a:prstGeom>
-          <a:solidFill>
-            <a:srgbClr val="0D7490"/>
-          </a:solidFill>
-          <a:ln/>
-        </p:spPr>
-        <p:txBody>
-          <a:bodyPr/>
-          <a:p/>
-        </p:txBody>
-      </p:sp>
-      <p:sp>
-        <p:nvSpPr>
-          <p:cNvPr id="4" name="Text 2"/>
-          <p:cNvSpPr/>
-          <p:nvPr/>
-        </p:nvSpPr>
-        <p:spPr>
-          <a:xfrm>
-            <a:off x="822960" y="2615184"/>
-            <a:ext cx="6400800" cy="310896"/>
-          </a:xfrm>
-          <a:prstGeom prst="rect">
-            <a:avLst/>
-          </a:prstGeom>
-          <a:noFill/>
-          <a:ln/>
-        </p:spPr>
-        <p:txBody>
-          <a:bodyPr wrap="square" lIns="0" tIns="0" rIns="0" bIns="0" rtlCol="0" anchor="ctr"/>
-          <a:lstStyle/>
-          <a:p>
-            <a:pPr indent="0" marL="0">
-              <a:buNone/>
-            </a:pPr>
-            <a:r>
-              <a:rPr lang="en-US" sz="1300" b="1" spc="250" kern="0" dirty="0">
-                <a:solidFill>
-                  <a:srgbClr val="0D7490"/>
-                </a:solidFill>
-                <a:latin typeface="Helvetica Neue" pitchFamily="34" charset="0"/>
-                <a:ea typeface="Helvetica Neue" pitchFamily="34" charset="-122"/>
-                <a:cs typeface="Helvetica Neue" pitchFamily="34" charset="-120"/>
-              </a:rPr>
-              <a:t>SECTION 03</a:t>
-            </a:r>
-            <a:endParaRPr lang="en-US" sz="1300" dirty="0"/>
-          </a:p>
-        </p:txBody>
-      </p:sp>
-      <p:sp>
-        <p:nvSpPr>
-          <p:cNvPr id="5" name="Text 3"/>
-          <p:cNvSpPr/>
-          <p:nvPr/>
-        </p:nvSpPr>
-        <p:spPr>
-          <a:xfrm>
-            <a:off x="786384" y="2926080"/>
-            <a:ext cx="6949440" cy="1371600"/>
-          </a:xfrm>
-          <a:prstGeom prst="rect">
-            <a:avLst/>
-          </a:prstGeom>
-          <a:noFill/>
-          <a:ln/>
-        </p:spPr>
-        <p:txBody>
-          <a:bodyPr wrap="square" lIns="0" tIns="0" rIns="0" bIns="0" rtlCol="0" anchor="ctr"/>
-          <a:lstStyle/>
-          <a:p>
-            <a:pPr indent="0" marL="0">
-              <a:lnSpc>
-                <a:spcPts val="4300"/>
-              </a:lnSpc>
-              <a:buNone/>
-            </a:pPr>
-            <a:r>
-              <a:rPr lang="en-US" sz="4000" b="1" dirty="0">
-                <a:solidFill>
-                  <a:srgbClr val="1D1D1F"/>
-                </a:solidFill>
-                <a:latin typeface="Helvetica Neue" pitchFamily="34" charset="0"/>
-                <a:ea typeface="Helvetica Neue" pitchFamily="34" charset="-122"/>
-                <a:cs typeface="Helvetica Neue" pitchFamily="34" charset="-120"/>
-              </a:rPr>
-              <a:t>We Are</a:t>
-            </a:r>
-            <a:endParaRPr lang="en-US" sz="4000" dirty="0"/>
-          </a:p>
-          <a:p>
-            <a:pPr indent="0" marL="0">
-              <a:lnSpc>
-                <a:spcPts val="4300"/>
-              </a:lnSpc>
-              <a:buNone/>
-            </a:pPr>
-            <a:r>
-              <a:rPr lang="en-US" sz="4000" b="1" dirty="0">
-                <a:solidFill>
-                  <a:srgbClr val="1D1D1F"/>
-                </a:solidFill>
-                <a:latin typeface="Helvetica Neue" pitchFamily="34" charset="0"/>
-                <a:ea typeface="Helvetica Neue" pitchFamily="34" charset="-122"/>
-                <a:cs typeface="Helvetica Neue" pitchFamily="34" charset="-120"/>
-              </a:rPr>
-              <a:t>a Company</a:t>
-            </a:r>
-            <a:endParaRPr lang="en-US" sz="4000" dirty="0"/>
-          </a:p>
-        </p:txBody>
-      </p:sp>
-      <p:sp>
-        <p:nvSpPr>
-          <p:cNvPr id="6" name="Shape 4"/>
-          <p:cNvSpPr/>
-          <p:nvPr/>
-        </p:nvSpPr>
-        <p:spPr>
-          <a:xfrm>
-            <a:off x="841248" y="4370832"/>
-            <a:ext cx="2971800" cy="420624"/>
-          </a:xfrm>
-          <a:prstGeom prst="roundRect">
-            <a:avLst>
-              <a:gd name="adj" fmla="val 50000"/>
-            </a:avLst>
-          </a:prstGeom>
-          <a:solidFill>
-            <a:srgbClr val="0D7490"/>
-          </a:solidFill>
-          <a:ln/>
-        </p:spPr>
-        <p:txBody>
-          <a:bodyPr/>
-          <a:p/>
-        </p:txBody>
-      </p:sp>
-      <p:sp>
-        <p:nvSpPr>
-          <p:cNvPr id="7" name="Text 5"/>
-          <p:cNvSpPr/>
-          <p:nvPr/>
-        </p:nvSpPr>
-        <p:spPr>
-          <a:xfrm>
-            <a:off x="841248" y="4370832"/>
-            <a:ext cx="2971800" cy="420624"/>
-          </a:xfrm>
-          <a:prstGeom prst="rect">
-            <a:avLst/>
-          </a:prstGeom>
-          <a:noFill/>
-          <a:ln/>
-        </p:spPr>
-        <p:txBody>
-          <a:bodyPr wrap="square" lIns="0" tIns="0" rIns="0" bIns="0" rtlCol="0" anchor="ctr"/>
-          <a:lstStyle/>
-          <a:p>
-            <a:pPr algn="ctr" indent="0" marL="0">
-              <a:buNone/>
-            </a:pPr>
-            <a:r>
-              <a:rPr lang="en-US" sz="1050" b="1" spc="150" kern="0" dirty="0">
-                <a:solidFill>
-                  <a:srgbClr val="FFFFFF"/>
-                </a:solidFill>
-                <a:latin typeface="Helvetica Neue" pitchFamily="34" charset="0"/>
-                <a:ea typeface="Helvetica Neue" pitchFamily="34" charset="-122"/>
-                <a:cs typeface="Helvetica Neue" pitchFamily="34" charset="-120"/>
-              </a:rPr>
-              <a:t>0:45 – 1:30   ·   45 MIN</a:t>
-            </a:r>
-            <a:endParaRPr lang="en-US" sz="1050" dirty="0"/>
-          </a:p>
-        </p:txBody>
-      </p:sp>
-      <p:sp>
-        <p:nvSpPr>
-          <p:cNvPr id="8" name="Text 6"/>
-          <p:cNvSpPr/>
-          <p:nvPr/>
-        </p:nvSpPr>
-        <p:spPr>
-          <a:xfrm>
-            <a:off x="841248" y="5029200"/>
-            <a:ext cx="6126480" cy="1005840"/>
-          </a:xfrm>
-          <a:prstGeom prst="rect">
-            <a:avLst/>
-          </a:prstGeom>
-          <a:noFill/>
-          <a:ln/>
-        </p:spPr>
-        <p:txBody>
-          <a:bodyPr wrap="square" lIns="0" tIns="0" rIns="0" bIns="0" rtlCol="0" anchor="ctr"/>
-          <a:lstStyle/>
-          <a:p>
-            <a:pPr indent="0" marL="0">
-              <a:lnSpc>
-                <a:spcPts val="2200"/>
-              </a:lnSpc>
-              <a:buNone/>
-            </a:pPr>
-            <a:r>
-              <a:rPr lang="en-US" sz="1500" i="1" dirty="0">
-                <a:solidFill>
-                  <a:srgbClr val="6E6E73"/>
-                </a:solidFill>
-                <a:latin typeface="Helvetica Neue" pitchFamily="34" charset="0"/>
-                <a:ea typeface="Helvetica Neue" pitchFamily="34" charset="-122"/>
-                <a:cs typeface="Helvetica Neue" pitchFamily="34" charset="-120"/>
-              </a:rPr>
-              <a:t>This is the longest block of the day — and the one that decides how the team works.</a:t>
-            </a:r>
-            <a:endParaRPr lang="en-US" sz="1500" dirty="0"/>
-          </a:p>
-        </p:txBody>
-      </p:sp>
-      <p:sp>
-        <p:nvSpPr>
-          <p:cNvPr id="9" name="Shape 7"/>
-          <p:cNvSpPr/>
-          <p:nvPr/>
-        </p:nvSpPr>
-        <p:spPr>
-          <a:xfrm>
-            <a:off x="822960" y="6437376"/>
-            <a:ext cx="10545775" cy="0"/>
-          </a:xfrm>
-          <a:prstGeom prst="line">
-            <a:avLst/>
-          </a:prstGeom>
-          <a:noFill/>
-          <a:ln w="9525">
-            <a:solidFill>
-              <a:srgbClr val="E3E3E6"/>
-            </a:solidFill>
-            <a:prstDash val="solid"/>
-          </a:ln>
-        </p:spPr>
-        <p:txBody>
-          <a:bodyPr/>
-          <a:p/>
-        </p:txBody>
-      </p:sp>
-      <p:sp>
-        <p:nvSpPr>
-          <p:cNvPr id="10" name="Text 8"/>
-          <p:cNvSpPr/>
-          <p:nvPr/>
-        </p:nvSpPr>
-        <p:spPr>
-          <a:xfrm>
-            <a:off x="822960" y="6473952"/>
-            <a:ext cx="5486400" cy="274320"/>
-          </a:xfrm>
-          <a:prstGeom prst="rect">
-            <a:avLst/>
-          </a:prstGeom>
-          <a:noFill/>
-          <a:ln/>
-        </p:spPr>
-        <p:txBody>
-          <a:bodyPr wrap="square" lIns="0" tIns="0" rIns="0" bIns="0" rtlCol="0" anchor="ctr"/>
-          <a:lstStyle/>
-          <a:p>
-            <a:pPr indent="0" marL="0">
-              <a:buNone/>
-            </a:pPr>
-            <a:r>
-              <a:rPr lang="en-US" sz="750" spc="150" kern="0" dirty="0">
-                <a:solidFill>
-                  <a:srgbClr val="86868B"/>
-                </a:solidFill>
-                <a:latin typeface="Helvetica Neue" pitchFamily="34" charset="0"/>
-                <a:ea typeface="Helvetica Neue" pitchFamily="34" charset="-122"/>
-                <a:cs typeface="Helvetica Neue" pitchFamily="34" charset="-120"/>
-              </a:rPr>
-              <a:t>SAY WATT ROBOTICS  ·  ROV TEAM</a:t>
-            </a:r>
-            <a:endParaRPr lang="en-US" sz="750" dirty="0"/>
-          </a:p>
-        </p:txBody>
-      </p:sp>
-      <p:sp>
-        <p:nvSpPr>
-          <p:cNvPr id="11" name="Text 9"/>
-          <p:cNvSpPr/>
-          <p:nvPr/>
-        </p:nvSpPr>
-        <p:spPr>
-          <a:xfrm>
-            <a:off x="5882335" y="6473952"/>
-            <a:ext cx="5486400" cy="274320"/>
-          </a:xfrm>
-          <a:prstGeom prst="rect">
-            <a:avLst/>
-          </a:prstGeom>
-          <a:noFill/>
-          <a:ln/>
-        </p:spPr>
-        <p:txBody>
-          <a:bodyPr wrap="square" lIns="0" tIns="0" rIns="0" bIns="0" rtlCol="0" anchor="ctr"/>
-          <a:lstStyle/>
-          <a:p>
-            <a:pPr algn="r" indent="0" marL="0">
-              <a:buNone/>
-            </a:pPr>
-            <a:r>
-              <a:rPr lang="en-US" sz="750" spc="150" kern="0" dirty="0">
-                <a:solidFill>
-                  <a:srgbClr val="86868B"/>
-                </a:solidFill>
-                <a:latin typeface="Helvetica Neue" pitchFamily="34" charset="0"/>
-                <a:ea typeface="Helvetica Neue" pitchFamily="34" charset="-122"/>
-                <a:cs typeface="Helvetica Neue" pitchFamily="34" charset="-120"/>
-              </a:rPr>
-              <a:t>WEEK 1 — KICKOFF   ·   10 / 29</a:t>
             </a:r>
             <a:endParaRPr lang="en-US" sz="750" dirty="0"/>
           </a:p>
